--- a/output/wordlabs-perform-3day.pptx
+++ b/output/wordlabs-perform-3day.pptx
@@ -4240,7 +4240,7 @@
                 <a:ea typeface="Calibri" pitchFamily="34" charset="-122"/>
                 <a:cs typeface="Calibri" pitchFamily="34" charset="-120"/>
               </a:rPr>
-              <a:t>"carry out, do, present"</a:t>
+              <a:t>"carry out, do, or show"</a:t>
             </a:r>
             <a:endParaRPr lang="en-US" sz="2200" dirty="0"/>
           </a:p>
@@ -5288,7 +5288,7 @@
                 <a:ea typeface="Calibri" pitchFamily="34" charset="-122"/>
                 <a:cs typeface="Calibri" pitchFamily="34" charset="-120"/>
               </a:rPr>
-              <a:t>Word Labs  •  wordlabs.app  •  Root: 'perform' = carry out, do, present</a:t>
+              <a:t>Word Labs  •  wordlabs.app  •  Root: 'perform' = carry out, do, or show</a:t>
             </a:r>
             <a:endParaRPr lang="en-US" sz="800" dirty="0"/>
           </a:p>
@@ -5928,7 +5928,7 @@
                 <a:ea typeface="Calibri" pitchFamily="34" charset="-122"/>
                 <a:cs typeface="Calibri" pitchFamily="34" charset="-120"/>
               </a:rPr>
-              <a:t>Word Labs  •  wordlabs.app  •  Root: 'perform' = carry out, do, present</a:t>
+              <a:t>Word Labs  •  wordlabs.app  •  Root: 'perform' = carry out, do, or show</a:t>
             </a:r>
             <a:endParaRPr lang="en-US" sz="800" dirty="0"/>
           </a:p>
@@ -6040,7 +6040,7 @@
                 <a:ea typeface="Calibri" pitchFamily="34" charset="-122"/>
                 <a:cs typeface="Calibri" pitchFamily="34" charset="-120"/>
               </a:rPr>
-              <a:t>The young </a:t>
+              <a:t>The </a:t>
             </a:r>
             <a:pPr algn="l" indent="0" marL="0">
               <a:buNone/>
@@ -6057,7 +6057,7 @@
                 <a:ea typeface="Calibri" pitchFamily="34" charset="-122"/>
                 <a:cs typeface="Calibri" pitchFamily="34" charset="-120"/>
               </a:rPr>
-              <a:t>performer</a:t>
+              <a:t>performance</a:t>
             </a:r>
             <a:pPr algn="l" indent="0" marL="0">
               <a:buNone/>
@@ -6071,7 +6071,7 @@
                 <a:ea typeface="Calibri" pitchFamily="34" charset="-122"/>
                 <a:cs typeface="Calibri" pitchFamily="34" charset="-120"/>
               </a:rPr>
-              <a:t> gave an outstanding </a:t>
+              <a:t> was amazing, and every </a:t>
             </a:r>
             <a:pPr algn="l" indent="0" marL="0">
               <a:buNone/>
@@ -6088,7 +6088,7 @@
                 <a:ea typeface="Calibri" pitchFamily="34" charset="-122"/>
                 <a:cs typeface="Calibri" pitchFamily="34" charset="-120"/>
               </a:rPr>
-              <a:t>performance</a:t>
+              <a:t>performer</a:t>
             </a:r>
             <a:pPr algn="l" indent="0" marL="0">
               <a:buNone/>
@@ -6102,7 +6102,7 @@
                 <a:ea typeface="Calibri" pitchFamily="34" charset="-122"/>
                 <a:cs typeface="Calibri" pitchFamily="34" charset="-120"/>
               </a:rPr>
-              <a:t> that amazed the entire audience!</a:t>
+              <a:t> on stage gave their very best.</a:t>
             </a:r>
             <a:endParaRPr lang="en-US" sz="1800" dirty="0"/>
           </a:p>
@@ -6257,7 +6257,7 @@
                 <a:ea typeface="Trebuchet MS" pitchFamily="34" charset="-122"/>
                 <a:cs typeface="Trebuchet MS" pitchFamily="34" charset="-120"/>
               </a:rPr>
-              <a:t>performer</a:t>
+              <a:t>performance</a:t>
             </a:r>
             <a:endParaRPr lang="en-US" sz="1400" dirty="0"/>
           </a:p>
@@ -6385,7 +6385,7 @@
                 <a:ea typeface="Trebuchet MS" pitchFamily="34" charset="-122"/>
                 <a:cs typeface="Trebuchet MS" pitchFamily="34" charset="-120"/>
               </a:rPr>
-              <a:t>performance</a:t>
+              <a:t>performer</a:t>
             </a:r>
             <a:endParaRPr lang="en-US" sz="1400" dirty="0"/>
           </a:p>
@@ -6716,7 +6716,7 @@
                 <a:ea typeface="Calibri" pitchFamily="34" charset="-122"/>
                 <a:cs typeface="Calibri" pitchFamily="34" charset="-120"/>
               </a:rPr>
-              <a:t>Word Labs  •  wordlabs.app  •  Root: 'perform' = carry out, do, present</a:t>
+              <a:t>Word Labs  •  wordlabs.app  •  Root: 'perform' = carry out, do, or show</a:t>
             </a:r>
             <a:endParaRPr lang="en-US" sz="800" dirty="0"/>
           </a:p>
@@ -6855,7 +6855,7 @@
                 <a:ea typeface="Trebuchet MS" pitchFamily="34" charset="-122"/>
                 <a:cs typeface="Trebuchet MS" pitchFamily="34" charset="-120"/>
               </a:rPr>
-              <a:t>performer</a:t>
+              <a:t>performance</a:t>
             </a:r>
             <a:endParaRPr lang="en-US" sz="2800" dirty="0"/>
           </a:p>
@@ -7543,7 +7543,7 @@
                 <a:ea typeface="Calibri" pitchFamily="34" charset="-122"/>
                 <a:cs typeface="Calibri" pitchFamily="34" charset="-120"/>
               </a:rPr>
-              <a:t>Word Labs  •  wordlabs.app  •  Root: 'perform' = carry out, do, present</a:t>
+              <a:t>Word Labs  •  wordlabs.app  •  Root: 'perform' = carry out, do, or show</a:t>
             </a:r>
             <a:endParaRPr lang="en-US" sz="800" dirty="0"/>
           </a:p>
@@ -7682,7 +7682,7 @@
                 <a:ea typeface="Trebuchet MS" pitchFamily="34" charset="-122"/>
                 <a:cs typeface="Trebuchet MS" pitchFamily="34" charset="-120"/>
               </a:rPr>
-              <a:t>performer</a:t>
+              <a:t>performance</a:t>
             </a:r>
             <a:endParaRPr lang="en-US" sz="2800" dirty="0"/>
           </a:p>
@@ -7860,7 +7860,7 @@
                 <a:ea typeface="Calibri" pitchFamily="34" charset="-122"/>
                 <a:cs typeface="Calibri" pitchFamily="34" charset="-120"/>
               </a:rPr>
-              <a:t>carry out, present</a:t>
+              <a:t>carry out or show</a:t>
             </a:r>
             <a:endParaRPr lang="en-US" sz="850" dirty="0"/>
           </a:p>
@@ -7933,7 +7933,7 @@
                 <a:ea typeface="Trebuchet MS" pitchFamily="34" charset="-122"/>
                 <a:cs typeface="Trebuchet MS" pitchFamily="34" charset="-120"/>
               </a:rPr>
-              <a:t>er</a:t>
+              <a:t>ance</a:t>
             </a:r>
             <a:endParaRPr lang="en-US" sz="1300" dirty="0"/>
           </a:p>
@@ -7972,7 +7972,7 @@
                 <a:ea typeface="Calibri" pitchFamily="34" charset="-122"/>
                 <a:cs typeface="Calibri" pitchFamily="34" charset="-120"/>
               </a:rPr>
-              <a:t>one who does something</a:t>
+              <a:t>state or act of</a:t>
             </a:r>
             <a:endParaRPr lang="en-US" sz="850" dirty="0"/>
           </a:p>
@@ -8528,7 +8528,7 @@
                 <a:ea typeface="Calibri" pitchFamily="34" charset="-122"/>
                 <a:cs typeface="Calibri" pitchFamily="34" charset="-120"/>
               </a:rPr>
-              <a:t>Word Labs  •  wordlabs.app  •  Root: 'perform' = carry out, do, present</a:t>
+              <a:t>Word Labs  •  wordlabs.app  •  Root: 'perform' = carry out, do, or show</a:t>
             </a:r>
             <a:endParaRPr lang="en-US" sz="800" dirty="0"/>
           </a:p>
@@ -8667,7 +8667,7 @@
                 <a:ea typeface="Trebuchet MS" pitchFamily="34" charset="-122"/>
                 <a:cs typeface="Trebuchet MS" pitchFamily="34" charset="-120"/>
               </a:rPr>
-              <a:t>performer</a:t>
+              <a:t>performance</a:t>
             </a:r>
             <a:endParaRPr lang="en-US" sz="2800" dirty="0"/>
           </a:p>
@@ -8845,7 +8845,7 @@
                 <a:ea typeface="Calibri" pitchFamily="34" charset="-122"/>
                 <a:cs typeface="Calibri" pitchFamily="34" charset="-120"/>
               </a:rPr>
-              <a:t>carry out, present</a:t>
+              <a:t>carry out or show</a:t>
             </a:r>
             <a:endParaRPr lang="en-US" sz="850" dirty="0"/>
           </a:p>
@@ -8918,7 +8918,7 @@
                 <a:ea typeface="Trebuchet MS" pitchFamily="34" charset="-122"/>
                 <a:cs typeface="Trebuchet MS" pitchFamily="34" charset="-120"/>
               </a:rPr>
-              <a:t>er</a:t>
+              <a:t>ance</a:t>
             </a:r>
             <a:endParaRPr lang="en-US" sz="1300" dirty="0"/>
           </a:p>
@@ -8957,7 +8957,7 @@
                 <a:ea typeface="Calibri" pitchFamily="34" charset="-122"/>
                 <a:cs typeface="Calibri" pitchFamily="34" charset="-120"/>
               </a:rPr>
-              <a:t>one who does something</a:t>
+              <a:t>state or act of</a:t>
             </a:r>
             <a:endParaRPr lang="en-US" sz="850" dirty="0"/>
           </a:p>
@@ -9326,7 +9326,7 @@
                 <a:ea typeface="Trebuchet MS" pitchFamily="34" charset="-122"/>
                 <a:cs typeface="Trebuchet MS" pitchFamily="34" charset="-120"/>
               </a:rPr>
-              <a:t>er</a:t>
+              <a:t>ance</a:t>
             </a:r>
             <a:endParaRPr lang="en-US" sz="1400" dirty="0"/>
           </a:p>
@@ -9750,7 +9750,7 @@
                 <a:ea typeface="Calibri" pitchFamily="34" charset="-122"/>
                 <a:cs typeface="Calibri" pitchFamily="34" charset="-120"/>
               </a:rPr>
-              <a:t>Word Labs  •  wordlabs.app  •  Root: 'perform' = carry out, do, present</a:t>
+              <a:t>Word Labs  •  wordlabs.app  •  Root: 'perform' = carry out, do, or show</a:t>
             </a:r>
             <a:endParaRPr lang="en-US" sz="800" dirty="0"/>
           </a:p>
@@ -9889,7 +9889,7 @@
                 <a:ea typeface="Trebuchet MS" pitchFamily="34" charset="-122"/>
                 <a:cs typeface="Trebuchet MS" pitchFamily="34" charset="-120"/>
               </a:rPr>
-              <a:t>performer</a:t>
+              <a:t>performance</a:t>
             </a:r>
             <a:endParaRPr lang="en-US" sz="2800" dirty="0"/>
           </a:p>
@@ -10067,7 +10067,7 @@
                 <a:ea typeface="Calibri" pitchFamily="34" charset="-122"/>
                 <a:cs typeface="Calibri" pitchFamily="34" charset="-120"/>
               </a:rPr>
-              <a:t>carry out, present</a:t>
+              <a:t>carry out or show</a:t>
             </a:r>
             <a:endParaRPr lang="en-US" sz="850" dirty="0"/>
           </a:p>
@@ -10140,7 +10140,7 @@
                 <a:ea typeface="Trebuchet MS" pitchFamily="34" charset="-122"/>
                 <a:cs typeface="Trebuchet MS" pitchFamily="34" charset="-120"/>
               </a:rPr>
-              <a:t>er</a:t>
+              <a:t>ance</a:t>
             </a:r>
             <a:endParaRPr lang="en-US" sz="1300" dirty="0"/>
           </a:p>
@@ -10179,7 +10179,7 @@
                 <a:ea typeface="Calibri" pitchFamily="34" charset="-122"/>
                 <a:cs typeface="Calibri" pitchFamily="34" charset="-120"/>
               </a:rPr>
-              <a:t>one who does something</a:t>
+              <a:t>state or act of</a:t>
             </a:r>
             <a:endParaRPr lang="en-US" sz="850" dirty="0"/>
           </a:p>
@@ -10548,7 +10548,7 @@
                 <a:ea typeface="Trebuchet MS" pitchFamily="34" charset="-122"/>
                 <a:cs typeface="Trebuchet MS" pitchFamily="34" charset="-120"/>
               </a:rPr>
-              <a:t>er</a:t>
+              <a:t>ance</a:t>
             </a:r>
             <a:endParaRPr lang="en-US" sz="1400" dirty="0"/>
           </a:p>
@@ -10629,11 +10629,11 @@
         <p:spPr>
           <a:xfrm>
             <a:off x="1874520" y="4096512"/>
-            <a:ext cx="6903720" cy="658368"/>
+            <a:ext cx="6903720" cy="804672"/>
           </a:xfrm>
           <a:prstGeom prst="rect">
             <a:avLst>
-              <a:gd name="adj" fmla="val 8333"/>
+              <a:gd name="adj" fmla="val 6818"/>
             </a:avLst>
           </a:prstGeom>
           <a:solidFill>
@@ -10655,12 +10655,12 @@
         </p:nvSpPr>
         <p:spPr>
           <a:xfrm>
-            <a:off x="2254649" y="4169664"/>
-            <a:ext cx="685800" cy="475488"/>
+            <a:off x="2023872" y="4169664"/>
+            <a:ext cx="685800" cy="384048"/>
           </a:xfrm>
           <a:prstGeom prst="rect">
             <a:avLst>
-              <a:gd name="adj" fmla="val 7692"/>
+              <a:gd name="adj" fmla="val 9524"/>
             </a:avLst>
           </a:prstGeom>
           <a:solidFill>
@@ -10682,8 +10682,8 @@
         </p:nvSpPr>
         <p:spPr>
           <a:xfrm>
-            <a:off x="2254649" y="4169664"/>
-            <a:ext cx="685800" cy="475488"/>
+            <a:off x="2023872" y="4169664"/>
+            <a:ext cx="685800" cy="384048"/>
           </a:xfrm>
           <a:prstGeom prst="rect">
             <a:avLst/>
@@ -10721,12 +10721,12 @@
         </p:nvSpPr>
         <p:spPr>
           <a:xfrm>
-            <a:off x="3293146" y="4169664"/>
-            <a:ext cx="685800" cy="475488"/>
+            <a:off x="2831592" y="4169664"/>
+            <a:ext cx="685800" cy="384048"/>
           </a:xfrm>
           <a:prstGeom prst="rect">
             <a:avLst>
-              <a:gd name="adj" fmla="val 7692"/>
+              <a:gd name="adj" fmla="val 9524"/>
             </a:avLst>
           </a:prstGeom>
           <a:solidFill>
@@ -10748,8 +10748,8 @@
         </p:nvSpPr>
         <p:spPr>
           <a:xfrm>
-            <a:off x="3293146" y="4169664"/>
-            <a:ext cx="685800" cy="475488"/>
+            <a:off x="2831592" y="4169664"/>
+            <a:ext cx="685800" cy="384048"/>
           </a:xfrm>
           <a:prstGeom prst="rect">
             <a:avLst/>
@@ -10787,12 +10787,12 @@
         </p:nvSpPr>
         <p:spPr>
           <a:xfrm>
-            <a:off x="4331643" y="4169664"/>
-            <a:ext cx="685800" cy="475488"/>
+            <a:off x="3639312" y="4169664"/>
+            <a:ext cx="685800" cy="384048"/>
           </a:xfrm>
           <a:prstGeom prst="rect">
             <a:avLst>
-              <a:gd name="adj" fmla="val 7692"/>
+              <a:gd name="adj" fmla="val 9524"/>
             </a:avLst>
           </a:prstGeom>
           <a:solidFill>
@@ -10814,8 +10814,8 @@
         </p:nvSpPr>
         <p:spPr>
           <a:xfrm>
-            <a:off x="4331643" y="4169664"/>
-            <a:ext cx="685800" cy="475488"/>
+            <a:off x="3639312" y="4169664"/>
+            <a:ext cx="685800" cy="384048"/>
           </a:xfrm>
           <a:prstGeom prst="rect">
             <a:avLst/>
@@ -10853,12 +10853,12 @@
         </p:nvSpPr>
         <p:spPr>
           <a:xfrm>
-            <a:off x="5370141" y="4169664"/>
-            <a:ext cx="685800" cy="475488"/>
+            <a:off x="4447032" y="4169664"/>
+            <a:ext cx="685800" cy="384048"/>
           </a:xfrm>
           <a:prstGeom prst="rect">
             <a:avLst>
-              <a:gd name="adj" fmla="val 7692"/>
+              <a:gd name="adj" fmla="val 9524"/>
             </a:avLst>
           </a:prstGeom>
           <a:solidFill>
@@ -10880,8 +10880,8 @@
         </p:nvSpPr>
         <p:spPr>
           <a:xfrm>
-            <a:off x="5370141" y="4169664"/>
-            <a:ext cx="685800" cy="475488"/>
+            <a:off x="4447032" y="4169664"/>
+            <a:ext cx="685800" cy="384048"/>
           </a:xfrm>
           <a:prstGeom prst="rect">
             <a:avLst/>
@@ -10919,12 +10919,12 @@
         </p:nvSpPr>
         <p:spPr>
           <a:xfrm>
-            <a:off x="6408638" y="4169664"/>
-            <a:ext cx="685800" cy="475488"/>
+            <a:off x="5254752" y="4169664"/>
+            <a:ext cx="685800" cy="384048"/>
           </a:xfrm>
           <a:prstGeom prst="rect">
             <a:avLst>
-              <a:gd name="adj" fmla="val 7692"/>
+              <a:gd name="adj" fmla="val 9524"/>
             </a:avLst>
           </a:prstGeom>
           <a:solidFill>
@@ -10946,8 +10946,8 @@
         </p:nvSpPr>
         <p:spPr>
           <a:xfrm>
-            <a:off x="6408638" y="4169664"/>
-            <a:ext cx="685800" cy="475488"/>
+            <a:off x="5254752" y="4169664"/>
+            <a:ext cx="685800" cy="384048"/>
           </a:xfrm>
           <a:prstGeom prst="rect">
             <a:avLst/>
@@ -10985,12 +10985,12 @@
         </p:nvSpPr>
         <p:spPr>
           <a:xfrm>
-            <a:off x="7447135" y="4169664"/>
-            <a:ext cx="685800" cy="475488"/>
+            <a:off x="6062472" y="4169664"/>
+            <a:ext cx="685800" cy="384048"/>
           </a:xfrm>
           <a:prstGeom prst="rect">
             <a:avLst>
-              <a:gd name="adj" fmla="val 7692"/>
+              <a:gd name="adj" fmla="val 9524"/>
             </a:avLst>
           </a:prstGeom>
           <a:solidFill>
@@ -11012,8 +11012,8 @@
         </p:nvSpPr>
         <p:spPr>
           <a:xfrm>
-            <a:off x="7447135" y="4169664"/>
-            <a:ext cx="685800" cy="475488"/>
+            <a:off x="6062472" y="4169664"/>
+            <a:ext cx="685800" cy="384048"/>
           </a:xfrm>
           <a:prstGeom prst="rect">
             <a:avLst/>
@@ -11037,9 +11037,180 @@
                 <a:ea typeface="Trebuchet MS" pitchFamily="34" charset="-122"/>
                 <a:cs typeface="Trebuchet MS" pitchFamily="34" charset="-120"/>
               </a:rPr>
-              <a:t>er</a:t>
+              <a:t>a</a:t>
             </a:r>
             <a:endParaRPr lang="en-US" sz="900" dirty="0"/>
+          </a:p>
+        </p:txBody>
+      </p:sp>
+      <p:sp>
+        <p:nvSpPr>
+          <p:cNvPr id="48" name="Shape 46"/>
+          <p:cNvSpPr/>
+          <p:nvPr/>
+        </p:nvSpPr>
+        <p:spPr>
+          <a:xfrm>
+            <a:off x="6870192" y="4169664"/>
+            <a:ext cx="685800" cy="384048"/>
+          </a:xfrm>
+          <a:prstGeom prst="rect">
+            <a:avLst>
+              <a:gd name="adj" fmla="val 9524"/>
+            </a:avLst>
+          </a:prstGeom>
+          <a:solidFill>
+            <a:srgbClr val="FFFFFF"/>
+          </a:solidFill>
+          <a:ln w="12700">
+            <a:solidFill>
+              <a:srgbClr val="DB2777"/>
+            </a:solidFill>
+            <a:prstDash val="solid"/>
+          </a:ln>
+        </p:spPr>
+      </p:sp>
+      <p:sp>
+        <p:nvSpPr>
+          <p:cNvPr id="49" name="Text 47"/>
+          <p:cNvSpPr/>
+          <p:nvPr/>
+        </p:nvSpPr>
+        <p:spPr>
+          <a:xfrm>
+            <a:off x="6870192" y="4169664"/>
+            <a:ext cx="685800" cy="384048"/>
+          </a:xfrm>
+          <a:prstGeom prst="rect">
+            <a:avLst/>
+          </a:prstGeom>
+          <a:noFill/>
+          <a:ln/>
+        </p:spPr>
+        <p:txBody>
+          <a:bodyPr wrap="square" lIns="0" tIns="0" rIns="0" bIns="0" rtlCol="0" anchor="ctr"/>
+          <a:lstStyle/>
+          <a:p>
+            <a:pPr algn="ctr" indent="0" marL="0">
+              <a:buNone/>
+            </a:pPr>
+            <a:r>
+              <a:rPr lang="en-US" sz="900" b="1" dirty="0">
+                <a:solidFill>
+                  <a:srgbClr val="9D174D"/>
+                </a:solidFill>
+                <a:latin typeface="Trebuchet MS" pitchFamily="34" charset="0"/>
+                <a:ea typeface="Trebuchet MS" pitchFamily="34" charset="-122"/>
+                <a:cs typeface="Trebuchet MS" pitchFamily="34" charset="-120"/>
+              </a:rPr>
+              <a:t>n</a:t>
+            </a:r>
+            <a:endParaRPr lang="en-US" sz="900" dirty="0"/>
+          </a:p>
+        </p:txBody>
+      </p:sp>
+      <p:sp>
+        <p:nvSpPr>
+          <p:cNvPr id="50" name="Shape 48"/>
+          <p:cNvSpPr/>
+          <p:nvPr/>
+        </p:nvSpPr>
+        <p:spPr>
+          <a:xfrm>
+            <a:off x="7677912" y="4169664"/>
+            <a:ext cx="685800" cy="384048"/>
+          </a:xfrm>
+          <a:prstGeom prst="rect">
+            <a:avLst>
+              <a:gd name="adj" fmla="val 9524"/>
+            </a:avLst>
+          </a:prstGeom>
+          <a:solidFill>
+            <a:srgbClr val="FFFFFF"/>
+          </a:solidFill>
+          <a:ln w="12700">
+            <a:solidFill>
+              <a:srgbClr val="DB2777"/>
+            </a:solidFill>
+            <a:prstDash val="solid"/>
+          </a:ln>
+        </p:spPr>
+      </p:sp>
+      <p:sp>
+        <p:nvSpPr>
+          <p:cNvPr id="51" name="Text 49"/>
+          <p:cNvSpPr/>
+          <p:nvPr/>
+        </p:nvSpPr>
+        <p:spPr>
+          <a:xfrm>
+            <a:off x="7677912" y="4169664"/>
+            <a:ext cx="685800" cy="384048"/>
+          </a:xfrm>
+          <a:prstGeom prst="rect">
+            <a:avLst/>
+          </a:prstGeom>
+          <a:noFill/>
+          <a:ln/>
+        </p:spPr>
+        <p:txBody>
+          <a:bodyPr wrap="square" lIns="0" tIns="0" rIns="0" bIns="0" rtlCol="0" anchor="ctr"/>
+          <a:lstStyle/>
+          <a:p>
+            <a:pPr algn="ctr" indent="0" marL="0">
+              <a:buNone/>
+            </a:pPr>
+            <a:r>
+              <a:rPr lang="en-US" sz="900" b="1" dirty="0">
+                <a:solidFill>
+                  <a:srgbClr val="9D174D"/>
+                </a:solidFill>
+                <a:latin typeface="Trebuchet MS" pitchFamily="34" charset="0"/>
+                <a:ea typeface="Trebuchet MS" pitchFamily="34" charset="-122"/>
+                <a:cs typeface="Trebuchet MS" pitchFamily="34" charset="-120"/>
+              </a:rPr>
+              <a:t>ce</a:t>
+            </a:r>
+            <a:endParaRPr lang="en-US" sz="900" dirty="0"/>
+          </a:p>
+        </p:txBody>
+      </p:sp>
+      <p:sp>
+        <p:nvSpPr>
+          <p:cNvPr id="52" name="Text 50"/>
+          <p:cNvSpPr/>
+          <p:nvPr/>
+        </p:nvSpPr>
+        <p:spPr>
+          <a:xfrm>
+            <a:off x="7677912" y="4572000"/>
+            <a:ext cx="685800" cy="219456"/>
+          </a:xfrm>
+          <a:prstGeom prst="rect">
+            <a:avLst/>
+          </a:prstGeom>
+          <a:noFill/>
+          <a:ln/>
+        </p:spPr>
+        <p:txBody>
+          <a:bodyPr wrap="square" lIns="0" tIns="0" rIns="0" bIns="0" rtlCol="0" anchor="t"/>
+          <a:lstStyle/>
+          <a:p>
+            <a:pPr algn="ctr" indent="0" marL="0">
+              <a:buNone/>
+            </a:pPr>
+            <a:r>
+              <a:rPr lang="en-US" sz="750" i="1" dirty="0">
+                <a:solidFill>
+                  <a:srgbClr val="94A3B8"/>
+                </a:solidFill>
+                <a:latin typeface="Calibri" pitchFamily="34" charset="0"/>
+                <a:ea typeface="Calibri" pitchFamily="34" charset="-122"/>
+                <a:cs typeface="Calibri" pitchFamily="34" charset="-120"/>
+              </a:rPr>
+              <a:t>/s/</a:t>
+            </a:r>
+            <a:endParaRPr lang="en-US" sz="750" dirty="0"/>
           </a:p>
         </p:txBody>
       </p:sp>
@@ -11329,7 +11500,7 @@
                 <a:ea typeface="Calibri" pitchFamily="34" charset="-122"/>
                 <a:cs typeface="Calibri" pitchFamily="34" charset="-120"/>
               </a:rPr>
-              <a:t>Word Labs  •  wordlabs.app  •  Root: 'perform' = carry out, do, present</a:t>
+              <a:t>Word Labs  •  wordlabs.app  •  Root: 'perform' = carry out, do, or show</a:t>
             </a:r>
             <a:endParaRPr lang="en-US" sz="800" dirty="0"/>
           </a:p>
@@ -11468,7 +11639,7 @@
                 <a:ea typeface="Trebuchet MS" pitchFamily="34" charset="-122"/>
                 <a:cs typeface="Trebuchet MS" pitchFamily="34" charset="-120"/>
               </a:rPr>
-              <a:t>performance</a:t>
+              <a:t>performer</a:t>
             </a:r>
             <a:endParaRPr lang="en-US" sz="2800" dirty="0"/>
           </a:p>
@@ -12156,7 +12327,7 @@
                 <a:ea typeface="Calibri" pitchFamily="34" charset="-122"/>
                 <a:cs typeface="Calibri" pitchFamily="34" charset="-120"/>
               </a:rPr>
-              <a:t>Word Labs  •  wordlabs.app  •  Root: 'perform' = carry out, do, present</a:t>
+              <a:t>Word Labs  •  wordlabs.app  •  Root: 'perform' = carry out, do, or show</a:t>
             </a:r>
             <a:endParaRPr lang="en-US" sz="800" dirty="0"/>
           </a:p>
@@ -12295,7 +12466,7 @@
                 <a:ea typeface="Trebuchet MS" pitchFamily="34" charset="-122"/>
                 <a:cs typeface="Trebuchet MS" pitchFamily="34" charset="-120"/>
               </a:rPr>
-              <a:t>performance</a:t>
+              <a:t>performer</a:t>
             </a:r>
             <a:endParaRPr lang="en-US" sz="2800" dirty="0"/>
           </a:p>
@@ -12473,7 +12644,7 @@
                 <a:ea typeface="Calibri" pitchFamily="34" charset="-122"/>
                 <a:cs typeface="Calibri" pitchFamily="34" charset="-120"/>
               </a:rPr>
-              <a:t>carry out, present</a:t>
+              <a:t>carry out or show</a:t>
             </a:r>
             <a:endParaRPr lang="en-US" sz="850" dirty="0"/>
           </a:p>
@@ -12546,7 +12717,7 @@
                 <a:ea typeface="Trebuchet MS" pitchFamily="34" charset="-122"/>
                 <a:cs typeface="Trebuchet MS" pitchFamily="34" charset="-120"/>
               </a:rPr>
-              <a:t>ance</a:t>
+              <a:t>er</a:t>
             </a:r>
             <a:endParaRPr lang="en-US" sz="1300" dirty="0"/>
           </a:p>
@@ -12585,7 +12756,7 @@
                 <a:ea typeface="Calibri" pitchFamily="34" charset="-122"/>
                 <a:cs typeface="Calibri" pitchFamily="34" charset="-120"/>
               </a:rPr>
-              <a:t>state or quality of</a:t>
+              <a:t>one who does</a:t>
             </a:r>
             <a:endParaRPr lang="en-US" sz="850" dirty="0"/>
           </a:p>
@@ -13141,7 +13312,7 @@
                 <a:ea typeface="Calibri" pitchFamily="34" charset="-122"/>
                 <a:cs typeface="Calibri" pitchFamily="34" charset="-120"/>
               </a:rPr>
-              <a:t>Word Labs  •  wordlabs.app  •  Root: 'perform' = carry out, do, present</a:t>
+              <a:t>Word Labs  •  wordlabs.app  •  Root: 'perform' = carry out, do, or show</a:t>
             </a:r>
             <a:endParaRPr lang="en-US" sz="800" dirty="0"/>
           </a:p>
@@ -13280,7 +13451,7 @@
                 <a:ea typeface="Trebuchet MS" pitchFamily="34" charset="-122"/>
                 <a:cs typeface="Trebuchet MS" pitchFamily="34" charset="-120"/>
               </a:rPr>
-              <a:t>performance</a:t>
+              <a:t>performer</a:t>
             </a:r>
             <a:endParaRPr lang="en-US" sz="2800" dirty="0"/>
           </a:p>
@@ -13458,7 +13629,7 @@
                 <a:ea typeface="Calibri" pitchFamily="34" charset="-122"/>
                 <a:cs typeface="Calibri" pitchFamily="34" charset="-120"/>
               </a:rPr>
-              <a:t>carry out, present</a:t>
+              <a:t>carry out or show</a:t>
             </a:r>
             <a:endParaRPr lang="en-US" sz="850" dirty="0"/>
           </a:p>
@@ -13531,7 +13702,7 @@
                 <a:ea typeface="Trebuchet MS" pitchFamily="34" charset="-122"/>
                 <a:cs typeface="Trebuchet MS" pitchFamily="34" charset="-120"/>
               </a:rPr>
-              <a:t>ance</a:t>
+              <a:t>er</a:t>
             </a:r>
             <a:endParaRPr lang="en-US" sz="1300" dirty="0"/>
           </a:p>
@@ -13570,7 +13741,7 @@
                 <a:ea typeface="Calibri" pitchFamily="34" charset="-122"/>
                 <a:cs typeface="Calibri" pitchFamily="34" charset="-120"/>
               </a:rPr>
-              <a:t>state or quality of</a:t>
+              <a:t>one who does</a:t>
             </a:r>
             <a:endParaRPr lang="en-US" sz="850" dirty="0"/>
           </a:p>
@@ -13939,7 +14110,7 @@
                 <a:ea typeface="Trebuchet MS" pitchFamily="34" charset="-122"/>
                 <a:cs typeface="Trebuchet MS" pitchFamily="34" charset="-120"/>
               </a:rPr>
-              <a:t>ance</a:t>
+              <a:t>er</a:t>
             </a:r>
             <a:endParaRPr lang="en-US" sz="1400" dirty="0"/>
           </a:p>
@@ -14272,7 +14443,7 @@
                 <a:ea typeface="Calibri" pitchFamily="34" charset="-122"/>
                 <a:cs typeface="Calibri" pitchFamily="34" charset="-120"/>
               </a:rPr>
-              <a:t>Root 'perform' — carry out, do, present</a:t>
+              <a:t>Root 'perform' — carry out, do, or show</a:t>
             </a:r>
             <a:endParaRPr lang="en-US" sz="1600" dirty="0"/>
           </a:p>
@@ -14628,7 +14799,7 @@
                 <a:ea typeface="Calibri" pitchFamily="34" charset="-122"/>
                 <a:cs typeface="Calibri" pitchFamily="34" charset="-120"/>
               </a:rPr>
-              <a:t>Word Labs  •  wordlabs.app  •  Root: 'perform' = carry out, do, present</a:t>
+              <a:t>Word Labs  •  wordlabs.app  •  Root: 'perform' = carry out, do, or show</a:t>
             </a:r>
             <a:endParaRPr lang="en-US" sz="800" dirty="0"/>
           </a:p>
@@ -14767,7 +14938,7 @@
                 <a:ea typeface="Trebuchet MS" pitchFamily="34" charset="-122"/>
                 <a:cs typeface="Trebuchet MS" pitchFamily="34" charset="-120"/>
               </a:rPr>
-              <a:t>performance</a:t>
+              <a:t>performer</a:t>
             </a:r>
             <a:endParaRPr lang="en-US" sz="2800" dirty="0"/>
           </a:p>
@@ -14945,7 +15116,7 @@
                 <a:ea typeface="Calibri" pitchFamily="34" charset="-122"/>
                 <a:cs typeface="Calibri" pitchFamily="34" charset="-120"/>
               </a:rPr>
-              <a:t>carry out, present</a:t>
+              <a:t>carry out or show</a:t>
             </a:r>
             <a:endParaRPr lang="en-US" sz="850" dirty="0"/>
           </a:p>
@@ -15018,7 +15189,7 @@
                 <a:ea typeface="Trebuchet MS" pitchFamily="34" charset="-122"/>
                 <a:cs typeface="Trebuchet MS" pitchFamily="34" charset="-120"/>
               </a:rPr>
-              <a:t>ance</a:t>
+              <a:t>er</a:t>
             </a:r>
             <a:endParaRPr lang="en-US" sz="1300" dirty="0"/>
           </a:p>
@@ -15057,7 +15228,7 @@
                 <a:ea typeface="Calibri" pitchFamily="34" charset="-122"/>
                 <a:cs typeface="Calibri" pitchFamily="34" charset="-120"/>
               </a:rPr>
-              <a:t>state or quality of</a:t>
+              <a:t>one who does</a:t>
             </a:r>
             <a:endParaRPr lang="en-US" sz="850" dirty="0"/>
           </a:p>
@@ -15426,7 +15597,7 @@
                 <a:ea typeface="Trebuchet MS" pitchFamily="34" charset="-122"/>
                 <a:cs typeface="Trebuchet MS" pitchFamily="34" charset="-120"/>
               </a:rPr>
-              <a:t>ance</a:t>
+              <a:t>er</a:t>
             </a:r>
             <a:endParaRPr lang="en-US" sz="1400" dirty="0"/>
           </a:p>
@@ -15507,11 +15678,11 @@
         <p:spPr>
           <a:xfrm>
             <a:off x="1874520" y="4096512"/>
-            <a:ext cx="6903720" cy="804672"/>
+            <a:ext cx="6903720" cy="658368"/>
           </a:xfrm>
           <a:prstGeom prst="rect">
             <a:avLst>
-              <a:gd name="adj" fmla="val 6818"/>
+              <a:gd name="adj" fmla="val 8333"/>
             </a:avLst>
           </a:prstGeom>
           <a:solidFill>
@@ -15533,12 +15704,12 @@
         </p:nvSpPr>
         <p:spPr>
           <a:xfrm>
-            <a:off x="2023872" y="4169664"/>
-            <a:ext cx="685800" cy="384048"/>
+            <a:off x="2254649" y="4169664"/>
+            <a:ext cx="685800" cy="475488"/>
           </a:xfrm>
           <a:prstGeom prst="rect">
             <a:avLst>
-              <a:gd name="adj" fmla="val 9524"/>
+              <a:gd name="adj" fmla="val 7692"/>
             </a:avLst>
           </a:prstGeom>
           <a:solidFill>
@@ -15560,8 +15731,8 @@
         </p:nvSpPr>
         <p:spPr>
           <a:xfrm>
-            <a:off x="2023872" y="4169664"/>
-            <a:ext cx="685800" cy="384048"/>
+            <a:off x="2254649" y="4169664"/>
+            <a:ext cx="685800" cy="475488"/>
           </a:xfrm>
           <a:prstGeom prst="rect">
             <a:avLst/>
@@ -15599,12 +15770,12 @@
         </p:nvSpPr>
         <p:spPr>
           <a:xfrm>
-            <a:off x="2831592" y="4169664"/>
-            <a:ext cx="685800" cy="384048"/>
+            <a:off x="3293146" y="4169664"/>
+            <a:ext cx="685800" cy="475488"/>
           </a:xfrm>
           <a:prstGeom prst="rect">
             <a:avLst>
-              <a:gd name="adj" fmla="val 9524"/>
+              <a:gd name="adj" fmla="val 7692"/>
             </a:avLst>
           </a:prstGeom>
           <a:solidFill>
@@ -15626,8 +15797,8 @@
         </p:nvSpPr>
         <p:spPr>
           <a:xfrm>
-            <a:off x="2831592" y="4169664"/>
-            <a:ext cx="685800" cy="384048"/>
+            <a:off x="3293146" y="4169664"/>
+            <a:ext cx="685800" cy="475488"/>
           </a:xfrm>
           <a:prstGeom prst="rect">
             <a:avLst/>
@@ -15665,12 +15836,12 @@
         </p:nvSpPr>
         <p:spPr>
           <a:xfrm>
-            <a:off x="3639312" y="4169664"/>
-            <a:ext cx="685800" cy="384048"/>
+            <a:off x="4331643" y="4169664"/>
+            <a:ext cx="685800" cy="475488"/>
           </a:xfrm>
           <a:prstGeom prst="rect">
             <a:avLst>
-              <a:gd name="adj" fmla="val 9524"/>
+              <a:gd name="adj" fmla="val 7692"/>
             </a:avLst>
           </a:prstGeom>
           <a:solidFill>
@@ -15692,8 +15863,8 @@
         </p:nvSpPr>
         <p:spPr>
           <a:xfrm>
-            <a:off x="3639312" y="4169664"/>
-            <a:ext cx="685800" cy="384048"/>
+            <a:off x="4331643" y="4169664"/>
+            <a:ext cx="685800" cy="475488"/>
           </a:xfrm>
           <a:prstGeom prst="rect">
             <a:avLst/>
@@ -15731,12 +15902,12 @@
         </p:nvSpPr>
         <p:spPr>
           <a:xfrm>
-            <a:off x="4447032" y="4169664"/>
-            <a:ext cx="685800" cy="384048"/>
+            <a:off x="5370141" y="4169664"/>
+            <a:ext cx="685800" cy="475488"/>
           </a:xfrm>
           <a:prstGeom prst="rect">
             <a:avLst>
-              <a:gd name="adj" fmla="val 9524"/>
+              <a:gd name="adj" fmla="val 7692"/>
             </a:avLst>
           </a:prstGeom>
           <a:solidFill>
@@ -15758,8 +15929,8 @@
         </p:nvSpPr>
         <p:spPr>
           <a:xfrm>
-            <a:off x="4447032" y="4169664"/>
-            <a:ext cx="685800" cy="384048"/>
+            <a:off x="5370141" y="4169664"/>
+            <a:ext cx="685800" cy="475488"/>
           </a:xfrm>
           <a:prstGeom prst="rect">
             <a:avLst/>
@@ -15797,12 +15968,12 @@
         </p:nvSpPr>
         <p:spPr>
           <a:xfrm>
-            <a:off x="5254752" y="4169664"/>
-            <a:ext cx="685800" cy="384048"/>
+            <a:off x="6408638" y="4169664"/>
+            <a:ext cx="685800" cy="475488"/>
           </a:xfrm>
           <a:prstGeom prst="rect">
             <a:avLst>
-              <a:gd name="adj" fmla="val 9524"/>
+              <a:gd name="adj" fmla="val 7692"/>
             </a:avLst>
           </a:prstGeom>
           <a:solidFill>
@@ -15824,8 +15995,8 @@
         </p:nvSpPr>
         <p:spPr>
           <a:xfrm>
-            <a:off x="5254752" y="4169664"/>
-            <a:ext cx="685800" cy="384048"/>
+            <a:off x="6408638" y="4169664"/>
+            <a:ext cx="685800" cy="475488"/>
           </a:xfrm>
           <a:prstGeom prst="rect">
             <a:avLst/>
@@ -15863,12 +16034,12 @@
         </p:nvSpPr>
         <p:spPr>
           <a:xfrm>
-            <a:off x="6062472" y="4169664"/>
-            <a:ext cx="685800" cy="384048"/>
+            <a:off x="7447135" y="4169664"/>
+            <a:ext cx="685800" cy="475488"/>
           </a:xfrm>
           <a:prstGeom prst="rect">
             <a:avLst>
-              <a:gd name="adj" fmla="val 9524"/>
+              <a:gd name="adj" fmla="val 7692"/>
             </a:avLst>
           </a:prstGeom>
           <a:solidFill>
@@ -15890,8 +16061,8 @@
         </p:nvSpPr>
         <p:spPr>
           <a:xfrm>
-            <a:off x="6062472" y="4169664"/>
-            <a:ext cx="685800" cy="384048"/>
+            <a:off x="7447135" y="4169664"/>
+            <a:ext cx="685800" cy="475488"/>
           </a:xfrm>
           <a:prstGeom prst="rect">
             <a:avLst/>
@@ -15915,180 +16086,9 @@
                 <a:ea typeface="Trebuchet MS" pitchFamily="34" charset="-122"/>
                 <a:cs typeface="Trebuchet MS" pitchFamily="34" charset="-120"/>
               </a:rPr>
-              <a:t>a</a:t>
+              <a:t>er</a:t>
             </a:r>
             <a:endParaRPr lang="en-US" sz="900" dirty="0"/>
-          </a:p>
-        </p:txBody>
-      </p:sp>
-      <p:sp>
-        <p:nvSpPr>
-          <p:cNvPr id="48" name="Shape 46"/>
-          <p:cNvSpPr/>
-          <p:nvPr/>
-        </p:nvSpPr>
-        <p:spPr>
-          <a:xfrm>
-            <a:off x="6870192" y="4169664"/>
-            <a:ext cx="685800" cy="384048"/>
-          </a:xfrm>
-          <a:prstGeom prst="rect">
-            <a:avLst>
-              <a:gd name="adj" fmla="val 9524"/>
-            </a:avLst>
-          </a:prstGeom>
-          <a:solidFill>
-            <a:srgbClr val="FFFFFF"/>
-          </a:solidFill>
-          <a:ln w="12700">
-            <a:solidFill>
-              <a:srgbClr val="DB2777"/>
-            </a:solidFill>
-            <a:prstDash val="solid"/>
-          </a:ln>
-        </p:spPr>
-      </p:sp>
-      <p:sp>
-        <p:nvSpPr>
-          <p:cNvPr id="49" name="Text 47"/>
-          <p:cNvSpPr/>
-          <p:nvPr/>
-        </p:nvSpPr>
-        <p:spPr>
-          <a:xfrm>
-            <a:off x="6870192" y="4169664"/>
-            <a:ext cx="685800" cy="384048"/>
-          </a:xfrm>
-          <a:prstGeom prst="rect">
-            <a:avLst/>
-          </a:prstGeom>
-          <a:noFill/>
-          <a:ln/>
-        </p:spPr>
-        <p:txBody>
-          <a:bodyPr wrap="square" lIns="0" tIns="0" rIns="0" bIns="0" rtlCol="0" anchor="ctr"/>
-          <a:lstStyle/>
-          <a:p>
-            <a:pPr algn="ctr" indent="0" marL="0">
-              <a:buNone/>
-            </a:pPr>
-            <a:r>
-              <a:rPr lang="en-US" sz="900" b="1" dirty="0">
-                <a:solidFill>
-                  <a:srgbClr val="9D174D"/>
-                </a:solidFill>
-                <a:latin typeface="Trebuchet MS" pitchFamily="34" charset="0"/>
-                <a:ea typeface="Trebuchet MS" pitchFamily="34" charset="-122"/>
-                <a:cs typeface="Trebuchet MS" pitchFamily="34" charset="-120"/>
-              </a:rPr>
-              <a:t>n</a:t>
-            </a:r>
-            <a:endParaRPr lang="en-US" sz="900" dirty="0"/>
-          </a:p>
-        </p:txBody>
-      </p:sp>
-      <p:sp>
-        <p:nvSpPr>
-          <p:cNvPr id="50" name="Shape 48"/>
-          <p:cNvSpPr/>
-          <p:nvPr/>
-        </p:nvSpPr>
-        <p:spPr>
-          <a:xfrm>
-            <a:off x="7677912" y="4169664"/>
-            <a:ext cx="685800" cy="384048"/>
-          </a:xfrm>
-          <a:prstGeom prst="rect">
-            <a:avLst>
-              <a:gd name="adj" fmla="val 9524"/>
-            </a:avLst>
-          </a:prstGeom>
-          <a:solidFill>
-            <a:srgbClr val="FFFFFF"/>
-          </a:solidFill>
-          <a:ln w="12700">
-            <a:solidFill>
-              <a:srgbClr val="DB2777"/>
-            </a:solidFill>
-            <a:prstDash val="solid"/>
-          </a:ln>
-        </p:spPr>
-      </p:sp>
-      <p:sp>
-        <p:nvSpPr>
-          <p:cNvPr id="51" name="Text 49"/>
-          <p:cNvSpPr/>
-          <p:nvPr/>
-        </p:nvSpPr>
-        <p:spPr>
-          <a:xfrm>
-            <a:off x="7677912" y="4169664"/>
-            <a:ext cx="685800" cy="384048"/>
-          </a:xfrm>
-          <a:prstGeom prst="rect">
-            <a:avLst/>
-          </a:prstGeom>
-          <a:noFill/>
-          <a:ln/>
-        </p:spPr>
-        <p:txBody>
-          <a:bodyPr wrap="square" lIns="0" tIns="0" rIns="0" bIns="0" rtlCol="0" anchor="ctr"/>
-          <a:lstStyle/>
-          <a:p>
-            <a:pPr algn="ctr" indent="0" marL="0">
-              <a:buNone/>
-            </a:pPr>
-            <a:r>
-              <a:rPr lang="en-US" sz="900" b="1" dirty="0">
-                <a:solidFill>
-                  <a:srgbClr val="9D174D"/>
-                </a:solidFill>
-                <a:latin typeface="Trebuchet MS" pitchFamily="34" charset="0"/>
-                <a:ea typeface="Trebuchet MS" pitchFamily="34" charset="-122"/>
-                <a:cs typeface="Trebuchet MS" pitchFamily="34" charset="-120"/>
-              </a:rPr>
-              <a:t>ce</a:t>
-            </a:r>
-            <a:endParaRPr lang="en-US" sz="900" dirty="0"/>
-          </a:p>
-        </p:txBody>
-      </p:sp>
-      <p:sp>
-        <p:nvSpPr>
-          <p:cNvPr id="52" name="Text 50"/>
-          <p:cNvSpPr/>
-          <p:nvPr/>
-        </p:nvSpPr>
-        <p:spPr>
-          <a:xfrm>
-            <a:off x="7677912" y="4572000"/>
-            <a:ext cx="685800" cy="219456"/>
-          </a:xfrm>
-          <a:prstGeom prst="rect">
-            <a:avLst/>
-          </a:prstGeom>
-          <a:noFill/>
-          <a:ln/>
-        </p:spPr>
-        <p:txBody>
-          <a:bodyPr wrap="square" lIns="0" tIns="0" rIns="0" bIns="0" rtlCol="0" anchor="t"/>
-          <a:lstStyle/>
-          <a:p>
-            <a:pPr algn="ctr" indent="0" marL="0">
-              <a:buNone/>
-            </a:pPr>
-            <a:r>
-              <a:rPr lang="en-US" sz="750" i="1" dirty="0">
-                <a:solidFill>
-                  <a:srgbClr val="94A3B8"/>
-                </a:solidFill>
-                <a:latin typeface="Calibri" pitchFamily="34" charset="0"/>
-                <a:ea typeface="Calibri" pitchFamily="34" charset="-122"/>
-                <a:cs typeface="Calibri" pitchFamily="34" charset="-120"/>
-              </a:rPr>
-              <a:t>/s/</a:t>
-            </a:r>
-            <a:endParaRPr lang="en-US" sz="750" dirty="0"/>
           </a:p>
         </p:txBody>
       </p:sp>
@@ -16660,7 +16660,7 @@
                 <a:ea typeface="Calibri" pitchFamily="34" charset="-122"/>
                 <a:cs typeface="Calibri" pitchFamily="34" charset="-120"/>
               </a:rPr>
-              <a:t>Word Labs  •  wordlabs.app  •  Root: 'perform' = carry out, do, present</a:t>
+              <a:t>Word Labs  •  wordlabs.app  •  Root: 'perform' = carry out, do, or show</a:t>
             </a:r>
             <a:endParaRPr lang="en-US" sz="800" dirty="0"/>
           </a:p>
@@ -17300,7 +17300,7 @@
                 <a:ea typeface="Calibri" pitchFamily="34" charset="-122"/>
                 <a:cs typeface="Calibri" pitchFamily="34" charset="-120"/>
               </a:rPr>
-              <a:t>Word Labs  •  wordlabs.app  •  Root: 'perform' = carry out, do, present</a:t>
+              <a:t>Word Labs  •  wordlabs.app  •  Root: 'perform' = carry out, do, or show</a:t>
             </a:r>
             <a:endParaRPr lang="en-US" sz="800" dirty="0"/>
           </a:p>
@@ -17412,7 +17412,7 @@
                 <a:ea typeface="Calibri" pitchFamily="34" charset="-122"/>
                 <a:cs typeface="Calibri" pitchFamily="34" charset="-120"/>
               </a:rPr>
-              <a:t>Although she had </a:t>
+              <a:t>The </a:t>
             </a:r>
             <a:pPr algn="l" indent="0" marL="0">
               <a:buNone/>
@@ -17429,7 +17429,7 @@
                 <a:ea typeface="Calibri" pitchFamily="34" charset="-122"/>
                 <a:cs typeface="Calibri" pitchFamily="34" charset="-120"/>
               </a:rPr>
-              <a:t>underperformed</a:t>
+              <a:t>outperforming</a:t>
             </a:r>
             <a:pPr algn="l" indent="0" marL="0">
               <a:buNone/>
@@ -17443,7 +17443,7 @@
                 <a:ea typeface="Calibri" pitchFamily="34" charset="-122"/>
                 <a:cs typeface="Calibri" pitchFamily="34" charset="-120"/>
               </a:rPr>
-              <a:t> at rehearsal, her </a:t>
+              <a:t> students </a:t>
             </a:r>
             <a:pPr algn="l" indent="0" marL="0">
               <a:buNone/>
@@ -17460,7 +17460,7 @@
                 <a:ea typeface="Calibri" pitchFamily="34" charset="-122"/>
                 <a:cs typeface="Calibri" pitchFamily="34" charset="-120"/>
               </a:rPr>
-              <a:t>performance</a:t>
+              <a:t>performed</a:t>
             </a:r>
             <a:pPr algn="l" indent="0" marL="0">
               <a:buNone/>
@@ -17474,7 +17474,7 @@
                 <a:ea typeface="Calibri" pitchFamily="34" charset="-122"/>
                 <a:cs typeface="Calibri" pitchFamily="34" charset="-120"/>
               </a:rPr>
-              <a:t> on the night was outstanding, and every </a:t>
+              <a:t> brilliantly; their </a:t>
             </a:r>
             <a:pPr algn="l" indent="0" marL="0">
               <a:buNone/>
@@ -17491,7 +17491,7 @@
                 <a:ea typeface="Calibri" pitchFamily="34" charset="-122"/>
                 <a:cs typeface="Calibri" pitchFamily="34" charset="-120"/>
               </a:rPr>
-              <a:t>performer</a:t>
+              <a:t>underperforming</a:t>
             </a:r>
             <a:pPr algn="l" indent="0" marL="0">
               <a:buNone/>
@@ -17505,7 +17505,7 @@
                 <a:ea typeface="Calibri" pitchFamily="34" charset="-122"/>
                 <a:cs typeface="Calibri" pitchFamily="34" charset="-120"/>
               </a:rPr>
-              <a:t> on stage shone brightly.</a:t>
+              <a:t> rivals were left speechless.</a:t>
             </a:r>
             <a:endParaRPr lang="en-US" sz="1800" dirty="0"/>
           </a:p>
@@ -17660,7 +17660,7 @@
                 <a:ea typeface="Trebuchet MS" pitchFamily="34" charset="-122"/>
                 <a:cs typeface="Trebuchet MS" pitchFamily="34" charset="-120"/>
               </a:rPr>
-              <a:t>underperformed</a:t>
+              <a:t>outperforming</a:t>
             </a:r>
             <a:endParaRPr lang="en-US" sz="1400" dirty="0"/>
           </a:p>
@@ -17788,7 +17788,7 @@
                 <a:ea typeface="Trebuchet MS" pitchFamily="34" charset="-122"/>
                 <a:cs typeface="Trebuchet MS" pitchFamily="34" charset="-120"/>
               </a:rPr>
-              <a:t>performance</a:t>
+              <a:t>performed</a:t>
             </a:r>
             <a:endParaRPr lang="en-US" sz="1400" dirty="0"/>
           </a:p>
@@ -17916,7 +17916,7 @@
                 <a:ea typeface="Trebuchet MS" pitchFamily="34" charset="-122"/>
                 <a:cs typeface="Trebuchet MS" pitchFamily="34" charset="-120"/>
               </a:rPr>
-              <a:t>performer</a:t>
+              <a:t>underperforming</a:t>
             </a:r>
             <a:endParaRPr lang="en-US" sz="1400" dirty="0"/>
           </a:p>
@@ -18247,7 +18247,7 @@
                 <a:ea typeface="Calibri" pitchFamily="34" charset="-122"/>
                 <a:cs typeface="Calibri" pitchFamily="34" charset="-120"/>
               </a:rPr>
-              <a:t>Word Labs  •  wordlabs.app  •  Root: 'perform' = carry out, do, present</a:t>
+              <a:t>Word Labs  •  wordlabs.app  •  Root: 'perform' = carry out, do, or show</a:t>
             </a:r>
             <a:endParaRPr lang="en-US" sz="800" dirty="0"/>
           </a:p>
@@ -18386,7 +18386,7 @@
                 <a:ea typeface="Trebuchet MS" pitchFamily="34" charset="-122"/>
                 <a:cs typeface="Trebuchet MS" pitchFamily="34" charset="-120"/>
               </a:rPr>
-              <a:t>underperformed</a:t>
+              <a:t>outperforming</a:t>
             </a:r>
             <a:endParaRPr lang="en-US" sz="2800" dirty="0"/>
           </a:p>
@@ -19074,7 +19074,7 @@
                 <a:ea typeface="Calibri" pitchFamily="34" charset="-122"/>
                 <a:cs typeface="Calibri" pitchFamily="34" charset="-120"/>
               </a:rPr>
-              <a:t>Word Labs  •  wordlabs.app  •  Root: 'perform' = carry out, do, present</a:t>
+              <a:t>Word Labs  •  wordlabs.app  •  Root: 'perform' = carry out, do, or show</a:t>
             </a:r>
             <a:endParaRPr lang="en-US" sz="800" dirty="0"/>
           </a:p>
@@ -19213,7 +19213,7 @@
                 <a:ea typeface="Trebuchet MS" pitchFamily="34" charset="-122"/>
                 <a:cs typeface="Trebuchet MS" pitchFamily="34" charset="-120"/>
               </a:rPr>
-              <a:t>underperformed</a:t>
+              <a:t>outperforming</a:t>
             </a:r>
             <a:endParaRPr lang="en-US" sz="2800" dirty="0"/>
           </a:p>
@@ -19352,7 +19352,7 @@
                 <a:ea typeface="Trebuchet MS" pitchFamily="34" charset="-122"/>
                 <a:cs typeface="Trebuchet MS" pitchFamily="34" charset="-120"/>
               </a:rPr>
-              <a:t>under</a:t>
+              <a:t>out</a:t>
             </a:r>
             <a:endParaRPr lang="en-US" sz="1300" dirty="0"/>
           </a:p>
@@ -19391,7 +19391,7 @@
                 <a:ea typeface="Calibri" pitchFamily="34" charset="-122"/>
                 <a:cs typeface="Calibri" pitchFamily="34" charset="-120"/>
               </a:rPr>
-              <a:t>below, not enough</a:t>
+              <a:t>beyond or better than</a:t>
             </a:r>
             <a:endParaRPr lang="en-US" sz="850" dirty="0"/>
           </a:p>
@@ -19503,7 +19503,7 @@
                 <a:ea typeface="Calibri" pitchFamily="34" charset="-122"/>
                 <a:cs typeface="Calibri" pitchFamily="34" charset="-120"/>
               </a:rPr>
-              <a:t>carry out, present</a:t>
+              <a:t>carry out or show</a:t>
             </a:r>
             <a:endParaRPr lang="en-US" sz="850" dirty="0"/>
           </a:p>
@@ -19576,7 +19576,7 @@
                 <a:ea typeface="Trebuchet MS" pitchFamily="34" charset="-122"/>
                 <a:cs typeface="Trebuchet MS" pitchFamily="34" charset="-120"/>
               </a:rPr>
-              <a:t>ed</a:t>
+              <a:t>ing</a:t>
             </a:r>
             <a:endParaRPr lang="en-US" sz="1300" dirty="0"/>
           </a:p>
@@ -19615,7 +19615,7 @@
                 <a:ea typeface="Calibri" pitchFamily="34" charset="-122"/>
                 <a:cs typeface="Calibri" pitchFamily="34" charset="-120"/>
               </a:rPr>
-              <a:t>past tense</a:t>
+              <a:t>in the process of</a:t>
             </a:r>
             <a:endParaRPr lang="en-US" sz="850" dirty="0"/>
           </a:p>
@@ -20171,7 +20171,7 @@
                 <a:ea typeface="Calibri" pitchFamily="34" charset="-122"/>
                 <a:cs typeface="Calibri" pitchFamily="34" charset="-120"/>
               </a:rPr>
-              <a:t>Word Labs  •  wordlabs.app  •  Root: 'perform' = carry out, do, present</a:t>
+              <a:t>Word Labs  •  wordlabs.app  •  Root: 'perform' = carry out, do, or show</a:t>
             </a:r>
             <a:endParaRPr lang="en-US" sz="800" dirty="0"/>
           </a:p>
@@ -20310,7 +20310,7 @@
                 <a:ea typeface="Trebuchet MS" pitchFamily="34" charset="-122"/>
                 <a:cs typeface="Trebuchet MS" pitchFamily="34" charset="-120"/>
               </a:rPr>
-              <a:t>underperformed</a:t>
+              <a:t>outperforming</a:t>
             </a:r>
             <a:endParaRPr lang="en-US" sz="2800" dirty="0"/>
           </a:p>
@@ -20449,7 +20449,7 @@
                 <a:ea typeface="Trebuchet MS" pitchFamily="34" charset="-122"/>
                 <a:cs typeface="Trebuchet MS" pitchFamily="34" charset="-120"/>
               </a:rPr>
-              <a:t>under</a:t>
+              <a:t>out</a:t>
             </a:r>
             <a:endParaRPr lang="en-US" sz="1300" dirty="0"/>
           </a:p>
@@ -20488,7 +20488,7 @@
                 <a:ea typeface="Calibri" pitchFamily="34" charset="-122"/>
                 <a:cs typeface="Calibri" pitchFamily="34" charset="-120"/>
               </a:rPr>
-              <a:t>below, not enough</a:t>
+              <a:t>beyond or better than</a:t>
             </a:r>
             <a:endParaRPr lang="en-US" sz="850" dirty="0"/>
           </a:p>
@@ -20600,7 +20600,7 @@
                 <a:ea typeface="Calibri" pitchFamily="34" charset="-122"/>
                 <a:cs typeface="Calibri" pitchFamily="34" charset="-120"/>
               </a:rPr>
-              <a:t>carry out, present</a:t>
+              <a:t>carry out or show</a:t>
             </a:r>
             <a:endParaRPr lang="en-US" sz="850" dirty="0"/>
           </a:p>
@@ -20673,7 +20673,7 @@
                 <a:ea typeface="Trebuchet MS" pitchFamily="34" charset="-122"/>
                 <a:cs typeface="Trebuchet MS" pitchFamily="34" charset="-120"/>
               </a:rPr>
-              <a:t>ed</a:t>
+              <a:t>ing</a:t>
             </a:r>
             <a:endParaRPr lang="en-US" sz="1300" dirty="0"/>
           </a:p>
@@ -20712,7 +20712,7 @@
                 <a:ea typeface="Calibri" pitchFamily="34" charset="-122"/>
                 <a:cs typeface="Calibri" pitchFamily="34" charset="-120"/>
               </a:rPr>
-              <a:t>past tense</a:t>
+              <a:t>in the process of</a:t>
             </a:r>
             <a:endParaRPr lang="en-US" sz="850" dirty="0"/>
           </a:p>
@@ -20871,7 +20871,7 @@
                 <a:ea typeface="Trebuchet MS" pitchFamily="34" charset="-122"/>
                 <a:cs typeface="Trebuchet MS" pitchFamily="34" charset="-120"/>
               </a:rPr>
-              <a:t>un</a:t>
+              <a:t>out</a:t>
             </a:r>
             <a:endParaRPr lang="en-US" sz="1400" dirty="0"/>
           </a:p>
@@ -20976,7 +20976,7 @@
                 <a:ea typeface="Trebuchet MS" pitchFamily="34" charset="-122"/>
                 <a:cs typeface="Trebuchet MS" pitchFamily="34" charset="-120"/>
               </a:rPr>
-              <a:t>der</a:t>
+              <a:t>per</a:t>
             </a:r>
             <a:endParaRPr lang="en-US" sz="1400" dirty="0"/>
           </a:p>
@@ -21081,7 +21081,7 @@
                 <a:ea typeface="Trebuchet MS" pitchFamily="34" charset="-122"/>
                 <a:cs typeface="Trebuchet MS" pitchFamily="34" charset="-120"/>
               </a:rPr>
-              <a:t>per</a:t>
+              <a:t>form</a:t>
             </a:r>
             <a:endParaRPr lang="en-US" sz="1400" dirty="0"/>
           </a:p>
@@ -21186,7 +21186,7 @@
                 <a:ea typeface="Trebuchet MS" pitchFamily="34" charset="-122"/>
                 <a:cs typeface="Trebuchet MS" pitchFamily="34" charset="-120"/>
               </a:rPr>
-              <a:t>formed</a:t>
+              <a:t>ing</a:t>
             </a:r>
             <a:endParaRPr lang="en-US" sz="1400" dirty="0"/>
           </a:p>
@@ -21610,7 +21610,7 @@
                 <a:ea typeface="Calibri" pitchFamily="34" charset="-122"/>
                 <a:cs typeface="Calibri" pitchFamily="34" charset="-120"/>
               </a:rPr>
-              <a:t>Word Labs  •  wordlabs.app  •  Root: 'perform' = carry out, do, present</a:t>
+              <a:t>Word Labs  •  wordlabs.app  •  Root: 'perform' = carry out, do, or show</a:t>
             </a:r>
             <a:endParaRPr lang="en-US" sz="800" dirty="0"/>
           </a:p>
@@ -21749,7 +21749,7 @@
                 <a:ea typeface="Trebuchet MS" pitchFamily="34" charset="-122"/>
                 <a:cs typeface="Trebuchet MS" pitchFamily="34" charset="-120"/>
               </a:rPr>
-              <a:t>underperformed</a:t>
+              <a:t>outperforming</a:t>
             </a:r>
             <a:endParaRPr lang="en-US" sz="2800" dirty="0"/>
           </a:p>
@@ -21888,7 +21888,7 @@
                 <a:ea typeface="Trebuchet MS" pitchFamily="34" charset="-122"/>
                 <a:cs typeface="Trebuchet MS" pitchFamily="34" charset="-120"/>
               </a:rPr>
-              <a:t>under</a:t>
+              <a:t>out</a:t>
             </a:r>
             <a:endParaRPr lang="en-US" sz="1300" dirty="0"/>
           </a:p>
@@ -21927,7 +21927,7 @@
                 <a:ea typeface="Calibri" pitchFamily="34" charset="-122"/>
                 <a:cs typeface="Calibri" pitchFamily="34" charset="-120"/>
               </a:rPr>
-              <a:t>below, not enough</a:t>
+              <a:t>beyond or better than</a:t>
             </a:r>
             <a:endParaRPr lang="en-US" sz="850" dirty="0"/>
           </a:p>
@@ -22039,7 +22039,7 @@
                 <a:ea typeface="Calibri" pitchFamily="34" charset="-122"/>
                 <a:cs typeface="Calibri" pitchFamily="34" charset="-120"/>
               </a:rPr>
-              <a:t>carry out, present</a:t>
+              <a:t>carry out or show</a:t>
             </a:r>
             <a:endParaRPr lang="en-US" sz="850" dirty="0"/>
           </a:p>
@@ -22112,7 +22112,7 @@
                 <a:ea typeface="Trebuchet MS" pitchFamily="34" charset="-122"/>
                 <a:cs typeface="Trebuchet MS" pitchFamily="34" charset="-120"/>
               </a:rPr>
-              <a:t>ed</a:t>
+              <a:t>ing</a:t>
             </a:r>
             <a:endParaRPr lang="en-US" sz="1300" dirty="0"/>
           </a:p>
@@ -22151,7 +22151,7 @@
                 <a:ea typeface="Calibri" pitchFamily="34" charset="-122"/>
                 <a:cs typeface="Calibri" pitchFamily="34" charset="-120"/>
               </a:rPr>
-              <a:t>past tense</a:t>
+              <a:t>in the process of</a:t>
             </a:r>
             <a:endParaRPr lang="en-US" sz="850" dirty="0"/>
           </a:p>
@@ -22310,7 +22310,7 @@
                 <a:ea typeface="Trebuchet MS" pitchFamily="34" charset="-122"/>
                 <a:cs typeface="Trebuchet MS" pitchFamily="34" charset="-120"/>
               </a:rPr>
-              <a:t>un</a:t>
+              <a:t>out</a:t>
             </a:r>
             <a:endParaRPr lang="en-US" sz="1400" dirty="0"/>
           </a:p>
@@ -22415,7 +22415,7 @@
                 <a:ea typeface="Trebuchet MS" pitchFamily="34" charset="-122"/>
                 <a:cs typeface="Trebuchet MS" pitchFamily="34" charset="-120"/>
               </a:rPr>
-              <a:t>der</a:t>
+              <a:t>per</a:t>
             </a:r>
             <a:endParaRPr lang="en-US" sz="1400" dirty="0"/>
           </a:p>
@@ -22520,7 +22520,7 @@
                 <a:ea typeface="Trebuchet MS" pitchFamily="34" charset="-122"/>
                 <a:cs typeface="Trebuchet MS" pitchFamily="34" charset="-120"/>
               </a:rPr>
-              <a:t>per</a:t>
+              <a:t>form</a:t>
             </a:r>
             <a:endParaRPr lang="en-US" sz="1400" dirty="0"/>
           </a:p>
@@ -22625,7 +22625,7 @@
                 <a:ea typeface="Trebuchet MS" pitchFamily="34" charset="-122"/>
                 <a:cs typeface="Trebuchet MS" pitchFamily="34" charset="-120"/>
               </a:rPr>
-              <a:t>formed</a:t>
+              <a:t>ing</a:t>
             </a:r>
             <a:endParaRPr lang="en-US" sz="1400" dirty="0"/>
           </a:p>
@@ -22732,8 +22732,8 @@
         </p:nvSpPr>
         <p:spPr>
           <a:xfrm>
-            <a:off x="1951828" y="4169664"/>
-            <a:ext cx="603504" cy="475488"/>
+            <a:off x="1951330" y="4169664"/>
+            <a:ext cx="676656" cy="475488"/>
           </a:xfrm>
           <a:prstGeom prst="rect">
             <a:avLst>
@@ -22759,8 +22759,8 @@
         </p:nvSpPr>
         <p:spPr>
           <a:xfrm>
-            <a:off x="1951828" y="4169664"/>
-            <a:ext cx="603504" cy="475488"/>
+            <a:off x="1951330" y="4169664"/>
+            <a:ext cx="676656" cy="475488"/>
           </a:xfrm>
           <a:prstGeom prst="rect">
             <a:avLst/>
@@ -22784,7 +22784,7 @@
                 <a:ea typeface="Trebuchet MS" pitchFamily="34" charset="-122"/>
                 <a:cs typeface="Trebuchet MS" pitchFamily="34" charset="-120"/>
               </a:rPr>
-              <a:t>u</a:t>
+              <a:t>ou</a:t>
             </a:r>
             <a:endParaRPr lang="en-US" sz="900" dirty="0"/>
           </a:p>
@@ -22798,8 +22798,8 @@
         </p:nvSpPr>
         <p:spPr>
           <a:xfrm>
-            <a:off x="2605209" y="4169664"/>
-            <a:ext cx="603504" cy="475488"/>
+            <a:off x="2677363" y="4169664"/>
+            <a:ext cx="676656" cy="475488"/>
           </a:xfrm>
           <a:prstGeom prst="rect">
             <a:avLst>
@@ -22825,8 +22825,8 @@
         </p:nvSpPr>
         <p:spPr>
           <a:xfrm>
-            <a:off x="2605209" y="4169664"/>
-            <a:ext cx="603504" cy="475488"/>
+            <a:off x="2677363" y="4169664"/>
+            <a:ext cx="676656" cy="475488"/>
           </a:xfrm>
           <a:prstGeom prst="rect">
             <a:avLst/>
@@ -22850,7 +22850,7 @@
                 <a:ea typeface="Trebuchet MS" pitchFamily="34" charset="-122"/>
                 <a:cs typeface="Trebuchet MS" pitchFamily="34" charset="-120"/>
               </a:rPr>
-              <a:t>n</a:t>
+              <a:t>t</a:t>
             </a:r>
             <a:endParaRPr lang="en-US" sz="900" dirty="0"/>
           </a:p>
@@ -22864,8 +22864,8 @@
         </p:nvSpPr>
         <p:spPr>
           <a:xfrm>
-            <a:off x="3258589" y="4169664"/>
-            <a:ext cx="603504" cy="475488"/>
+            <a:off x="3403397" y="4169664"/>
+            <a:ext cx="676656" cy="475488"/>
           </a:xfrm>
           <a:prstGeom prst="rect">
             <a:avLst>
@@ -22891,8 +22891,8 @@
         </p:nvSpPr>
         <p:spPr>
           <a:xfrm>
-            <a:off x="3258589" y="4169664"/>
-            <a:ext cx="603504" cy="475488"/>
+            <a:off x="3403397" y="4169664"/>
+            <a:ext cx="676656" cy="475488"/>
           </a:xfrm>
           <a:prstGeom prst="rect">
             <a:avLst/>
@@ -22916,7 +22916,7 @@
                 <a:ea typeface="Trebuchet MS" pitchFamily="34" charset="-122"/>
                 <a:cs typeface="Trebuchet MS" pitchFamily="34" charset="-120"/>
               </a:rPr>
-              <a:t>d</a:t>
+              <a:t>p</a:t>
             </a:r>
             <a:endParaRPr lang="en-US" sz="900" dirty="0"/>
           </a:p>
@@ -22930,8 +22930,8 @@
         </p:nvSpPr>
         <p:spPr>
           <a:xfrm>
-            <a:off x="3911969" y="4169664"/>
-            <a:ext cx="603504" cy="475488"/>
+            <a:off x="4129430" y="4169664"/>
+            <a:ext cx="676656" cy="475488"/>
           </a:xfrm>
           <a:prstGeom prst="rect">
             <a:avLst>
@@ -22957,8 +22957,8 @@
         </p:nvSpPr>
         <p:spPr>
           <a:xfrm>
-            <a:off x="3911969" y="4169664"/>
-            <a:ext cx="603504" cy="475488"/>
+            <a:off x="4129430" y="4169664"/>
+            <a:ext cx="676656" cy="475488"/>
           </a:xfrm>
           <a:prstGeom prst="rect">
             <a:avLst/>
@@ -22996,8 +22996,8 @@
         </p:nvSpPr>
         <p:spPr>
           <a:xfrm>
-            <a:off x="4565350" y="4169664"/>
-            <a:ext cx="603504" cy="475488"/>
+            <a:off x="4855464" y="4169664"/>
+            <a:ext cx="676656" cy="475488"/>
           </a:xfrm>
           <a:prstGeom prst="rect">
             <a:avLst>
@@ -23023,8 +23023,8 @@
         </p:nvSpPr>
         <p:spPr>
           <a:xfrm>
-            <a:off x="4565350" y="4169664"/>
-            <a:ext cx="603504" cy="475488"/>
+            <a:off x="4855464" y="4169664"/>
+            <a:ext cx="676656" cy="475488"/>
           </a:xfrm>
           <a:prstGeom prst="rect">
             <a:avLst/>
@@ -23048,7 +23048,7 @@
                 <a:ea typeface="Trebuchet MS" pitchFamily="34" charset="-122"/>
                 <a:cs typeface="Trebuchet MS" pitchFamily="34" charset="-120"/>
               </a:rPr>
-              <a:t>p</a:t>
+              <a:t>f</a:t>
             </a:r>
             <a:endParaRPr lang="en-US" sz="900" dirty="0"/>
           </a:p>
@@ -23062,8 +23062,8 @@
         </p:nvSpPr>
         <p:spPr>
           <a:xfrm>
-            <a:off x="5218730" y="4169664"/>
-            <a:ext cx="603504" cy="475488"/>
+            <a:off x="5581498" y="4169664"/>
+            <a:ext cx="676656" cy="475488"/>
           </a:xfrm>
           <a:prstGeom prst="rect">
             <a:avLst>
@@ -23089,8 +23089,8 @@
         </p:nvSpPr>
         <p:spPr>
           <a:xfrm>
-            <a:off x="5218730" y="4169664"/>
-            <a:ext cx="603504" cy="475488"/>
+            <a:off x="5581498" y="4169664"/>
+            <a:ext cx="676656" cy="475488"/>
           </a:xfrm>
           <a:prstGeom prst="rect">
             <a:avLst/>
@@ -23114,7 +23114,7 @@
                 <a:ea typeface="Trebuchet MS" pitchFamily="34" charset="-122"/>
                 <a:cs typeface="Trebuchet MS" pitchFamily="34" charset="-120"/>
               </a:rPr>
-              <a:t>er</a:t>
+              <a:t>or</a:t>
             </a:r>
             <a:endParaRPr lang="en-US" sz="900" dirty="0"/>
           </a:p>
@@ -23128,8 +23128,8 @@
         </p:nvSpPr>
         <p:spPr>
           <a:xfrm>
-            <a:off x="5872111" y="4169664"/>
-            <a:ext cx="603504" cy="475488"/>
+            <a:off x="6307531" y="4169664"/>
+            <a:ext cx="676656" cy="475488"/>
           </a:xfrm>
           <a:prstGeom prst="rect">
             <a:avLst>
@@ -23155,8 +23155,8 @@
         </p:nvSpPr>
         <p:spPr>
           <a:xfrm>
-            <a:off x="5872111" y="4169664"/>
-            <a:ext cx="603504" cy="475488"/>
+            <a:off x="6307531" y="4169664"/>
+            <a:ext cx="676656" cy="475488"/>
           </a:xfrm>
           <a:prstGeom prst="rect">
             <a:avLst/>
@@ -23180,7 +23180,7 @@
                 <a:ea typeface="Trebuchet MS" pitchFamily="34" charset="-122"/>
                 <a:cs typeface="Trebuchet MS" pitchFamily="34" charset="-120"/>
               </a:rPr>
-              <a:t>f</a:t>
+              <a:t>m</a:t>
             </a:r>
             <a:endParaRPr lang="en-US" sz="900" dirty="0"/>
           </a:p>
@@ -23194,8 +23194,8 @@
         </p:nvSpPr>
         <p:spPr>
           <a:xfrm>
-            <a:off x="6525491" y="4169664"/>
-            <a:ext cx="603504" cy="475488"/>
+            <a:off x="7033565" y="4169664"/>
+            <a:ext cx="676656" cy="475488"/>
           </a:xfrm>
           <a:prstGeom prst="rect">
             <a:avLst>
@@ -23221,8 +23221,8 @@
         </p:nvSpPr>
         <p:spPr>
           <a:xfrm>
-            <a:off x="6525491" y="4169664"/>
-            <a:ext cx="603504" cy="475488"/>
+            <a:off x="7033565" y="4169664"/>
+            <a:ext cx="676656" cy="475488"/>
           </a:xfrm>
           <a:prstGeom prst="rect">
             <a:avLst/>
@@ -23246,7 +23246,7 @@
                 <a:ea typeface="Trebuchet MS" pitchFamily="34" charset="-122"/>
                 <a:cs typeface="Trebuchet MS" pitchFamily="34" charset="-120"/>
               </a:rPr>
-              <a:t>or</a:t>
+              <a:t>i</a:t>
             </a:r>
             <a:endParaRPr lang="en-US" sz="900" dirty="0"/>
           </a:p>
@@ -23260,8 +23260,8 @@
         </p:nvSpPr>
         <p:spPr>
           <a:xfrm>
-            <a:off x="7178871" y="4169664"/>
-            <a:ext cx="603504" cy="475488"/>
+            <a:off x="7759598" y="4169664"/>
+            <a:ext cx="676656" cy="475488"/>
           </a:xfrm>
           <a:prstGeom prst="rect">
             <a:avLst>
@@ -23287,8 +23287,8 @@
         </p:nvSpPr>
         <p:spPr>
           <a:xfrm>
-            <a:off x="7178871" y="4169664"/>
-            <a:ext cx="603504" cy="475488"/>
+            <a:off x="7759598" y="4169664"/>
+            <a:ext cx="676656" cy="475488"/>
           </a:xfrm>
           <a:prstGeom prst="rect">
             <a:avLst/>
@@ -23312,73 +23312,7 @@
                 <a:ea typeface="Trebuchet MS" pitchFamily="34" charset="-122"/>
                 <a:cs typeface="Trebuchet MS" pitchFamily="34" charset="-120"/>
               </a:rPr>
-              <a:t>m</a:t>
-            </a:r>
-            <a:endParaRPr lang="en-US" sz="900" dirty="0"/>
-          </a:p>
-        </p:txBody>
-      </p:sp>
-      <p:sp>
-        <p:nvSpPr>
-          <p:cNvPr id="60" name="Shape 58"/>
-          <p:cNvSpPr/>
-          <p:nvPr/>
-        </p:nvSpPr>
-        <p:spPr>
-          <a:xfrm>
-            <a:off x="7832252" y="4169664"/>
-            <a:ext cx="603504" cy="475488"/>
-          </a:xfrm>
-          <a:prstGeom prst="rect">
-            <a:avLst>
-              <a:gd name="adj" fmla="val 7692"/>
-            </a:avLst>
-          </a:prstGeom>
-          <a:solidFill>
-            <a:srgbClr val="FFFFFF"/>
-          </a:solidFill>
-          <a:ln w="12700">
-            <a:solidFill>
-              <a:srgbClr val="DB2777"/>
-            </a:solidFill>
-            <a:prstDash val="solid"/>
-          </a:ln>
-        </p:spPr>
-      </p:sp>
-      <p:sp>
-        <p:nvSpPr>
-          <p:cNvPr id="61" name="Text 59"/>
-          <p:cNvSpPr/>
-          <p:nvPr/>
-        </p:nvSpPr>
-        <p:spPr>
-          <a:xfrm>
-            <a:off x="7832252" y="4169664"/>
-            <a:ext cx="603504" cy="475488"/>
-          </a:xfrm>
-          <a:prstGeom prst="rect">
-            <a:avLst/>
-          </a:prstGeom>
-          <a:noFill/>
-          <a:ln/>
-        </p:spPr>
-        <p:txBody>
-          <a:bodyPr wrap="square" lIns="0" tIns="0" rIns="0" bIns="0" rtlCol="0" anchor="ctr"/>
-          <a:lstStyle/>
-          <a:p>
-            <a:pPr algn="ctr" indent="0" marL="0">
-              <a:buNone/>
-            </a:pPr>
-            <a:r>
-              <a:rPr lang="en-US" sz="900" b="1" dirty="0">
-                <a:solidFill>
-                  <a:srgbClr val="9D174D"/>
-                </a:solidFill>
-                <a:latin typeface="Trebuchet MS" pitchFamily="34" charset="0"/>
-                <a:ea typeface="Trebuchet MS" pitchFamily="34" charset="-122"/>
-                <a:cs typeface="Trebuchet MS" pitchFamily="34" charset="-120"/>
-              </a:rPr>
-              <a:t>ed</a:t>
+              <a:t>ng</a:t>
             </a:r>
             <a:endParaRPr lang="en-US" sz="900" dirty="0"/>
           </a:p>
@@ -23670,7 +23604,7 @@
                 <a:ea typeface="Calibri" pitchFamily="34" charset="-122"/>
                 <a:cs typeface="Calibri" pitchFamily="34" charset="-120"/>
               </a:rPr>
-              <a:t>Word Labs  •  wordlabs.app  •  Root: 'perform' = carry out, do, present</a:t>
+              <a:t>Word Labs  •  wordlabs.app  •  Root: 'perform' = carry out, do, or show</a:t>
             </a:r>
             <a:endParaRPr lang="en-US" sz="800" dirty="0"/>
           </a:p>
@@ -23809,7 +23743,7 @@
                 <a:ea typeface="Trebuchet MS" pitchFamily="34" charset="-122"/>
                 <a:cs typeface="Trebuchet MS" pitchFamily="34" charset="-120"/>
               </a:rPr>
-              <a:t>performance</a:t>
+              <a:t>performed</a:t>
             </a:r>
             <a:endParaRPr lang="en-US" sz="2800" dirty="0"/>
           </a:p>
@@ -24497,7 +24431,7 @@
                 <a:ea typeface="Calibri" pitchFamily="34" charset="-122"/>
                 <a:cs typeface="Calibri" pitchFamily="34" charset="-120"/>
               </a:rPr>
-              <a:t>Word Labs  •  wordlabs.app  •  Root: 'perform' = carry out, do, present</a:t>
+              <a:t>Word Labs  •  wordlabs.app  •  Root: 'perform' = carry out, do, or show</a:t>
             </a:r>
             <a:endParaRPr lang="en-US" sz="800" dirty="0"/>
           </a:p>
@@ -24636,7 +24570,7 @@
                 <a:ea typeface="Trebuchet MS" pitchFamily="34" charset="-122"/>
                 <a:cs typeface="Trebuchet MS" pitchFamily="34" charset="-120"/>
               </a:rPr>
-              <a:t>performance</a:t>
+              <a:t>performed</a:t>
             </a:r>
             <a:endParaRPr lang="en-US" sz="2800" dirty="0"/>
           </a:p>
@@ -24814,7 +24748,7 @@
                 <a:ea typeface="Calibri" pitchFamily="34" charset="-122"/>
                 <a:cs typeface="Calibri" pitchFamily="34" charset="-120"/>
               </a:rPr>
-              <a:t>carry out, present</a:t>
+              <a:t>carry out or show</a:t>
             </a:r>
             <a:endParaRPr lang="en-US" sz="850" dirty="0"/>
           </a:p>
@@ -24887,7 +24821,7 @@
                 <a:ea typeface="Trebuchet MS" pitchFamily="34" charset="-122"/>
                 <a:cs typeface="Trebuchet MS" pitchFamily="34" charset="-120"/>
               </a:rPr>
-              <a:t>ance</a:t>
+              <a:t>ed</a:t>
             </a:r>
             <a:endParaRPr lang="en-US" sz="1300" dirty="0"/>
           </a:p>
@@ -24926,7 +24860,7 @@
                 <a:ea typeface="Calibri" pitchFamily="34" charset="-122"/>
                 <a:cs typeface="Calibri" pitchFamily="34" charset="-120"/>
               </a:rPr>
-              <a:t>state or quality of</a:t>
+              <a:t>in the past</a:t>
             </a:r>
             <a:endParaRPr lang="en-US" sz="850" dirty="0"/>
           </a:p>
@@ -25482,7 +25416,7 @@
                 <a:ea typeface="Calibri" pitchFamily="34" charset="-122"/>
                 <a:cs typeface="Calibri" pitchFamily="34" charset="-120"/>
               </a:rPr>
-              <a:t>Word Labs  •  wordlabs.app  •  Root: 'perform' = carry out, do, present</a:t>
+              <a:t>Word Labs  •  wordlabs.app  •  Root: 'perform' = carry out, do, or show</a:t>
             </a:r>
             <a:endParaRPr lang="en-US" sz="800" dirty="0"/>
           </a:p>
@@ -25555,7 +25489,7 @@
                 <a:ea typeface="Trebuchet MS" pitchFamily="34" charset="-122"/>
                 <a:cs typeface="Trebuchet MS" pitchFamily="34" charset="-120"/>
               </a:rPr>
-              <a:t>We are learning that the root 'perform' means 'carry out, do, present'.</a:t>
+              <a:t>We are learning that the root 'perform' means 'carry out, do, or show'.</a:t>
             </a:r>
             <a:endParaRPr lang="en-US" sz="2000" dirty="0"/>
           </a:p>
@@ -26201,7 +26135,7 @@
                 <a:ea typeface="Calibri" pitchFamily="34" charset="-122"/>
                 <a:cs typeface="Calibri" pitchFamily="34" charset="-120"/>
               </a:rPr>
-              <a:t>Word Labs  •  wordlabs.app  •  Root: 'perform' = carry out, do, present</a:t>
+              <a:t>Word Labs  •  wordlabs.app  •  Root: 'perform' = carry out, do, or show</a:t>
             </a:r>
             <a:endParaRPr lang="en-US" sz="800" dirty="0"/>
           </a:p>
@@ -26340,7 +26274,7 @@
                 <a:ea typeface="Trebuchet MS" pitchFamily="34" charset="-122"/>
                 <a:cs typeface="Trebuchet MS" pitchFamily="34" charset="-120"/>
               </a:rPr>
-              <a:t>performance</a:t>
+              <a:t>performed</a:t>
             </a:r>
             <a:endParaRPr lang="en-US" sz="2800" dirty="0"/>
           </a:p>
@@ -26518,7 +26452,7 @@
                 <a:ea typeface="Calibri" pitchFamily="34" charset="-122"/>
                 <a:cs typeface="Calibri" pitchFamily="34" charset="-120"/>
               </a:rPr>
-              <a:t>carry out, present</a:t>
+              <a:t>carry out or show</a:t>
             </a:r>
             <a:endParaRPr lang="en-US" sz="850" dirty="0"/>
           </a:p>
@@ -26591,7 +26525,7 @@
                 <a:ea typeface="Trebuchet MS" pitchFamily="34" charset="-122"/>
                 <a:cs typeface="Trebuchet MS" pitchFamily="34" charset="-120"/>
               </a:rPr>
-              <a:t>ance</a:t>
+              <a:t>ed</a:t>
             </a:r>
             <a:endParaRPr lang="en-US" sz="1300" dirty="0"/>
           </a:p>
@@ -26630,7 +26564,7 @@
                 <a:ea typeface="Calibri" pitchFamily="34" charset="-122"/>
                 <a:cs typeface="Calibri" pitchFamily="34" charset="-120"/>
               </a:rPr>
-              <a:t>state or quality of</a:t>
+              <a:t>in the past</a:t>
             </a:r>
             <a:endParaRPr lang="en-US" sz="850" dirty="0"/>
           </a:p>
@@ -26737,7 +26671,7 @@
         </p:nvSpPr>
         <p:spPr>
           <a:xfrm>
-            <a:off x="2313432" y="3364992"/>
+            <a:off x="2999232" y="3364992"/>
             <a:ext cx="1645920" cy="475488"/>
           </a:xfrm>
           <a:prstGeom prst="rect">
@@ -26764,7 +26698,7 @@
         </p:nvSpPr>
         <p:spPr>
           <a:xfrm>
-            <a:off x="2313432" y="3364992"/>
+            <a:off x="2999232" y="3364992"/>
             <a:ext cx="1645920" cy="475488"/>
           </a:xfrm>
           <a:prstGeom prst="rect">
@@ -26803,8 +26737,8 @@
         </p:nvSpPr>
         <p:spPr>
           <a:xfrm>
-            <a:off x="3959352" y="3364992"/>
-            <a:ext cx="411480" cy="475488"/>
+            <a:off x="4645152" y="3364992"/>
+            <a:ext cx="1097280" cy="475488"/>
           </a:xfrm>
           <a:prstGeom prst="rect">
             <a:avLst/>
@@ -26842,7 +26776,7 @@
         </p:nvSpPr>
         <p:spPr>
           <a:xfrm>
-            <a:off x="4370832" y="3364992"/>
+            <a:off x="5742432" y="3364992"/>
             <a:ext cx="1645920" cy="475488"/>
           </a:xfrm>
           <a:prstGeom prst="rect">
@@ -26869,7 +26803,7 @@
         </p:nvSpPr>
         <p:spPr>
           <a:xfrm>
-            <a:off x="4370832" y="3364992"/>
+            <a:off x="5742432" y="3364992"/>
             <a:ext cx="1645920" cy="475488"/>
           </a:xfrm>
           <a:prstGeom prst="rect">
@@ -26894,7 +26828,7 @@
                 <a:ea typeface="Trebuchet MS" pitchFamily="34" charset="-122"/>
                 <a:cs typeface="Trebuchet MS" pitchFamily="34" charset="-120"/>
               </a:rPr>
-              <a:t>form</a:t>
+              <a:t>formed</a:t>
             </a:r>
             <a:endParaRPr lang="en-US" sz="1400" dirty="0"/>
           </a:p>
@@ -26902,119 +26836,80 @@
       </p:sp>
       <p:sp>
         <p:nvSpPr>
-          <p:cNvPr id="30" name="Text 28"/>
-          <p:cNvSpPr/>
-          <p:nvPr/>
-        </p:nvSpPr>
-        <p:spPr>
-          <a:xfrm>
-            <a:off x="6016752" y="3364992"/>
-            <a:ext cx="411480" cy="475488"/>
-          </a:xfrm>
-          <a:prstGeom prst="rect">
-            <a:avLst/>
-          </a:prstGeom>
-          <a:noFill/>
-          <a:ln/>
-        </p:spPr>
-        <p:txBody>
-          <a:bodyPr wrap="square" lIns="0" tIns="0" rIns="0" bIns="0" rtlCol="0" anchor="ctr"/>
-          <a:lstStyle/>
-          <a:p>
-            <a:pPr algn="ctr" indent="0" marL="0">
-              <a:buNone/>
-            </a:pPr>
-            <a:r>
-              <a:rPr lang="en-US" sz="1600" b="1" dirty="0">
-                <a:solidFill>
-                  <a:srgbClr val="0D9488"/>
+          <p:cNvPr id="30" name="Shape 28"/>
+          <p:cNvSpPr/>
+          <p:nvPr/>
+        </p:nvSpPr>
+        <p:spPr>
+          <a:xfrm>
+            <a:off x="365760" y="4096512"/>
+            <a:ext cx="1371600" cy="804672"/>
+          </a:xfrm>
+          <a:prstGeom prst="rect">
+            <a:avLst>
+              <a:gd name="adj" fmla="val 6818"/>
+            </a:avLst>
+          </a:prstGeom>
+          <a:solidFill>
+            <a:srgbClr val="E2E8F0"/>
+          </a:solidFill>
+          <a:ln w="12700">
+            <a:solidFill>
+              <a:srgbClr val="E2E8F0"/>
+            </a:solidFill>
+            <a:prstDash val="solid"/>
+          </a:ln>
+        </p:spPr>
+      </p:sp>
+      <p:sp>
+        <p:nvSpPr>
+          <p:cNvPr id="31" name="Text 29"/>
+          <p:cNvSpPr/>
+          <p:nvPr/>
+        </p:nvSpPr>
+        <p:spPr>
+          <a:xfrm>
+            <a:off x="365760" y="4096512"/>
+            <a:ext cx="1371600" cy="804672"/>
+          </a:xfrm>
+          <a:prstGeom prst="rect">
+            <a:avLst/>
+          </a:prstGeom>
+          <a:noFill/>
+          <a:ln/>
+        </p:spPr>
+        <p:txBody>
+          <a:bodyPr wrap="square" lIns="0" tIns="0" rIns="0" bIns="0" rtlCol="0" anchor="ctr"/>
+          <a:lstStyle/>
+          <a:p>
+            <a:pPr algn="ctr" indent="0" marL="0">
+              <a:buNone/>
+            </a:pPr>
+            <a:r>
+              <a:rPr lang="en-US" sz="1100" b="1" dirty="0">
+                <a:solidFill>
+                  <a:srgbClr val="475569"/>
                 </a:solidFill>
                 <a:latin typeface="Trebuchet MS" pitchFamily="34" charset="0"/>
                 <a:ea typeface="Trebuchet MS" pitchFamily="34" charset="-122"/>
                 <a:cs typeface="Trebuchet MS" pitchFamily="34" charset="-120"/>
               </a:rPr>
-              <a:t>·</a:t>
-            </a:r>
-            <a:endParaRPr lang="en-US" sz="1600" dirty="0"/>
-          </a:p>
-        </p:txBody>
-      </p:sp>
-      <p:sp>
-        <p:nvSpPr>
-          <p:cNvPr id="31" name="Shape 29"/>
-          <p:cNvSpPr/>
-          <p:nvPr/>
-        </p:nvSpPr>
-        <p:spPr>
-          <a:xfrm>
-            <a:off x="6428232" y="3364992"/>
-            <a:ext cx="1645920" cy="475488"/>
-          </a:xfrm>
-          <a:prstGeom prst="rect">
-            <a:avLst>
-              <a:gd name="adj" fmla="val 9615"/>
-            </a:avLst>
-          </a:prstGeom>
-          <a:solidFill>
-            <a:srgbClr val="FFFFFF"/>
-          </a:solidFill>
-          <a:ln w="12700">
-            <a:solidFill>
-              <a:srgbClr val="0D9488"/>
-            </a:solidFill>
-            <a:prstDash val="solid"/>
-          </a:ln>
-        </p:spPr>
-      </p:sp>
-      <p:sp>
-        <p:nvSpPr>
-          <p:cNvPr id="32" name="Text 30"/>
-          <p:cNvSpPr/>
-          <p:nvPr/>
-        </p:nvSpPr>
-        <p:spPr>
-          <a:xfrm>
-            <a:off x="6428232" y="3364992"/>
-            <a:ext cx="1645920" cy="475488"/>
-          </a:xfrm>
-          <a:prstGeom prst="rect">
-            <a:avLst/>
-          </a:prstGeom>
-          <a:noFill/>
-          <a:ln/>
-        </p:spPr>
-        <p:txBody>
-          <a:bodyPr wrap="square" lIns="0" tIns="0" rIns="0" bIns="0" rtlCol="0" anchor="ctr"/>
-          <a:lstStyle/>
-          <a:p>
-            <a:pPr algn="ctr" indent="0" marL="0">
-              <a:buNone/>
-            </a:pPr>
-            <a:r>
-              <a:rPr lang="en-US" sz="1400" b="1" dirty="0">
-                <a:solidFill>
-                  <a:srgbClr val="0D9488"/>
-                </a:solidFill>
-                <a:latin typeface="Trebuchet MS" pitchFamily="34" charset="0"/>
-                <a:ea typeface="Trebuchet MS" pitchFamily="34" charset="-122"/>
-                <a:cs typeface="Trebuchet MS" pitchFamily="34" charset="-120"/>
-              </a:rPr>
-              <a:t>ance</a:t>
-            </a:r>
-            <a:endParaRPr lang="en-US" sz="1400" dirty="0"/>
-          </a:p>
-        </p:txBody>
-      </p:sp>
-      <p:sp>
-        <p:nvSpPr>
-          <p:cNvPr id="33" name="Shape 31"/>
-          <p:cNvSpPr/>
-          <p:nvPr/>
-        </p:nvSpPr>
-        <p:spPr>
-          <a:xfrm>
-            <a:off x="365760" y="4096512"/>
-            <a:ext cx="1371600" cy="804672"/>
+              <a:t>Phonemes</a:t>
+            </a:r>
+            <a:endParaRPr lang="en-US" sz="1100" dirty="0"/>
+          </a:p>
+        </p:txBody>
+      </p:sp>
+      <p:sp>
+        <p:nvSpPr>
+          <p:cNvPr id="32" name="Shape 30"/>
+          <p:cNvSpPr/>
+          <p:nvPr/>
+        </p:nvSpPr>
+        <p:spPr>
+          <a:xfrm>
+            <a:off x="1874520" y="4096512"/>
+            <a:ext cx="6903720" cy="804672"/>
           </a:xfrm>
           <a:prstGeom prst="rect">
             <a:avLst>
@@ -27022,85 +26917,19 @@
             </a:avLst>
           </a:prstGeom>
           <a:solidFill>
-            <a:srgbClr val="E2E8F0"/>
+            <a:srgbClr val="F8FAFC"/>
           </a:solidFill>
           <a:ln w="12700">
             <a:solidFill>
               <a:srgbClr val="E2E8F0"/>
             </a:solidFill>
-            <a:prstDash val="solid"/>
-          </a:ln>
-        </p:spPr>
-      </p:sp>
-      <p:sp>
-        <p:nvSpPr>
-          <p:cNvPr id="34" name="Text 32"/>
-          <p:cNvSpPr/>
-          <p:nvPr/>
-        </p:nvSpPr>
-        <p:spPr>
-          <a:xfrm>
-            <a:off x="365760" y="4096512"/>
-            <a:ext cx="1371600" cy="804672"/>
-          </a:xfrm>
-          <a:prstGeom prst="rect">
-            <a:avLst/>
-          </a:prstGeom>
-          <a:noFill/>
-          <a:ln/>
-        </p:spPr>
-        <p:txBody>
-          <a:bodyPr wrap="square" lIns="0" tIns="0" rIns="0" bIns="0" rtlCol="0" anchor="ctr"/>
-          <a:lstStyle/>
-          <a:p>
-            <a:pPr algn="ctr" indent="0" marL="0">
-              <a:buNone/>
-            </a:pPr>
-            <a:r>
-              <a:rPr lang="en-US" sz="1100" b="1" dirty="0">
-                <a:solidFill>
-                  <a:srgbClr val="475569"/>
-                </a:solidFill>
-                <a:latin typeface="Trebuchet MS" pitchFamily="34" charset="0"/>
-                <a:ea typeface="Trebuchet MS" pitchFamily="34" charset="-122"/>
-                <a:cs typeface="Trebuchet MS" pitchFamily="34" charset="-120"/>
-              </a:rPr>
-              <a:t>Phonemes</a:t>
-            </a:r>
-            <a:endParaRPr lang="en-US" sz="1100" dirty="0"/>
-          </a:p>
-        </p:txBody>
-      </p:sp>
-      <p:sp>
-        <p:nvSpPr>
-          <p:cNvPr id="35" name="Shape 33"/>
-          <p:cNvSpPr/>
-          <p:nvPr/>
-        </p:nvSpPr>
-        <p:spPr>
-          <a:xfrm>
-            <a:off x="1874520" y="4096512"/>
-            <a:ext cx="6903720" cy="804672"/>
-          </a:xfrm>
-          <a:prstGeom prst="rect">
-            <a:avLst>
-              <a:gd name="adj" fmla="val 6818"/>
-            </a:avLst>
-          </a:prstGeom>
-          <a:solidFill>
-            <a:srgbClr val="F8FAFC"/>
-          </a:solidFill>
-          <a:ln w="12700">
-            <a:solidFill>
-              <a:srgbClr val="E2E8F0"/>
-            </a:solidFill>
             <a:prstDash val="dash"/>
           </a:ln>
         </p:spPr>
       </p:sp>
       <p:sp>
         <p:nvSpPr>
-          <p:cNvPr id="36" name="Text 34"/>
+          <p:cNvPr id="33" name="Text 31"/>
           <p:cNvSpPr/>
           <p:nvPr/>
         </p:nvSpPr>
@@ -27423,7 +27252,7 @@
                 <a:ea typeface="Calibri" pitchFamily="34" charset="-122"/>
                 <a:cs typeface="Calibri" pitchFamily="34" charset="-120"/>
               </a:rPr>
-              <a:t>Word Labs  •  wordlabs.app  •  Root: 'perform' = carry out, do, present</a:t>
+              <a:t>Word Labs  •  wordlabs.app  •  Root: 'perform' = carry out, do, or show</a:t>
             </a:r>
             <a:endParaRPr lang="en-US" sz="800" dirty="0"/>
           </a:p>
@@ -27562,7 +27391,7 @@
                 <a:ea typeface="Trebuchet MS" pitchFamily="34" charset="-122"/>
                 <a:cs typeface="Trebuchet MS" pitchFamily="34" charset="-120"/>
               </a:rPr>
-              <a:t>performance</a:t>
+              <a:t>performed</a:t>
             </a:r>
             <a:endParaRPr lang="en-US" sz="2800" dirty="0"/>
           </a:p>
@@ -27740,7 +27569,7 @@
                 <a:ea typeface="Calibri" pitchFamily="34" charset="-122"/>
                 <a:cs typeface="Calibri" pitchFamily="34" charset="-120"/>
               </a:rPr>
-              <a:t>carry out, present</a:t>
+              <a:t>carry out or show</a:t>
             </a:r>
             <a:endParaRPr lang="en-US" sz="850" dirty="0"/>
           </a:p>
@@ -27813,7 +27642,7 @@
                 <a:ea typeface="Trebuchet MS" pitchFamily="34" charset="-122"/>
                 <a:cs typeface="Trebuchet MS" pitchFamily="34" charset="-120"/>
               </a:rPr>
-              <a:t>ance</a:t>
+              <a:t>ed</a:t>
             </a:r>
             <a:endParaRPr lang="en-US" sz="1300" dirty="0"/>
           </a:p>
@@ -27852,7 +27681,7 @@
                 <a:ea typeface="Calibri" pitchFamily="34" charset="-122"/>
                 <a:cs typeface="Calibri" pitchFamily="34" charset="-120"/>
               </a:rPr>
-              <a:t>state or quality of</a:t>
+              <a:t>in the past</a:t>
             </a:r>
             <a:endParaRPr lang="en-US" sz="850" dirty="0"/>
           </a:p>
@@ -27959,7 +27788,7 @@
         </p:nvSpPr>
         <p:spPr>
           <a:xfrm>
-            <a:off x="2313432" y="3364992"/>
+            <a:off x="2999232" y="3364992"/>
             <a:ext cx="1645920" cy="475488"/>
           </a:xfrm>
           <a:prstGeom prst="rect">
@@ -27986,7 +27815,7 @@
         </p:nvSpPr>
         <p:spPr>
           <a:xfrm>
-            <a:off x="2313432" y="3364992"/>
+            <a:off x="2999232" y="3364992"/>
             <a:ext cx="1645920" cy="475488"/>
           </a:xfrm>
           <a:prstGeom prst="rect">
@@ -28025,8 +27854,8 @@
         </p:nvSpPr>
         <p:spPr>
           <a:xfrm>
-            <a:off x="3959352" y="3364992"/>
-            <a:ext cx="411480" cy="475488"/>
+            <a:off x="4645152" y="3364992"/>
+            <a:ext cx="1097280" cy="475488"/>
           </a:xfrm>
           <a:prstGeom prst="rect">
             <a:avLst/>
@@ -28064,7 +27893,7 @@
         </p:nvSpPr>
         <p:spPr>
           <a:xfrm>
-            <a:off x="4370832" y="3364992"/>
+            <a:off x="5742432" y="3364992"/>
             <a:ext cx="1645920" cy="475488"/>
           </a:xfrm>
           <a:prstGeom prst="rect">
@@ -28091,7 +27920,7 @@
         </p:nvSpPr>
         <p:spPr>
           <a:xfrm>
-            <a:off x="4370832" y="3364992"/>
+            <a:off x="5742432" y="3364992"/>
             <a:ext cx="1645920" cy="475488"/>
           </a:xfrm>
           <a:prstGeom prst="rect">
@@ -28116,7 +27945,7 @@
                 <a:ea typeface="Trebuchet MS" pitchFamily="34" charset="-122"/>
                 <a:cs typeface="Trebuchet MS" pitchFamily="34" charset="-120"/>
               </a:rPr>
-              <a:t>form</a:t>
+              <a:t>formed</a:t>
             </a:r>
             <a:endParaRPr lang="en-US" sz="1400" dirty="0"/>
           </a:p>
@@ -28124,193 +27953,247 @@
       </p:sp>
       <p:sp>
         <p:nvSpPr>
-          <p:cNvPr id="30" name="Text 28"/>
-          <p:cNvSpPr/>
-          <p:nvPr/>
-        </p:nvSpPr>
-        <p:spPr>
-          <a:xfrm>
-            <a:off x="6016752" y="3364992"/>
-            <a:ext cx="411480" cy="475488"/>
-          </a:xfrm>
-          <a:prstGeom prst="rect">
-            <a:avLst/>
-          </a:prstGeom>
-          <a:noFill/>
-          <a:ln/>
-        </p:spPr>
-        <p:txBody>
-          <a:bodyPr wrap="square" lIns="0" tIns="0" rIns="0" bIns="0" rtlCol="0" anchor="ctr"/>
-          <a:lstStyle/>
-          <a:p>
-            <a:pPr algn="ctr" indent="0" marL="0">
-              <a:buNone/>
-            </a:pPr>
-            <a:r>
-              <a:rPr lang="en-US" sz="1600" b="1" dirty="0">
-                <a:solidFill>
-                  <a:srgbClr val="0D9488"/>
+          <p:cNvPr id="30" name="Shape 28"/>
+          <p:cNvSpPr/>
+          <p:nvPr/>
+        </p:nvSpPr>
+        <p:spPr>
+          <a:xfrm>
+            <a:off x="365760" y="4096512"/>
+            <a:ext cx="1371600" cy="804672"/>
+          </a:xfrm>
+          <a:prstGeom prst="rect">
+            <a:avLst>
+              <a:gd name="adj" fmla="val 6818"/>
+            </a:avLst>
+          </a:prstGeom>
+          <a:solidFill>
+            <a:srgbClr val="E2E8F0"/>
+          </a:solidFill>
+          <a:ln w="12700">
+            <a:solidFill>
+              <a:srgbClr val="E2E8F0"/>
+            </a:solidFill>
+            <a:prstDash val="solid"/>
+          </a:ln>
+        </p:spPr>
+      </p:sp>
+      <p:sp>
+        <p:nvSpPr>
+          <p:cNvPr id="31" name="Text 29"/>
+          <p:cNvSpPr/>
+          <p:nvPr/>
+        </p:nvSpPr>
+        <p:spPr>
+          <a:xfrm>
+            <a:off x="365760" y="4096512"/>
+            <a:ext cx="1371600" cy="804672"/>
+          </a:xfrm>
+          <a:prstGeom prst="rect">
+            <a:avLst/>
+          </a:prstGeom>
+          <a:noFill/>
+          <a:ln/>
+        </p:spPr>
+        <p:txBody>
+          <a:bodyPr wrap="square" lIns="0" tIns="0" rIns="0" bIns="0" rtlCol="0" anchor="ctr"/>
+          <a:lstStyle/>
+          <a:p>
+            <a:pPr algn="ctr" indent="0" marL="0">
+              <a:buNone/>
+            </a:pPr>
+            <a:r>
+              <a:rPr lang="en-US" sz="1100" b="1" dirty="0">
+                <a:solidFill>
+                  <a:srgbClr val="475569"/>
                 </a:solidFill>
                 <a:latin typeface="Trebuchet MS" pitchFamily="34" charset="0"/>
                 <a:ea typeface="Trebuchet MS" pitchFamily="34" charset="-122"/>
                 <a:cs typeface="Trebuchet MS" pitchFamily="34" charset="-120"/>
               </a:rPr>
-              <a:t>·</a:t>
-            </a:r>
-            <a:endParaRPr lang="en-US" sz="1600" dirty="0"/>
-          </a:p>
-        </p:txBody>
-      </p:sp>
-      <p:sp>
-        <p:nvSpPr>
-          <p:cNvPr id="31" name="Shape 29"/>
-          <p:cNvSpPr/>
-          <p:nvPr/>
-        </p:nvSpPr>
-        <p:spPr>
-          <a:xfrm>
-            <a:off x="6428232" y="3364992"/>
-            <a:ext cx="1645920" cy="475488"/>
+              <a:t>Phonemes</a:t>
+            </a:r>
+            <a:endParaRPr lang="en-US" sz="1100" dirty="0"/>
+          </a:p>
+        </p:txBody>
+      </p:sp>
+      <p:sp>
+        <p:nvSpPr>
+          <p:cNvPr id="32" name="Shape 30"/>
+          <p:cNvSpPr/>
+          <p:nvPr/>
+        </p:nvSpPr>
+        <p:spPr>
+          <a:xfrm>
+            <a:off x="1874520" y="4096512"/>
+            <a:ext cx="6903720" cy="658368"/>
           </a:xfrm>
           <a:prstGeom prst="rect">
             <a:avLst>
-              <a:gd name="adj" fmla="val 9615"/>
+              <a:gd name="adj" fmla="val 8333"/>
             </a:avLst>
           </a:prstGeom>
           <a:solidFill>
+            <a:srgbClr val="FCE7F3"/>
+          </a:solidFill>
+          <a:ln w="12700">
+            <a:solidFill>
+              <a:srgbClr val="DB2777"/>
+            </a:solidFill>
+            <a:prstDash val="solid"/>
+          </a:ln>
+        </p:spPr>
+      </p:sp>
+      <p:sp>
+        <p:nvSpPr>
+          <p:cNvPr id="33" name="Shape 31"/>
+          <p:cNvSpPr/>
+          <p:nvPr/>
+        </p:nvSpPr>
+        <p:spPr>
+          <a:xfrm>
+            <a:off x="2254649" y="4169664"/>
+            <a:ext cx="685800" cy="475488"/>
+          </a:xfrm>
+          <a:prstGeom prst="rect">
+            <a:avLst>
+              <a:gd name="adj" fmla="val 7692"/>
+            </a:avLst>
+          </a:prstGeom>
+          <a:solidFill>
             <a:srgbClr val="FFFFFF"/>
           </a:solidFill>
           <a:ln w="12700">
             <a:solidFill>
-              <a:srgbClr val="0D9488"/>
-            </a:solidFill>
-            <a:prstDash val="solid"/>
-          </a:ln>
-        </p:spPr>
-      </p:sp>
-      <p:sp>
-        <p:nvSpPr>
-          <p:cNvPr id="32" name="Text 30"/>
-          <p:cNvSpPr/>
-          <p:nvPr/>
-        </p:nvSpPr>
-        <p:spPr>
-          <a:xfrm>
-            <a:off x="6428232" y="3364992"/>
-            <a:ext cx="1645920" cy="475488"/>
-          </a:xfrm>
-          <a:prstGeom prst="rect">
-            <a:avLst/>
-          </a:prstGeom>
-          <a:noFill/>
-          <a:ln/>
-        </p:spPr>
-        <p:txBody>
-          <a:bodyPr wrap="square" lIns="0" tIns="0" rIns="0" bIns="0" rtlCol="0" anchor="ctr"/>
-          <a:lstStyle/>
-          <a:p>
-            <a:pPr algn="ctr" indent="0" marL="0">
-              <a:buNone/>
-            </a:pPr>
-            <a:r>
-              <a:rPr lang="en-US" sz="1400" b="1" dirty="0">
-                <a:solidFill>
-                  <a:srgbClr val="0D9488"/>
+              <a:srgbClr val="DB2777"/>
+            </a:solidFill>
+            <a:prstDash val="solid"/>
+          </a:ln>
+        </p:spPr>
+      </p:sp>
+      <p:sp>
+        <p:nvSpPr>
+          <p:cNvPr id="34" name="Text 32"/>
+          <p:cNvSpPr/>
+          <p:nvPr/>
+        </p:nvSpPr>
+        <p:spPr>
+          <a:xfrm>
+            <a:off x="2254649" y="4169664"/>
+            <a:ext cx="685800" cy="475488"/>
+          </a:xfrm>
+          <a:prstGeom prst="rect">
+            <a:avLst/>
+          </a:prstGeom>
+          <a:noFill/>
+          <a:ln/>
+        </p:spPr>
+        <p:txBody>
+          <a:bodyPr wrap="square" lIns="0" tIns="0" rIns="0" bIns="0" rtlCol="0" anchor="ctr"/>
+          <a:lstStyle/>
+          <a:p>
+            <a:pPr algn="ctr" indent="0" marL="0">
+              <a:buNone/>
+            </a:pPr>
+            <a:r>
+              <a:rPr lang="en-US" sz="900" b="1" dirty="0">
+                <a:solidFill>
+                  <a:srgbClr val="9D174D"/>
                 </a:solidFill>
                 <a:latin typeface="Trebuchet MS" pitchFamily="34" charset="0"/>
                 <a:ea typeface="Trebuchet MS" pitchFamily="34" charset="-122"/>
                 <a:cs typeface="Trebuchet MS" pitchFamily="34" charset="-120"/>
               </a:rPr>
-              <a:t>ance</a:t>
-            </a:r>
-            <a:endParaRPr lang="en-US" sz="1400" dirty="0"/>
-          </a:p>
-        </p:txBody>
-      </p:sp>
-      <p:sp>
-        <p:nvSpPr>
-          <p:cNvPr id="33" name="Shape 31"/>
-          <p:cNvSpPr/>
-          <p:nvPr/>
-        </p:nvSpPr>
-        <p:spPr>
-          <a:xfrm>
-            <a:off x="365760" y="4096512"/>
-            <a:ext cx="1371600" cy="804672"/>
+              <a:t>p</a:t>
+            </a:r>
+            <a:endParaRPr lang="en-US" sz="900" dirty="0"/>
+          </a:p>
+        </p:txBody>
+      </p:sp>
+      <p:sp>
+        <p:nvSpPr>
+          <p:cNvPr id="35" name="Shape 33"/>
+          <p:cNvSpPr/>
+          <p:nvPr/>
+        </p:nvSpPr>
+        <p:spPr>
+          <a:xfrm>
+            <a:off x="3293146" y="4169664"/>
+            <a:ext cx="685800" cy="475488"/>
           </a:xfrm>
           <a:prstGeom prst="rect">
             <a:avLst>
-              <a:gd name="adj" fmla="val 6818"/>
+              <a:gd name="adj" fmla="val 7692"/>
             </a:avLst>
           </a:prstGeom>
           <a:solidFill>
-            <a:srgbClr val="E2E8F0"/>
-          </a:solidFill>
-          <a:ln w="12700">
-            <a:solidFill>
-              <a:srgbClr val="E2E8F0"/>
-            </a:solidFill>
-            <a:prstDash val="solid"/>
-          </a:ln>
-        </p:spPr>
-      </p:sp>
-      <p:sp>
-        <p:nvSpPr>
-          <p:cNvPr id="34" name="Text 32"/>
-          <p:cNvSpPr/>
-          <p:nvPr/>
-        </p:nvSpPr>
-        <p:spPr>
-          <a:xfrm>
-            <a:off x="365760" y="4096512"/>
-            <a:ext cx="1371600" cy="804672"/>
-          </a:xfrm>
-          <a:prstGeom prst="rect">
-            <a:avLst/>
-          </a:prstGeom>
-          <a:noFill/>
-          <a:ln/>
-        </p:spPr>
-        <p:txBody>
-          <a:bodyPr wrap="square" lIns="0" tIns="0" rIns="0" bIns="0" rtlCol="0" anchor="ctr"/>
-          <a:lstStyle/>
-          <a:p>
-            <a:pPr algn="ctr" indent="0" marL="0">
-              <a:buNone/>
-            </a:pPr>
-            <a:r>
-              <a:rPr lang="en-US" sz="1100" b="1" dirty="0">
-                <a:solidFill>
-                  <a:srgbClr val="475569"/>
+            <a:srgbClr val="FFFFFF"/>
+          </a:solidFill>
+          <a:ln w="12700">
+            <a:solidFill>
+              <a:srgbClr val="DB2777"/>
+            </a:solidFill>
+            <a:prstDash val="solid"/>
+          </a:ln>
+        </p:spPr>
+      </p:sp>
+      <p:sp>
+        <p:nvSpPr>
+          <p:cNvPr id="36" name="Text 34"/>
+          <p:cNvSpPr/>
+          <p:nvPr/>
+        </p:nvSpPr>
+        <p:spPr>
+          <a:xfrm>
+            <a:off x="3293146" y="4169664"/>
+            <a:ext cx="685800" cy="475488"/>
+          </a:xfrm>
+          <a:prstGeom prst="rect">
+            <a:avLst/>
+          </a:prstGeom>
+          <a:noFill/>
+          <a:ln/>
+        </p:spPr>
+        <p:txBody>
+          <a:bodyPr wrap="square" lIns="0" tIns="0" rIns="0" bIns="0" rtlCol="0" anchor="ctr"/>
+          <a:lstStyle/>
+          <a:p>
+            <a:pPr algn="ctr" indent="0" marL="0">
+              <a:buNone/>
+            </a:pPr>
+            <a:r>
+              <a:rPr lang="en-US" sz="900" b="1" dirty="0">
+                <a:solidFill>
+                  <a:srgbClr val="9D174D"/>
                 </a:solidFill>
                 <a:latin typeface="Trebuchet MS" pitchFamily="34" charset="0"/>
                 <a:ea typeface="Trebuchet MS" pitchFamily="34" charset="-122"/>
                 <a:cs typeface="Trebuchet MS" pitchFamily="34" charset="-120"/>
               </a:rPr>
-              <a:t>Phonemes</a:t>
-            </a:r>
-            <a:endParaRPr lang="en-US" sz="1100" dirty="0"/>
-          </a:p>
-        </p:txBody>
-      </p:sp>
-      <p:sp>
-        <p:nvSpPr>
-          <p:cNvPr id="35" name="Shape 33"/>
-          <p:cNvSpPr/>
-          <p:nvPr/>
-        </p:nvSpPr>
-        <p:spPr>
-          <a:xfrm>
-            <a:off x="1874520" y="4096512"/>
-            <a:ext cx="6903720" cy="804672"/>
+              <a:t>er</a:t>
+            </a:r>
+            <a:endParaRPr lang="en-US" sz="900" dirty="0"/>
+          </a:p>
+        </p:txBody>
+      </p:sp>
+      <p:sp>
+        <p:nvSpPr>
+          <p:cNvPr id="37" name="Shape 35"/>
+          <p:cNvSpPr/>
+          <p:nvPr/>
+        </p:nvSpPr>
+        <p:spPr>
+          <a:xfrm>
+            <a:off x="4331643" y="4169664"/>
+            <a:ext cx="685800" cy="475488"/>
           </a:xfrm>
           <a:prstGeom prst="rect">
             <a:avLst>
-              <a:gd name="adj" fmla="val 6818"/>
+              <a:gd name="adj" fmla="val 7692"/>
             </a:avLst>
           </a:prstGeom>
           <a:solidFill>
-            <a:srgbClr val="FCE7F3"/>
+            <a:srgbClr val="FFFFFF"/>
           </a:solidFill>
           <a:ln w="12700">
             <a:solidFill>
@@ -28322,41 +28205,14 @@
       </p:sp>
       <p:sp>
         <p:nvSpPr>
-          <p:cNvPr id="36" name="Shape 34"/>
-          <p:cNvSpPr/>
-          <p:nvPr/>
-        </p:nvSpPr>
-        <p:spPr>
-          <a:xfrm>
-            <a:off x="2023872" y="4169664"/>
-            <a:ext cx="685800" cy="384048"/>
-          </a:xfrm>
-          <a:prstGeom prst="rect">
-            <a:avLst>
-              <a:gd name="adj" fmla="val 9524"/>
-            </a:avLst>
-          </a:prstGeom>
-          <a:solidFill>
-            <a:srgbClr val="FFFFFF"/>
-          </a:solidFill>
-          <a:ln w="12700">
-            <a:solidFill>
-              <a:srgbClr val="DB2777"/>
-            </a:solidFill>
-            <a:prstDash val="solid"/>
-          </a:ln>
-        </p:spPr>
-      </p:sp>
-      <p:sp>
-        <p:nvSpPr>
-          <p:cNvPr id="37" name="Text 35"/>
-          <p:cNvSpPr/>
-          <p:nvPr/>
-        </p:nvSpPr>
-        <p:spPr>
-          <a:xfrm>
-            <a:off x="2023872" y="4169664"/>
-            <a:ext cx="685800" cy="384048"/>
+          <p:cNvPr id="38" name="Text 36"/>
+          <p:cNvSpPr/>
+          <p:nvPr/>
+        </p:nvSpPr>
+        <p:spPr>
+          <a:xfrm>
+            <a:off x="4331643" y="4169664"/>
+            <a:ext cx="685800" cy="475488"/>
           </a:xfrm>
           <a:prstGeom prst="rect">
             <a:avLst/>
@@ -28380,7 +28236,7 @@
                 <a:ea typeface="Trebuchet MS" pitchFamily="34" charset="-122"/>
                 <a:cs typeface="Trebuchet MS" pitchFamily="34" charset="-120"/>
               </a:rPr>
-              <a:t>p</a:t>
+              <a:t>f</a:t>
             </a:r>
             <a:endParaRPr lang="en-US" sz="900" dirty="0"/>
           </a:p>
@@ -28388,18 +28244,18 @@
       </p:sp>
       <p:sp>
         <p:nvSpPr>
-          <p:cNvPr id="38" name="Shape 36"/>
-          <p:cNvSpPr/>
-          <p:nvPr/>
-        </p:nvSpPr>
-        <p:spPr>
-          <a:xfrm>
-            <a:off x="2831592" y="4169664"/>
-            <a:ext cx="685800" cy="384048"/>
+          <p:cNvPr id="39" name="Shape 37"/>
+          <p:cNvSpPr/>
+          <p:nvPr/>
+        </p:nvSpPr>
+        <p:spPr>
+          <a:xfrm>
+            <a:off x="5370141" y="4169664"/>
+            <a:ext cx="685800" cy="475488"/>
           </a:xfrm>
           <a:prstGeom prst="rect">
             <a:avLst>
-              <a:gd name="adj" fmla="val 9524"/>
+              <a:gd name="adj" fmla="val 7692"/>
             </a:avLst>
           </a:prstGeom>
           <a:solidFill>
@@ -28415,14 +28271,14 @@
       </p:sp>
       <p:sp>
         <p:nvSpPr>
-          <p:cNvPr id="39" name="Text 37"/>
-          <p:cNvSpPr/>
-          <p:nvPr/>
-        </p:nvSpPr>
-        <p:spPr>
-          <a:xfrm>
-            <a:off x="2831592" y="4169664"/>
-            <a:ext cx="685800" cy="384048"/>
+          <p:cNvPr id="40" name="Text 38"/>
+          <p:cNvSpPr/>
+          <p:nvPr/>
+        </p:nvSpPr>
+        <p:spPr>
+          <a:xfrm>
+            <a:off x="5370141" y="4169664"/>
+            <a:ext cx="685800" cy="475488"/>
           </a:xfrm>
           <a:prstGeom prst="rect">
             <a:avLst/>
@@ -28446,7 +28302,7 @@
                 <a:ea typeface="Trebuchet MS" pitchFamily="34" charset="-122"/>
                 <a:cs typeface="Trebuchet MS" pitchFamily="34" charset="-120"/>
               </a:rPr>
-              <a:t>er</a:t>
+              <a:t>or</a:t>
             </a:r>
             <a:endParaRPr lang="en-US" sz="900" dirty="0"/>
           </a:p>
@@ -28454,18 +28310,18 @@
       </p:sp>
       <p:sp>
         <p:nvSpPr>
-          <p:cNvPr id="40" name="Shape 38"/>
-          <p:cNvSpPr/>
-          <p:nvPr/>
-        </p:nvSpPr>
-        <p:spPr>
-          <a:xfrm>
-            <a:off x="3639312" y="4169664"/>
-            <a:ext cx="685800" cy="384048"/>
+          <p:cNvPr id="41" name="Shape 39"/>
+          <p:cNvSpPr/>
+          <p:nvPr/>
+        </p:nvSpPr>
+        <p:spPr>
+          <a:xfrm>
+            <a:off x="6408638" y="4169664"/>
+            <a:ext cx="685800" cy="475488"/>
           </a:xfrm>
           <a:prstGeom prst="rect">
             <a:avLst>
-              <a:gd name="adj" fmla="val 9524"/>
+              <a:gd name="adj" fmla="val 7692"/>
             </a:avLst>
           </a:prstGeom>
           <a:solidFill>
@@ -28481,14 +28337,14 @@
       </p:sp>
       <p:sp>
         <p:nvSpPr>
-          <p:cNvPr id="41" name="Text 39"/>
-          <p:cNvSpPr/>
-          <p:nvPr/>
-        </p:nvSpPr>
-        <p:spPr>
-          <a:xfrm>
-            <a:off x="3639312" y="4169664"/>
-            <a:ext cx="685800" cy="384048"/>
+          <p:cNvPr id="42" name="Text 40"/>
+          <p:cNvSpPr/>
+          <p:nvPr/>
+        </p:nvSpPr>
+        <p:spPr>
+          <a:xfrm>
+            <a:off x="6408638" y="4169664"/>
+            <a:ext cx="685800" cy="475488"/>
           </a:xfrm>
           <a:prstGeom prst="rect">
             <a:avLst/>
@@ -28512,7 +28368,7 @@
                 <a:ea typeface="Trebuchet MS" pitchFamily="34" charset="-122"/>
                 <a:cs typeface="Trebuchet MS" pitchFamily="34" charset="-120"/>
               </a:rPr>
-              <a:t>f</a:t>
+              <a:t>m</a:t>
             </a:r>
             <a:endParaRPr lang="en-US" sz="900" dirty="0"/>
           </a:p>
@@ -28520,18 +28376,18 @@
       </p:sp>
       <p:sp>
         <p:nvSpPr>
-          <p:cNvPr id="42" name="Shape 40"/>
-          <p:cNvSpPr/>
-          <p:nvPr/>
-        </p:nvSpPr>
-        <p:spPr>
-          <a:xfrm>
-            <a:off x="4447032" y="4169664"/>
-            <a:ext cx="685800" cy="384048"/>
+          <p:cNvPr id="43" name="Shape 41"/>
+          <p:cNvSpPr/>
+          <p:nvPr/>
+        </p:nvSpPr>
+        <p:spPr>
+          <a:xfrm>
+            <a:off x="7447135" y="4169664"/>
+            <a:ext cx="685800" cy="475488"/>
           </a:xfrm>
           <a:prstGeom prst="rect">
             <a:avLst>
-              <a:gd name="adj" fmla="val 9524"/>
+              <a:gd name="adj" fmla="val 7692"/>
             </a:avLst>
           </a:prstGeom>
           <a:solidFill>
@@ -28547,14 +28403,14 @@
       </p:sp>
       <p:sp>
         <p:nvSpPr>
-          <p:cNvPr id="43" name="Text 41"/>
-          <p:cNvSpPr/>
-          <p:nvPr/>
-        </p:nvSpPr>
-        <p:spPr>
-          <a:xfrm>
-            <a:off x="4447032" y="4169664"/>
-            <a:ext cx="685800" cy="384048"/>
+          <p:cNvPr id="44" name="Text 42"/>
+          <p:cNvSpPr/>
+          <p:nvPr/>
+        </p:nvSpPr>
+        <p:spPr>
+          <a:xfrm>
+            <a:off x="7447135" y="4169664"/>
+            <a:ext cx="685800" cy="475488"/>
           </a:xfrm>
           <a:prstGeom prst="rect">
             <a:avLst/>
@@ -28578,312 +28434,9 @@
                 <a:ea typeface="Trebuchet MS" pitchFamily="34" charset="-122"/>
                 <a:cs typeface="Trebuchet MS" pitchFamily="34" charset="-120"/>
               </a:rPr>
-              <a:t>or</a:t>
+              <a:t>ed</a:t>
             </a:r>
             <a:endParaRPr lang="en-US" sz="900" dirty="0"/>
-          </a:p>
-        </p:txBody>
-      </p:sp>
-      <p:sp>
-        <p:nvSpPr>
-          <p:cNvPr id="44" name="Shape 42"/>
-          <p:cNvSpPr/>
-          <p:nvPr/>
-        </p:nvSpPr>
-        <p:spPr>
-          <a:xfrm>
-            <a:off x="5254752" y="4169664"/>
-            <a:ext cx="685800" cy="384048"/>
-          </a:xfrm>
-          <a:prstGeom prst="rect">
-            <a:avLst>
-              <a:gd name="adj" fmla="val 9524"/>
-            </a:avLst>
-          </a:prstGeom>
-          <a:solidFill>
-            <a:srgbClr val="FFFFFF"/>
-          </a:solidFill>
-          <a:ln w="12700">
-            <a:solidFill>
-              <a:srgbClr val="DB2777"/>
-            </a:solidFill>
-            <a:prstDash val="solid"/>
-          </a:ln>
-        </p:spPr>
-      </p:sp>
-      <p:sp>
-        <p:nvSpPr>
-          <p:cNvPr id="45" name="Text 43"/>
-          <p:cNvSpPr/>
-          <p:nvPr/>
-        </p:nvSpPr>
-        <p:spPr>
-          <a:xfrm>
-            <a:off x="5254752" y="4169664"/>
-            <a:ext cx="685800" cy="384048"/>
-          </a:xfrm>
-          <a:prstGeom prst="rect">
-            <a:avLst/>
-          </a:prstGeom>
-          <a:noFill/>
-          <a:ln/>
-        </p:spPr>
-        <p:txBody>
-          <a:bodyPr wrap="square" lIns="0" tIns="0" rIns="0" bIns="0" rtlCol="0" anchor="ctr"/>
-          <a:lstStyle/>
-          <a:p>
-            <a:pPr algn="ctr" indent="0" marL="0">
-              <a:buNone/>
-            </a:pPr>
-            <a:r>
-              <a:rPr lang="en-US" sz="900" b="1" dirty="0">
-                <a:solidFill>
-                  <a:srgbClr val="9D174D"/>
-                </a:solidFill>
-                <a:latin typeface="Trebuchet MS" pitchFamily="34" charset="0"/>
-                <a:ea typeface="Trebuchet MS" pitchFamily="34" charset="-122"/>
-                <a:cs typeface="Trebuchet MS" pitchFamily="34" charset="-120"/>
-              </a:rPr>
-              <a:t>m</a:t>
-            </a:r>
-            <a:endParaRPr lang="en-US" sz="900" dirty="0"/>
-          </a:p>
-        </p:txBody>
-      </p:sp>
-      <p:sp>
-        <p:nvSpPr>
-          <p:cNvPr id="46" name="Shape 44"/>
-          <p:cNvSpPr/>
-          <p:nvPr/>
-        </p:nvSpPr>
-        <p:spPr>
-          <a:xfrm>
-            <a:off x="6062472" y="4169664"/>
-            <a:ext cx="685800" cy="384048"/>
-          </a:xfrm>
-          <a:prstGeom prst="rect">
-            <a:avLst>
-              <a:gd name="adj" fmla="val 9524"/>
-            </a:avLst>
-          </a:prstGeom>
-          <a:solidFill>
-            <a:srgbClr val="FFFFFF"/>
-          </a:solidFill>
-          <a:ln w="12700">
-            <a:solidFill>
-              <a:srgbClr val="DB2777"/>
-            </a:solidFill>
-            <a:prstDash val="solid"/>
-          </a:ln>
-        </p:spPr>
-      </p:sp>
-      <p:sp>
-        <p:nvSpPr>
-          <p:cNvPr id="47" name="Text 45"/>
-          <p:cNvSpPr/>
-          <p:nvPr/>
-        </p:nvSpPr>
-        <p:spPr>
-          <a:xfrm>
-            <a:off x="6062472" y="4169664"/>
-            <a:ext cx="685800" cy="384048"/>
-          </a:xfrm>
-          <a:prstGeom prst="rect">
-            <a:avLst/>
-          </a:prstGeom>
-          <a:noFill/>
-          <a:ln/>
-        </p:spPr>
-        <p:txBody>
-          <a:bodyPr wrap="square" lIns="0" tIns="0" rIns="0" bIns="0" rtlCol="0" anchor="ctr"/>
-          <a:lstStyle/>
-          <a:p>
-            <a:pPr algn="ctr" indent="0" marL="0">
-              <a:buNone/>
-            </a:pPr>
-            <a:r>
-              <a:rPr lang="en-US" sz="900" b="1" dirty="0">
-                <a:solidFill>
-                  <a:srgbClr val="9D174D"/>
-                </a:solidFill>
-                <a:latin typeface="Trebuchet MS" pitchFamily="34" charset="0"/>
-                <a:ea typeface="Trebuchet MS" pitchFamily="34" charset="-122"/>
-                <a:cs typeface="Trebuchet MS" pitchFamily="34" charset="-120"/>
-              </a:rPr>
-              <a:t>a</a:t>
-            </a:r>
-            <a:endParaRPr lang="en-US" sz="900" dirty="0"/>
-          </a:p>
-        </p:txBody>
-      </p:sp>
-      <p:sp>
-        <p:nvSpPr>
-          <p:cNvPr id="48" name="Shape 46"/>
-          <p:cNvSpPr/>
-          <p:nvPr/>
-        </p:nvSpPr>
-        <p:spPr>
-          <a:xfrm>
-            <a:off x="6870192" y="4169664"/>
-            <a:ext cx="685800" cy="384048"/>
-          </a:xfrm>
-          <a:prstGeom prst="rect">
-            <a:avLst>
-              <a:gd name="adj" fmla="val 9524"/>
-            </a:avLst>
-          </a:prstGeom>
-          <a:solidFill>
-            <a:srgbClr val="FFFFFF"/>
-          </a:solidFill>
-          <a:ln w="12700">
-            <a:solidFill>
-              <a:srgbClr val="DB2777"/>
-            </a:solidFill>
-            <a:prstDash val="solid"/>
-          </a:ln>
-        </p:spPr>
-      </p:sp>
-      <p:sp>
-        <p:nvSpPr>
-          <p:cNvPr id="49" name="Text 47"/>
-          <p:cNvSpPr/>
-          <p:nvPr/>
-        </p:nvSpPr>
-        <p:spPr>
-          <a:xfrm>
-            <a:off x="6870192" y="4169664"/>
-            <a:ext cx="685800" cy="384048"/>
-          </a:xfrm>
-          <a:prstGeom prst="rect">
-            <a:avLst/>
-          </a:prstGeom>
-          <a:noFill/>
-          <a:ln/>
-        </p:spPr>
-        <p:txBody>
-          <a:bodyPr wrap="square" lIns="0" tIns="0" rIns="0" bIns="0" rtlCol="0" anchor="ctr"/>
-          <a:lstStyle/>
-          <a:p>
-            <a:pPr algn="ctr" indent="0" marL="0">
-              <a:buNone/>
-            </a:pPr>
-            <a:r>
-              <a:rPr lang="en-US" sz="900" b="1" dirty="0">
-                <a:solidFill>
-                  <a:srgbClr val="9D174D"/>
-                </a:solidFill>
-                <a:latin typeface="Trebuchet MS" pitchFamily="34" charset="0"/>
-                <a:ea typeface="Trebuchet MS" pitchFamily="34" charset="-122"/>
-                <a:cs typeface="Trebuchet MS" pitchFamily="34" charset="-120"/>
-              </a:rPr>
-              <a:t>n</a:t>
-            </a:r>
-            <a:endParaRPr lang="en-US" sz="900" dirty="0"/>
-          </a:p>
-        </p:txBody>
-      </p:sp>
-      <p:sp>
-        <p:nvSpPr>
-          <p:cNvPr id="50" name="Shape 48"/>
-          <p:cNvSpPr/>
-          <p:nvPr/>
-        </p:nvSpPr>
-        <p:spPr>
-          <a:xfrm>
-            <a:off x="7677912" y="4169664"/>
-            <a:ext cx="685800" cy="384048"/>
-          </a:xfrm>
-          <a:prstGeom prst="rect">
-            <a:avLst>
-              <a:gd name="adj" fmla="val 9524"/>
-            </a:avLst>
-          </a:prstGeom>
-          <a:solidFill>
-            <a:srgbClr val="FFFFFF"/>
-          </a:solidFill>
-          <a:ln w="12700">
-            <a:solidFill>
-              <a:srgbClr val="DB2777"/>
-            </a:solidFill>
-            <a:prstDash val="solid"/>
-          </a:ln>
-        </p:spPr>
-      </p:sp>
-      <p:sp>
-        <p:nvSpPr>
-          <p:cNvPr id="51" name="Text 49"/>
-          <p:cNvSpPr/>
-          <p:nvPr/>
-        </p:nvSpPr>
-        <p:spPr>
-          <a:xfrm>
-            <a:off x="7677912" y="4169664"/>
-            <a:ext cx="685800" cy="384048"/>
-          </a:xfrm>
-          <a:prstGeom prst="rect">
-            <a:avLst/>
-          </a:prstGeom>
-          <a:noFill/>
-          <a:ln/>
-        </p:spPr>
-        <p:txBody>
-          <a:bodyPr wrap="square" lIns="0" tIns="0" rIns="0" bIns="0" rtlCol="0" anchor="ctr"/>
-          <a:lstStyle/>
-          <a:p>
-            <a:pPr algn="ctr" indent="0" marL="0">
-              <a:buNone/>
-            </a:pPr>
-            <a:r>
-              <a:rPr lang="en-US" sz="900" b="1" dirty="0">
-                <a:solidFill>
-                  <a:srgbClr val="9D174D"/>
-                </a:solidFill>
-                <a:latin typeface="Trebuchet MS" pitchFamily="34" charset="0"/>
-                <a:ea typeface="Trebuchet MS" pitchFamily="34" charset="-122"/>
-                <a:cs typeface="Trebuchet MS" pitchFamily="34" charset="-120"/>
-              </a:rPr>
-              <a:t>ce</a:t>
-            </a:r>
-            <a:endParaRPr lang="en-US" sz="900" dirty="0"/>
-          </a:p>
-        </p:txBody>
-      </p:sp>
-      <p:sp>
-        <p:nvSpPr>
-          <p:cNvPr id="52" name="Text 50"/>
-          <p:cNvSpPr/>
-          <p:nvPr/>
-        </p:nvSpPr>
-        <p:spPr>
-          <a:xfrm>
-            <a:off x="7677912" y="4572000"/>
-            <a:ext cx="685800" cy="219456"/>
-          </a:xfrm>
-          <a:prstGeom prst="rect">
-            <a:avLst/>
-          </a:prstGeom>
-          <a:noFill/>
-          <a:ln/>
-        </p:spPr>
-        <p:txBody>
-          <a:bodyPr wrap="square" lIns="0" tIns="0" rIns="0" bIns="0" rtlCol="0" anchor="t"/>
-          <a:lstStyle/>
-          <a:p>
-            <a:pPr algn="ctr" indent="0" marL="0">
-              <a:buNone/>
-            </a:pPr>
-            <a:r>
-              <a:rPr lang="en-US" sz="750" i="1" dirty="0">
-                <a:solidFill>
-                  <a:srgbClr val="94A3B8"/>
-                </a:solidFill>
-                <a:latin typeface="Calibri" pitchFamily="34" charset="0"/>
-                <a:ea typeface="Calibri" pitchFamily="34" charset="-122"/>
-                <a:cs typeface="Calibri" pitchFamily="34" charset="-120"/>
-              </a:rPr>
-              <a:t>/s/</a:t>
-            </a:r>
-            <a:endParaRPr lang="en-US" sz="750" dirty="0"/>
           </a:p>
         </p:txBody>
       </p:sp>
@@ -29173,7 +28726,7 @@
                 <a:ea typeface="Calibri" pitchFamily="34" charset="-122"/>
                 <a:cs typeface="Calibri" pitchFamily="34" charset="-120"/>
               </a:rPr>
-              <a:t>Word Labs  •  wordlabs.app  •  Root: 'perform' = carry out, do, present</a:t>
+              <a:t>Word Labs  •  wordlabs.app  •  Root: 'perform' = carry out, do, or show</a:t>
             </a:r>
             <a:endParaRPr lang="en-US" sz="800" dirty="0"/>
           </a:p>
@@ -29312,7 +28865,7 @@
                 <a:ea typeface="Trebuchet MS" pitchFamily="34" charset="-122"/>
                 <a:cs typeface="Trebuchet MS" pitchFamily="34" charset="-120"/>
               </a:rPr>
-              <a:t>performer</a:t>
+              <a:t>underperforming</a:t>
             </a:r>
             <a:endParaRPr lang="en-US" sz="2800" dirty="0"/>
           </a:p>
@@ -30000,7 +29553,7 @@
                 <a:ea typeface="Calibri" pitchFamily="34" charset="-122"/>
                 <a:cs typeface="Calibri" pitchFamily="34" charset="-120"/>
               </a:rPr>
-              <a:t>Word Labs  •  wordlabs.app  •  Root: 'perform' = carry out, do, present</a:t>
+              <a:t>Word Labs  •  wordlabs.app  •  Root: 'perform' = carry out, do, or show</a:t>
             </a:r>
             <a:endParaRPr lang="en-US" sz="800" dirty="0"/>
           </a:p>
@@ -30139,7 +29692,7 @@
                 <a:ea typeface="Trebuchet MS" pitchFamily="34" charset="-122"/>
                 <a:cs typeface="Trebuchet MS" pitchFamily="34" charset="-120"/>
               </a:rPr>
-              <a:t>performer</a:t>
+              <a:t>underperforming</a:t>
             </a:r>
             <a:endParaRPr lang="en-US" sz="2800" dirty="0"/>
           </a:p>
@@ -30219,7 +29772,7 @@
         </p:nvSpPr>
         <p:spPr>
           <a:xfrm>
-            <a:off x="2938272" y="2258568"/>
+            <a:off x="2221992" y="2258568"/>
             <a:ext cx="1828800" cy="292608"/>
           </a:xfrm>
           <a:prstGeom prst="rect">
@@ -30228,11 +29781,11 @@
             </a:avLst>
           </a:prstGeom>
           <a:solidFill>
-            <a:srgbClr val="CCFBF1"/>
+            <a:srgbClr val="DDD6FE"/>
           </a:solidFill>
           <a:ln w="19050">
             <a:solidFill>
-              <a:srgbClr val="0D9488"/>
+              <a:srgbClr val="7C3AED"/>
             </a:solidFill>
             <a:prstDash val="solid"/>
           </a:ln>
@@ -30253,7 +29806,7 @@
         </p:nvSpPr>
         <p:spPr>
           <a:xfrm>
-            <a:off x="2938272" y="2258568"/>
+            <a:off x="2221992" y="2258568"/>
             <a:ext cx="1828800" cy="292608"/>
           </a:xfrm>
           <a:prstGeom prst="rect">
@@ -30272,13 +29825,13 @@
             <a:r>
               <a:rPr lang="en-US" sz="1300" b="1" dirty="0">
                 <a:solidFill>
-                  <a:srgbClr val="0F766E"/>
+                  <a:srgbClr val="4C1D95"/>
                 </a:solidFill>
                 <a:latin typeface="Trebuchet MS" pitchFamily="34" charset="0"/>
                 <a:ea typeface="Trebuchet MS" pitchFamily="34" charset="-122"/>
                 <a:cs typeface="Trebuchet MS" pitchFamily="34" charset="-120"/>
               </a:rPr>
-              <a:t>perform</a:t>
+              <a:t>under</a:t>
             </a:r>
             <a:endParaRPr lang="en-US" sz="1300" dirty="0"/>
           </a:p>
@@ -30292,7 +29845,7 @@
         </p:nvSpPr>
         <p:spPr>
           <a:xfrm>
-            <a:off x="2938272" y="2569464"/>
+            <a:off x="2221992" y="2569464"/>
             <a:ext cx="1828800" cy="201168"/>
           </a:xfrm>
           <a:prstGeom prst="rect">
@@ -30317,7 +29870,7 @@
                 <a:ea typeface="Calibri" pitchFamily="34" charset="-122"/>
                 <a:cs typeface="Calibri" pitchFamily="34" charset="-120"/>
               </a:rPr>
-              <a:t>carry out, present</a:t>
+              <a:t>below or less than expected</a:t>
             </a:r>
             <a:endParaRPr lang="en-US" sz="850" dirty="0"/>
           </a:p>
@@ -30331,7 +29884,7 @@
         </p:nvSpPr>
         <p:spPr>
           <a:xfrm>
-            <a:off x="5803392" y="2258568"/>
+            <a:off x="4370832" y="2258568"/>
             <a:ext cx="1828800" cy="292608"/>
           </a:xfrm>
           <a:prstGeom prst="rect">
@@ -30340,11 +29893,11 @@
             </a:avLst>
           </a:prstGeom>
           <a:solidFill>
-            <a:srgbClr val="FCE7F3"/>
+            <a:srgbClr val="CCFBF1"/>
           </a:solidFill>
           <a:ln w="19050">
             <a:solidFill>
-              <a:srgbClr val="DB2777"/>
+              <a:srgbClr val="0D9488"/>
             </a:solidFill>
             <a:prstDash val="solid"/>
           </a:ln>
@@ -30365,7 +29918,7 @@
         </p:nvSpPr>
         <p:spPr>
           <a:xfrm>
-            <a:off x="5803392" y="2258568"/>
+            <a:off x="4370832" y="2258568"/>
             <a:ext cx="1828800" cy="292608"/>
           </a:xfrm>
           <a:prstGeom prst="rect">
@@ -30384,13 +29937,13 @@
             <a:r>
               <a:rPr lang="en-US" sz="1300" b="1" dirty="0">
                 <a:solidFill>
-                  <a:srgbClr val="9D174D"/>
+                  <a:srgbClr val="0F766E"/>
                 </a:solidFill>
                 <a:latin typeface="Trebuchet MS" pitchFamily="34" charset="0"/>
                 <a:ea typeface="Trebuchet MS" pitchFamily="34" charset="-122"/>
                 <a:cs typeface="Trebuchet MS" pitchFamily="34" charset="-120"/>
               </a:rPr>
-              <a:t>er</a:t>
+              <a:t>perform</a:t>
             </a:r>
             <a:endParaRPr lang="en-US" sz="1300" dirty="0"/>
           </a:p>
@@ -30404,7 +29957,7 @@
         </p:nvSpPr>
         <p:spPr>
           <a:xfrm>
-            <a:off x="5803392" y="2569464"/>
+            <a:off x="4370832" y="2569464"/>
             <a:ext cx="1828800" cy="201168"/>
           </a:xfrm>
           <a:prstGeom prst="rect">
@@ -30429,7 +29982,7 @@
                 <a:ea typeface="Calibri" pitchFamily="34" charset="-122"/>
                 <a:cs typeface="Calibri" pitchFamily="34" charset="-120"/>
               </a:rPr>
-              <a:t>one who does something</a:t>
+              <a:t>carry out or show</a:t>
             </a:r>
             <a:endParaRPr lang="en-US" sz="850" dirty="0"/>
           </a:p>
@@ -30438,6 +29991,118 @@
       <p:sp>
         <p:nvSpPr>
           <p:cNvPr id="22" name="Shape 20"/>
+          <p:cNvSpPr/>
+          <p:nvPr/>
+        </p:nvSpPr>
+        <p:spPr>
+          <a:xfrm>
+            <a:off x="6519672" y="2258568"/>
+            <a:ext cx="1828800" cy="292608"/>
+          </a:xfrm>
+          <a:prstGeom prst="rect">
+            <a:avLst>
+              <a:gd name="adj" fmla="val 25000"/>
+            </a:avLst>
+          </a:prstGeom>
+          <a:solidFill>
+            <a:srgbClr val="FCE7F3"/>
+          </a:solidFill>
+          <a:ln w="19050">
+            <a:solidFill>
+              <a:srgbClr val="DB2777"/>
+            </a:solidFill>
+            <a:prstDash val="solid"/>
+          </a:ln>
+          <a:effectLst>
+            <a:outerShdw sx="100000" sy="100000" kx="0" ky="0" algn="bl" rotWithShape="0" blurRad="101600" dist="38100" dir="8100000">
+              <a:srgbClr val="000000">
+                <a:alpha val="12000"/>
+              </a:srgbClr>
+            </a:outerShdw>
+          </a:effectLst>
+        </p:spPr>
+      </p:sp>
+      <p:sp>
+        <p:nvSpPr>
+          <p:cNvPr id="23" name="Text 21"/>
+          <p:cNvSpPr/>
+          <p:nvPr/>
+        </p:nvSpPr>
+        <p:spPr>
+          <a:xfrm>
+            <a:off x="6519672" y="2258568"/>
+            <a:ext cx="1828800" cy="292608"/>
+          </a:xfrm>
+          <a:prstGeom prst="rect">
+            <a:avLst/>
+          </a:prstGeom>
+          <a:noFill/>
+          <a:ln/>
+        </p:spPr>
+        <p:txBody>
+          <a:bodyPr wrap="square" lIns="0" tIns="0" rIns="0" bIns="0" rtlCol="0" anchor="ctr"/>
+          <a:lstStyle/>
+          <a:p>
+            <a:pPr algn="ctr" indent="0" marL="0">
+              <a:buNone/>
+            </a:pPr>
+            <a:r>
+              <a:rPr lang="en-US" sz="1300" b="1" dirty="0">
+                <a:solidFill>
+                  <a:srgbClr val="9D174D"/>
+                </a:solidFill>
+                <a:latin typeface="Trebuchet MS" pitchFamily="34" charset="0"/>
+                <a:ea typeface="Trebuchet MS" pitchFamily="34" charset="-122"/>
+                <a:cs typeface="Trebuchet MS" pitchFamily="34" charset="-120"/>
+              </a:rPr>
+              <a:t>ing</a:t>
+            </a:r>
+            <a:endParaRPr lang="en-US" sz="1300" dirty="0"/>
+          </a:p>
+        </p:txBody>
+      </p:sp>
+      <p:sp>
+        <p:nvSpPr>
+          <p:cNvPr id="24" name="Text 22"/>
+          <p:cNvSpPr/>
+          <p:nvPr/>
+        </p:nvSpPr>
+        <p:spPr>
+          <a:xfrm>
+            <a:off x="6519672" y="2569464"/>
+            <a:ext cx="1828800" cy="201168"/>
+          </a:xfrm>
+          <a:prstGeom prst="rect">
+            <a:avLst/>
+          </a:prstGeom>
+          <a:noFill/>
+          <a:ln/>
+        </p:spPr>
+        <p:txBody>
+          <a:bodyPr wrap="square" lIns="0" tIns="0" rIns="0" bIns="0" rtlCol="0" anchor="t"/>
+          <a:lstStyle/>
+          <a:p>
+            <a:pPr algn="ctr" indent="0" marL="0">
+              <a:buNone/>
+            </a:pPr>
+            <a:r>
+              <a:rPr lang="en-US" sz="850" dirty="0">
+                <a:solidFill>
+                  <a:srgbClr val="475569"/>
+                </a:solidFill>
+                <a:latin typeface="Calibri" pitchFamily="34" charset="0"/>
+                <a:ea typeface="Calibri" pitchFamily="34" charset="-122"/>
+                <a:cs typeface="Calibri" pitchFamily="34" charset="-120"/>
+              </a:rPr>
+              <a:t>in the process of</a:t>
+            </a:r>
+            <a:endParaRPr lang="en-US" sz="850" dirty="0"/>
+          </a:p>
+        </p:txBody>
+      </p:sp>
+      <p:sp>
+        <p:nvSpPr>
+          <p:cNvPr id="25" name="Shape 23"/>
           <p:cNvSpPr/>
           <p:nvPr/>
         </p:nvSpPr>
@@ -30464,7 +30129,7 @@
       </p:sp>
       <p:sp>
         <p:nvSpPr>
-          <p:cNvPr id="23" name="Text 21"/>
+          <p:cNvPr id="26" name="Text 24"/>
           <p:cNvSpPr/>
           <p:nvPr/>
         </p:nvSpPr>
@@ -30503,7 +30168,7 @@
       </p:sp>
       <p:sp>
         <p:nvSpPr>
-          <p:cNvPr id="24" name="Shape 22"/>
+          <p:cNvPr id="27" name="Shape 25"/>
           <p:cNvSpPr/>
           <p:nvPr/>
         </p:nvSpPr>
@@ -30530,7 +30195,7 @@
       </p:sp>
       <p:sp>
         <p:nvSpPr>
-          <p:cNvPr id="25" name="Text 23"/>
+          <p:cNvPr id="28" name="Text 26"/>
           <p:cNvSpPr/>
           <p:nvPr/>
         </p:nvSpPr>
@@ -30569,7 +30234,7 @@
       </p:sp>
       <p:sp>
         <p:nvSpPr>
-          <p:cNvPr id="26" name="Shape 24"/>
+          <p:cNvPr id="29" name="Shape 27"/>
           <p:cNvSpPr/>
           <p:nvPr/>
         </p:nvSpPr>
@@ -30596,7 +30261,7 @@
       </p:sp>
       <p:sp>
         <p:nvSpPr>
-          <p:cNvPr id="27" name="Text 25"/>
+          <p:cNvPr id="30" name="Text 28"/>
           <p:cNvSpPr/>
           <p:nvPr/>
         </p:nvSpPr>
@@ -30635,7 +30300,7 @@
       </p:sp>
       <p:sp>
         <p:nvSpPr>
-          <p:cNvPr id="28" name="Shape 26"/>
+          <p:cNvPr id="31" name="Shape 29"/>
           <p:cNvSpPr/>
           <p:nvPr/>
         </p:nvSpPr>
@@ -30662,7 +30327,7 @@
       </p:sp>
       <p:sp>
         <p:nvSpPr>
-          <p:cNvPr id="29" name="Text 27"/>
+          <p:cNvPr id="32" name="Text 30"/>
           <p:cNvSpPr/>
           <p:nvPr/>
         </p:nvSpPr>
@@ -30985,7 +30650,7 @@
                 <a:ea typeface="Calibri" pitchFamily="34" charset="-122"/>
                 <a:cs typeface="Calibri" pitchFamily="34" charset="-120"/>
               </a:rPr>
-              <a:t>Word Labs  •  wordlabs.app  •  Root: 'perform' = carry out, do, present</a:t>
+              <a:t>Word Labs  •  wordlabs.app  •  Root: 'perform' = carry out, do, or show</a:t>
             </a:r>
             <a:endParaRPr lang="en-US" sz="800" dirty="0"/>
           </a:p>
@@ -31124,7 +30789,7 @@
                 <a:ea typeface="Trebuchet MS" pitchFamily="34" charset="-122"/>
                 <a:cs typeface="Trebuchet MS" pitchFamily="34" charset="-120"/>
               </a:rPr>
-              <a:t>performer</a:t>
+              <a:t>underperforming</a:t>
             </a:r>
             <a:endParaRPr lang="en-US" sz="2800" dirty="0"/>
           </a:p>
@@ -31204,7 +30869,7 @@
         </p:nvSpPr>
         <p:spPr>
           <a:xfrm>
-            <a:off x="2938272" y="2258568"/>
+            <a:off x="2221992" y="2258568"/>
             <a:ext cx="1828800" cy="292608"/>
           </a:xfrm>
           <a:prstGeom prst="rect">
@@ -31213,11 +30878,11 @@
             </a:avLst>
           </a:prstGeom>
           <a:solidFill>
-            <a:srgbClr val="CCFBF1"/>
+            <a:srgbClr val="DDD6FE"/>
           </a:solidFill>
           <a:ln w="19050">
             <a:solidFill>
-              <a:srgbClr val="0D9488"/>
+              <a:srgbClr val="7C3AED"/>
             </a:solidFill>
             <a:prstDash val="solid"/>
           </a:ln>
@@ -31238,7 +30903,7 @@
         </p:nvSpPr>
         <p:spPr>
           <a:xfrm>
-            <a:off x="2938272" y="2258568"/>
+            <a:off x="2221992" y="2258568"/>
             <a:ext cx="1828800" cy="292608"/>
           </a:xfrm>
           <a:prstGeom prst="rect">
@@ -31257,13 +30922,13 @@
             <a:r>
               <a:rPr lang="en-US" sz="1300" b="1" dirty="0">
                 <a:solidFill>
-                  <a:srgbClr val="0F766E"/>
+                  <a:srgbClr val="4C1D95"/>
                 </a:solidFill>
                 <a:latin typeface="Trebuchet MS" pitchFamily="34" charset="0"/>
                 <a:ea typeface="Trebuchet MS" pitchFamily="34" charset="-122"/>
                 <a:cs typeface="Trebuchet MS" pitchFamily="34" charset="-120"/>
               </a:rPr>
-              <a:t>perform</a:t>
+              <a:t>under</a:t>
             </a:r>
             <a:endParaRPr lang="en-US" sz="1300" dirty="0"/>
           </a:p>
@@ -31277,7 +30942,7 @@
         </p:nvSpPr>
         <p:spPr>
           <a:xfrm>
-            <a:off x="2938272" y="2569464"/>
+            <a:off x="2221992" y="2569464"/>
             <a:ext cx="1828800" cy="201168"/>
           </a:xfrm>
           <a:prstGeom prst="rect">
@@ -31302,7 +30967,7 @@
                 <a:ea typeface="Calibri" pitchFamily="34" charset="-122"/>
                 <a:cs typeface="Calibri" pitchFamily="34" charset="-120"/>
               </a:rPr>
-              <a:t>carry out, present</a:t>
+              <a:t>below or less than expected</a:t>
             </a:r>
             <a:endParaRPr lang="en-US" sz="850" dirty="0"/>
           </a:p>
@@ -31316,7 +30981,7 @@
         </p:nvSpPr>
         <p:spPr>
           <a:xfrm>
-            <a:off x="5803392" y="2258568"/>
+            <a:off x="4370832" y="2258568"/>
             <a:ext cx="1828800" cy="292608"/>
           </a:xfrm>
           <a:prstGeom prst="rect">
@@ -31325,11 +30990,11 @@
             </a:avLst>
           </a:prstGeom>
           <a:solidFill>
-            <a:srgbClr val="FCE7F3"/>
+            <a:srgbClr val="CCFBF1"/>
           </a:solidFill>
           <a:ln w="19050">
             <a:solidFill>
-              <a:srgbClr val="DB2777"/>
+              <a:srgbClr val="0D9488"/>
             </a:solidFill>
             <a:prstDash val="solid"/>
           </a:ln>
@@ -31350,7 +31015,7 @@
         </p:nvSpPr>
         <p:spPr>
           <a:xfrm>
-            <a:off x="5803392" y="2258568"/>
+            <a:off x="4370832" y="2258568"/>
             <a:ext cx="1828800" cy="292608"/>
           </a:xfrm>
           <a:prstGeom prst="rect">
@@ -31369,13 +31034,13 @@
             <a:r>
               <a:rPr lang="en-US" sz="1300" b="1" dirty="0">
                 <a:solidFill>
-                  <a:srgbClr val="9D174D"/>
+                  <a:srgbClr val="0F766E"/>
                 </a:solidFill>
                 <a:latin typeface="Trebuchet MS" pitchFamily="34" charset="0"/>
                 <a:ea typeface="Trebuchet MS" pitchFamily="34" charset="-122"/>
                 <a:cs typeface="Trebuchet MS" pitchFamily="34" charset="-120"/>
               </a:rPr>
-              <a:t>er</a:t>
+              <a:t>perform</a:t>
             </a:r>
             <a:endParaRPr lang="en-US" sz="1300" dirty="0"/>
           </a:p>
@@ -31389,7 +31054,7 @@
         </p:nvSpPr>
         <p:spPr>
           <a:xfrm>
-            <a:off x="5803392" y="2569464"/>
+            <a:off x="4370832" y="2569464"/>
             <a:ext cx="1828800" cy="201168"/>
           </a:xfrm>
           <a:prstGeom prst="rect">
@@ -31414,7 +31079,7 @@
                 <a:ea typeface="Calibri" pitchFamily="34" charset="-122"/>
                 <a:cs typeface="Calibri" pitchFamily="34" charset="-120"/>
               </a:rPr>
-              <a:t>one who does something</a:t>
+              <a:t>carry out or show</a:t>
             </a:r>
             <a:endParaRPr lang="en-US" sz="850" dirty="0"/>
           </a:p>
@@ -31423,6 +31088,118 @@
       <p:sp>
         <p:nvSpPr>
           <p:cNvPr id="22" name="Shape 20"/>
+          <p:cNvSpPr/>
+          <p:nvPr/>
+        </p:nvSpPr>
+        <p:spPr>
+          <a:xfrm>
+            <a:off x="6519672" y="2258568"/>
+            <a:ext cx="1828800" cy="292608"/>
+          </a:xfrm>
+          <a:prstGeom prst="rect">
+            <a:avLst>
+              <a:gd name="adj" fmla="val 25000"/>
+            </a:avLst>
+          </a:prstGeom>
+          <a:solidFill>
+            <a:srgbClr val="FCE7F3"/>
+          </a:solidFill>
+          <a:ln w="19050">
+            <a:solidFill>
+              <a:srgbClr val="DB2777"/>
+            </a:solidFill>
+            <a:prstDash val="solid"/>
+          </a:ln>
+          <a:effectLst>
+            <a:outerShdw sx="100000" sy="100000" kx="0" ky="0" algn="bl" rotWithShape="0" blurRad="101600" dist="38100" dir="8100000">
+              <a:srgbClr val="000000">
+                <a:alpha val="12000"/>
+              </a:srgbClr>
+            </a:outerShdw>
+          </a:effectLst>
+        </p:spPr>
+      </p:sp>
+      <p:sp>
+        <p:nvSpPr>
+          <p:cNvPr id="23" name="Text 21"/>
+          <p:cNvSpPr/>
+          <p:nvPr/>
+        </p:nvSpPr>
+        <p:spPr>
+          <a:xfrm>
+            <a:off x="6519672" y="2258568"/>
+            <a:ext cx="1828800" cy="292608"/>
+          </a:xfrm>
+          <a:prstGeom prst="rect">
+            <a:avLst/>
+          </a:prstGeom>
+          <a:noFill/>
+          <a:ln/>
+        </p:spPr>
+        <p:txBody>
+          <a:bodyPr wrap="square" lIns="0" tIns="0" rIns="0" bIns="0" rtlCol="0" anchor="ctr"/>
+          <a:lstStyle/>
+          <a:p>
+            <a:pPr algn="ctr" indent="0" marL="0">
+              <a:buNone/>
+            </a:pPr>
+            <a:r>
+              <a:rPr lang="en-US" sz="1300" b="1" dirty="0">
+                <a:solidFill>
+                  <a:srgbClr val="9D174D"/>
+                </a:solidFill>
+                <a:latin typeface="Trebuchet MS" pitchFamily="34" charset="0"/>
+                <a:ea typeface="Trebuchet MS" pitchFamily="34" charset="-122"/>
+                <a:cs typeface="Trebuchet MS" pitchFamily="34" charset="-120"/>
+              </a:rPr>
+              <a:t>ing</a:t>
+            </a:r>
+            <a:endParaRPr lang="en-US" sz="1300" dirty="0"/>
+          </a:p>
+        </p:txBody>
+      </p:sp>
+      <p:sp>
+        <p:nvSpPr>
+          <p:cNvPr id="24" name="Text 22"/>
+          <p:cNvSpPr/>
+          <p:nvPr/>
+        </p:nvSpPr>
+        <p:spPr>
+          <a:xfrm>
+            <a:off x="6519672" y="2569464"/>
+            <a:ext cx="1828800" cy="201168"/>
+          </a:xfrm>
+          <a:prstGeom prst="rect">
+            <a:avLst/>
+          </a:prstGeom>
+          <a:noFill/>
+          <a:ln/>
+        </p:spPr>
+        <p:txBody>
+          <a:bodyPr wrap="square" lIns="0" tIns="0" rIns="0" bIns="0" rtlCol="0" anchor="t"/>
+          <a:lstStyle/>
+          <a:p>
+            <a:pPr algn="ctr" indent="0" marL="0">
+              <a:buNone/>
+            </a:pPr>
+            <a:r>
+              <a:rPr lang="en-US" sz="850" dirty="0">
+                <a:solidFill>
+                  <a:srgbClr val="475569"/>
+                </a:solidFill>
+                <a:latin typeface="Calibri" pitchFamily="34" charset="0"/>
+                <a:ea typeface="Calibri" pitchFamily="34" charset="-122"/>
+                <a:cs typeface="Calibri" pitchFamily="34" charset="-120"/>
+              </a:rPr>
+              <a:t>in the process of</a:t>
+            </a:r>
+            <a:endParaRPr lang="en-US" sz="850" dirty="0"/>
+          </a:p>
+        </p:txBody>
+      </p:sp>
+      <p:sp>
+        <p:nvSpPr>
+          <p:cNvPr id="25" name="Shape 23"/>
           <p:cNvSpPr/>
           <p:nvPr/>
         </p:nvSpPr>
@@ -31449,7 +31226,7 @@
       </p:sp>
       <p:sp>
         <p:nvSpPr>
-          <p:cNvPr id="23" name="Text 21"/>
+          <p:cNvPr id="26" name="Text 24"/>
           <p:cNvSpPr/>
           <p:nvPr/>
         </p:nvSpPr>
@@ -31488,7 +31265,7 @@
       </p:sp>
       <p:sp>
         <p:nvSpPr>
-          <p:cNvPr id="24" name="Shape 22"/>
+          <p:cNvPr id="27" name="Shape 25"/>
           <p:cNvSpPr/>
           <p:nvPr/>
         </p:nvSpPr>
@@ -31515,14 +31292,14 @@
       </p:sp>
       <p:sp>
         <p:nvSpPr>
-          <p:cNvPr id="25" name="Shape 23"/>
-          <p:cNvSpPr/>
-          <p:nvPr/>
-        </p:nvSpPr>
-        <p:spPr>
-          <a:xfrm>
-            <a:off x="2313432" y="3364992"/>
-            <a:ext cx="1645920" cy="475488"/>
+          <p:cNvPr id="28" name="Shape 26"/>
+          <p:cNvSpPr/>
+          <p:nvPr/>
+        </p:nvSpPr>
+        <p:spPr>
+          <a:xfrm>
+            <a:off x="1978152" y="3364992"/>
+            <a:ext cx="1225296" cy="475488"/>
           </a:xfrm>
           <a:prstGeom prst="rect">
             <a:avLst>
@@ -31542,14 +31319,14 @@
       </p:sp>
       <p:sp>
         <p:nvSpPr>
-          <p:cNvPr id="26" name="Text 24"/>
-          <p:cNvSpPr/>
-          <p:nvPr/>
-        </p:nvSpPr>
-        <p:spPr>
-          <a:xfrm>
-            <a:off x="2313432" y="3364992"/>
-            <a:ext cx="1645920" cy="475488"/>
+          <p:cNvPr id="29" name="Text 27"/>
+          <p:cNvSpPr/>
+          <p:nvPr/>
+        </p:nvSpPr>
+        <p:spPr>
+          <a:xfrm>
+            <a:off x="1978152" y="3364992"/>
+            <a:ext cx="1225296" cy="475488"/>
           </a:xfrm>
           <a:prstGeom prst="rect">
             <a:avLst/>
@@ -31573,7 +31350,7 @@
                 <a:ea typeface="Trebuchet MS" pitchFamily="34" charset="-122"/>
                 <a:cs typeface="Trebuchet MS" pitchFamily="34" charset="-120"/>
               </a:rPr>
-              <a:t>per</a:t>
+              <a:t>un</a:t>
             </a:r>
             <a:endParaRPr lang="en-US" sz="1400" dirty="0"/>
           </a:p>
@@ -31581,14 +31358,14 @@
       </p:sp>
       <p:sp>
         <p:nvSpPr>
-          <p:cNvPr id="27" name="Text 25"/>
-          <p:cNvSpPr/>
-          <p:nvPr/>
-        </p:nvSpPr>
-        <p:spPr>
-          <a:xfrm>
-            <a:off x="3959352" y="3364992"/>
-            <a:ext cx="411480" cy="475488"/>
+          <p:cNvPr id="30" name="Text 28"/>
+          <p:cNvSpPr/>
+          <p:nvPr/>
+        </p:nvSpPr>
+        <p:spPr>
+          <a:xfrm>
+            <a:off x="3203448" y="3364992"/>
+            <a:ext cx="76200" cy="475488"/>
           </a:xfrm>
           <a:prstGeom prst="rect">
             <a:avLst/>
@@ -31620,14 +31397,14 @@
       </p:sp>
       <p:sp>
         <p:nvSpPr>
-          <p:cNvPr id="28" name="Shape 26"/>
-          <p:cNvSpPr/>
-          <p:nvPr/>
-        </p:nvSpPr>
-        <p:spPr>
-          <a:xfrm>
-            <a:off x="4370832" y="3364992"/>
-            <a:ext cx="1645920" cy="475488"/>
+          <p:cNvPr id="31" name="Shape 29"/>
+          <p:cNvSpPr/>
+          <p:nvPr/>
+        </p:nvSpPr>
+        <p:spPr>
+          <a:xfrm>
+            <a:off x="3279648" y="3364992"/>
+            <a:ext cx="1225296" cy="475488"/>
           </a:xfrm>
           <a:prstGeom prst="rect">
             <a:avLst>
@@ -31647,14 +31424,14 @@
       </p:sp>
       <p:sp>
         <p:nvSpPr>
-          <p:cNvPr id="29" name="Text 27"/>
-          <p:cNvSpPr/>
-          <p:nvPr/>
-        </p:nvSpPr>
-        <p:spPr>
-          <a:xfrm>
-            <a:off x="4370832" y="3364992"/>
-            <a:ext cx="1645920" cy="475488"/>
+          <p:cNvPr id="32" name="Text 30"/>
+          <p:cNvSpPr/>
+          <p:nvPr/>
+        </p:nvSpPr>
+        <p:spPr>
+          <a:xfrm>
+            <a:off x="3279648" y="3364992"/>
+            <a:ext cx="1225296" cy="475488"/>
           </a:xfrm>
           <a:prstGeom prst="rect">
             <a:avLst/>
@@ -31678,7 +31455,7 @@
                 <a:ea typeface="Trebuchet MS" pitchFamily="34" charset="-122"/>
                 <a:cs typeface="Trebuchet MS" pitchFamily="34" charset="-120"/>
               </a:rPr>
-              <a:t>form</a:t>
+              <a:t>der</a:t>
             </a:r>
             <a:endParaRPr lang="en-US" sz="1400" dirty="0"/>
           </a:p>
@@ -31686,14 +31463,14 @@
       </p:sp>
       <p:sp>
         <p:nvSpPr>
-          <p:cNvPr id="30" name="Text 28"/>
-          <p:cNvSpPr/>
-          <p:nvPr/>
-        </p:nvSpPr>
-        <p:spPr>
-          <a:xfrm>
-            <a:off x="6016752" y="3364992"/>
-            <a:ext cx="411480" cy="475488"/>
+          <p:cNvPr id="33" name="Text 31"/>
+          <p:cNvSpPr/>
+          <p:nvPr/>
+        </p:nvSpPr>
+        <p:spPr>
+          <a:xfrm>
+            <a:off x="4504944" y="3364992"/>
+            <a:ext cx="76200" cy="475488"/>
           </a:xfrm>
           <a:prstGeom prst="rect">
             <a:avLst/>
@@ -31725,14 +31502,14 @@
       </p:sp>
       <p:sp>
         <p:nvSpPr>
-          <p:cNvPr id="31" name="Shape 29"/>
-          <p:cNvSpPr/>
-          <p:nvPr/>
-        </p:nvSpPr>
-        <p:spPr>
-          <a:xfrm>
-            <a:off x="6428232" y="3364992"/>
-            <a:ext cx="1645920" cy="475488"/>
+          <p:cNvPr id="34" name="Shape 32"/>
+          <p:cNvSpPr/>
+          <p:nvPr/>
+        </p:nvSpPr>
+        <p:spPr>
+          <a:xfrm>
+            <a:off x="4581144" y="3364992"/>
+            <a:ext cx="1225296" cy="475488"/>
           </a:xfrm>
           <a:prstGeom prst="rect">
             <a:avLst>
@@ -31752,14 +31529,14 @@
       </p:sp>
       <p:sp>
         <p:nvSpPr>
-          <p:cNvPr id="32" name="Text 30"/>
-          <p:cNvSpPr/>
-          <p:nvPr/>
-        </p:nvSpPr>
-        <p:spPr>
-          <a:xfrm>
-            <a:off x="6428232" y="3364992"/>
-            <a:ext cx="1645920" cy="475488"/>
+          <p:cNvPr id="35" name="Text 33"/>
+          <p:cNvSpPr/>
+          <p:nvPr/>
+        </p:nvSpPr>
+        <p:spPr>
+          <a:xfrm>
+            <a:off x="4581144" y="3364992"/>
+            <a:ext cx="1225296" cy="475488"/>
           </a:xfrm>
           <a:prstGeom prst="rect">
             <a:avLst/>
@@ -31783,7 +31560,7 @@
                 <a:ea typeface="Trebuchet MS" pitchFamily="34" charset="-122"/>
                 <a:cs typeface="Trebuchet MS" pitchFamily="34" charset="-120"/>
               </a:rPr>
-              <a:t>er</a:t>
+              <a:t>per</a:t>
             </a:r>
             <a:endParaRPr lang="en-US" sz="1400" dirty="0"/>
           </a:p>
@@ -31791,7 +31568,217 @@
       </p:sp>
       <p:sp>
         <p:nvSpPr>
-          <p:cNvPr id="33" name="Shape 31"/>
+          <p:cNvPr id="36" name="Text 34"/>
+          <p:cNvSpPr/>
+          <p:nvPr/>
+        </p:nvSpPr>
+        <p:spPr>
+          <a:xfrm>
+            <a:off x="5806440" y="3364992"/>
+            <a:ext cx="76200" cy="475488"/>
+          </a:xfrm>
+          <a:prstGeom prst="rect">
+            <a:avLst/>
+          </a:prstGeom>
+          <a:noFill/>
+          <a:ln/>
+        </p:spPr>
+        <p:txBody>
+          <a:bodyPr wrap="square" lIns="0" tIns="0" rIns="0" bIns="0" rtlCol="0" anchor="ctr"/>
+          <a:lstStyle/>
+          <a:p>
+            <a:pPr algn="ctr" indent="0" marL="0">
+              <a:buNone/>
+            </a:pPr>
+            <a:r>
+              <a:rPr lang="en-US" sz="1600" b="1" dirty="0">
+                <a:solidFill>
+                  <a:srgbClr val="0D9488"/>
+                </a:solidFill>
+                <a:latin typeface="Trebuchet MS" pitchFamily="34" charset="0"/>
+                <a:ea typeface="Trebuchet MS" pitchFamily="34" charset="-122"/>
+                <a:cs typeface="Trebuchet MS" pitchFamily="34" charset="-120"/>
+              </a:rPr>
+              <a:t>·</a:t>
+            </a:r>
+            <a:endParaRPr lang="en-US" sz="1600" dirty="0"/>
+          </a:p>
+        </p:txBody>
+      </p:sp>
+      <p:sp>
+        <p:nvSpPr>
+          <p:cNvPr id="37" name="Shape 35"/>
+          <p:cNvSpPr/>
+          <p:nvPr/>
+        </p:nvSpPr>
+        <p:spPr>
+          <a:xfrm>
+            <a:off x="5882640" y="3364992"/>
+            <a:ext cx="1225296" cy="475488"/>
+          </a:xfrm>
+          <a:prstGeom prst="rect">
+            <a:avLst>
+              <a:gd name="adj" fmla="val 9615"/>
+            </a:avLst>
+          </a:prstGeom>
+          <a:solidFill>
+            <a:srgbClr val="FFFFFF"/>
+          </a:solidFill>
+          <a:ln w="12700">
+            <a:solidFill>
+              <a:srgbClr val="0D9488"/>
+            </a:solidFill>
+            <a:prstDash val="solid"/>
+          </a:ln>
+        </p:spPr>
+      </p:sp>
+      <p:sp>
+        <p:nvSpPr>
+          <p:cNvPr id="38" name="Text 36"/>
+          <p:cNvSpPr/>
+          <p:nvPr/>
+        </p:nvSpPr>
+        <p:spPr>
+          <a:xfrm>
+            <a:off x="5882640" y="3364992"/>
+            <a:ext cx="1225296" cy="475488"/>
+          </a:xfrm>
+          <a:prstGeom prst="rect">
+            <a:avLst/>
+          </a:prstGeom>
+          <a:noFill/>
+          <a:ln/>
+        </p:spPr>
+        <p:txBody>
+          <a:bodyPr wrap="square" lIns="0" tIns="0" rIns="0" bIns="0" rtlCol="0" anchor="ctr"/>
+          <a:lstStyle/>
+          <a:p>
+            <a:pPr algn="ctr" indent="0" marL="0">
+              <a:buNone/>
+            </a:pPr>
+            <a:r>
+              <a:rPr lang="en-US" sz="1400" b="1" dirty="0">
+                <a:solidFill>
+                  <a:srgbClr val="0D9488"/>
+                </a:solidFill>
+                <a:latin typeface="Trebuchet MS" pitchFamily="34" charset="0"/>
+                <a:ea typeface="Trebuchet MS" pitchFamily="34" charset="-122"/>
+                <a:cs typeface="Trebuchet MS" pitchFamily="34" charset="-120"/>
+              </a:rPr>
+              <a:t>form</a:t>
+            </a:r>
+            <a:endParaRPr lang="en-US" sz="1400" dirty="0"/>
+          </a:p>
+        </p:txBody>
+      </p:sp>
+      <p:sp>
+        <p:nvSpPr>
+          <p:cNvPr id="39" name="Text 37"/>
+          <p:cNvSpPr/>
+          <p:nvPr/>
+        </p:nvSpPr>
+        <p:spPr>
+          <a:xfrm>
+            <a:off x="7107936" y="3364992"/>
+            <a:ext cx="76200" cy="475488"/>
+          </a:xfrm>
+          <a:prstGeom prst="rect">
+            <a:avLst/>
+          </a:prstGeom>
+          <a:noFill/>
+          <a:ln/>
+        </p:spPr>
+        <p:txBody>
+          <a:bodyPr wrap="square" lIns="0" tIns="0" rIns="0" bIns="0" rtlCol="0" anchor="ctr"/>
+          <a:lstStyle/>
+          <a:p>
+            <a:pPr algn="ctr" indent="0" marL="0">
+              <a:buNone/>
+            </a:pPr>
+            <a:r>
+              <a:rPr lang="en-US" sz="1600" b="1" dirty="0">
+                <a:solidFill>
+                  <a:srgbClr val="0D9488"/>
+                </a:solidFill>
+                <a:latin typeface="Trebuchet MS" pitchFamily="34" charset="0"/>
+                <a:ea typeface="Trebuchet MS" pitchFamily="34" charset="-122"/>
+                <a:cs typeface="Trebuchet MS" pitchFamily="34" charset="-120"/>
+              </a:rPr>
+              <a:t>·</a:t>
+            </a:r>
+            <a:endParaRPr lang="en-US" sz="1600" dirty="0"/>
+          </a:p>
+        </p:txBody>
+      </p:sp>
+      <p:sp>
+        <p:nvSpPr>
+          <p:cNvPr id="40" name="Shape 38"/>
+          <p:cNvSpPr/>
+          <p:nvPr/>
+        </p:nvSpPr>
+        <p:spPr>
+          <a:xfrm>
+            <a:off x="7184136" y="3364992"/>
+            <a:ext cx="1225296" cy="475488"/>
+          </a:xfrm>
+          <a:prstGeom prst="rect">
+            <a:avLst>
+              <a:gd name="adj" fmla="val 9615"/>
+            </a:avLst>
+          </a:prstGeom>
+          <a:solidFill>
+            <a:srgbClr val="FFFFFF"/>
+          </a:solidFill>
+          <a:ln w="12700">
+            <a:solidFill>
+              <a:srgbClr val="0D9488"/>
+            </a:solidFill>
+            <a:prstDash val="solid"/>
+          </a:ln>
+        </p:spPr>
+      </p:sp>
+      <p:sp>
+        <p:nvSpPr>
+          <p:cNvPr id="41" name="Text 39"/>
+          <p:cNvSpPr/>
+          <p:nvPr/>
+        </p:nvSpPr>
+        <p:spPr>
+          <a:xfrm>
+            <a:off x="7184136" y="3364992"/>
+            <a:ext cx="1225296" cy="475488"/>
+          </a:xfrm>
+          <a:prstGeom prst="rect">
+            <a:avLst/>
+          </a:prstGeom>
+          <a:noFill/>
+          <a:ln/>
+        </p:spPr>
+        <p:txBody>
+          <a:bodyPr wrap="square" lIns="0" tIns="0" rIns="0" bIns="0" rtlCol="0" anchor="ctr"/>
+          <a:lstStyle/>
+          <a:p>
+            <a:pPr algn="ctr" indent="0" marL="0">
+              <a:buNone/>
+            </a:pPr>
+            <a:r>
+              <a:rPr lang="en-US" sz="1400" b="1" dirty="0">
+                <a:solidFill>
+                  <a:srgbClr val="0D9488"/>
+                </a:solidFill>
+                <a:latin typeface="Trebuchet MS" pitchFamily="34" charset="0"/>
+                <a:ea typeface="Trebuchet MS" pitchFamily="34" charset="-122"/>
+                <a:cs typeface="Trebuchet MS" pitchFamily="34" charset="-120"/>
+              </a:rPr>
+              <a:t>ing</a:t>
+            </a:r>
+            <a:endParaRPr lang="en-US" sz="1400" dirty="0"/>
+          </a:p>
+        </p:txBody>
+      </p:sp>
+      <p:sp>
+        <p:nvSpPr>
+          <p:cNvPr id="42" name="Shape 40"/>
           <p:cNvSpPr/>
           <p:nvPr/>
         </p:nvSpPr>
@@ -31818,7 +31805,7 @@
       </p:sp>
       <p:sp>
         <p:nvSpPr>
-          <p:cNvPr id="34" name="Text 32"/>
+          <p:cNvPr id="43" name="Text 41"/>
           <p:cNvSpPr/>
           <p:nvPr/>
         </p:nvSpPr>
@@ -31857,7 +31844,7 @@
       </p:sp>
       <p:sp>
         <p:nvSpPr>
-          <p:cNvPr id="35" name="Shape 33"/>
+          <p:cNvPr id="44" name="Shape 42"/>
           <p:cNvSpPr/>
           <p:nvPr/>
         </p:nvSpPr>
@@ -31884,7 +31871,7 @@
       </p:sp>
       <p:sp>
         <p:nvSpPr>
-          <p:cNvPr id="36" name="Text 34"/>
+          <p:cNvPr id="45" name="Text 43"/>
           <p:cNvSpPr/>
           <p:nvPr/>
         </p:nvSpPr>
@@ -32207,7 +32194,7 @@
                 <a:ea typeface="Calibri" pitchFamily="34" charset="-122"/>
                 <a:cs typeface="Calibri" pitchFamily="34" charset="-120"/>
               </a:rPr>
-              <a:t>Word Labs  •  wordlabs.app  •  Root: 'perform' = carry out, do, present</a:t>
+              <a:t>Word Labs  •  wordlabs.app  •  Root: 'perform' = carry out, do, or show</a:t>
             </a:r>
             <a:endParaRPr lang="en-US" sz="800" dirty="0"/>
           </a:p>
@@ -32346,7 +32333,7 @@
                 <a:ea typeface="Trebuchet MS" pitchFamily="34" charset="-122"/>
                 <a:cs typeface="Trebuchet MS" pitchFamily="34" charset="-120"/>
               </a:rPr>
-              <a:t>performer</a:t>
+              <a:t>underperforming</a:t>
             </a:r>
             <a:endParaRPr lang="en-US" sz="2800" dirty="0"/>
           </a:p>
@@ -32426,7 +32413,7 @@
         </p:nvSpPr>
         <p:spPr>
           <a:xfrm>
-            <a:off x="2938272" y="2258568"/>
+            <a:off x="2221992" y="2258568"/>
             <a:ext cx="1828800" cy="292608"/>
           </a:xfrm>
           <a:prstGeom prst="rect">
@@ -32435,11 +32422,11 @@
             </a:avLst>
           </a:prstGeom>
           <a:solidFill>
-            <a:srgbClr val="CCFBF1"/>
+            <a:srgbClr val="DDD6FE"/>
           </a:solidFill>
           <a:ln w="19050">
             <a:solidFill>
-              <a:srgbClr val="0D9488"/>
+              <a:srgbClr val="7C3AED"/>
             </a:solidFill>
             <a:prstDash val="solid"/>
           </a:ln>
@@ -32460,7 +32447,7 @@
         </p:nvSpPr>
         <p:spPr>
           <a:xfrm>
-            <a:off x="2938272" y="2258568"/>
+            <a:off x="2221992" y="2258568"/>
             <a:ext cx="1828800" cy="292608"/>
           </a:xfrm>
           <a:prstGeom prst="rect">
@@ -32479,13 +32466,13 @@
             <a:r>
               <a:rPr lang="en-US" sz="1300" b="1" dirty="0">
                 <a:solidFill>
-                  <a:srgbClr val="0F766E"/>
+                  <a:srgbClr val="4C1D95"/>
                 </a:solidFill>
                 <a:latin typeface="Trebuchet MS" pitchFamily="34" charset="0"/>
                 <a:ea typeface="Trebuchet MS" pitchFamily="34" charset="-122"/>
                 <a:cs typeface="Trebuchet MS" pitchFamily="34" charset="-120"/>
               </a:rPr>
-              <a:t>perform</a:t>
+              <a:t>under</a:t>
             </a:r>
             <a:endParaRPr lang="en-US" sz="1300" dirty="0"/>
           </a:p>
@@ -32499,7 +32486,7 @@
         </p:nvSpPr>
         <p:spPr>
           <a:xfrm>
-            <a:off x="2938272" y="2569464"/>
+            <a:off x="2221992" y="2569464"/>
             <a:ext cx="1828800" cy="201168"/>
           </a:xfrm>
           <a:prstGeom prst="rect">
@@ -32524,7 +32511,7 @@
                 <a:ea typeface="Calibri" pitchFamily="34" charset="-122"/>
                 <a:cs typeface="Calibri" pitchFamily="34" charset="-120"/>
               </a:rPr>
-              <a:t>carry out, present</a:t>
+              <a:t>below or less than expected</a:t>
             </a:r>
             <a:endParaRPr lang="en-US" sz="850" dirty="0"/>
           </a:p>
@@ -32538,7 +32525,7 @@
         </p:nvSpPr>
         <p:spPr>
           <a:xfrm>
-            <a:off x="5803392" y="2258568"/>
+            <a:off x="4370832" y="2258568"/>
             <a:ext cx="1828800" cy="292608"/>
           </a:xfrm>
           <a:prstGeom prst="rect">
@@ -32547,11 +32534,11 @@
             </a:avLst>
           </a:prstGeom>
           <a:solidFill>
-            <a:srgbClr val="FCE7F3"/>
+            <a:srgbClr val="CCFBF1"/>
           </a:solidFill>
           <a:ln w="19050">
             <a:solidFill>
-              <a:srgbClr val="DB2777"/>
+              <a:srgbClr val="0D9488"/>
             </a:solidFill>
             <a:prstDash val="solid"/>
           </a:ln>
@@ -32572,7 +32559,7 @@
         </p:nvSpPr>
         <p:spPr>
           <a:xfrm>
-            <a:off x="5803392" y="2258568"/>
+            <a:off x="4370832" y="2258568"/>
             <a:ext cx="1828800" cy="292608"/>
           </a:xfrm>
           <a:prstGeom prst="rect">
@@ -32591,13 +32578,13 @@
             <a:r>
               <a:rPr lang="en-US" sz="1300" b="1" dirty="0">
                 <a:solidFill>
-                  <a:srgbClr val="9D174D"/>
+                  <a:srgbClr val="0F766E"/>
                 </a:solidFill>
                 <a:latin typeface="Trebuchet MS" pitchFamily="34" charset="0"/>
                 <a:ea typeface="Trebuchet MS" pitchFamily="34" charset="-122"/>
                 <a:cs typeface="Trebuchet MS" pitchFamily="34" charset="-120"/>
               </a:rPr>
-              <a:t>er</a:t>
+              <a:t>perform</a:t>
             </a:r>
             <a:endParaRPr lang="en-US" sz="1300" dirty="0"/>
           </a:p>
@@ -32611,7 +32598,7 @@
         </p:nvSpPr>
         <p:spPr>
           <a:xfrm>
-            <a:off x="5803392" y="2569464"/>
+            <a:off x="4370832" y="2569464"/>
             <a:ext cx="1828800" cy="201168"/>
           </a:xfrm>
           <a:prstGeom prst="rect">
@@ -32636,7 +32623,7 @@
                 <a:ea typeface="Calibri" pitchFamily="34" charset="-122"/>
                 <a:cs typeface="Calibri" pitchFamily="34" charset="-120"/>
               </a:rPr>
-              <a:t>one who does something</a:t>
+              <a:t>carry out or show</a:t>
             </a:r>
             <a:endParaRPr lang="en-US" sz="850" dirty="0"/>
           </a:p>
@@ -32645,6 +32632,118 @@
       <p:sp>
         <p:nvSpPr>
           <p:cNvPr id="22" name="Shape 20"/>
+          <p:cNvSpPr/>
+          <p:nvPr/>
+        </p:nvSpPr>
+        <p:spPr>
+          <a:xfrm>
+            <a:off x="6519672" y="2258568"/>
+            <a:ext cx="1828800" cy="292608"/>
+          </a:xfrm>
+          <a:prstGeom prst="rect">
+            <a:avLst>
+              <a:gd name="adj" fmla="val 25000"/>
+            </a:avLst>
+          </a:prstGeom>
+          <a:solidFill>
+            <a:srgbClr val="FCE7F3"/>
+          </a:solidFill>
+          <a:ln w="19050">
+            <a:solidFill>
+              <a:srgbClr val="DB2777"/>
+            </a:solidFill>
+            <a:prstDash val="solid"/>
+          </a:ln>
+          <a:effectLst>
+            <a:outerShdw sx="100000" sy="100000" kx="0" ky="0" algn="bl" rotWithShape="0" blurRad="101600" dist="38100" dir="8100000">
+              <a:srgbClr val="000000">
+                <a:alpha val="12000"/>
+              </a:srgbClr>
+            </a:outerShdw>
+          </a:effectLst>
+        </p:spPr>
+      </p:sp>
+      <p:sp>
+        <p:nvSpPr>
+          <p:cNvPr id="23" name="Text 21"/>
+          <p:cNvSpPr/>
+          <p:nvPr/>
+        </p:nvSpPr>
+        <p:spPr>
+          <a:xfrm>
+            <a:off x="6519672" y="2258568"/>
+            <a:ext cx="1828800" cy="292608"/>
+          </a:xfrm>
+          <a:prstGeom prst="rect">
+            <a:avLst/>
+          </a:prstGeom>
+          <a:noFill/>
+          <a:ln/>
+        </p:spPr>
+        <p:txBody>
+          <a:bodyPr wrap="square" lIns="0" tIns="0" rIns="0" bIns="0" rtlCol="0" anchor="ctr"/>
+          <a:lstStyle/>
+          <a:p>
+            <a:pPr algn="ctr" indent="0" marL="0">
+              <a:buNone/>
+            </a:pPr>
+            <a:r>
+              <a:rPr lang="en-US" sz="1300" b="1" dirty="0">
+                <a:solidFill>
+                  <a:srgbClr val="9D174D"/>
+                </a:solidFill>
+                <a:latin typeface="Trebuchet MS" pitchFamily="34" charset="0"/>
+                <a:ea typeface="Trebuchet MS" pitchFamily="34" charset="-122"/>
+                <a:cs typeface="Trebuchet MS" pitchFamily="34" charset="-120"/>
+              </a:rPr>
+              <a:t>ing</a:t>
+            </a:r>
+            <a:endParaRPr lang="en-US" sz="1300" dirty="0"/>
+          </a:p>
+        </p:txBody>
+      </p:sp>
+      <p:sp>
+        <p:nvSpPr>
+          <p:cNvPr id="24" name="Text 22"/>
+          <p:cNvSpPr/>
+          <p:nvPr/>
+        </p:nvSpPr>
+        <p:spPr>
+          <a:xfrm>
+            <a:off x="6519672" y="2569464"/>
+            <a:ext cx="1828800" cy="201168"/>
+          </a:xfrm>
+          <a:prstGeom prst="rect">
+            <a:avLst/>
+          </a:prstGeom>
+          <a:noFill/>
+          <a:ln/>
+        </p:spPr>
+        <p:txBody>
+          <a:bodyPr wrap="square" lIns="0" tIns="0" rIns="0" bIns="0" rtlCol="0" anchor="t"/>
+          <a:lstStyle/>
+          <a:p>
+            <a:pPr algn="ctr" indent="0" marL="0">
+              <a:buNone/>
+            </a:pPr>
+            <a:r>
+              <a:rPr lang="en-US" sz="850" dirty="0">
+                <a:solidFill>
+                  <a:srgbClr val="475569"/>
+                </a:solidFill>
+                <a:latin typeface="Calibri" pitchFamily="34" charset="0"/>
+                <a:ea typeface="Calibri" pitchFamily="34" charset="-122"/>
+                <a:cs typeface="Calibri" pitchFamily="34" charset="-120"/>
+              </a:rPr>
+              <a:t>in the process of</a:t>
+            </a:r>
+            <a:endParaRPr lang="en-US" sz="850" dirty="0"/>
+          </a:p>
+        </p:txBody>
+      </p:sp>
+      <p:sp>
+        <p:nvSpPr>
+          <p:cNvPr id="25" name="Shape 23"/>
           <p:cNvSpPr/>
           <p:nvPr/>
         </p:nvSpPr>
@@ -32671,7 +32770,7 @@
       </p:sp>
       <p:sp>
         <p:nvSpPr>
-          <p:cNvPr id="23" name="Text 21"/>
+          <p:cNvPr id="26" name="Text 24"/>
           <p:cNvSpPr/>
           <p:nvPr/>
         </p:nvSpPr>
@@ -32710,7 +32809,7 @@
       </p:sp>
       <p:sp>
         <p:nvSpPr>
-          <p:cNvPr id="24" name="Shape 22"/>
+          <p:cNvPr id="27" name="Shape 25"/>
           <p:cNvSpPr/>
           <p:nvPr/>
         </p:nvSpPr>
@@ -32737,14 +32836,14 @@
       </p:sp>
       <p:sp>
         <p:nvSpPr>
-          <p:cNvPr id="25" name="Shape 23"/>
-          <p:cNvSpPr/>
-          <p:nvPr/>
-        </p:nvSpPr>
-        <p:spPr>
-          <a:xfrm>
-            <a:off x="2313432" y="3364992"/>
-            <a:ext cx="1645920" cy="475488"/>
+          <p:cNvPr id="28" name="Shape 26"/>
+          <p:cNvSpPr/>
+          <p:nvPr/>
+        </p:nvSpPr>
+        <p:spPr>
+          <a:xfrm>
+            <a:off x="1978152" y="3364992"/>
+            <a:ext cx="1225296" cy="475488"/>
           </a:xfrm>
           <a:prstGeom prst="rect">
             <a:avLst>
@@ -32764,14 +32863,14 @@
       </p:sp>
       <p:sp>
         <p:nvSpPr>
-          <p:cNvPr id="26" name="Text 24"/>
-          <p:cNvSpPr/>
-          <p:nvPr/>
-        </p:nvSpPr>
-        <p:spPr>
-          <a:xfrm>
-            <a:off x="2313432" y="3364992"/>
-            <a:ext cx="1645920" cy="475488"/>
+          <p:cNvPr id="29" name="Text 27"/>
+          <p:cNvSpPr/>
+          <p:nvPr/>
+        </p:nvSpPr>
+        <p:spPr>
+          <a:xfrm>
+            <a:off x="1978152" y="3364992"/>
+            <a:ext cx="1225296" cy="475488"/>
           </a:xfrm>
           <a:prstGeom prst="rect">
             <a:avLst/>
@@ -32795,7 +32894,7 @@
                 <a:ea typeface="Trebuchet MS" pitchFamily="34" charset="-122"/>
                 <a:cs typeface="Trebuchet MS" pitchFamily="34" charset="-120"/>
               </a:rPr>
-              <a:t>per</a:t>
+              <a:t>un</a:t>
             </a:r>
             <a:endParaRPr lang="en-US" sz="1400" dirty="0"/>
           </a:p>
@@ -32803,14 +32902,14 @@
       </p:sp>
       <p:sp>
         <p:nvSpPr>
-          <p:cNvPr id="27" name="Text 25"/>
-          <p:cNvSpPr/>
-          <p:nvPr/>
-        </p:nvSpPr>
-        <p:spPr>
-          <a:xfrm>
-            <a:off x="3959352" y="3364992"/>
-            <a:ext cx="411480" cy="475488"/>
+          <p:cNvPr id="30" name="Text 28"/>
+          <p:cNvSpPr/>
+          <p:nvPr/>
+        </p:nvSpPr>
+        <p:spPr>
+          <a:xfrm>
+            <a:off x="3203448" y="3364992"/>
+            <a:ext cx="76200" cy="475488"/>
           </a:xfrm>
           <a:prstGeom prst="rect">
             <a:avLst/>
@@ -32842,14 +32941,14 @@
       </p:sp>
       <p:sp>
         <p:nvSpPr>
-          <p:cNvPr id="28" name="Shape 26"/>
-          <p:cNvSpPr/>
-          <p:nvPr/>
-        </p:nvSpPr>
-        <p:spPr>
-          <a:xfrm>
-            <a:off x="4370832" y="3364992"/>
-            <a:ext cx="1645920" cy="475488"/>
+          <p:cNvPr id="31" name="Shape 29"/>
+          <p:cNvSpPr/>
+          <p:nvPr/>
+        </p:nvSpPr>
+        <p:spPr>
+          <a:xfrm>
+            <a:off x="3279648" y="3364992"/>
+            <a:ext cx="1225296" cy="475488"/>
           </a:xfrm>
           <a:prstGeom prst="rect">
             <a:avLst>
@@ -32869,14 +32968,14 @@
       </p:sp>
       <p:sp>
         <p:nvSpPr>
-          <p:cNvPr id="29" name="Text 27"/>
-          <p:cNvSpPr/>
-          <p:nvPr/>
-        </p:nvSpPr>
-        <p:spPr>
-          <a:xfrm>
-            <a:off x="4370832" y="3364992"/>
-            <a:ext cx="1645920" cy="475488"/>
+          <p:cNvPr id="32" name="Text 30"/>
+          <p:cNvSpPr/>
+          <p:nvPr/>
+        </p:nvSpPr>
+        <p:spPr>
+          <a:xfrm>
+            <a:off x="3279648" y="3364992"/>
+            <a:ext cx="1225296" cy="475488"/>
           </a:xfrm>
           <a:prstGeom prst="rect">
             <a:avLst/>
@@ -32900,7 +32999,7 @@
                 <a:ea typeface="Trebuchet MS" pitchFamily="34" charset="-122"/>
                 <a:cs typeface="Trebuchet MS" pitchFamily="34" charset="-120"/>
               </a:rPr>
-              <a:t>form</a:t>
+              <a:t>der</a:t>
             </a:r>
             <a:endParaRPr lang="en-US" sz="1400" dirty="0"/>
           </a:p>
@@ -32908,14 +33007,14 @@
       </p:sp>
       <p:sp>
         <p:nvSpPr>
-          <p:cNvPr id="30" name="Text 28"/>
-          <p:cNvSpPr/>
-          <p:nvPr/>
-        </p:nvSpPr>
-        <p:spPr>
-          <a:xfrm>
-            <a:off x="6016752" y="3364992"/>
-            <a:ext cx="411480" cy="475488"/>
+          <p:cNvPr id="33" name="Text 31"/>
+          <p:cNvSpPr/>
+          <p:nvPr/>
+        </p:nvSpPr>
+        <p:spPr>
+          <a:xfrm>
+            <a:off x="4504944" y="3364992"/>
+            <a:ext cx="76200" cy="475488"/>
           </a:xfrm>
           <a:prstGeom prst="rect">
             <a:avLst/>
@@ -32947,14 +33046,14 @@
       </p:sp>
       <p:sp>
         <p:nvSpPr>
-          <p:cNvPr id="31" name="Shape 29"/>
-          <p:cNvSpPr/>
-          <p:nvPr/>
-        </p:nvSpPr>
-        <p:spPr>
-          <a:xfrm>
-            <a:off x="6428232" y="3364992"/>
-            <a:ext cx="1645920" cy="475488"/>
+          <p:cNvPr id="34" name="Shape 32"/>
+          <p:cNvSpPr/>
+          <p:nvPr/>
+        </p:nvSpPr>
+        <p:spPr>
+          <a:xfrm>
+            <a:off x="4581144" y="3364992"/>
+            <a:ext cx="1225296" cy="475488"/>
           </a:xfrm>
           <a:prstGeom prst="rect">
             <a:avLst>
@@ -32974,14 +33073,14 @@
       </p:sp>
       <p:sp>
         <p:nvSpPr>
-          <p:cNvPr id="32" name="Text 30"/>
-          <p:cNvSpPr/>
-          <p:nvPr/>
-        </p:nvSpPr>
-        <p:spPr>
-          <a:xfrm>
-            <a:off x="6428232" y="3364992"/>
-            <a:ext cx="1645920" cy="475488"/>
+          <p:cNvPr id="35" name="Text 33"/>
+          <p:cNvSpPr/>
+          <p:nvPr/>
+        </p:nvSpPr>
+        <p:spPr>
+          <a:xfrm>
+            <a:off x="4581144" y="3364992"/>
+            <a:ext cx="1225296" cy="475488"/>
           </a:xfrm>
           <a:prstGeom prst="rect">
             <a:avLst/>
@@ -33005,7 +33104,7 @@
                 <a:ea typeface="Trebuchet MS" pitchFamily="34" charset="-122"/>
                 <a:cs typeface="Trebuchet MS" pitchFamily="34" charset="-120"/>
               </a:rPr>
-              <a:t>er</a:t>
+              <a:t>per</a:t>
             </a:r>
             <a:endParaRPr lang="en-US" sz="1400" dirty="0"/>
           </a:p>
@@ -33013,7 +33112,217 @@
       </p:sp>
       <p:sp>
         <p:nvSpPr>
-          <p:cNvPr id="33" name="Shape 31"/>
+          <p:cNvPr id="36" name="Text 34"/>
+          <p:cNvSpPr/>
+          <p:nvPr/>
+        </p:nvSpPr>
+        <p:spPr>
+          <a:xfrm>
+            <a:off x="5806440" y="3364992"/>
+            <a:ext cx="76200" cy="475488"/>
+          </a:xfrm>
+          <a:prstGeom prst="rect">
+            <a:avLst/>
+          </a:prstGeom>
+          <a:noFill/>
+          <a:ln/>
+        </p:spPr>
+        <p:txBody>
+          <a:bodyPr wrap="square" lIns="0" tIns="0" rIns="0" bIns="0" rtlCol="0" anchor="ctr"/>
+          <a:lstStyle/>
+          <a:p>
+            <a:pPr algn="ctr" indent="0" marL="0">
+              <a:buNone/>
+            </a:pPr>
+            <a:r>
+              <a:rPr lang="en-US" sz="1600" b="1" dirty="0">
+                <a:solidFill>
+                  <a:srgbClr val="0D9488"/>
+                </a:solidFill>
+                <a:latin typeface="Trebuchet MS" pitchFamily="34" charset="0"/>
+                <a:ea typeface="Trebuchet MS" pitchFamily="34" charset="-122"/>
+                <a:cs typeface="Trebuchet MS" pitchFamily="34" charset="-120"/>
+              </a:rPr>
+              <a:t>·</a:t>
+            </a:r>
+            <a:endParaRPr lang="en-US" sz="1600" dirty="0"/>
+          </a:p>
+        </p:txBody>
+      </p:sp>
+      <p:sp>
+        <p:nvSpPr>
+          <p:cNvPr id="37" name="Shape 35"/>
+          <p:cNvSpPr/>
+          <p:nvPr/>
+        </p:nvSpPr>
+        <p:spPr>
+          <a:xfrm>
+            <a:off x="5882640" y="3364992"/>
+            <a:ext cx="1225296" cy="475488"/>
+          </a:xfrm>
+          <a:prstGeom prst="rect">
+            <a:avLst>
+              <a:gd name="adj" fmla="val 9615"/>
+            </a:avLst>
+          </a:prstGeom>
+          <a:solidFill>
+            <a:srgbClr val="FFFFFF"/>
+          </a:solidFill>
+          <a:ln w="12700">
+            <a:solidFill>
+              <a:srgbClr val="0D9488"/>
+            </a:solidFill>
+            <a:prstDash val="solid"/>
+          </a:ln>
+        </p:spPr>
+      </p:sp>
+      <p:sp>
+        <p:nvSpPr>
+          <p:cNvPr id="38" name="Text 36"/>
+          <p:cNvSpPr/>
+          <p:nvPr/>
+        </p:nvSpPr>
+        <p:spPr>
+          <a:xfrm>
+            <a:off x="5882640" y="3364992"/>
+            <a:ext cx="1225296" cy="475488"/>
+          </a:xfrm>
+          <a:prstGeom prst="rect">
+            <a:avLst/>
+          </a:prstGeom>
+          <a:noFill/>
+          <a:ln/>
+        </p:spPr>
+        <p:txBody>
+          <a:bodyPr wrap="square" lIns="0" tIns="0" rIns="0" bIns="0" rtlCol="0" anchor="ctr"/>
+          <a:lstStyle/>
+          <a:p>
+            <a:pPr algn="ctr" indent="0" marL="0">
+              <a:buNone/>
+            </a:pPr>
+            <a:r>
+              <a:rPr lang="en-US" sz="1400" b="1" dirty="0">
+                <a:solidFill>
+                  <a:srgbClr val="0D9488"/>
+                </a:solidFill>
+                <a:latin typeface="Trebuchet MS" pitchFamily="34" charset="0"/>
+                <a:ea typeface="Trebuchet MS" pitchFamily="34" charset="-122"/>
+                <a:cs typeface="Trebuchet MS" pitchFamily="34" charset="-120"/>
+              </a:rPr>
+              <a:t>form</a:t>
+            </a:r>
+            <a:endParaRPr lang="en-US" sz="1400" dirty="0"/>
+          </a:p>
+        </p:txBody>
+      </p:sp>
+      <p:sp>
+        <p:nvSpPr>
+          <p:cNvPr id="39" name="Text 37"/>
+          <p:cNvSpPr/>
+          <p:nvPr/>
+        </p:nvSpPr>
+        <p:spPr>
+          <a:xfrm>
+            <a:off x="7107936" y="3364992"/>
+            <a:ext cx="76200" cy="475488"/>
+          </a:xfrm>
+          <a:prstGeom prst="rect">
+            <a:avLst/>
+          </a:prstGeom>
+          <a:noFill/>
+          <a:ln/>
+        </p:spPr>
+        <p:txBody>
+          <a:bodyPr wrap="square" lIns="0" tIns="0" rIns="0" bIns="0" rtlCol="0" anchor="ctr"/>
+          <a:lstStyle/>
+          <a:p>
+            <a:pPr algn="ctr" indent="0" marL="0">
+              <a:buNone/>
+            </a:pPr>
+            <a:r>
+              <a:rPr lang="en-US" sz="1600" b="1" dirty="0">
+                <a:solidFill>
+                  <a:srgbClr val="0D9488"/>
+                </a:solidFill>
+                <a:latin typeface="Trebuchet MS" pitchFamily="34" charset="0"/>
+                <a:ea typeface="Trebuchet MS" pitchFamily="34" charset="-122"/>
+                <a:cs typeface="Trebuchet MS" pitchFamily="34" charset="-120"/>
+              </a:rPr>
+              <a:t>·</a:t>
+            </a:r>
+            <a:endParaRPr lang="en-US" sz="1600" dirty="0"/>
+          </a:p>
+        </p:txBody>
+      </p:sp>
+      <p:sp>
+        <p:nvSpPr>
+          <p:cNvPr id="40" name="Shape 38"/>
+          <p:cNvSpPr/>
+          <p:nvPr/>
+        </p:nvSpPr>
+        <p:spPr>
+          <a:xfrm>
+            <a:off x="7184136" y="3364992"/>
+            <a:ext cx="1225296" cy="475488"/>
+          </a:xfrm>
+          <a:prstGeom prst="rect">
+            <a:avLst>
+              <a:gd name="adj" fmla="val 9615"/>
+            </a:avLst>
+          </a:prstGeom>
+          <a:solidFill>
+            <a:srgbClr val="FFFFFF"/>
+          </a:solidFill>
+          <a:ln w="12700">
+            <a:solidFill>
+              <a:srgbClr val="0D9488"/>
+            </a:solidFill>
+            <a:prstDash val="solid"/>
+          </a:ln>
+        </p:spPr>
+      </p:sp>
+      <p:sp>
+        <p:nvSpPr>
+          <p:cNvPr id="41" name="Text 39"/>
+          <p:cNvSpPr/>
+          <p:nvPr/>
+        </p:nvSpPr>
+        <p:spPr>
+          <a:xfrm>
+            <a:off x="7184136" y="3364992"/>
+            <a:ext cx="1225296" cy="475488"/>
+          </a:xfrm>
+          <a:prstGeom prst="rect">
+            <a:avLst/>
+          </a:prstGeom>
+          <a:noFill/>
+          <a:ln/>
+        </p:spPr>
+        <p:txBody>
+          <a:bodyPr wrap="square" lIns="0" tIns="0" rIns="0" bIns="0" rtlCol="0" anchor="ctr"/>
+          <a:lstStyle/>
+          <a:p>
+            <a:pPr algn="ctr" indent="0" marL="0">
+              <a:buNone/>
+            </a:pPr>
+            <a:r>
+              <a:rPr lang="en-US" sz="1400" b="1" dirty="0">
+                <a:solidFill>
+                  <a:srgbClr val="0D9488"/>
+                </a:solidFill>
+                <a:latin typeface="Trebuchet MS" pitchFamily="34" charset="0"/>
+                <a:ea typeface="Trebuchet MS" pitchFamily="34" charset="-122"/>
+                <a:cs typeface="Trebuchet MS" pitchFamily="34" charset="-120"/>
+              </a:rPr>
+              <a:t>ing</a:t>
+            </a:r>
+            <a:endParaRPr lang="en-US" sz="1400" dirty="0"/>
+          </a:p>
+        </p:txBody>
+      </p:sp>
+      <p:sp>
+        <p:nvSpPr>
+          <p:cNvPr id="42" name="Shape 40"/>
           <p:cNvSpPr/>
           <p:nvPr/>
         </p:nvSpPr>
@@ -33040,7 +33349,7 @@
       </p:sp>
       <p:sp>
         <p:nvSpPr>
-          <p:cNvPr id="34" name="Text 32"/>
+          <p:cNvPr id="43" name="Text 41"/>
           <p:cNvSpPr/>
           <p:nvPr/>
         </p:nvSpPr>
@@ -33079,7 +33388,7 @@
       </p:sp>
       <p:sp>
         <p:nvSpPr>
-          <p:cNvPr id="35" name="Shape 33"/>
+          <p:cNvPr id="44" name="Shape 42"/>
           <p:cNvSpPr/>
           <p:nvPr/>
         </p:nvSpPr>
@@ -33106,14 +33415,14 @@
       </p:sp>
       <p:sp>
         <p:nvSpPr>
-          <p:cNvPr id="36" name="Shape 34"/>
-          <p:cNvSpPr/>
-          <p:nvPr/>
-        </p:nvSpPr>
-        <p:spPr>
-          <a:xfrm>
-            <a:off x="2254649" y="4169664"/>
-            <a:ext cx="685800" cy="475488"/>
+          <p:cNvPr id="45" name="Shape 43"/>
+          <p:cNvSpPr/>
+          <p:nvPr/>
+        </p:nvSpPr>
+        <p:spPr>
+          <a:xfrm>
+            <a:off x="1952244" y="4169664"/>
+            <a:ext cx="543652" cy="475488"/>
           </a:xfrm>
           <a:prstGeom prst="rect">
             <a:avLst>
@@ -33133,14 +33442,14 @@
       </p:sp>
       <p:sp>
         <p:nvSpPr>
-          <p:cNvPr id="37" name="Text 35"/>
-          <p:cNvSpPr/>
-          <p:nvPr/>
-        </p:nvSpPr>
-        <p:spPr>
-          <a:xfrm>
-            <a:off x="2254649" y="4169664"/>
-            <a:ext cx="685800" cy="475488"/>
+          <p:cNvPr id="46" name="Text 44"/>
+          <p:cNvSpPr/>
+          <p:nvPr/>
+        </p:nvSpPr>
+        <p:spPr>
+          <a:xfrm>
+            <a:off x="1952244" y="4169664"/>
+            <a:ext cx="543652" cy="475488"/>
           </a:xfrm>
           <a:prstGeom prst="rect">
             <a:avLst/>
@@ -33164,7 +33473,7 @@
                 <a:ea typeface="Trebuchet MS" pitchFamily="34" charset="-122"/>
                 <a:cs typeface="Trebuchet MS" pitchFamily="34" charset="-120"/>
               </a:rPr>
-              <a:t>p</a:t>
+              <a:t>u</a:t>
             </a:r>
             <a:endParaRPr lang="en-US" sz="900" dirty="0"/>
           </a:p>
@@ -33172,14 +33481,14 @@
       </p:sp>
       <p:sp>
         <p:nvSpPr>
-          <p:cNvPr id="38" name="Shape 36"/>
-          <p:cNvSpPr/>
-          <p:nvPr/>
-        </p:nvSpPr>
-        <p:spPr>
-          <a:xfrm>
-            <a:off x="3293146" y="4169664"/>
-            <a:ext cx="685800" cy="475488"/>
+          <p:cNvPr id="47" name="Shape 45"/>
+          <p:cNvSpPr/>
+          <p:nvPr/>
+        </p:nvSpPr>
+        <p:spPr>
+          <a:xfrm>
+            <a:off x="2546188" y="4169664"/>
+            <a:ext cx="543652" cy="475488"/>
           </a:xfrm>
           <a:prstGeom prst="rect">
             <a:avLst>
@@ -33199,14 +33508,14 @@
       </p:sp>
       <p:sp>
         <p:nvSpPr>
-          <p:cNvPr id="39" name="Text 37"/>
-          <p:cNvSpPr/>
-          <p:nvPr/>
-        </p:nvSpPr>
-        <p:spPr>
-          <a:xfrm>
-            <a:off x="3293146" y="4169664"/>
-            <a:ext cx="685800" cy="475488"/>
+          <p:cNvPr id="48" name="Text 46"/>
+          <p:cNvSpPr/>
+          <p:nvPr/>
+        </p:nvSpPr>
+        <p:spPr>
+          <a:xfrm>
+            <a:off x="2546188" y="4169664"/>
+            <a:ext cx="543652" cy="475488"/>
           </a:xfrm>
           <a:prstGeom prst="rect">
             <a:avLst/>
@@ -33230,7 +33539,7 @@
                 <a:ea typeface="Trebuchet MS" pitchFamily="34" charset="-122"/>
                 <a:cs typeface="Trebuchet MS" pitchFamily="34" charset="-120"/>
               </a:rPr>
-              <a:t>er</a:t>
+              <a:t>n</a:t>
             </a:r>
             <a:endParaRPr lang="en-US" sz="900" dirty="0"/>
           </a:p>
@@ -33238,14 +33547,14 @@
       </p:sp>
       <p:sp>
         <p:nvSpPr>
-          <p:cNvPr id="40" name="Shape 38"/>
-          <p:cNvSpPr/>
-          <p:nvPr/>
-        </p:nvSpPr>
-        <p:spPr>
-          <a:xfrm>
-            <a:off x="4331643" y="4169664"/>
-            <a:ext cx="685800" cy="475488"/>
+          <p:cNvPr id="49" name="Shape 47"/>
+          <p:cNvSpPr/>
+          <p:nvPr/>
+        </p:nvSpPr>
+        <p:spPr>
+          <a:xfrm>
+            <a:off x="3140133" y="4169664"/>
+            <a:ext cx="543652" cy="475488"/>
           </a:xfrm>
           <a:prstGeom prst="rect">
             <a:avLst>
@@ -33265,14 +33574,14 @@
       </p:sp>
       <p:sp>
         <p:nvSpPr>
-          <p:cNvPr id="41" name="Text 39"/>
-          <p:cNvSpPr/>
-          <p:nvPr/>
-        </p:nvSpPr>
-        <p:spPr>
-          <a:xfrm>
-            <a:off x="4331643" y="4169664"/>
-            <a:ext cx="685800" cy="475488"/>
+          <p:cNvPr id="50" name="Text 48"/>
+          <p:cNvSpPr/>
+          <p:nvPr/>
+        </p:nvSpPr>
+        <p:spPr>
+          <a:xfrm>
+            <a:off x="3140133" y="4169664"/>
+            <a:ext cx="543652" cy="475488"/>
           </a:xfrm>
           <a:prstGeom prst="rect">
             <a:avLst/>
@@ -33296,7 +33605,7 @@
                 <a:ea typeface="Trebuchet MS" pitchFamily="34" charset="-122"/>
                 <a:cs typeface="Trebuchet MS" pitchFamily="34" charset="-120"/>
               </a:rPr>
-              <a:t>f</a:t>
+              <a:t>d</a:t>
             </a:r>
             <a:endParaRPr lang="en-US" sz="900" dirty="0"/>
           </a:p>
@@ -33304,14 +33613,14 @@
       </p:sp>
       <p:sp>
         <p:nvSpPr>
-          <p:cNvPr id="42" name="Shape 40"/>
-          <p:cNvSpPr/>
-          <p:nvPr/>
-        </p:nvSpPr>
-        <p:spPr>
-          <a:xfrm>
-            <a:off x="5370141" y="4169664"/>
-            <a:ext cx="685800" cy="475488"/>
+          <p:cNvPr id="51" name="Shape 49"/>
+          <p:cNvSpPr/>
+          <p:nvPr/>
+        </p:nvSpPr>
+        <p:spPr>
+          <a:xfrm>
+            <a:off x="3734077" y="4169664"/>
+            <a:ext cx="543652" cy="475488"/>
           </a:xfrm>
           <a:prstGeom prst="rect">
             <a:avLst>
@@ -33331,14 +33640,14 @@
       </p:sp>
       <p:sp>
         <p:nvSpPr>
-          <p:cNvPr id="43" name="Text 41"/>
-          <p:cNvSpPr/>
-          <p:nvPr/>
-        </p:nvSpPr>
-        <p:spPr>
-          <a:xfrm>
-            <a:off x="5370141" y="4169664"/>
-            <a:ext cx="685800" cy="475488"/>
+          <p:cNvPr id="52" name="Text 50"/>
+          <p:cNvSpPr/>
+          <p:nvPr/>
+        </p:nvSpPr>
+        <p:spPr>
+          <a:xfrm>
+            <a:off x="3734077" y="4169664"/>
+            <a:ext cx="543652" cy="475488"/>
           </a:xfrm>
           <a:prstGeom prst="rect">
             <a:avLst/>
@@ -33362,7 +33671,7 @@
                 <a:ea typeface="Trebuchet MS" pitchFamily="34" charset="-122"/>
                 <a:cs typeface="Trebuchet MS" pitchFamily="34" charset="-120"/>
               </a:rPr>
-              <a:t>or</a:t>
+              <a:t>er</a:t>
             </a:r>
             <a:endParaRPr lang="en-US" sz="900" dirty="0"/>
           </a:p>
@@ -33370,14 +33679,14 @@
       </p:sp>
       <p:sp>
         <p:nvSpPr>
-          <p:cNvPr id="44" name="Shape 42"/>
-          <p:cNvSpPr/>
-          <p:nvPr/>
-        </p:nvSpPr>
-        <p:spPr>
-          <a:xfrm>
-            <a:off x="6408638" y="4169664"/>
-            <a:ext cx="685800" cy="475488"/>
+          <p:cNvPr id="53" name="Shape 51"/>
+          <p:cNvSpPr/>
+          <p:nvPr/>
+        </p:nvSpPr>
+        <p:spPr>
+          <a:xfrm>
+            <a:off x="4328021" y="4169664"/>
+            <a:ext cx="543652" cy="475488"/>
           </a:xfrm>
           <a:prstGeom prst="rect">
             <a:avLst>
@@ -33397,14 +33706,14 @@
       </p:sp>
       <p:sp>
         <p:nvSpPr>
-          <p:cNvPr id="45" name="Text 43"/>
-          <p:cNvSpPr/>
-          <p:nvPr/>
-        </p:nvSpPr>
-        <p:spPr>
-          <a:xfrm>
-            <a:off x="6408638" y="4169664"/>
-            <a:ext cx="685800" cy="475488"/>
+          <p:cNvPr id="54" name="Text 52"/>
+          <p:cNvSpPr/>
+          <p:nvPr/>
+        </p:nvSpPr>
+        <p:spPr>
+          <a:xfrm>
+            <a:off x="4328021" y="4169664"/>
+            <a:ext cx="543652" cy="475488"/>
           </a:xfrm>
           <a:prstGeom prst="rect">
             <a:avLst/>
@@ -33428,7 +33737,7 @@
                 <a:ea typeface="Trebuchet MS" pitchFamily="34" charset="-122"/>
                 <a:cs typeface="Trebuchet MS" pitchFamily="34" charset="-120"/>
               </a:rPr>
-              <a:t>m</a:t>
+              <a:t>p</a:t>
             </a:r>
             <a:endParaRPr lang="en-US" sz="900" dirty="0"/>
           </a:p>
@@ -33436,14 +33745,14 @@
       </p:sp>
       <p:sp>
         <p:nvSpPr>
-          <p:cNvPr id="46" name="Shape 44"/>
-          <p:cNvSpPr/>
-          <p:nvPr/>
-        </p:nvSpPr>
-        <p:spPr>
-          <a:xfrm>
-            <a:off x="7447135" y="4169664"/>
-            <a:ext cx="685800" cy="475488"/>
+          <p:cNvPr id="55" name="Shape 53"/>
+          <p:cNvSpPr/>
+          <p:nvPr/>
+        </p:nvSpPr>
+        <p:spPr>
+          <a:xfrm>
+            <a:off x="4921966" y="4169664"/>
+            <a:ext cx="543652" cy="475488"/>
           </a:xfrm>
           <a:prstGeom prst="rect">
             <a:avLst>
@@ -33463,14 +33772,14 @@
       </p:sp>
       <p:sp>
         <p:nvSpPr>
-          <p:cNvPr id="47" name="Text 45"/>
-          <p:cNvSpPr/>
-          <p:nvPr/>
-        </p:nvSpPr>
-        <p:spPr>
-          <a:xfrm>
-            <a:off x="7447135" y="4169664"/>
-            <a:ext cx="685800" cy="475488"/>
+          <p:cNvPr id="56" name="Text 54"/>
+          <p:cNvSpPr/>
+          <p:nvPr/>
+        </p:nvSpPr>
+        <p:spPr>
+          <a:xfrm>
+            <a:off x="4921966" y="4169664"/>
+            <a:ext cx="543652" cy="475488"/>
           </a:xfrm>
           <a:prstGeom prst="rect">
             <a:avLst/>
@@ -33495,6 +33804,336 @@
                 <a:cs typeface="Trebuchet MS" pitchFamily="34" charset="-120"/>
               </a:rPr>
               <a:t>er</a:t>
+            </a:r>
+            <a:endParaRPr lang="en-US" sz="900" dirty="0"/>
+          </a:p>
+        </p:txBody>
+      </p:sp>
+      <p:sp>
+        <p:nvSpPr>
+          <p:cNvPr id="57" name="Shape 55"/>
+          <p:cNvSpPr/>
+          <p:nvPr/>
+        </p:nvSpPr>
+        <p:spPr>
+          <a:xfrm>
+            <a:off x="5515910" y="4169664"/>
+            <a:ext cx="543652" cy="475488"/>
+          </a:xfrm>
+          <a:prstGeom prst="rect">
+            <a:avLst>
+              <a:gd name="adj" fmla="val 7692"/>
+            </a:avLst>
+          </a:prstGeom>
+          <a:solidFill>
+            <a:srgbClr val="FFFFFF"/>
+          </a:solidFill>
+          <a:ln w="12700">
+            <a:solidFill>
+              <a:srgbClr val="DB2777"/>
+            </a:solidFill>
+            <a:prstDash val="solid"/>
+          </a:ln>
+        </p:spPr>
+      </p:sp>
+      <p:sp>
+        <p:nvSpPr>
+          <p:cNvPr id="58" name="Text 56"/>
+          <p:cNvSpPr/>
+          <p:nvPr/>
+        </p:nvSpPr>
+        <p:spPr>
+          <a:xfrm>
+            <a:off x="5515910" y="4169664"/>
+            <a:ext cx="543652" cy="475488"/>
+          </a:xfrm>
+          <a:prstGeom prst="rect">
+            <a:avLst/>
+          </a:prstGeom>
+          <a:noFill/>
+          <a:ln/>
+        </p:spPr>
+        <p:txBody>
+          <a:bodyPr wrap="square" lIns="0" tIns="0" rIns="0" bIns="0" rtlCol="0" anchor="ctr"/>
+          <a:lstStyle/>
+          <a:p>
+            <a:pPr algn="ctr" indent="0" marL="0">
+              <a:buNone/>
+            </a:pPr>
+            <a:r>
+              <a:rPr lang="en-US" sz="900" b="1" dirty="0">
+                <a:solidFill>
+                  <a:srgbClr val="9D174D"/>
+                </a:solidFill>
+                <a:latin typeface="Trebuchet MS" pitchFamily="34" charset="0"/>
+                <a:ea typeface="Trebuchet MS" pitchFamily="34" charset="-122"/>
+                <a:cs typeface="Trebuchet MS" pitchFamily="34" charset="-120"/>
+              </a:rPr>
+              <a:t>f</a:t>
+            </a:r>
+            <a:endParaRPr lang="en-US" sz="900" dirty="0"/>
+          </a:p>
+        </p:txBody>
+      </p:sp>
+      <p:sp>
+        <p:nvSpPr>
+          <p:cNvPr id="59" name="Shape 57"/>
+          <p:cNvSpPr/>
+          <p:nvPr/>
+        </p:nvSpPr>
+        <p:spPr>
+          <a:xfrm>
+            <a:off x="6109855" y="4169664"/>
+            <a:ext cx="543652" cy="475488"/>
+          </a:xfrm>
+          <a:prstGeom prst="rect">
+            <a:avLst>
+              <a:gd name="adj" fmla="val 7692"/>
+            </a:avLst>
+          </a:prstGeom>
+          <a:solidFill>
+            <a:srgbClr val="FFFFFF"/>
+          </a:solidFill>
+          <a:ln w="12700">
+            <a:solidFill>
+              <a:srgbClr val="DB2777"/>
+            </a:solidFill>
+            <a:prstDash val="solid"/>
+          </a:ln>
+        </p:spPr>
+      </p:sp>
+      <p:sp>
+        <p:nvSpPr>
+          <p:cNvPr id="60" name="Text 58"/>
+          <p:cNvSpPr/>
+          <p:nvPr/>
+        </p:nvSpPr>
+        <p:spPr>
+          <a:xfrm>
+            <a:off x="6109855" y="4169664"/>
+            <a:ext cx="543652" cy="475488"/>
+          </a:xfrm>
+          <a:prstGeom prst="rect">
+            <a:avLst/>
+          </a:prstGeom>
+          <a:noFill/>
+          <a:ln/>
+        </p:spPr>
+        <p:txBody>
+          <a:bodyPr wrap="square" lIns="0" tIns="0" rIns="0" bIns="0" rtlCol="0" anchor="ctr"/>
+          <a:lstStyle/>
+          <a:p>
+            <a:pPr algn="ctr" indent="0" marL="0">
+              <a:buNone/>
+            </a:pPr>
+            <a:r>
+              <a:rPr lang="en-US" sz="900" b="1" dirty="0">
+                <a:solidFill>
+                  <a:srgbClr val="9D174D"/>
+                </a:solidFill>
+                <a:latin typeface="Trebuchet MS" pitchFamily="34" charset="0"/>
+                <a:ea typeface="Trebuchet MS" pitchFamily="34" charset="-122"/>
+                <a:cs typeface="Trebuchet MS" pitchFamily="34" charset="-120"/>
+              </a:rPr>
+              <a:t>or</a:t>
+            </a:r>
+            <a:endParaRPr lang="en-US" sz="900" dirty="0"/>
+          </a:p>
+        </p:txBody>
+      </p:sp>
+      <p:sp>
+        <p:nvSpPr>
+          <p:cNvPr id="61" name="Shape 59"/>
+          <p:cNvSpPr/>
+          <p:nvPr/>
+        </p:nvSpPr>
+        <p:spPr>
+          <a:xfrm>
+            <a:off x="6703799" y="4169664"/>
+            <a:ext cx="543652" cy="475488"/>
+          </a:xfrm>
+          <a:prstGeom prst="rect">
+            <a:avLst>
+              <a:gd name="adj" fmla="val 7692"/>
+            </a:avLst>
+          </a:prstGeom>
+          <a:solidFill>
+            <a:srgbClr val="FFFFFF"/>
+          </a:solidFill>
+          <a:ln w="12700">
+            <a:solidFill>
+              <a:srgbClr val="DB2777"/>
+            </a:solidFill>
+            <a:prstDash val="solid"/>
+          </a:ln>
+        </p:spPr>
+      </p:sp>
+      <p:sp>
+        <p:nvSpPr>
+          <p:cNvPr id="62" name="Text 60"/>
+          <p:cNvSpPr/>
+          <p:nvPr/>
+        </p:nvSpPr>
+        <p:spPr>
+          <a:xfrm>
+            <a:off x="6703799" y="4169664"/>
+            <a:ext cx="543652" cy="475488"/>
+          </a:xfrm>
+          <a:prstGeom prst="rect">
+            <a:avLst/>
+          </a:prstGeom>
+          <a:noFill/>
+          <a:ln/>
+        </p:spPr>
+        <p:txBody>
+          <a:bodyPr wrap="square" lIns="0" tIns="0" rIns="0" bIns="0" rtlCol="0" anchor="ctr"/>
+          <a:lstStyle/>
+          <a:p>
+            <a:pPr algn="ctr" indent="0" marL="0">
+              <a:buNone/>
+            </a:pPr>
+            <a:r>
+              <a:rPr lang="en-US" sz="900" b="1" dirty="0">
+                <a:solidFill>
+                  <a:srgbClr val="9D174D"/>
+                </a:solidFill>
+                <a:latin typeface="Trebuchet MS" pitchFamily="34" charset="0"/>
+                <a:ea typeface="Trebuchet MS" pitchFamily="34" charset="-122"/>
+                <a:cs typeface="Trebuchet MS" pitchFamily="34" charset="-120"/>
+              </a:rPr>
+              <a:t>m</a:t>
+            </a:r>
+            <a:endParaRPr lang="en-US" sz="900" dirty="0"/>
+          </a:p>
+        </p:txBody>
+      </p:sp>
+      <p:sp>
+        <p:nvSpPr>
+          <p:cNvPr id="63" name="Shape 61"/>
+          <p:cNvSpPr/>
+          <p:nvPr/>
+        </p:nvSpPr>
+        <p:spPr>
+          <a:xfrm>
+            <a:off x="7297743" y="4169664"/>
+            <a:ext cx="543652" cy="475488"/>
+          </a:xfrm>
+          <a:prstGeom prst="rect">
+            <a:avLst>
+              <a:gd name="adj" fmla="val 7692"/>
+            </a:avLst>
+          </a:prstGeom>
+          <a:solidFill>
+            <a:srgbClr val="FFFFFF"/>
+          </a:solidFill>
+          <a:ln w="12700">
+            <a:solidFill>
+              <a:srgbClr val="DB2777"/>
+            </a:solidFill>
+            <a:prstDash val="solid"/>
+          </a:ln>
+        </p:spPr>
+      </p:sp>
+      <p:sp>
+        <p:nvSpPr>
+          <p:cNvPr id="64" name="Text 62"/>
+          <p:cNvSpPr/>
+          <p:nvPr/>
+        </p:nvSpPr>
+        <p:spPr>
+          <a:xfrm>
+            <a:off x="7297743" y="4169664"/>
+            <a:ext cx="543652" cy="475488"/>
+          </a:xfrm>
+          <a:prstGeom prst="rect">
+            <a:avLst/>
+          </a:prstGeom>
+          <a:noFill/>
+          <a:ln/>
+        </p:spPr>
+        <p:txBody>
+          <a:bodyPr wrap="square" lIns="0" tIns="0" rIns="0" bIns="0" rtlCol="0" anchor="ctr"/>
+          <a:lstStyle/>
+          <a:p>
+            <a:pPr algn="ctr" indent="0" marL="0">
+              <a:buNone/>
+            </a:pPr>
+            <a:r>
+              <a:rPr lang="en-US" sz="900" b="1" dirty="0">
+                <a:solidFill>
+                  <a:srgbClr val="9D174D"/>
+                </a:solidFill>
+                <a:latin typeface="Trebuchet MS" pitchFamily="34" charset="0"/>
+                <a:ea typeface="Trebuchet MS" pitchFamily="34" charset="-122"/>
+                <a:cs typeface="Trebuchet MS" pitchFamily="34" charset="-120"/>
+              </a:rPr>
+              <a:t>i</a:t>
+            </a:r>
+            <a:endParaRPr lang="en-US" sz="900" dirty="0"/>
+          </a:p>
+        </p:txBody>
+      </p:sp>
+      <p:sp>
+        <p:nvSpPr>
+          <p:cNvPr id="65" name="Shape 63"/>
+          <p:cNvSpPr/>
+          <p:nvPr/>
+        </p:nvSpPr>
+        <p:spPr>
+          <a:xfrm>
+            <a:off x="7891688" y="4169664"/>
+            <a:ext cx="543652" cy="475488"/>
+          </a:xfrm>
+          <a:prstGeom prst="rect">
+            <a:avLst>
+              <a:gd name="adj" fmla="val 7692"/>
+            </a:avLst>
+          </a:prstGeom>
+          <a:solidFill>
+            <a:srgbClr val="FFFFFF"/>
+          </a:solidFill>
+          <a:ln w="12700">
+            <a:solidFill>
+              <a:srgbClr val="DB2777"/>
+            </a:solidFill>
+            <a:prstDash val="solid"/>
+          </a:ln>
+        </p:spPr>
+      </p:sp>
+      <p:sp>
+        <p:nvSpPr>
+          <p:cNvPr id="66" name="Text 64"/>
+          <p:cNvSpPr/>
+          <p:nvPr/>
+        </p:nvSpPr>
+        <p:spPr>
+          <a:xfrm>
+            <a:off x="7891688" y="4169664"/>
+            <a:ext cx="543652" cy="475488"/>
+          </a:xfrm>
+          <a:prstGeom prst="rect">
+            <a:avLst/>
+          </a:prstGeom>
+          <a:noFill/>
+          <a:ln/>
+        </p:spPr>
+        <p:txBody>
+          <a:bodyPr wrap="square" lIns="0" tIns="0" rIns="0" bIns="0" rtlCol="0" anchor="ctr"/>
+          <a:lstStyle/>
+          <a:p>
+            <a:pPr algn="ctr" indent="0" marL="0">
+              <a:buNone/>
+            </a:pPr>
+            <a:r>
+              <a:rPr lang="en-US" sz="900" b="1" dirty="0">
+                <a:solidFill>
+                  <a:srgbClr val="9D174D"/>
+                </a:solidFill>
+                <a:latin typeface="Trebuchet MS" pitchFamily="34" charset="0"/>
+                <a:ea typeface="Trebuchet MS" pitchFamily="34" charset="-122"/>
+                <a:cs typeface="Trebuchet MS" pitchFamily="34" charset="-120"/>
+              </a:rPr>
+              <a:t>ng</a:t>
             </a:r>
             <a:endParaRPr lang="en-US" sz="900" dirty="0"/>
           </a:p>
@@ -33786,7 +34425,7 @@
                 <a:ea typeface="Calibri" pitchFamily="34" charset="-122"/>
                 <a:cs typeface="Calibri" pitchFamily="34" charset="-120"/>
               </a:rPr>
-              <a:t>Word Labs  •  wordlabs.app  •  Root: 'perform' = carry out, do, present</a:t>
+              <a:t>Word Labs  •  wordlabs.app  •  Root: 'perform' = carry out, do, or show</a:t>
             </a:r>
             <a:endParaRPr lang="en-US" sz="800" dirty="0"/>
           </a:p>
@@ -34955,7 +35594,7 @@
                 <a:ea typeface="Calibri" pitchFamily="34" charset="-122"/>
                 <a:cs typeface="Calibri" pitchFamily="34" charset="-120"/>
               </a:rPr>
-              <a:t>Word Labs  •  wordlabs.app  •  Root: 'perform' = carry out, do, present</a:t>
+              <a:t>Word Labs  •  wordlabs.app  •  Root: 'perform' = carry out, do, or show</a:t>
             </a:r>
             <a:endParaRPr lang="en-US" sz="800" dirty="0"/>
           </a:p>
@@ -36855,7 +37494,7 @@
                 <a:ea typeface="Calibri" pitchFamily="34" charset="-122"/>
                 <a:cs typeface="Calibri" pitchFamily="34" charset="-120"/>
               </a:rPr>
-              <a:t>Word Labs  •  wordlabs.app  •  Root: 'perform' = carry out, do, present</a:t>
+              <a:t>Word Labs  •  wordlabs.app  •  Root: 'perform' = carry out, do, or show</a:t>
             </a:r>
             <a:endParaRPr lang="en-US" sz="800" dirty="0"/>
           </a:p>
@@ -37019,7 +37658,7 @@
                 <a:ea typeface="Calibri" pitchFamily="34" charset="-122"/>
                 <a:cs typeface="Calibri" pitchFamily="34" charset="-120"/>
               </a:rPr>
-              <a:t>The core part of a word carrying its basic meaning. For example, 'perform' means 'carry out, do, present'.</a:t>
+              <a:t>The core part of a word carrying its basic meaning. For example, 'perform' means 'carry out, do, or show'.</a:t>
             </a:r>
             <a:endParaRPr lang="en-US" sz="1350" dirty="0"/>
           </a:p>
@@ -37639,7 +38278,7 @@
                 <a:ea typeface="Calibri" pitchFamily="34" charset="-122"/>
                 <a:cs typeface="Calibri" pitchFamily="34" charset="-120"/>
               </a:rPr>
-              <a:t>Word Labs  •  wordlabs.app  •  Root: 'perform' = carry out, do, present</a:t>
+              <a:t>Word Labs  •  wordlabs.app  •  Root: 'perform' = carry out, do, or show</a:t>
             </a:r>
             <a:endParaRPr lang="en-US" sz="800" dirty="0"/>
           </a:p>
@@ -37751,7 +38390,7 @@
                 <a:ea typeface="Calibri" pitchFamily="34" charset="-122"/>
                 <a:cs typeface="Calibri" pitchFamily="34" charset="-120"/>
               </a:rPr>
-              <a:t>1.  The word 'performer' contains the root 'perform' plus the suffix '-er' meaning 'one who'.</a:t>
+              <a:t>1.  A performer is someone who performs for an audience.</a:t>
             </a:r>
             <a:endParaRPr lang="en-US" sz="1300" dirty="0"/>
           </a:p>
@@ -37890,7 +38529,7 @@
                 <a:ea typeface="Calibri" pitchFamily="34" charset="-122"/>
                 <a:cs typeface="Calibri" pitchFamily="34" charset="-120"/>
               </a:rPr>
-              <a:t>2.  The root 'perform' comes from ancient Greek.</a:t>
+              <a:t>2.  The suffix '-ance' turns the verb perform into a noun.</a:t>
             </a:r>
             <a:endParaRPr lang="en-US" sz="1300" dirty="0"/>
           </a:p>
@@ -37913,11 +38552,11 @@
             </a:avLst>
           </a:prstGeom>
           <a:solidFill>
-            <a:srgbClr val="FEE2E2"/>
-          </a:solidFill>
-          <a:ln w="12700">
-            <a:solidFill>
-              <a:srgbClr val="DC2626"/>
+            <a:srgbClr val="DCFCE7"/>
+          </a:solidFill>
+          <a:ln w="12700">
+            <a:solidFill>
+              <a:srgbClr val="16A34A"/>
             </a:solidFill>
             <a:prstDash val="solid"/>
           </a:ln>
@@ -37950,13 +38589,13 @@
             <a:r>
               <a:rPr lang="en-US" sz="1100" b="1" dirty="0">
                 <a:solidFill>
-                  <a:srgbClr val="DC2626"/>
+                  <a:srgbClr val="16A34A"/>
                 </a:solidFill>
                 <a:latin typeface="Trebuchet MS" pitchFamily="34" charset="0"/>
                 <a:ea typeface="Trebuchet MS" pitchFamily="34" charset="-122"/>
                 <a:cs typeface="Trebuchet MS" pitchFamily="34" charset="-120"/>
               </a:rPr>
-              <a:t>FALSE</a:t>
+              <a:t>TRUE</a:t>
             </a:r>
             <a:endParaRPr lang="en-US" sz="1100" dirty="0"/>
           </a:p>
@@ -38029,7 +38668,7 @@
                 <a:ea typeface="Calibri" pitchFamily="34" charset="-122"/>
                 <a:cs typeface="Calibri" pitchFamily="34" charset="-120"/>
               </a:rPr>
-              <a:t>3.  The word 'outperform' means to do better than someone else.</a:t>
+              <a:t>3.  Outperform means to do much worse than someone else.</a:t>
             </a:r>
             <a:endParaRPr lang="en-US" sz="1300" dirty="0"/>
           </a:p>
@@ -38052,11 +38691,11 @@
             </a:avLst>
           </a:prstGeom>
           <a:solidFill>
-            <a:srgbClr val="DCFCE7"/>
-          </a:solidFill>
-          <a:ln w="12700">
-            <a:solidFill>
-              <a:srgbClr val="16A34A"/>
+            <a:srgbClr val="FEE2E2"/>
+          </a:solidFill>
+          <a:ln w="12700">
+            <a:solidFill>
+              <a:srgbClr val="DC2626"/>
             </a:solidFill>
             <a:prstDash val="solid"/>
           </a:ln>
@@ -38089,13 +38728,13 @@
             <a:r>
               <a:rPr lang="en-US" sz="1100" b="1" dirty="0">
                 <a:solidFill>
-                  <a:srgbClr val="16A34A"/>
+                  <a:srgbClr val="DC2626"/>
                 </a:solidFill>
                 <a:latin typeface="Trebuchet MS" pitchFamily="34" charset="0"/>
                 <a:ea typeface="Trebuchet MS" pitchFamily="34" charset="-122"/>
                 <a:cs typeface="Trebuchet MS" pitchFamily="34" charset="-120"/>
               </a:rPr>
-              <a:t>TRUE</a:t>
+              <a:t>FALSE</a:t>
             </a:r>
             <a:endParaRPr lang="en-US" sz="1100" dirty="0"/>
           </a:p>
@@ -38168,7 +38807,7 @@
                 <a:ea typeface="Calibri" pitchFamily="34" charset="-122"/>
                 <a:cs typeface="Calibri" pitchFamily="34" charset="-120"/>
               </a:rPr>
-              <a:t>4.  A 'performance' is a show or presentation put on for an audience.</a:t>
+              <a:t>4.  The root 'perform' comes from Ancient Greek.</a:t>
             </a:r>
             <a:endParaRPr lang="en-US" sz="1300" dirty="0"/>
           </a:p>
@@ -38191,11 +38830,11 @@
             </a:avLst>
           </a:prstGeom>
           <a:solidFill>
-            <a:srgbClr val="DCFCE7"/>
-          </a:solidFill>
-          <a:ln w="12700">
-            <a:solidFill>
-              <a:srgbClr val="16A34A"/>
+            <a:srgbClr val="FEE2E2"/>
+          </a:solidFill>
+          <a:ln w="12700">
+            <a:solidFill>
+              <a:srgbClr val="DC2626"/>
             </a:solidFill>
             <a:prstDash val="solid"/>
           </a:ln>
@@ -38228,13 +38867,13 @@
             <a:r>
               <a:rPr lang="en-US" sz="1100" b="1" dirty="0">
                 <a:solidFill>
-                  <a:srgbClr val="16A34A"/>
+                  <a:srgbClr val="DC2626"/>
                 </a:solidFill>
                 <a:latin typeface="Trebuchet MS" pitchFamily="34" charset="0"/>
                 <a:ea typeface="Trebuchet MS" pitchFamily="34" charset="-122"/>
                 <a:cs typeface="Trebuchet MS" pitchFamily="34" charset="-120"/>
               </a:rPr>
-              <a:t>TRUE</a:t>
+              <a:t>FALSE</a:t>
             </a:r>
             <a:endParaRPr lang="en-US" sz="1100" dirty="0"/>
           </a:p>
@@ -38307,7 +38946,7 @@
                 <a:ea typeface="Calibri" pitchFamily="34" charset="-122"/>
                 <a:cs typeface="Calibri" pitchFamily="34" charset="-120"/>
               </a:rPr>
-              <a:t>5.  The word 'underperform' means to do much better than expected.</a:t>
+              <a:t>5.  Underperform means to do worse than expected.</a:t>
             </a:r>
             <a:endParaRPr lang="en-US" sz="1300" dirty="0"/>
           </a:p>
@@ -38330,11 +38969,11 @@
             </a:avLst>
           </a:prstGeom>
           <a:solidFill>
-            <a:srgbClr val="FEE2E2"/>
-          </a:solidFill>
-          <a:ln w="12700">
-            <a:solidFill>
-              <a:srgbClr val="DC2626"/>
+            <a:srgbClr val="DCFCE7"/>
+          </a:solidFill>
+          <a:ln w="12700">
+            <a:solidFill>
+              <a:srgbClr val="16A34A"/>
             </a:solidFill>
             <a:prstDash val="solid"/>
           </a:ln>
@@ -38367,13 +39006,13 @@
             <a:r>
               <a:rPr lang="en-US" sz="1100" b="1" dirty="0">
                 <a:solidFill>
-                  <a:srgbClr val="DC2626"/>
+                  <a:srgbClr val="16A34A"/>
                 </a:solidFill>
                 <a:latin typeface="Trebuchet MS" pitchFamily="34" charset="0"/>
                 <a:ea typeface="Trebuchet MS" pitchFamily="34" charset="-122"/>
                 <a:cs typeface="Trebuchet MS" pitchFamily="34" charset="-120"/>
               </a:rPr>
-              <a:t>FALSE</a:t>
+              <a:t>TRUE</a:t>
             </a:r>
             <a:endParaRPr lang="en-US" sz="1100" dirty="0"/>
           </a:p>
@@ -38665,7 +39304,7 @@
                 <a:ea typeface="Calibri" pitchFamily="34" charset="-122"/>
                 <a:cs typeface="Calibri" pitchFamily="34" charset="-120"/>
               </a:rPr>
-              <a:t>Word Labs  •  wordlabs.app  •  Root: 'perform' = carry out, do, present</a:t>
+              <a:t>Word Labs  •  wordlabs.app  •  Root: 'perform' = carry out, do, or show</a:t>
             </a:r>
             <a:endParaRPr lang="en-US" sz="800" dirty="0"/>
           </a:p>
@@ -38802,7 +39441,7 @@
                 <a:ea typeface="Trebuchet MS" pitchFamily="34" charset="-122"/>
                 <a:cs typeface="Trebuchet MS" pitchFamily="34" charset="-120"/>
               </a:rPr>
-              <a:t>carry out, do, present</a:t>
+              <a:t>carry out, do, or show</a:t>
             </a:r>
             <a:endParaRPr lang="en-US" sz="2000" dirty="0"/>
           </a:p>
@@ -39634,7 +40273,7 @@
                 <a:ea typeface="Calibri" pitchFamily="34" charset="-122"/>
                 <a:cs typeface="Calibri" pitchFamily="34" charset="-120"/>
               </a:rPr>
-              <a:t>Word Labs  •  wordlabs.app  •  Root: 'perform' = carry out, do, present</a:t>
+              <a:t>Word Labs  •  wordlabs.app  •  Root: 'perform' = carry out, do, or show</a:t>
             </a:r>
             <a:endParaRPr lang="en-US" sz="800" dirty="0"/>
           </a:p>
@@ -41408,7 +42047,7 @@
                 <a:ea typeface="Calibri" pitchFamily="34" charset="-122"/>
                 <a:cs typeface="Calibri" pitchFamily="34" charset="-120"/>
               </a:rPr>
-              <a:t>Word Labs  •  wordlabs.app  •  Root: 'perform' = carry out, do, present</a:t>
+              <a:t>Word Labs  •  wordlabs.app  •  Root: 'perform' = carry out, do, or show</a:t>
             </a:r>
             <a:endParaRPr lang="en-US" sz="800" dirty="0"/>
           </a:p>
@@ -41586,7 +42225,7 @@
                 <a:ea typeface="Calibri" pitchFamily="34" charset="-122"/>
                 <a:cs typeface="Calibri" pitchFamily="34" charset="-120"/>
               </a:rPr>
-              <a:t>A person who entertains others by acting, singing, dancing, or doing another kind of show.</a:t>
+              <a:t>A person who performs, such as a singer, actor, or dancer.</a:t>
             </a:r>
             <a:endParaRPr lang="en-US" sz="1200" dirty="0"/>
           </a:p>
@@ -41725,7 +42364,7 @@
                 <a:ea typeface="Calibri" pitchFamily="34" charset="-122"/>
                 <a:cs typeface="Calibri" pitchFamily="34" charset="-120"/>
               </a:rPr>
-              <a:t>Already completed an action or put on a show in the past.</a:t>
+              <a:t>Did something or put on a show in the past.</a:t>
             </a:r>
             <a:endParaRPr lang="en-US" sz="1200" dirty="0"/>
           </a:p>
@@ -41864,7 +42503,7 @@
                 <a:ea typeface="Calibri" pitchFamily="34" charset="-122"/>
                 <a:cs typeface="Calibri" pitchFamily="34" charset="-120"/>
               </a:rPr>
-              <a:t>To carry out an action or present something to an audience, like singing or acting on stage.</a:t>
+              <a:t>To do something, like act in a play or complete a task.</a:t>
             </a:r>
             <a:endParaRPr lang="en-US" sz="1200" dirty="0"/>
           </a:p>
@@ -42142,7 +42781,7 @@
                 <a:ea typeface="Calibri" pitchFamily="34" charset="-122"/>
                 <a:cs typeface="Calibri" pitchFamily="34" charset="-120"/>
               </a:rPr>
-              <a:t>To do worse than expected or not as well as you should.</a:t>
+              <a:t>To do worse than expected or not as well as you could.</a:t>
             </a:r>
             <a:endParaRPr lang="en-US" sz="1200" dirty="0"/>
           </a:p>
@@ -42281,7 +42920,7 @@
                 <a:ea typeface="Calibri" pitchFamily="34" charset="-122"/>
                 <a:cs typeface="Calibri" pitchFamily="34" charset="-120"/>
               </a:rPr>
-              <a:t>Currently carrying out a task or presenting a show to an audience.</a:t>
+              <a:t>Currently doing or showing something to an audience.</a:t>
             </a:r>
             <a:endParaRPr lang="en-US" sz="1200" dirty="0"/>
           </a:p>
@@ -42420,7 +43059,7 @@
                 <a:ea typeface="Calibri" pitchFamily="34" charset="-122"/>
                 <a:cs typeface="Calibri" pitchFamily="34" charset="-120"/>
               </a:rPr>
-              <a:t>A show or presentation put on for an audience, such as a play, concert, or dance recital.</a:t>
+              <a:t>The act of doing something in front of others, like a concert or play.</a:t>
             </a:r>
             <a:endParaRPr lang="en-US" sz="1200" dirty="0"/>
           </a:p>
@@ -42712,7 +43351,7 @@
                 <a:ea typeface="Calibri" pitchFamily="34" charset="-122"/>
                 <a:cs typeface="Calibri" pitchFamily="34" charset="-120"/>
               </a:rPr>
-              <a:t>Word Labs  •  wordlabs.app  •  Root: 'perform' = carry out, do, present</a:t>
+              <a:t>Word Labs  •  wordlabs.app  •  Root: 'perform' = carry out, do, or show</a:t>
             </a:r>
             <a:endParaRPr lang="en-US" sz="800" dirty="0"/>
           </a:p>
@@ -42915,7 +43554,7 @@
                 <a:ea typeface="Calibri" pitchFamily="34" charset="-122"/>
                 <a:cs typeface="Calibri" pitchFamily="34" charset="-120"/>
               </a:rPr>
-              <a:t>The students were nervous before they had to perform their dance routine in front of the whole school.</a:t>
+              <a:t>The talented performer took a deep bow after the final act of the school play.</a:t>
             </a:r>
             <a:endParaRPr lang="en-US" sz="1500" dirty="0"/>
           </a:p>
@@ -43079,7 +43718,7 @@
                 <a:ea typeface="Calibri" pitchFamily="34" charset="-122"/>
                 <a:cs typeface="Calibri" pitchFamily="34" charset="-120"/>
               </a:rPr>
-              <a:t>The performer on stage dazzled the audience with her incredible acrobatic skills.</a:t>
+              <a:t>Our class will perform a short skit about Australian animals for the whole school.</a:t>
             </a:r>
             <a:endParaRPr lang="en-US" sz="1500" dirty="0"/>
           </a:p>
@@ -43243,7 +43882,7 @@
                 <a:ea typeface="Calibri" pitchFamily="34" charset="-122"/>
                 <a:cs typeface="Calibri" pitchFamily="34" charset="-120"/>
               </a:rPr>
-              <a:t>Our teacher said that if we underperform on the test, we can practise and try again next week.</a:t>
+              <a:t>The gymnast continued to outperform all of her teammates at every competition this season.</a:t>
             </a:r>
             <a:endParaRPr lang="en-US" sz="1500" dirty="0"/>
           </a:p>

--- a/output/wordlabs-perform-3day.pptx
+++ b/output/wordlabs-perform-3day.pptx
@@ -4240,7 +4240,7 @@
                 <a:ea typeface="Calibri" pitchFamily="34" charset="-122"/>
                 <a:cs typeface="Calibri" pitchFamily="34" charset="-120"/>
               </a:rPr>
-              <a:t>"carry out, do, or show"</a:t>
+              <a:t>"do; carry out"</a:t>
             </a:r>
             <a:endParaRPr lang="en-US" sz="2200" dirty="0"/>
           </a:p>
@@ -4279,7 +4279,7 @@
                 <a:ea typeface="Calibri" pitchFamily="34" charset="-122"/>
                 <a:cs typeface="Calibri" pitchFamily="34" charset="-120"/>
               </a:rPr>
-              <a:t>Origin: Latin: performare</a:t>
+              <a:t>Origin: Core English root</a:t>
             </a:r>
             <a:endParaRPr lang="en-US" sz="1300" dirty="0"/>
           </a:p>
@@ -5288,7 +5288,7 @@
                 <a:ea typeface="Calibri" pitchFamily="34" charset="-122"/>
                 <a:cs typeface="Calibri" pitchFamily="34" charset="-120"/>
               </a:rPr>
-              <a:t>Word Labs  •  wordlabs.app  •  Root: 'perform' = carry out, do, or show</a:t>
+              <a:t>Word Labs  •  wordlabs.app  •  Root: 'perform' = do; carry out</a:t>
             </a:r>
             <a:endParaRPr lang="en-US" sz="800" dirty="0"/>
           </a:p>
@@ -5622,7 +5622,7 @@
                 <a:ea typeface="Trebuchet MS" pitchFamily="34" charset="-122"/>
                 <a:cs typeface="Trebuchet MS" pitchFamily="34" charset="-120"/>
               </a:rPr>
-              <a:t>1</a:t>
+              <a:t>0</a:t>
             </a:r>
             <a:pPr algn="ctr" indent="0" marL="0">
               <a:buNone/>
@@ -5928,7 +5928,7 @@
                 <a:ea typeface="Calibri" pitchFamily="34" charset="-122"/>
                 <a:cs typeface="Calibri" pitchFamily="34" charset="-120"/>
               </a:rPr>
-              <a:t>Word Labs  •  wordlabs.app  •  Root: 'perform' = carry out, do, or show</a:t>
+              <a:t>Word Labs  •  wordlabs.app  •  Root: 'perform' = do; carry out</a:t>
             </a:r>
             <a:endParaRPr lang="en-US" sz="800" dirty="0"/>
           </a:p>
@@ -6040,7 +6040,7 @@
                 <a:ea typeface="Calibri" pitchFamily="34" charset="-122"/>
                 <a:cs typeface="Calibri" pitchFamily="34" charset="-120"/>
               </a:rPr>
-              <a:t>The </a:t>
+              <a:t>The gymnast is </a:t>
             </a:r>
             <a:pPr algn="l" indent="0" marL="0">
               <a:buNone/>
@@ -6057,7 +6057,7 @@
                 <a:ea typeface="Calibri" pitchFamily="34" charset="-122"/>
                 <a:cs typeface="Calibri" pitchFamily="34" charset="-120"/>
               </a:rPr>
-              <a:t>performance</a:t>
+              <a:t>performing</a:t>
             </a:r>
             <a:pPr algn="l" indent="0" marL="0">
               <a:buNone/>
@@ -6071,7 +6071,7 @@
                 <a:ea typeface="Calibri" pitchFamily="34" charset="-122"/>
                 <a:cs typeface="Calibri" pitchFamily="34" charset="-120"/>
               </a:rPr>
-              <a:t> was amazing, and every </a:t>
+              <a:t> a difficult routine on the beam. The team </a:t>
             </a:r>
             <a:pPr algn="l" indent="0" marL="0">
               <a:buNone/>
@@ -6088,7 +6088,7 @@
                 <a:ea typeface="Calibri" pitchFamily="34" charset="-122"/>
                 <a:cs typeface="Calibri" pitchFamily="34" charset="-120"/>
               </a:rPr>
-              <a:t>performer</a:t>
+              <a:t>underperform</a:t>
             </a:r>
             <a:pPr algn="l" indent="0" marL="0">
               <a:buNone/>
@@ -6102,7 +6102,7 @@
                 <a:ea typeface="Calibri" pitchFamily="34" charset="-122"/>
                 <a:cs typeface="Calibri" pitchFamily="34" charset="-120"/>
               </a:rPr>
-              <a:t> on stage gave their very best.</a:t>
+              <a:t>ed badly in the second half of the match.</a:t>
             </a:r>
             <a:endParaRPr lang="en-US" sz="1800" dirty="0"/>
           </a:p>
@@ -6257,7 +6257,7 @@
                 <a:ea typeface="Trebuchet MS" pitchFamily="34" charset="-122"/>
                 <a:cs typeface="Trebuchet MS" pitchFamily="34" charset="-120"/>
               </a:rPr>
-              <a:t>performance</a:t>
+              <a:t>performing</a:t>
             </a:r>
             <a:endParaRPr lang="en-US" sz="1400" dirty="0"/>
           </a:p>
@@ -6385,7 +6385,7 @@
                 <a:ea typeface="Trebuchet MS" pitchFamily="34" charset="-122"/>
                 <a:cs typeface="Trebuchet MS" pitchFamily="34" charset="-120"/>
               </a:rPr>
-              <a:t>performer</a:t>
+              <a:t>underperform</a:t>
             </a:r>
             <a:endParaRPr lang="en-US" sz="1400" dirty="0"/>
           </a:p>
@@ -6716,7 +6716,7 @@
                 <a:ea typeface="Calibri" pitchFamily="34" charset="-122"/>
                 <a:cs typeface="Calibri" pitchFamily="34" charset="-120"/>
               </a:rPr>
-              <a:t>Word Labs  •  wordlabs.app  •  Root: 'perform' = carry out, do, or show</a:t>
+              <a:t>Word Labs  •  wordlabs.app  •  Root: 'perform' = do; carry out</a:t>
             </a:r>
             <a:endParaRPr lang="en-US" sz="800" dirty="0"/>
           </a:p>
@@ -6855,7 +6855,7 @@
                 <a:ea typeface="Trebuchet MS" pitchFamily="34" charset="-122"/>
                 <a:cs typeface="Trebuchet MS" pitchFamily="34" charset="-120"/>
               </a:rPr>
-              <a:t>performance</a:t>
+              <a:t>performing</a:t>
             </a:r>
             <a:endParaRPr lang="en-US" sz="2800" dirty="0"/>
           </a:p>
@@ -7543,7 +7543,7 @@
                 <a:ea typeface="Calibri" pitchFamily="34" charset="-122"/>
                 <a:cs typeface="Calibri" pitchFamily="34" charset="-120"/>
               </a:rPr>
-              <a:t>Word Labs  •  wordlabs.app  •  Root: 'perform' = carry out, do, or show</a:t>
+              <a:t>Word Labs  •  wordlabs.app  •  Root: 'perform' = do; carry out</a:t>
             </a:r>
             <a:endParaRPr lang="en-US" sz="800" dirty="0"/>
           </a:p>
@@ -7682,7 +7682,7 @@
                 <a:ea typeface="Trebuchet MS" pitchFamily="34" charset="-122"/>
                 <a:cs typeface="Trebuchet MS" pitchFamily="34" charset="-120"/>
               </a:rPr>
-              <a:t>performance</a:t>
+              <a:t>performing</a:t>
             </a:r>
             <a:endParaRPr lang="en-US" sz="2800" dirty="0"/>
           </a:p>
@@ -7860,7 +7860,7 @@
                 <a:ea typeface="Calibri" pitchFamily="34" charset="-122"/>
                 <a:cs typeface="Calibri" pitchFamily="34" charset="-120"/>
               </a:rPr>
-              <a:t>carry out or show</a:t>
+              <a:t>do; carry out</a:t>
             </a:r>
             <a:endParaRPr lang="en-US" sz="850" dirty="0"/>
           </a:p>
@@ -7933,7 +7933,7 @@
                 <a:ea typeface="Trebuchet MS" pitchFamily="34" charset="-122"/>
                 <a:cs typeface="Trebuchet MS" pitchFamily="34" charset="-120"/>
               </a:rPr>
-              <a:t>ance</a:t>
+              <a:t>ing</a:t>
             </a:r>
             <a:endParaRPr lang="en-US" sz="1300" dirty="0"/>
           </a:p>
@@ -7972,7 +7972,7 @@
                 <a:ea typeface="Calibri" pitchFamily="34" charset="-122"/>
                 <a:cs typeface="Calibri" pitchFamily="34" charset="-120"/>
               </a:rPr>
-              <a:t>state or act of</a:t>
+              <a:t>happening now</a:t>
             </a:r>
             <a:endParaRPr lang="en-US" sz="850" dirty="0"/>
           </a:p>
@@ -8528,7 +8528,7 @@
                 <a:ea typeface="Calibri" pitchFamily="34" charset="-122"/>
                 <a:cs typeface="Calibri" pitchFamily="34" charset="-120"/>
               </a:rPr>
-              <a:t>Word Labs  •  wordlabs.app  •  Root: 'perform' = carry out, do, or show</a:t>
+              <a:t>Word Labs  •  wordlabs.app  •  Root: 'perform' = do; carry out</a:t>
             </a:r>
             <a:endParaRPr lang="en-US" sz="800" dirty="0"/>
           </a:p>
@@ -8667,7 +8667,7 @@
                 <a:ea typeface="Trebuchet MS" pitchFamily="34" charset="-122"/>
                 <a:cs typeface="Trebuchet MS" pitchFamily="34" charset="-120"/>
               </a:rPr>
-              <a:t>performance</a:t>
+              <a:t>performing</a:t>
             </a:r>
             <a:endParaRPr lang="en-US" sz="2800" dirty="0"/>
           </a:p>
@@ -8845,7 +8845,7 @@
                 <a:ea typeface="Calibri" pitchFamily="34" charset="-122"/>
                 <a:cs typeface="Calibri" pitchFamily="34" charset="-120"/>
               </a:rPr>
-              <a:t>carry out or show</a:t>
+              <a:t>do; carry out</a:t>
             </a:r>
             <a:endParaRPr lang="en-US" sz="850" dirty="0"/>
           </a:p>
@@ -8918,7 +8918,7 @@
                 <a:ea typeface="Trebuchet MS" pitchFamily="34" charset="-122"/>
                 <a:cs typeface="Trebuchet MS" pitchFamily="34" charset="-120"/>
               </a:rPr>
-              <a:t>ance</a:t>
+              <a:t>ing</a:t>
             </a:r>
             <a:endParaRPr lang="en-US" sz="1300" dirty="0"/>
           </a:p>
@@ -8957,7 +8957,7 @@
                 <a:ea typeface="Calibri" pitchFamily="34" charset="-122"/>
                 <a:cs typeface="Calibri" pitchFamily="34" charset="-120"/>
               </a:rPr>
-              <a:t>state or act of</a:t>
+              <a:t>happening now</a:t>
             </a:r>
             <a:endParaRPr lang="en-US" sz="850" dirty="0"/>
           </a:p>
@@ -9326,7 +9326,7 @@
                 <a:ea typeface="Trebuchet MS" pitchFamily="34" charset="-122"/>
                 <a:cs typeface="Trebuchet MS" pitchFamily="34" charset="-120"/>
               </a:rPr>
-              <a:t>ance</a:t>
+              <a:t>ing</a:t>
             </a:r>
             <a:endParaRPr lang="en-US" sz="1400" dirty="0"/>
           </a:p>
@@ -9750,7 +9750,7 @@
                 <a:ea typeface="Calibri" pitchFamily="34" charset="-122"/>
                 <a:cs typeface="Calibri" pitchFamily="34" charset="-120"/>
               </a:rPr>
-              <a:t>Word Labs  •  wordlabs.app  •  Root: 'perform' = carry out, do, or show</a:t>
+              <a:t>Word Labs  •  wordlabs.app  •  Root: 'perform' = do; carry out</a:t>
             </a:r>
             <a:endParaRPr lang="en-US" sz="800" dirty="0"/>
           </a:p>
@@ -9889,7 +9889,7 @@
                 <a:ea typeface="Trebuchet MS" pitchFamily="34" charset="-122"/>
                 <a:cs typeface="Trebuchet MS" pitchFamily="34" charset="-120"/>
               </a:rPr>
-              <a:t>performance</a:t>
+              <a:t>performing</a:t>
             </a:r>
             <a:endParaRPr lang="en-US" sz="2800" dirty="0"/>
           </a:p>
@@ -10067,7 +10067,7 @@
                 <a:ea typeface="Calibri" pitchFamily="34" charset="-122"/>
                 <a:cs typeface="Calibri" pitchFamily="34" charset="-120"/>
               </a:rPr>
-              <a:t>carry out or show</a:t>
+              <a:t>do; carry out</a:t>
             </a:r>
             <a:endParaRPr lang="en-US" sz="850" dirty="0"/>
           </a:p>
@@ -10140,7 +10140,7 @@
                 <a:ea typeface="Trebuchet MS" pitchFamily="34" charset="-122"/>
                 <a:cs typeface="Trebuchet MS" pitchFamily="34" charset="-120"/>
               </a:rPr>
-              <a:t>ance</a:t>
+              <a:t>ing</a:t>
             </a:r>
             <a:endParaRPr lang="en-US" sz="1300" dirty="0"/>
           </a:p>
@@ -10179,7 +10179,7 @@
                 <a:ea typeface="Calibri" pitchFamily="34" charset="-122"/>
                 <a:cs typeface="Calibri" pitchFamily="34" charset="-120"/>
               </a:rPr>
-              <a:t>state or act of</a:t>
+              <a:t>happening now</a:t>
             </a:r>
             <a:endParaRPr lang="en-US" sz="850" dirty="0"/>
           </a:p>
@@ -10548,7 +10548,7 @@
                 <a:ea typeface="Trebuchet MS" pitchFamily="34" charset="-122"/>
                 <a:cs typeface="Trebuchet MS" pitchFamily="34" charset="-120"/>
               </a:rPr>
-              <a:t>ance</a:t>
+              <a:t>ing</a:t>
             </a:r>
             <a:endParaRPr lang="en-US" sz="1400" dirty="0"/>
           </a:p>
@@ -10629,11 +10629,11 @@
         <p:spPr>
           <a:xfrm>
             <a:off x="1874520" y="4096512"/>
-            <a:ext cx="6903720" cy="804672"/>
+            <a:ext cx="6903720" cy="658368"/>
           </a:xfrm>
           <a:prstGeom prst="rect">
             <a:avLst>
-              <a:gd name="adj" fmla="val 6818"/>
+              <a:gd name="adj" fmla="val 8333"/>
             </a:avLst>
           </a:prstGeom>
           <a:solidFill>
@@ -10655,12 +10655,12 @@
         </p:nvSpPr>
         <p:spPr>
           <a:xfrm>
-            <a:off x="2023872" y="4169664"/>
-            <a:ext cx="685800" cy="384048"/>
+            <a:off x="2124837" y="4169664"/>
+            <a:ext cx="685800" cy="475488"/>
           </a:xfrm>
           <a:prstGeom prst="rect">
             <a:avLst>
-              <a:gd name="adj" fmla="val 9524"/>
+              <a:gd name="adj" fmla="val 7692"/>
             </a:avLst>
           </a:prstGeom>
           <a:solidFill>
@@ -10682,8 +10682,8 @@
         </p:nvSpPr>
         <p:spPr>
           <a:xfrm>
-            <a:off x="2023872" y="4169664"/>
-            <a:ext cx="685800" cy="384048"/>
+            <a:off x="2124837" y="4169664"/>
+            <a:ext cx="685800" cy="475488"/>
           </a:xfrm>
           <a:prstGeom prst="rect">
             <a:avLst/>
@@ -10721,12 +10721,12 @@
         </p:nvSpPr>
         <p:spPr>
           <a:xfrm>
-            <a:off x="2831592" y="4169664"/>
-            <a:ext cx="685800" cy="384048"/>
+            <a:off x="3033522" y="4169664"/>
+            <a:ext cx="685800" cy="475488"/>
           </a:xfrm>
           <a:prstGeom prst="rect">
             <a:avLst>
-              <a:gd name="adj" fmla="val 9524"/>
+              <a:gd name="adj" fmla="val 7692"/>
             </a:avLst>
           </a:prstGeom>
           <a:solidFill>
@@ -10748,8 +10748,8 @@
         </p:nvSpPr>
         <p:spPr>
           <a:xfrm>
-            <a:off x="2831592" y="4169664"/>
-            <a:ext cx="685800" cy="384048"/>
+            <a:off x="3033522" y="4169664"/>
+            <a:ext cx="685800" cy="475488"/>
           </a:xfrm>
           <a:prstGeom prst="rect">
             <a:avLst/>
@@ -10787,12 +10787,12 @@
         </p:nvSpPr>
         <p:spPr>
           <a:xfrm>
-            <a:off x="3639312" y="4169664"/>
-            <a:ext cx="685800" cy="384048"/>
+            <a:off x="3942207" y="4169664"/>
+            <a:ext cx="685800" cy="475488"/>
           </a:xfrm>
           <a:prstGeom prst="rect">
             <a:avLst>
-              <a:gd name="adj" fmla="val 9524"/>
+              <a:gd name="adj" fmla="val 7692"/>
             </a:avLst>
           </a:prstGeom>
           <a:solidFill>
@@ -10814,8 +10814,8 @@
         </p:nvSpPr>
         <p:spPr>
           <a:xfrm>
-            <a:off x="3639312" y="4169664"/>
-            <a:ext cx="685800" cy="384048"/>
+            <a:off x="3942207" y="4169664"/>
+            <a:ext cx="685800" cy="475488"/>
           </a:xfrm>
           <a:prstGeom prst="rect">
             <a:avLst/>
@@ -10853,12 +10853,12 @@
         </p:nvSpPr>
         <p:spPr>
           <a:xfrm>
-            <a:off x="4447032" y="4169664"/>
-            <a:ext cx="685800" cy="384048"/>
+            <a:off x="4850892" y="4169664"/>
+            <a:ext cx="685800" cy="475488"/>
           </a:xfrm>
           <a:prstGeom prst="rect">
             <a:avLst>
-              <a:gd name="adj" fmla="val 9524"/>
+              <a:gd name="adj" fmla="val 7692"/>
             </a:avLst>
           </a:prstGeom>
           <a:solidFill>
@@ -10880,8 +10880,8 @@
         </p:nvSpPr>
         <p:spPr>
           <a:xfrm>
-            <a:off x="4447032" y="4169664"/>
-            <a:ext cx="685800" cy="384048"/>
+            <a:off x="4850892" y="4169664"/>
+            <a:ext cx="685800" cy="475488"/>
           </a:xfrm>
           <a:prstGeom prst="rect">
             <a:avLst/>
@@ -10919,12 +10919,12 @@
         </p:nvSpPr>
         <p:spPr>
           <a:xfrm>
-            <a:off x="5254752" y="4169664"/>
-            <a:ext cx="685800" cy="384048"/>
+            <a:off x="5759577" y="4169664"/>
+            <a:ext cx="685800" cy="475488"/>
           </a:xfrm>
           <a:prstGeom prst="rect">
             <a:avLst>
-              <a:gd name="adj" fmla="val 9524"/>
+              <a:gd name="adj" fmla="val 7692"/>
             </a:avLst>
           </a:prstGeom>
           <a:solidFill>
@@ -10946,8 +10946,8 @@
         </p:nvSpPr>
         <p:spPr>
           <a:xfrm>
-            <a:off x="5254752" y="4169664"/>
-            <a:ext cx="685800" cy="384048"/>
+            <a:off x="5759577" y="4169664"/>
+            <a:ext cx="685800" cy="475488"/>
           </a:xfrm>
           <a:prstGeom prst="rect">
             <a:avLst/>
@@ -10985,12 +10985,12 @@
         </p:nvSpPr>
         <p:spPr>
           <a:xfrm>
-            <a:off x="6062472" y="4169664"/>
-            <a:ext cx="685800" cy="384048"/>
+            <a:off x="6668262" y="4169664"/>
+            <a:ext cx="685800" cy="475488"/>
           </a:xfrm>
           <a:prstGeom prst="rect">
             <a:avLst>
-              <a:gd name="adj" fmla="val 9524"/>
+              <a:gd name="adj" fmla="val 7692"/>
             </a:avLst>
           </a:prstGeom>
           <a:solidFill>
@@ -11012,8 +11012,8 @@
         </p:nvSpPr>
         <p:spPr>
           <a:xfrm>
-            <a:off x="6062472" y="4169664"/>
-            <a:ext cx="685800" cy="384048"/>
+            <a:off x="6668262" y="4169664"/>
+            <a:ext cx="685800" cy="475488"/>
           </a:xfrm>
           <a:prstGeom prst="rect">
             <a:avLst/>
@@ -11037,7 +11037,7 @@
                 <a:ea typeface="Trebuchet MS" pitchFamily="34" charset="-122"/>
                 <a:cs typeface="Trebuchet MS" pitchFamily="34" charset="-120"/>
               </a:rPr>
-              <a:t>a</a:t>
+              <a:t>i</a:t>
             </a:r>
             <a:endParaRPr lang="en-US" sz="900" dirty="0"/>
           </a:p>
@@ -11051,12 +11051,12 @@
         </p:nvSpPr>
         <p:spPr>
           <a:xfrm>
-            <a:off x="6870192" y="4169664"/>
-            <a:ext cx="685800" cy="384048"/>
+            <a:off x="7576947" y="4169664"/>
+            <a:ext cx="685800" cy="475488"/>
           </a:xfrm>
           <a:prstGeom prst="rect">
             <a:avLst>
-              <a:gd name="adj" fmla="val 9524"/>
+              <a:gd name="adj" fmla="val 7692"/>
             </a:avLst>
           </a:prstGeom>
           <a:solidFill>
@@ -11078,8 +11078,8 @@
         </p:nvSpPr>
         <p:spPr>
           <a:xfrm>
-            <a:off x="6870192" y="4169664"/>
-            <a:ext cx="685800" cy="384048"/>
+            <a:off x="7576947" y="4169664"/>
+            <a:ext cx="685800" cy="475488"/>
           </a:xfrm>
           <a:prstGeom prst="rect">
             <a:avLst/>
@@ -11103,114 +11103,9 @@
                 <a:ea typeface="Trebuchet MS" pitchFamily="34" charset="-122"/>
                 <a:cs typeface="Trebuchet MS" pitchFamily="34" charset="-120"/>
               </a:rPr>
-              <a:t>n</a:t>
+              <a:t>ng</a:t>
             </a:r>
             <a:endParaRPr lang="en-US" sz="900" dirty="0"/>
-          </a:p>
-        </p:txBody>
-      </p:sp>
-      <p:sp>
-        <p:nvSpPr>
-          <p:cNvPr id="50" name="Shape 48"/>
-          <p:cNvSpPr/>
-          <p:nvPr/>
-        </p:nvSpPr>
-        <p:spPr>
-          <a:xfrm>
-            <a:off x="7677912" y="4169664"/>
-            <a:ext cx="685800" cy="384048"/>
-          </a:xfrm>
-          <a:prstGeom prst="rect">
-            <a:avLst>
-              <a:gd name="adj" fmla="val 9524"/>
-            </a:avLst>
-          </a:prstGeom>
-          <a:solidFill>
-            <a:srgbClr val="FFFFFF"/>
-          </a:solidFill>
-          <a:ln w="12700">
-            <a:solidFill>
-              <a:srgbClr val="DB2777"/>
-            </a:solidFill>
-            <a:prstDash val="solid"/>
-          </a:ln>
-        </p:spPr>
-      </p:sp>
-      <p:sp>
-        <p:nvSpPr>
-          <p:cNvPr id="51" name="Text 49"/>
-          <p:cNvSpPr/>
-          <p:nvPr/>
-        </p:nvSpPr>
-        <p:spPr>
-          <a:xfrm>
-            <a:off x="7677912" y="4169664"/>
-            <a:ext cx="685800" cy="384048"/>
-          </a:xfrm>
-          <a:prstGeom prst="rect">
-            <a:avLst/>
-          </a:prstGeom>
-          <a:noFill/>
-          <a:ln/>
-        </p:spPr>
-        <p:txBody>
-          <a:bodyPr wrap="square" lIns="0" tIns="0" rIns="0" bIns="0" rtlCol="0" anchor="ctr"/>
-          <a:lstStyle/>
-          <a:p>
-            <a:pPr algn="ctr" indent="0" marL="0">
-              <a:buNone/>
-            </a:pPr>
-            <a:r>
-              <a:rPr lang="en-US" sz="900" b="1" dirty="0">
-                <a:solidFill>
-                  <a:srgbClr val="9D174D"/>
-                </a:solidFill>
-                <a:latin typeface="Trebuchet MS" pitchFamily="34" charset="0"/>
-                <a:ea typeface="Trebuchet MS" pitchFamily="34" charset="-122"/>
-                <a:cs typeface="Trebuchet MS" pitchFamily="34" charset="-120"/>
-              </a:rPr>
-              <a:t>ce</a:t>
-            </a:r>
-            <a:endParaRPr lang="en-US" sz="900" dirty="0"/>
-          </a:p>
-        </p:txBody>
-      </p:sp>
-      <p:sp>
-        <p:nvSpPr>
-          <p:cNvPr id="52" name="Text 50"/>
-          <p:cNvSpPr/>
-          <p:nvPr/>
-        </p:nvSpPr>
-        <p:spPr>
-          <a:xfrm>
-            <a:off x="7677912" y="4572000"/>
-            <a:ext cx="685800" cy="219456"/>
-          </a:xfrm>
-          <a:prstGeom prst="rect">
-            <a:avLst/>
-          </a:prstGeom>
-          <a:noFill/>
-          <a:ln/>
-        </p:spPr>
-        <p:txBody>
-          <a:bodyPr wrap="square" lIns="0" tIns="0" rIns="0" bIns="0" rtlCol="0" anchor="t"/>
-          <a:lstStyle/>
-          <a:p>
-            <a:pPr algn="ctr" indent="0" marL="0">
-              <a:buNone/>
-            </a:pPr>
-            <a:r>
-              <a:rPr lang="en-US" sz="750" i="1" dirty="0">
-                <a:solidFill>
-                  <a:srgbClr val="94A3B8"/>
-                </a:solidFill>
-                <a:latin typeface="Calibri" pitchFamily="34" charset="0"/>
-                <a:ea typeface="Calibri" pitchFamily="34" charset="-122"/>
-                <a:cs typeface="Calibri" pitchFamily="34" charset="-120"/>
-              </a:rPr>
-              <a:t>/s/</a:t>
-            </a:r>
-            <a:endParaRPr lang="en-US" sz="750" dirty="0"/>
           </a:p>
         </p:txBody>
       </p:sp>
@@ -11500,7 +11395,7 @@
                 <a:ea typeface="Calibri" pitchFamily="34" charset="-122"/>
                 <a:cs typeface="Calibri" pitchFamily="34" charset="-120"/>
               </a:rPr>
-              <a:t>Word Labs  •  wordlabs.app  •  Root: 'perform' = carry out, do, or show</a:t>
+              <a:t>Word Labs  •  wordlabs.app  •  Root: 'perform' = do; carry out</a:t>
             </a:r>
             <a:endParaRPr lang="en-US" sz="800" dirty="0"/>
           </a:p>
@@ -11639,7 +11534,7 @@
                 <a:ea typeface="Trebuchet MS" pitchFamily="34" charset="-122"/>
                 <a:cs typeface="Trebuchet MS" pitchFamily="34" charset="-120"/>
               </a:rPr>
-              <a:t>performer</a:t>
+              <a:t>underperform</a:t>
             </a:r>
             <a:endParaRPr lang="en-US" sz="2800" dirty="0"/>
           </a:p>
@@ -12327,7 +12222,7 @@
                 <a:ea typeface="Calibri" pitchFamily="34" charset="-122"/>
                 <a:cs typeface="Calibri" pitchFamily="34" charset="-120"/>
               </a:rPr>
-              <a:t>Word Labs  •  wordlabs.app  •  Root: 'perform' = carry out, do, or show</a:t>
+              <a:t>Word Labs  •  wordlabs.app  •  Root: 'perform' = do; carry out</a:t>
             </a:r>
             <a:endParaRPr lang="en-US" sz="800" dirty="0"/>
           </a:p>
@@ -12466,7 +12361,7 @@
                 <a:ea typeface="Trebuchet MS" pitchFamily="34" charset="-122"/>
                 <a:cs typeface="Trebuchet MS" pitchFamily="34" charset="-120"/>
               </a:rPr>
-              <a:t>performer</a:t>
+              <a:t>underperform</a:t>
             </a:r>
             <a:endParaRPr lang="en-US" sz="2800" dirty="0"/>
           </a:p>
@@ -12555,11 +12450,11 @@
             </a:avLst>
           </a:prstGeom>
           <a:solidFill>
-            <a:srgbClr val="CCFBF1"/>
+            <a:srgbClr val="DDD6FE"/>
           </a:solidFill>
           <a:ln w="19050">
             <a:solidFill>
-              <a:srgbClr val="0D9488"/>
+              <a:srgbClr val="7C3AED"/>
             </a:solidFill>
             <a:prstDash val="solid"/>
           </a:ln>
@@ -12599,13 +12494,13 @@
             <a:r>
               <a:rPr lang="en-US" sz="1300" b="1" dirty="0">
                 <a:solidFill>
-                  <a:srgbClr val="0F766E"/>
+                  <a:srgbClr val="4C1D95"/>
                 </a:solidFill>
                 <a:latin typeface="Trebuchet MS" pitchFamily="34" charset="0"/>
                 <a:ea typeface="Trebuchet MS" pitchFamily="34" charset="-122"/>
                 <a:cs typeface="Trebuchet MS" pitchFamily="34" charset="-120"/>
               </a:rPr>
-              <a:t>perform</a:t>
+              <a:t>under</a:t>
             </a:r>
             <a:endParaRPr lang="en-US" sz="1300" dirty="0"/>
           </a:p>
@@ -12644,7 +12539,7 @@
                 <a:ea typeface="Calibri" pitchFamily="34" charset="-122"/>
                 <a:cs typeface="Calibri" pitchFamily="34" charset="-120"/>
               </a:rPr>
-              <a:t>carry out or show</a:t>
+              <a:t>below</a:t>
             </a:r>
             <a:endParaRPr lang="en-US" sz="850" dirty="0"/>
           </a:p>
@@ -12667,11 +12562,11 @@
             </a:avLst>
           </a:prstGeom>
           <a:solidFill>
-            <a:srgbClr val="FCE7F3"/>
+            <a:srgbClr val="CCFBF1"/>
           </a:solidFill>
           <a:ln w="19050">
             <a:solidFill>
-              <a:srgbClr val="DB2777"/>
+              <a:srgbClr val="0D9488"/>
             </a:solidFill>
             <a:prstDash val="solid"/>
           </a:ln>
@@ -12711,13 +12606,13 @@
             <a:r>
               <a:rPr lang="en-US" sz="1300" b="1" dirty="0">
                 <a:solidFill>
-                  <a:srgbClr val="9D174D"/>
+                  <a:srgbClr val="0F766E"/>
                 </a:solidFill>
                 <a:latin typeface="Trebuchet MS" pitchFamily="34" charset="0"/>
                 <a:ea typeface="Trebuchet MS" pitchFamily="34" charset="-122"/>
                 <a:cs typeface="Trebuchet MS" pitchFamily="34" charset="-120"/>
               </a:rPr>
-              <a:t>er</a:t>
+              <a:t>perform</a:t>
             </a:r>
             <a:endParaRPr lang="en-US" sz="1300" dirty="0"/>
           </a:p>
@@ -12756,7 +12651,7 @@
                 <a:ea typeface="Calibri" pitchFamily="34" charset="-122"/>
                 <a:cs typeface="Calibri" pitchFamily="34" charset="-120"/>
               </a:rPr>
-              <a:t>one who does</a:t>
+              <a:t>do; carry out</a:t>
             </a:r>
             <a:endParaRPr lang="en-US" sz="850" dirty="0"/>
           </a:p>
@@ -13312,7 +13207,7 @@
                 <a:ea typeface="Calibri" pitchFamily="34" charset="-122"/>
                 <a:cs typeface="Calibri" pitchFamily="34" charset="-120"/>
               </a:rPr>
-              <a:t>Word Labs  •  wordlabs.app  •  Root: 'perform' = carry out, do, or show</a:t>
+              <a:t>Word Labs  •  wordlabs.app  •  Root: 'perform' = do; carry out</a:t>
             </a:r>
             <a:endParaRPr lang="en-US" sz="800" dirty="0"/>
           </a:p>
@@ -13451,7 +13346,7 @@
                 <a:ea typeface="Trebuchet MS" pitchFamily="34" charset="-122"/>
                 <a:cs typeface="Trebuchet MS" pitchFamily="34" charset="-120"/>
               </a:rPr>
-              <a:t>performer</a:t>
+              <a:t>underperform</a:t>
             </a:r>
             <a:endParaRPr lang="en-US" sz="2800" dirty="0"/>
           </a:p>
@@ -13540,11 +13435,11 @@
             </a:avLst>
           </a:prstGeom>
           <a:solidFill>
-            <a:srgbClr val="CCFBF1"/>
+            <a:srgbClr val="DDD6FE"/>
           </a:solidFill>
           <a:ln w="19050">
             <a:solidFill>
-              <a:srgbClr val="0D9488"/>
+              <a:srgbClr val="7C3AED"/>
             </a:solidFill>
             <a:prstDash val="solid"/>
           </a:ln>
@@ -13584,13 +13479,13 @@
             <a:r>
               <a:rPr lang="en-US" sz="1300" b="1" dirty="0">
                 <a:solidFill>
-                  <a:srgbClr val="0F766E"/>
+                  <a:srgbClr val="4C1D95"/>
                 </a:solidFill>
                 <a:latin typeface="Trebuchet MS" pitchFamily="34" charset="0"/>
                 <a:ea typeface="Trebuchet MS" pitchFamily="34" charset="-122"/>
                 <a:cs typeface="Trebuchet MS" pitchFamily="34" charset="-120"/>
               </a:rPr>
-              <a:t>perform</a:t>
+              <a:t>under</a:t>
             </a:r>
             <a:endParaRPr lang="en-US" sz="1300" dirty="0"/>
           </a:p>
@@ -13629,7 +13524,7 @@
                 <a:ea typeface="Calibri" pitchFamily="34" charset="-122"/>
                 <a:cs typeface="Calibri" pitchFamily="34" charset="-120"/>
               </a:rPr>
-              <a:t>carry out or show</a:t>
+              <a:t>below</a:t>
             </a:r>
             <a:endParaRPr lang="en-US" sz="850" dirty="0"/>
           </a:p>
@@ -13652,11 +13547,11 @@
             </a:avLst>
           </a:prstGeom>
           <a:solidFill>
-            <a:srgbClr val="FCE7F3"/>
+            <a:srgbClr val="CCFBF1"/>
           </a:solidFill>
           <a:ln w="19050">
             <a:solidFill>
-              <a:srgbClr val="DB2777"/>
+              <a:srgbClr val="0D9488"/>
             </a:solidFill>
             <a:prstDash val="solid"/>
           </a:ln>
@@ -13696,13 +13591,13 @@
             <a:r>
               <a:rPr lang="en-US" sz="1300" b="1" dirty="0">
                 <a:solidFill>
-                  <a:srgbClr val="9D174D"/>
+                  <a:srgbClr val="0F766E"/>
                 </a:solidFill>
                 <a:latin typeface="Trebuchet MS" pitchFamily="34" charset="0"/>
                 <a:ea typeface="Trebuchet MS" pitchFamily="34" charset="-122"/>
                 <a:cs typeface="Trebuchet MS" pitchFamily="34" charset="-120"/>
               </a:rPr>
-              <a:t>er</a:t>
+              <a:t>perform</a:t>
             </a:r>
             <a:endParaRPr lang="en-US" sz="1300" dirty="0"/>
           </a:p>
@@ -13741,7 +13636,7 @@
                 <a:ea typeface="Calibri" pitchFamily="34" charset="-122"/>
                 <a:cs typeface="Calibri" pitchFamily="34" charset="-120"/>
               </a:rPr>
-              <a:t>one who does</a:t>
+              <a:t>do; carry out</a:t>
             </a:r>
             <a:endParaRPr lang="en-US" sz="850" dirty="0"/>
           </a:p>
@@ -13848,8 +13743,8 @@
         </p:nvSpPr>
         <p:spPr>
           <a:xfrm>
-            <a:off x="2313432" y="3364992"/>
-            <a:ext cx="1645920" cy="475488"/>
+            <a:off x="1975104" y="3364992"/>
+            <a:ext cx="1554480" cy="475488"/>
           </a:xfrm>
           <a:prstGeom prst="rect">
             <a:avLst>
@@ -13875,8 +13770,8 @@
         </p:nvSpPr>
         <p:spPr>
           <a:xfrm>
-            <a:off x="2313432" y="3364992"/>
-            <a:ext cx="1645920" cy="475488"/>
+            <a:off x="1975104" y="3364992"/>
+            <a:ext cx="1554480" cy="475488"/>
           </a:xfrm>
           <a:prstGeom prst="rect">
             <a:avLst/>
@@ -13900,7 +13795,7 @@
                 <a:ea typeface="Trebuchet MS" pitchFamily="34" charset="-122"/>
                 <a:cs typeface="Trebuchet MS" pitchFamily="34" charset="-120"/>
               </a:rPr>
-              <a:t>per</a:t>
+              <a:t>un</a:t>
             </a:r>
             <a:endParaRPr lang="en-US" sz="1400" dirty="0"/>
           </a:p>
@@ -13914,8 +13809,8 @@
         </p:nvSpPr>
         <p:spPr>
           <a:xfrm>
-            <a:off x="3959352" y="3364992"/>
-            <a:ext cx="411480" cy="475488"/>
+            <a:off x="3529584" y="3364992"/>
+            <a:ext cx="73152" cy="475488"/>
           </a:xfrm>
           <a:prstGeom prst="rect">
             <a:avLst/>
@@ -13953,8 +13848,8 @@
         </p:nvSpPr>
         <p:spPr>
           <a:xfrm>
-            <a:off x="4370832" y="3364992"/>
-            <a:ext cx="1645920" cy="475488"/>
+            <a:off x="3602736" y="3364992"/>
+            <a:ext cx="1554480" cy="475488"/>
           </a:xfrm>
           <a:prstGeom prst="rect">
             <a:avLst>
@@ -13980,8 +13875,8 @@
         </p:nvSpPr>
         <p:spPr>
           <a:xfrm>
-            <a:off x="4370832" y="3364992"/>
-            <a:ext cx="1645920" cy="475488"/>
+            <a:off x="3602736" y="3364992"/>
+            <a:ext cx="1554480" cy="475488"/>
           </a:xfrm>
           <a:prstGeom prst="rect">
             <a:avLst/>
@@ -14005,7 +13900,7 @@
                 <a:ea typeface="Trebuchet MS" pitchFamily="34" charset="-122"/>
                 <a:cs typeface="Trebuchet MS" pitchFamily="34" charset="-120"/>
               </a:rPr>
-              <a:t>form</a:t>
+              <a:t>der</a:t>
             </a:r>
             <a:endParaRPr lang="en-US" sz="1400" dirty="0"/>
           </a:p>
@@ -14019,8 +13914,8 @@
         </p:nvSpPr>
         <p:spPr>
           <a:xfrm>
-            <a:off x="6016752" y="3364992"/>
-            <a:ext cx="411480" cy="475488"/>
+            <a:off x="5157216" y="3364992"/>
+            <a:ext cx="73152" cy="475488"/>
           </a:xfrm>
           <a:prstGeom prst="rect">
             <a:avLst/>
@@ -14058,8 +13953,8 @@
         </p:nvSpPr>
         <p:spPr>
           <a:xfrm>
-            <a:off x="6428232" y="3364992"/>
-            <a:ext cx="1645920" cy="475488"/>
+            <a:off x="5230368" y="3364992"/>
+            <a:ext cx="1554480" cy="475488"/>
           </a:xfrm>
           <a:prstGeom prst="rect">
             <a:avLst>
@@ -14085,8 +13980,8 @@
         </p:nvSpPr>
         <p:spPr>
           <a:xfrm>
-            <a:off x="6428232" y="3364992"/>
-            <a:ext cx="1645920" cy="475488"/>
+            <a:off x="5230368" y="3364992"/>
+            <a:ext cx="1554480" cy="475488"/>
           </a:xfrm>
           <a:prstGeom prst="rect">
             <a:avLst/>
@@ -14110,7 +14005,7 @@
                 <a:ea typeface="Trebuchet MS" pitchFamily="34" charset="-122"/>
                 <a:cs typeface="Trebuchet MS" pitchFamily="34" charset="-120"/>
               </a:rPr>
-              <a:t>er</a:t>
+              <a:t>per</a:t>
             </a:r>
             <a:endParaRPr lang="en-US" sz="1400" dirty="0"/>
           </a:p>
@@ -14118,7 +14013,112 @@
       </p:sp>
       <p:sp>
         <p:nvSpPr>
-          <p:cNvPr id="33" name="Shape 31"/>
+          <p:cNvPr id="33" name="Text 31"/>
+          <p:cNvSpPr/>
+          <p:nvPr/>
+        </p:nvSpPr>
+        <p:spPr>
+          <a:xfrm>
+            <a:off x="6784848" y="3364992"/>
+            <a:ext cx="73152" cy="475488"/>
+          </a:xfrm>
+          <a:prstGeom prst="rect">
+            <a:avLst/>
+          </a:prstGeom>
+          <a:noFill/>
+          <a:ln/>
+        </p:spPr>
+        <p:txBody>
+          <a:bodyPr wrap="square" lIns="0" tIns="0" rIns="0" bIns="0" rtlCol="0" anchor="ctr"/>
+          <a:lstStyle/>
+          <a:p>
+            <a:pPr algn="ctr" indent="0" marL="0">
+              <a:buNone/>
+            </a:pPr>
+            <a:r>
+              <a:rPr lang="en-US" sz="1600" b="1" dirty="0">
+                <a:solidFill>
+                  <a:srgbClr val="0D9488"/>
+                </a:solidFill>
+                <a:latin typeface="Trebuchet MS" pitchFamily="34" charset="0"/>
+                <a:ea typeface="Trebuchet MS" pitchFamily="34" charset="-122"/>
+                <a:cs typeface="Trebuchet MS" pitchFamily="34" charset="-120"/>
+              </a:rPr>
+              <a:t>·</a:t>
+            </a:r>
+            <a:endParaRPr lang="en-US" sz="1600" dirty="0"/>
+          </a:p>
+        </p:txBody>
+      </p:sp>
+      <p:sp>
+        <p:nvSpPr>
+          <p:cNvPr id="34" name="Shape 32"/>
+          <p:cNvSpPr/>
+          <p:nvPr/>
+        </p:nvSpPr>
+        <p:spPr>
+          <a:xfrm>
+            <a:off x="6858000" y="3364992"/>
+            <a:ext cx="1554480" cy="475488"/>
+          </a:xfrm>
+          <a:prstGeom prst="rect">
+            <a:avLst>
+              <a:gd name="adj" fmla="val 9615"/>
+            </a:avLst>
+          </a:prstGeom>
+          <a:solidFill>
+            <a:srgbClr val="FFFFFF"/>
+          </a:solidFill>
+          <a:ln w="12700">
+            <a:solidFill>
+              <a:srgbClr val="0D9488"/>
+            </a:solidFill>
+            <a:prstDash val="solid"/>
+          </a:ln>
+        </p:spPr>
+      </p:sp>
+      <p:sp>
+        <p:nvSpPr>
+          <p:cNvPr id="35" name="Text 33"/>
+          <p:cNvSpPr/>
+          <p:nvPr/>
+        </p:nvSpPr>
+        <p:spPr>
+          <a:xfrm>
+            <a:off x="6858000" y="3364992"/>
+            <a:ext cx="1554480" cy="475488"/>
+          </a:xfrm>
+          <a:prstGeom prst="rect">
+            <a:avLst/>
+          </a:prstGeom>
+          <a:noFill/>
+          <a:ln/>
+        </p:spPr>
+        <p:txBody>
+          <a:bodyPr wrap="square" lIns="0" tIns="0" rIns="0" bIns="0" rtlCol="0" anchor="ctr"/>
+          <a:lstStyle/>
+          <a:p>
+            <a:pPr algn="ctr" indent="0" marL="0">
+              <a:buNone/>
+            </a:pPr>
+            <a:r>
+              <a:rPr lang="en-US" sz="1400" b="1" dirty="0">
+                <a:solidFill>
+                  <a:srgbClr val="0D9488"/>
+                </a:solidFill>
+                <a:latin typeface="Trebuchet MS" pitchFamily="34" charset="0"/>
+                <a:ea typeface="Trebuchet MS" pitchFamily="34" charset="-122"/>
+                <a:cs typeface="Trebuchet MS" pitchFamily="34" charset="-120"/>
+              </a:rPr>
+              <a:t>form</a:t>
+            </a:r>
+            <a:endParaRPr lang="en-US" sz="1400" dirty="0"/>
+          </a:p>
+        </p:txBody>
+      </p:sp>
+      <p:sp>
+        <p:nvSpPr>
+          <p:cNvPr id="36" name="Shape 34"/>
           <p:cNvSpPr/>
           <p:nvPr/>
         </p:nvSpPr>
@@ -14145,7 +14145,7 @@
       </p:sp>
       <p:sp>
         <p:nvSpPr>
-          <p:cNvPr id="34" name="Text 32"/>
+          <p:cNvPr id="37" name="Text 35"/>
           <p:cNvSpPr/>
           <p:nvPr/>
         </p:nvSpPr>
@@ -14184,7 +14184,7 @@
       </p:sp>
       <p:sp>
         <p:nvSpPr>
-          <p:cNvPr id="35" name="Shape 33"/>
+          <p:cNvPr id="38" name="Shape 36"/>
           <p:cNvSpPr/>
           <p:nvPr/>
         </p:nvSpPr>
@@ -14211,7 +14211,7 @@
       </p:sp>
       <p:sp>
         <p:nvSpPr>
-          <p:cNvPr id="36" name="Text 34"/>
+          <p:cNvPr id="39" name="Text 37"/>
           <p:cNvSpPr/>
           <p:nvPr/>
         </p:nvSpPr>
@@ -14443,7 +14443,7 @@
                 <a:ea typeface="Calibri" pitchFamily="34" charset="-122"/>
                 <a:cs typeface="Calibri" pitchFamily="34" charset="-120"/>
               </a:rPr>
-              <a:t>Root 'perform' — carry out, do, or show</a:t>
+              <a:t>Root 'perform' — do; carry out</a:t>
             </a:r>
             <a:endParaRPr lang="en-US" sz="1600" dirty="0"/>
           </a:p>
@@ -14799,7 +14799,7 @@
                 <a:ea typeface="Calibri" pitchFamily="34" charset="-122"/>
                 <a:cs typeface="Calibri" pitchFamily="34" charset="-120"/>
               </a:rPr>
-              <a:t>Word Labs  •  wordlabs.app  •  Root: 'perform' = carry out, do, or show</a:t>
+              <a:t>Word Labs  •  wordlabs.app  •  Root: 'perform' = do; carry out</a:t>
             </a:r>
             <a:endParaRPr lang="en-US" sz="800" dirty="0"/>
           </a:p>
@@ -14938,7 +14938,7 @@
                 <a:ea typeface="Trebuchet MS" pitchFamily="34" charset="-122"/>
                 <a:cs typeface="Trebuchet MS" pitchFamily="34" charset="-120"/>
               </a:rPr>
-              <a:t>performer</a:t>
+              <a:t>underperform</a:t>
             </a:r>
             <a:endParaRPr lang="en-US" sz="2800" dirty="0"/>
           </a:p>
@@ -15027,11 +15027,11 @@
             </a:avLst>
           </a:prstGeom>
           <a:solidFill>
-            <a:srgbClr val="CCFBF1"/>
+            <a:srgbClr val="DDD6FE"/>
           </a:solidFill>
           <a:ln w="19050">
             <a:solidFill>
-              <a:srgbClr val="0D9488"/>
+              <a:srgbClr val="7C3AED"/>
             </a:solidFill>
             <a:prstDash val="solid"/>
           </a:ln>
@@ -15071,13 +15071,13 @@
             <a:r>
               <a:rPr lang="en-US" sz="1300" b="1" dirty="0">
                 <a:solidFill>
-                  <a:srgbClr val="0F766E"/>
+                  <a:srgbClr val="4C1D95"/>
                 </a:solidFill>
                 <a:latin typeface="Trebuchet MS" pitchFamily="34" charset="0"/>
                 <a:ea typeface="Trebuchet MS" pitchFamily="34" charset="-122"/>
                 <a:cs typeface="Trebuchet MS" pitchFamily="34" charset="-120"/>
               </a:rPr>
-              <a:t>perform</a:t>
+              <a:t>under</a:t>
             </a:r>
             <a:endParaRPr lang="en-US" sz="1300" dirty="0"/>
           </a:p>
@@ -15116,7 +15116,7 @@
                 <a:ea typeface="Calibri" pitchFamily="34" charset="-122"/>
                 <a:cs typeface="Calibri" pitchFamily="34" charset="-120"/>
               </a:rPr>
-              <a:t>carry out or show</a:t>
+              <a:t>below</a:t>
             </a:r>
             <a:endParaRPr lang="en-US" sz="850" dirty="0"/>
           </a:p>
@@ -15139,11 +15139,11 @@
             </a:avLst>
           </a:prstGeom>
           <a:solidFill>
-            <a:srgbClr val="FCE7F3"/>
+            <a:srgbClr val="CCFBF1"/>
           </a:solidFill>
           <a:ln w="19050">
             <a:solidFill>
-              <a:srgbClr val="DB2777"/>
+              <a:srgbClr val="0D9488"/>
             </a:solidFill>
             <a:prstDash val="solid"/>
           </a:ln>
@@ -15183,13 +15183,13 @@
             <a:r>
               <a:rPr lang="en-US" sz="1300" b="1" dirty="0">
                 <a:solidFill>
-                  <a:srgbClr val="9D174D"/>
+                  <a:srgbClr val="0F766E"/>
                 </a:solidFill>
                 <a:latin typeface="Trebuchet MS" pitchFamily="34" charset="0"/>
                 <a:ea typeface="Trebuchet MS" pitchFamily="34" charset="-122"/>
                 <a:cs typeface="Trebuchet MS" pitchFamily="34" charset="-120"/>
               </a:rPr>
-              <a:t>er</a:t>
+              <a:t>perform</a:t>
             </a:r>
             <a:endParaRPr lang="en-US" sz="1300" dirty="0"/>
           </a:p>
@@ -15228,7 +15228,7 @@
                 <a:ea typeface="Calibri" pitchFamily="34" charset="-122"/>
                 <a:cs typeface="Calibri" pitchFamily="34" charset="-120"/>
               </a:rPr>
-              <a:t>one who does</a:t>
+              <a:t>do; carry out</a:t>
             </a:r>
             <a:endParaRPr lang="en-US" sz="850" dirty="0"/>
           </a:p>
@@ -15335,8 +15335,8 @@
         </p:nvSpPr>
         <p:spPr>
           <a:xfrm>
-            <a:off x="2313432" y="3364992"/>
-            <a:ext cx="1645920" cy="475488"/>
+            <a:off x="1975104" y="3364992"/>
+            <a:ext cx="1554480" cy="475488"/>
           </a:xfrm>
           <a:prstGeom prst="rect">
             <a:avLst>
@@ -15362,8 +15362,8 @@
         </p:nvSpPr>
         <p:spPr>
           <a:xfrm>
-            <a:off x="2313432" y="3364992"/>
-            <a:ext cx="1645920" cy="475488"/>
+            <a:off x="1975104" y="3364992"/>
+            <a:ext cx="1554480" cy="475488"/>
           </a:xfrm>
           <a:prstGeom prst="rect">
             <a:avLst/>
@@ -15387,7 +15387,7 @@
                 <a:ea typeface="Trebuchet MS" pitchFamily="34" charset="-122"/>
                 <a:cs typeface="Trebuchet MS" pitchFamily="34" charset="-120"/>
               </a:rPr>
-              <a:t>per</a:t>
+              <a:t>un</a:t>
             </a:r>
             <a:endParaRPr lang="en-US" sz="1400" dirty="0"/>
           </a:p>
@@ -15401,8 +15401,8 @@
         </p:nvSpPr>
         <p:spPr>
           <a:xfrm>
-            <a:off x="3959352" y="3364992"/>
-            <a:ext cx="411480" cy="475488"/>
+            <a:off x="3529584" y="3364992"/>
+            <a:ext cx="73152" cy="475488"/>
           </a:xfrm>
           <a:prstGeom prst="rect">
             <a:avLst/>
@@ -15440,8 +15440,8 @@
         </p:nvSpPr>
         <p:spPr>
           <a:xfrm>
-            <a:off x="4370832" y="3364992"/>
-            <a:ext cx="1645920" cy="475488"/>
+            <a:off x="3602736" y="3364992"/>
+            <a:ext cx="1554480" cy="475488"/>
           </a:xfrm>
           <a:prstGeom prst="rect">
             <a:avLst>
@@ -15467,8 +15467,8 @@
         </p:nvSpPr>
         <p:spPr>
           <a:xfrm>
-            <a:off x="4370832" y="3364992"/>
-            <a:ext cx="1645920" cy="475488"/>
+            <a:off x="3602736" y="3364992"/>
+            <a:ext cx="1554480" cy="475488"/>
           </a:xfrm>
           <a:prstGeom prst="rect">
             <a:avLst/>
@@ -15492,7 +15492,7 @@
                 <a:ea typeface="Trebuchet MS" pitchFamily="34" charset="-122"/>
                 <a:cs typeface="Trebuchet MS" pitchFamily="34" charset="-120"/>
               </a:rPr>
-              <a:t>form</a:t>
+              <a:t>der</a:t>
             </a:r>
             <a:endParaRPr lang="en-US" sz="1400" dirty="0"/>
           </a:p>
@@ -15506,8 +15506,8 @@
         </p:nvSpPr>
         <p:spPr>
           <a:xfrm>
-            <a:off x="6016752" y="3364992"/>
-            <a:ext cx="411480" cy="475488"/>
+            <a:off x="5157216" y="3364992"/>
+            <a:ext cx="73152" cy="475488"/>
           </a:xfrm>
           <a:prstGeom prst="rect">
             <a:avLst/>
@@ -15545,8 +15545,8 @@
         </p:nvSpPr>
         <p:spPr>
           <a:xfrm>
-            <a:off x="6428232" y="3364992"/>
-            <a:ext cx="1645920" cy="475488"/>
+            <a:off x="5230368" y="3364992"/>
+            <a:ext cx="1554480" cy="475488"/>
           </a:xfrm>
           <a:prstGeom prst="rect">
             <a:avLst>
@@ -15572,8 +15572,8 @@
         </p:nvSpPr>
         <p:spPr>
           <a:xfrm>
-            <a:off x="6428232" y="3364992"/>
-            <a:ext cx="1645920" cy="475488"/>
+            <a:off x="5230368" y="3364992"/>
+            <a:ext cx="1554480" cy="475488"/>
           </a:xfrm>
           <a:prstGeom prst="rect">
             <a:avLst/>
@@ -15597,7 +15597,7 @@
                 <a:ea typeface="Trebuchet MS" pitchFamily="34" charset="-122"/>
                 <a:cs typeface="Trebuchet MS" pitchFamily="34" charset="-120"/>
               </a:rPr>
-              <a:t>er</a:t>
+              <a:t>per</a:t>
             </a:r>
             <a:endParaRPr lang="en-US" sz="1400" dirty="0"/>
           </a:p>
@@ -15605,7 +15605,112 @@
       </p:sp>
       <p:sp>
         <p:nvSpPr>
-          <p:cNvPr id="33" name="Shape 31"/>
+          <p:cNvPr id="33" name="Text 31"/>
+          <p:cNvSpPr/>
+          <p:nvPr/>
+        </p:nvSpPr>
+        <p:spPr>
+          <a:xfrm>
+            <a:off x="6784848" y="3364992"/>
+            <a:ext cx="73152" cy="475488"/>
+          </a:xfrm>
+          <a:prstGeom prst="rect">
+            <a:avLst/>
+          </a:prstGeom>
+          <a:noFill/>
+          <a:ln/>
+        </p:spPr>
+        <p:txBody>
+          <a:bodyPr wrap="square" lIns="0" tIns="0" rIns="0" bIns="0" rtlCol="0" anchor="ctr"/>
+          <a:lstStyle/>
+          <a:p>
+            <a:pPr algn="ctr" indent="0" marL="0">
+              <a:buNone/>
+            </a:pPr>
+            <a:r>
+              <a:rPr lang="en-US" sz="1600" b="1" dirty="0">
+                <a:solidFill>
+                  <a:srgbClr val="0D9488"/>
+                </a:solidFill>
+                <a:latin typeface="Trebuchet MS" pitchFamily="34" charset="0"/>
+                <a:ea typeface="Trebuchet MS" pitchFamily="34" charset="-122"/>
+                <a:cs typeface="Trebuchet MS" pitchFamily="34" charset="-120"/>
+              </a:rPr>
+              <a:t>·</a:t>
+            </a:r>
+            <a:endParaRPr lang="en-US" sz="1600" dirty="0"/>
+          </a:p>
+        </p:txBody>
+      </p:sp>
+      <p:sp>
+        <p:nvSpPr>
+          <p:cNvPr id="34" name="Shape 32"/>
+          <p:cNvSpPr/>
+          <p:nvPr/>
+        </p:nvSpPr>
+        <p:spPr>
+          <a:xfrm>
+            <a:off x="6858000" y="3364992"/>
+            <a:ext cx="1554480" cy="475488"/>
+          </a:xfrm>
+          <a:prstGeom prst="rect">
+            <a:avLst>
+              <a:gd name="adj" fmla="val 9615"/>
+            </a:avLst>
+          </a:prstGeom>
+          <a:solidFill>
+            <a:srgbClr val="FFFFFF"/>
+          </a:solidFill>
+          <a:ln w="12700">
+            <a:solidFill>
+              <a:srgbClr val="0D9488"/>
+            </a:solidFill>
+            <a:prstDash val="solid"/>
+          </a:ln>
+        </p:spPr>
+      </p:sp>
+      <p:sp>
+        <p:nvSpPr>
+          <p:cNvPr id="35" name="Text 33"/>
+          <p:cNvSpPr/>
+          <p:nvPr/>
+        </p:nvSpPr>
+        <p:spPr>
+          <a:xfrm>
+            <a:off x="6858000" y="3364992"/>
+            <a:ext cx="1554480" cy="475488"/>
+          </a:xfrm>
+          <a:prstGeom prst="rect">
+            <a:avLst/>
+          </a:prstGeom>
+          <a:noFill/>
+          <a:ln/>
+        </p:spPr>
+        <p:txBody>
+          <a:bodyPr wrap="square" lIns="0" tIns="0" rIns="0" bIns="0" rtlCol="0" anchor="ctr"/>
+          <a:lstStyle/>
+          <a:p>
+            <a:pPr algn="ctr" indent="0" marL="0">
+              <a:buNone/>
+            </a:pPr>
+            <a:r>
+              <a:rPr lang="en-US" sz="1400" b="1" dirty="0">
+                <a:solidFill>
+                  <a:srgbClr val="0D9488"/>
+                </a:solidFill>
+                <a:latin typeface="Trebuchet MS" pitchFamily="34" charset="0"/>
+                <a:ea typeface="Trebuchet MS" pitchFamily="34" charset="-122"/>
+                <a:cs typeface="Trebuchet MS" pitchFamily="34" charset="-120"/>
+              </a:rPr>
+              <a:t>form</a:t>
+            </a:r>
+            <a:endParaRPr lang="en-US" sz="1400" dirty="0"/>
+          </a:p>
+        </p:txBody>
+      </p:sp>
+      <p:sp>
+        <p:nvSpPr>
+          <p:cNvPr id="36" name="Shape 34"/>
           <p:cNvSpPr/>
           <p:nvPr/>
         </p:nvSpPr>
@@ -15632,7 +15737,7 @@
       </p:sp>
       <p:sp>
         <p:nvSpPr>
-          <p:cNvPr id="34" name="Text 32"/>
+          <p:cNvPr id="37" name="Text 35"/>
           <p:cNvSpPr/>
           <p:nvPr/>
         </p:nvSpPr>
@@ -15671,7 +15776,7 @@
       </p:sp>
       <p:sp>
         <p:nvSpPr>
-          <p:cNvPr id="35" name="Shape 33"/>
+          <p:cNvPr id="38" name="Shape 36"/>
           <p:cNvSpPr/>
           <p:nvPr/>
         </p:nvSpPr>
@@ -15698,14 +15803,14 @@
       </p:sp>
       <p:sp>
         <p:nvSpPr>
-          <p:cNvPr id="36" name="Shape 34"/>
-          <p:cNvSpPr/>
-          <p:nvPr/>
-        </p:nvSpPr>
-        <p:spPr>
-          <a:xfrm>
-            <a:off x="2254649" y="4169664"/>
-            <a:ext cx="685800" cy="475488"/>
+          <p:cNvPr id="39" name="Shape 37"/>
+          <p:cNvSpPr/>
+          <p:nvPr/>
+        </p:nvSpPr>
+        <p:spPr>
+          <a:xfrm>
+            <a:off x="1951330" y="4169664"/>
+            <a:ext cx="676656" cy="475488"/>
           </a:xfrm>
           <a:prstGeom prst="rect">
             <a:avLst>
@@ -15725,14 +15830,14 @@
       </p:sp>
       <p:sp>
         <p:nvSpPr>
-          <p:cNvPr id="37" name="Text 35"/>
-          <p:cNvSpPr/>
-          <p:nvPr/>
-        </p:nvSpPr>
-        <p:spPr>
-          <a:xfrm>
-            <a:off x="2254649" y="4169664"/>
-            <a:ext cx="685800" cy="475488"/>
+          <p:cNvPr id="40" name="Text 38"/>
+          <p:cNvSpPr/>
+          <p:nvPr/>
+        </p:nvSpPr>
+        <p:spPr>
+          <a:xfrm>
+            <a:off x="1951330" y="4169664"/>
+            <a:ext cx="676656" cy="475488"/>
           </a:xfrm>
           <a:prstGeom prst="rect">
             <a:avLst/>
@@ -15756,7 +15861,7 @@
                 <a:ea typeface="Trebuchet MS" pitchFamily="34" charset="-122"/>
                 <a:cs typeface="Trebuchet MS" pitchFamily="34" charset="-120"/>
               </a:rPr>
-              <a:t>p</a:t>
+              <a:t>u</a:t>
             </a:r>
             <a:endParaRPr lang="en-US" sz="900" dirty="0"/>
           </a:p>
@@ -15764,14 +15869,14 @@
       </p:sp>
       <p:sp>
         <p:nvSpPr>
-          <p:cNvPr id="38" name="Shape 36"/>
-          <p:cNvSpPr/>
-          <p:nvPr/>
-        </p:nvSpPr>
-        <p:spPr>
-          <a:xfrm>
-            <a:off x="3293146" y="4169664"/>
-            <a:ext cx="685800" cy="475488"/>
+          <p:cNvPr id="41" name="Shape 39"/>
+          <p:cNvSpPr/>
+          <p:nvPr/>
+        </p:nvSpPr>
+        <p:spPr>
+          <a:xfrm>
+            <a:off x="2677363" y="4169664"/>
+            <a:ext cx="676656" cy="475488"/>
           </a:xfrm>
           <a:prstGeom prst="rect">
             <a:avLst>
@@ -15791,14 +15896,14 @@
       </p:sp>
       <p:sp>
         <p:nvSpPr>
-          <p:cNvPr id="39" name="Text 37"/>
-          <p:cNvSpPr/>
-          <p:nvPr/>
-        </p:nvSpPr>
-        <p:spPr>
-          <a:xfrm>
-            <a:off x="3293146" y="4169664"/>
-            <a:ext cx="685800" cy="475488"/>
+          <p:cNvPr id="42" name="Text 40"/>
+          <p:cNvSpPr/>
+          <p:nvPr/>
+        </p:nvSpPr>
+        <p:spPr>
+          <a:xfrm>
+            <a:off x="2677363" y="4169664"/>
+            <a:ext cx="676656" cy="475488"/>
           </a:xfrm>
           <a:prstGeom prst="rect">
             <a:avLst/>
@@ -15822,7 +15927,7 @@
                 <a:ea typeface="Trebuchet MS" pitchFamily="34" charset="-122"/>
                 <a:cs typeface="Trebuchet MS" pitchFamily="34" charset="-120"/>
               </a:rPr>
-              <a:t>er</a:t>
+              <a:t>n</a:t>
             </a:r>
             <a:endParaRPr lang="en-US" sz="900" dirty="0"/>
           </a:p>
@@ -15830,14 +15935,14 @@
       </p:sp>
       <p:sp>
         <p:nvSpPr>
-          <p:cNvPr id="40" name="Shape 38"/>
-          <p:cNvSpPr/>
-          <p:nvPr/>
-        </p:nvSpPr>
-        <p:spPr>
-          <a:xfrm>
-            <a:off x="4331643" y="4169664"/>
-            <a:ext cx="685800" cy="475488"/>
+          <p:cNvPr id="43" name="Shape 41"/>
+          <p:cNvSpPr/>
+          <p:nvPr/>
+        </p:nvSpPr>
+        <p:spPr>
+          <a:xfrm>
+            <a:off x="3403397" y="4169664"/>
+            <a:ext cx="676656" cy="475488"/>
           </a:xfrm>
           <a:prstGeom prst="rect">
             <a:avLst>
@@ -15857,14 +15962,14 @@
       </p:sp>
       <p:sp>
         <p:nvSpPr>
-          <p:cNvPr id="41" name="Text 39"/>
-          <p:cNvSpPr/>
-          <p:nvPr/>
-        </p:nvSpPr>
-        <p:spPr>
-          <a:xfrm>
-            <a:off x="4331643" y="4169664"/>
-            <a:ext cx="685800" cy="475488"/>
+          <p:cNvPr id="44" name="Text 42"/>
+          <p:cNvSpPr/>
+          <p:nvPr/>
+        </p:nvSpPr>
+        <p:spPr>
+          <a:xfrm>
+            <a:off x="3403397" y="4169664"/>
+            <a:ext cx="676656" cy="475488"/>
           </a:xfrm>
           <a:prstGeom prst="rect">
             <a:avLst/>
@@ -15888,7 +15993,7 @@
                 <a:ea typeface="Trebuchet MS" pitchFamily="34" charset="-122"/>
                 <a:cs typeface="Trebuchet MS" pitchFamily="34" charset="-120"/>
               </a:rPr>
-              <a:t>f</a:t>
+              <a:t>d</a:t>
             </a:r>
             <a:endParaRPr lang="en-US" sz="900" dirty="0"/>
           </a:p>
@@ -15896,14 +16001,14 @@
       </p:sp>
       <p:sp>
         <p:nvSpPr>
-          <p:cNvPr id="42" name="Shape 40"/>
-          <p:cNvSpPr/>
-          <p:nvPr/>
-        </p:nvSpPr>
-        <p:spPr>
-          <a:xfrm>
-            <a:off x="5370141" y="4169664"/>
-            <a:ext cx="685800" cy="475488"/>
+          <p:cNvPr id="45" name="Shape 43"/>
+          <p:cNvSpPr/>
+          <p:nvPr/>
+        </p:nvSpPr>
+        <p:spPr>
+          <a:xfrm>
+            <a:off x="4129430" y="4169664"/>
+            <a:ext cx="676656" cy="475488"/>
           </a:xfrm>
           <a:prstGeom prst="rect">
             <a:avLst>
@@ -15923,14 +16028,14 @@
       </p:sp>
       <p:sp>
         <p:nvSpPr>
-          <p:cNvPr id="43" name="Text 41"/>
-          <p:cNvSpPr/>
-          <p:nvPr/>
-        </p:nvSpPr>
-        <p:spPr>
-          <a:xfrm>
-            <a:off x="5370141" y="4169664"/>
-            <a:ext cx="685800" cy="475488"/>
+          <p:cNvPr id="46" name="Text 44"/>
+          <p:cNvSpPr/>
+          <p:nvPr/>
+        </p:nvSpPr>
+        <p:spPr>
+          <a:xfrm>
+            <a:off x="4129430" y="4169664"/>
+            <a:ext cx="676656" cy="475488"/>
           </a:xfrm>
           <a:prstGeom prst="rect">
             <a:avLst/>
@@ -15954,7 +16059,7 @@
                 <a:ea typeface="Trebuchet MS" pitchFamily="34" charset="-122"/>
                 <a:cs typeface="Trebuchet MS" pitchFamily="34" charset="-120"/>
               </a:rPr>
-              <a:t>or</a:t>
+              <a:t>er</a:t>
             </a:r>
             <a:endParaRPr lang="en-US" sz="900" dirty="0"/>
           </a:p>
@@ -15962,14 +16067,14 @@
       </p:sp>
       <p:sp>
         <p:nvSpPr>
-          <p:cNvPr id="44" name="Shape 42"/>
-          <p:cNvSpPr/>
-          <p:nvPr/>
-        </p:nvSpPr>
-        <p:spPr>
-          <a:xfrm>
-            <a:off x="6408638" y="4169664"/>
-            <a:ext cx="685800" cy="475488"/>
+          <p:cNvPr id="47" name="Shape 45"/>
+          <p:cNvSpPr/>
+          <p:nvPr/>
+        </p:nvSpPr>
+        <p:spPr>
+          <a:xfrm>
+            <a:off x="4855464" y="4169664"/>
+            <a:ext cx="676656" cy="475488"/>
           </a:xfrm>
           <a:prstGeom prst="rect">
             <a:avLst>
@@ -15989,14 +16094,14 @@
       </p:sp>
       <p:sp>
         <p:nvSpPr>
-          <p:cNvPr id="45" name="Text 43"/>
-          <p:cNvSpPr/>
-          <p:nvPr/>
-        </p:nvSpPr>
-        <p:spPr>
-          <a:xfrm>
-            <a:off x="6408638" y="4169664"/>
-            <a:ext cx="685800" cy="475488"/>
+          <p:cNvPr id="48" name="Text 46"/>
+          <p:cNvSpPr/>
+          <p:nvPr/>
+        </p:nvSpPr>
+        <p:spPr>
+          <a:xfrm>
+            <a:off x="4855464" y="4169664"/>
+            <a:ext cx="676656" cy="475488"/>
           </a:xfrm>
           <a:prstGeom prst="rect">
             <a:avLst/>
@@ -16020,7 +16125,7 @@
                 <a:ea typeface="Trebuchet MS" pitchFamily="34" charset="-122"/>
                 <a:cs typeface="Trebuchet MS" pitchFamily="34" charset="-120"/>
               </a:rPr>
-              <a:t>m</a:t>
+              <a:t>p</a:t>
             </a:r>
             <a:endParaRPr lang="en-US" sz="900" dirty="0"/>
           </a:p>
@@ -16028,14 +16133,14 @@
       </p:sp>
       <p:sp>
         <p:nvSpPr>
-          <p:cNvPr id="46" name="Shape 44"/>
-          <p:cNvSpPr/>
-          <p:nvPr/>
-        </p:nvSpPr>
-        <p:spPr>
-          <a:xfrm>
-            <a:off x="7447135" y="4169664"/>
-            <a:ext cx="685800" cy="475488"/>
+          <p:cNvPr id="49" name="Shape 47"/>
+          <p:cNvSpPr/>
+          <p:nvPr/>
+        </p:nvSpPr>
+        <p:spPr>
+          <a:xfrm>
+            <a:off x="5581498" y="4169664"/>
+            <a:ext cx="676656" cy="475488"/>
           </a:xfrm>
           <a:prstGeom prst="rect">
             <a:avLst>
@@ -16055,14 +16160,14 @@
       </p:sp>
       <p:sp>
         <p:nvSpPr>
-          <p:cNvPr id="47" name="Text 45"/>
-          <p:cNvSpPr/>
-          <p:nvPr/>
-        </p:nvSpPr>
-        <p:spPr>
-          <a:xfrm>
-            <a:off x="7447135" y="4169664"/>
-            <a:ext cx="685800" cy="475488"/>
+          <p:cNvPr id="50" name="Text 48"/>
+          <p:cNvSpPr/>
+          <p:nvPr/>
+        </p:nvSpPr>
+        <p:spPr>
+          <a:xfrm>
+            <a:off x="5581498" y="4169664"/>
+            <a:ext cx="676656" cy="475488"/>
           </a:xfrm>
           <a:prstGeom prst="rect">
             <a:avLst/>
@@ -16087,6 +16192,204 @@
                 <a:cs typeface="Trebuchet MS" pitchFamily="34" charset="-120"/>
               </a:rPr>
               <a:t>er</a:t>
+            </a:r>
+            <a:endParaRPr lang="en-US" sz="900" dirty="0"/>
+          </a:p>
+        </p:txBody>
+      </p:sp>
+      <p:sp>
+        <p:nvSpPr>
+          <p:cNvPr id="51" name="Shape 49"/>
+          <p:cNvSpPr/>
+          <p:nvPr/>
+        </p:nvSpPr>
+        <p:spPr>
+          <a:xfrm>
+            <a:off x="6307531" y="4169664"/>
+            <a:ext cx="676656" cy="475488"/>
+          </a:xfrm>
+          <a:prstGeom prst="rect">
+            <a:avLst>
+              <a:gd name="adj" fmla="val 7692"/>
+            </a:avLst>
+          </a:prstGeom>
+          <a:solidFill>
+            <a:srgbClr val="FFFFFF"/>
+          </a:solidFill>
+          <a:ln w="12700">
+            <a:solidFill>
+              <a:srgbClr val="DB2777"/>
+            </a:solidFill>
+            <a:prstDash val="solid"/>
+          </a:ln>
+        </p:spPr>
+      </p:sp>
+      <p:sp>
+        <p:nvSpPr>
+          <p:cNvPr id="52" name="Text 50"/>
+          <p:cNvSpPr/>
+          <p:nvPr/>
+        </p:nvSpPr>
+        <p:spPr>
+          <a:xfrm>
+            <a:off x="6307531" y="4169664"/>
+            <a:ext cx="676656" cy="475488"/>
+          </a:xfrm>
+          <a:prstGeom prst="rect">
+            <a:avLst/>
+          </a:prstGeom>
+          <a:noFill/>
+          <a:ln/>
+        </p:spPr>
+        <p:txBody>
+          <a:bodyPr wrap="square" lIns="0" tIns="0" rIns="0" bIns="0" rtlCol="0" anchor="ctr"/>
+          <a:lstStyle/>
+          <a:p>
+            <a:pPr algn="ctr" indent="0" marL="0">
+              <a:buNone/>
+            </a:pPr>
+            <a:r>
+              <a:rPr lang="en-US" sz="900" b="1" dirty="0">
+                <a:solidFill>
+                  <a:srgbClr val="9D174D"/>
+                </a:solidFill>
+                <a:latin typeface="Trebuchet MS" pitchFamily="34" charset="0"/>
+                <a:ea typeface="Trebuchet MS" pitchFamily="34" charset="-122"/>
+                <a:cs typeface="Trebuchet MS" pitchFamily="34" charset="-120"/>
+              </a:rPr>
+              <a:t>f</a:t>
+            </a:r>
+            <a:endParaRPr lang="en-US" sz="900" dirty="0"/>
+          </a:p>
+        </p:txBody>
+      </p:sp>
+      <p:sp>
+        <p:nvSpPr>
+          <p:cNvPr id="53" name="Shape 51"/>
+          <p:cNvSpPr/>
+          <p:nvPr/>
+        </p:nvSpPr>
+        <p:spPr>
+          <a:xfrm>
+            <a:off x="7033565" y="4169664"/>
+            <a:ext cx="676656" cy="475488"/>
+          </a:xfrm>
+          <a:prstGeom prst="rect">
+            <a:avLst>
+              <a:gd name="adj" fmla="val 7692"/>
+            </a:avLst>
+          </a:prstGeom>
+          <a:solidFill>
+            <a:srgbClr val="FFFFFF"/>
+          </a:solidFill>
+          <a:ln w="12700">
+            <a:solidFill>
+              <a:srgbClr val="DB2777"/>
+            </a:solidFill>
+            <a:prstDash val="solid"/>
+          </a:ln>
+        </p:spPr>
+      </p:sp>
+      <p:sp>
+        <p:nvSpPr>
+          <p:cNvPr id="54" name="Text 52"/>
+          <p:cNvSpPr/>
+          <p:nvPr/>
+        </p:nvSpPr>
+        <p:spPr>
+          <a:xfrm>
+            <a:off x="7033565" y="4169664"/>
+            <a:ext cx="676656" cy="475488"/>
+          </a:xfrm>
+          <a:prstGeom prst="rect">
+            <a:avLst/>
+          </a:prstGeom>
+          <a:noFill/>
+          <a:ln/>
+        </p:spPr>
+        <p:txBody>
+          <a:bodyPr wrap="square" lIns="0" tIns="0" rIns="0" bIns="0" rtlCol="0" anchor="ctr"/>
+          <a:lstStyle/>
+          <a:p>
+            <a:pPr algn="ctr" indent="0" marL="0">
+              <a:buNone/>
+            </a:pPr>
+            <a:r>
+              <a:rPr lang="en-US" sz="900" b="1" dirty="0">
+                <a:solidFill>
+                  <a:srgbClr val="9D174D"/>
+                </a:solidFill>
+                <a:latin typeface="Trebuchet MS" pitchFamily="34" charset="0"/>
+                <a:ea typeface="Trebuchet MS" pitchFamily="34" charset="-122"/>
+                <a:cs typeface="Trebuchet MS" pitchFamily="34" charset="-120"/>
+              </a:rPr>
+              <a:t>or</a:t>
+            </a:r>
+            <a:endParaRPr lang="en-US" sz="900" dirty="0"/>
+          </a:p>
+        </p:txBody>
+      </p:sp>
+      <p:sp>
+        <p:nvSpPr>
+          <p:cNvPr id="55" name="Shape 53"/>
+          <p:cNvSpPr/>
+          <p:nvPr/>
+        </p:nvSpPr>
+        <p:spPr>
+          <a:xfrm>
+            <a:off x="7759598" y="4169664"/>
+            <a:ext cx="676656" cy="475488"/>
+          </a:xfrm>
+          <a:prstGeom prst="rect">
+            <a:avLst>
+              <a:gd name="adj" fmla="val 7692"/>
+            </a:avLst>
+          </a:prstGeom>
+          <a:solidFill>
+            <a:srgbClr val="FFFFFF"/>
+          </a:solidFill>
+          <a:ln w="12700">
+            <a:solidFill>
+              <a:srgbClr val="DB2777"/>
+            </a:solidFill>
+            <a:prstDash val="solid"/>
+          </a:ln>
+        </p:spPr>
+      </p:sp>
+      <p:sp>
+        <p:nvSpPr>
+          <p:cNvPr id="56" name="Text 54"/>
+          <p:cNvSpPr/>
+          <p:nvPr/>
+        </p:nvSpPr>
+        <p:spPr>
+          <a:xfrm>
+            <a:off x="7759598" y="4169664"/>
+            <a:ext cx="676656" cy="475488"/>
+          </a:xfrm>
+          <a:prstGeom prst="rect">
+            <a:avLst/>
+          </a:prstGeom>
+          <a:noFill/>
+          <a:ln/>
+        </p:spPr>
+        <p:txBody>
+          <a:bodyPr wrap="square" lIns="0" tIns="0" rIns="0" bIns="0" rtlCol="0" anchor="ctr"/>
+          <a:lstStyle/>
+          <a:p>
+            <a:pPr algn="ctr" indent="0" marL="0">
+              <a:buNone/>
+            </a:pPr>
+            <a:r>
+              <a:rPr lang="en-US" sz="900" b="1" dirty="0">
+                <a:solidFill>
+                  <a:srgbClr val="9D174D"/>
+                </a:solidFill>
+                <a:latin typeface="Trebuchet MS" pitchFamily="34" charset="0"/>
+                <a:ea typeface="Trebuchet MS" pitchFamily="34" charset="-122"/>
+                <a:cs typeface="Trebuchet MS" pitchFamily="34" charset="-120"/>
+              </a:rPr>
+              <a:t>m</a:t>
             </a:r>
             <a:endParaRPr lang="en-US" sz="900" dirty="0"/>
           </a:p>
@@ -16660,7 +16963,7 @@
                 <a:ea typeface="Calibri" pitchFamily="34" charset="-122"/>
                 <a:cs typeface="Calibri" pitchFamily="34" charset="-120"/>
               </a:rPr>
-              <a:t>Word Labs  •  wordlabs.app  •  Root: 'perform' = carry out, do, or show</a:t>
+              <a:t>Word Labs  •  wordlabs.app  •  Root: 'perform' = do; carry out</a:t>
             </a:r>
             <a:endParaRPr lang="en-US" sz="800" dirty="0"/>
           </a:p>
@@ -16994,7 +17297,7 @@
                 <a:ea typeface="Trebuchet MS" pitchFamily="34" charset="-122"/>
                 <a:cs typeface="Trebuchet MS" pitchFamily="34" charset="-120"/>
               </a:rPr>
-              <a:t>2</a:t>
+              <a:t>0</a:t>
             </a:r>
             <a:pPr algn="ctr" indent="0" marL="0">
               <a:buNone/>
@@ -17008,7 +17311,7 @@
                 <a:ea typeface="Trebuchet MS" pitchFamily="34" charset="-122"/>
                 <a:cs typeface="Trebuchet MS" pitchFamily="34" charset="-120"/>
               </a:rPr>
-              <a:t>  punctuation marks</a:t>
+              <a:t>  punctuation mark</a:t>
             </a:r>
             <a:endParaRPr lang="en-US" sz="2800" dirty="0"/>
           </a:p>
@@ -17300,7 +17603,7 @@
                 <a:ea typeface="Calibri" pitchFamily="34" charset="-122"/>
                 <a:cs typeface="Calibri" pitchFamily="34" charset="-120"/>
               </a:rPr>
-              <a:t>Word Labs  •  wordlabs.app  •  Root: 'perform' = carry out, do, or show</a:t>
+              <a:t>Word Labs  •  wordlabs.app  •  Root: 'perform' = do; carry out</a:t>
             </a:r>
             <a:endParaRPr lang="en-US" sz="800" dirty="0"/>
           </a:p>
@@ -17412,7 +17715,7 @@
                 <a:ea typeface="Calibri" pitchFamily="34" charset="-122"/>
                 <a:cs typeface="Calibri" pitchFamily="34" charset="-120"/>
               </a:rPr>
-              <a:t>The </a:t>
+              <a:t>The stock market </a:t>
             </a:r>
             <a:pPr algn="l" indent="0" marL="0">
               <a:buNone/>
@@ -17429,7 +17732,7 @@
                 <a:ea typeface="Calibri" pitchFamily="34" charset="-122"/>
                 <a:cs typeface="Calibri" pitchFamily="34" charset="-120"/>
               </a:rPr>
-              <a:t>outperforming</a:t>
+              <a:t>underperformed</a:t>
             </a:r>
             <a:pPr algn="l" indent="0" marL="0">
               <a:buNone/>
@@ -17443,7 +17746,7 @@
                 <a:ea typeface="Calibri" pitchFamily="34" charset="-122"/>
                 <a:cs typeface="Calibri" pitchFamily="34" charset="-120"/>
               </a:rPr>
-              <a:t> students </a:t>
+              <a:t> compared to analysts' predictions. The audience clapped loudly after the dancers' </a:t>
             </a:r>
             <a:pPr algn="l" indent="0" marL="0">
               <a:buNone/>
@@ -17460,7 +17763,7 @@
                 <a:ea typeface="Calibri" pitchFamily="34" charset="-122"/>
                 <a:cs typeface="Calibri" pitchFamily="34" charset="-120"/>
               </a:rPr>
-              <a:t>performed</a:t>
+              <a:t>performance</a:t>
             </a:r>
             <a:pPr algn="l" indent="0" marL="0">
               <a:buNone/>
@@ -17474,7 +17777,7 @@
                 <a:ea typeface="Calibri" pitchFamily="34" charset="-122"/>
                 <a:cs typeface="Calibri" pitchFamily="34" charset="-120"/>
               </a:rPr>
-              <a:t> brilliantly; their </a:t>
+              <a:t>. The theatre hosted several </a:t>
             </a:r>
             <a:pPr algn="l" indent="0" marL="0">
               <a:buNone/>
@@ -17491,7 +17794,7 @@
                 <a:ea typeface="Calibri" pitchFamily="34" charset="-122"/>
                 <a:cs typeface="Calibri" pitchFamily="34" charset="-120"/>
               </a:rPr>
-              <a:t>underperforming</a:t>
+              <a:t>performances</a:t>
             </a:r>
             <a:pPr algn="l" indent="0" marL="0">
               <a:buNone/>
@@ -17505,7 +17808,7 @@
                 <a:ea typeface="Calibri" pitchFamily="34" charset="-122"/>
                 <a:cs typeface="Calibri" pitchFamily="34" charset="-120"/>
               </a:rPr>
-              <a:t> rivals were left speechless.</a:t>
+              <a:t> of the play throughout the week.</a:t>
             </a:r>
             <a:endParaRPr lang="en-US" sz="1800" dirty="0"/>
           </a:p>
@@ -17660,7 +17963,7 @@
                 <a:ea typeface="Trebuchet MS" pitchFamily="34" charset="-122"/>
                 <a:cs typeface="Trebuchet MS" pitchFamily="34" charset="-120"/>
               </a:rPr>
-              <a:t>outperforming</a:t>
+              <a:t>underperformed</a:t>
             </a:r>
             <a:endParaRPr lang="en-US" sz="1400" dirty="0"/>
           </a:p>
@@ -17788,7 +18091,7 @@
                 <a:ea typeface="Trebuchet MS" pitchFamily="34" charset="-122"/>
                 <a:cs typeface="Trebuchet MS" pitchFamily="34" charset="-120"/>
               </a:rPr>
-              <a:t>performed</a:t>
+              <a:t>performance</a:t>
             </a:r>
             <a:endParaRPr lang="en-US" sz="1400" dirty="0"/>
           </a:p>
@@ -17916,7 +18219,7 @@
                 <a:ea typeface="Trebuchet MS" pitchFamily="34" charset="-122"/>
                 <a:cs typeface="Trebuchet MS" pitchFamily="34" charset="-120"/>
               </a:rPr>
-              <a:t>underperforming</a:t>
+              <a:t>performances</a:t>
             </a:r>
             <a:endParaRPr lang="en-US" sz="1400" dirty="0"/>
           </a:p>
@@ -18247,7 +18550,7 @@
                 <a:ea typeface="Calibri" pitchFamily="34" charset="-122"/>
                 <a:cs typeface="Calibri" pitchFamily="34" charset="-120"/>
               </a:rPr>
-              <a:t>Word Labs  •  wordlabs.app  •  Root: 'perform' = carry out, do, or show</a:t>
+              <a:t>Word Labs  •  wordlabs.app  •  Root: 'perform' = do; carry out</a:t>
             </a:r>
             <a:endParaRPr lang="en-US" sz="800" dirty="0"/>
           </a:p>
@@ -18386,7 +18689,7 @@
                 <a:ea typeface="Trebuchet MS" pitchFamily="34" charset="-122"/>
                 <a:cs typeface="Trebuchet MS" pitchFamily="34" charset="-120"/>
               </a:rPr>
-              <a:t>outperforming</a:t>
+              <a:t>underperformed</a:t>
             </a:r>
             <a:endParaRPr lang="en-US" sz="2800" dirty="0"/>
           </a:p>
@@ -19074,7 +19377,7 @@
                 <a:ea typeface="Calibri" pitchFamily="34" charset="-122"/>
                 <a:cs typeface="Calibri" pitchFamily="34" charset="-120"/>
               </a:rPr>
-              <a:t>Word Labs  •  wordlabs.app  •  Root: 'perform' = carry out, do, or show</a:t>
+              <a:t>Word Labs  •  wordlabs.app  •  Root: 'perform' = do; carry out</a:t>
             </a:r>
             <a:endParaRPr lang="en-US" sz="800" dirty="0"/>
           </a:p>
@@ -19213,7 +19516,7 @@
                 <a:ea typeface="Trebuchet MS" pitchFamily="34" charset="-122"/>
                 <a:cs typeface="Trebuchet MS" pitchFamily="34" charset="-120"/>
               </a:rPr>
-              <a:t>outperforming</a:t>
+              <a:t>underperformed</a:t>
             </a:r>
             <a:endParaRPr lang="en-US" sz="2800" dirty="0"/>
           </a:p>
@@ -19352,7 +19655,7 @@
                 <a:ea typeface="Trebuchet MS" pitchFamily="34" charset="-122"/>
                 <a:cs typeface="Trebuchet MS" pitchFamily="34" charset="-120"/>
               </a:rPr>
-              <a:t>out</a:t>
+              <a:t>under</a:t>
             </a:r>
             <a:endParaRPr lang="en-US" sz="1300" dirty="0"/>
           </a:p>
@@ -19391,7 +19694,7 @@
                 <a:ea typeface="Calibri" pitchFamily="34" charset="-122"/>
                 <a:cs typeface="Calibri" pitchFamily="34" charset="-120"/>
               </a:rPr>
-              <a:t>beyond or better than</a:t>
+              <a:t>below</a:t>
             </a:r>
             <a:endParaRPr lang="en-US" sz="850" dirty="0"/>
           </a:p>
@@ -19503,7 +19806,7 @@
                 <a:ea typeface="Calibri" pitchFamily="34" charset="-122"/>
                 <a:cs typeface="Calibri" pitchFamily="34" charset="-120"/>
               </a:rPr>
-              <a:t>carry out or show</a:t>
+              <a:t>do; carry out</a:t>
             </a:r>
             <a:endParaRPr lang="en-US" sz="850" dirty="0"/>
           </a:p>
@@ -19576,7 +19879,7 @@
                 <a:ea typeface="Trebuchet MS" pitchFamily="34" charset="-122"/>
                 <a:cs typeface="Trebuchet MS" pitchFamily="34" charset="-120"/>
               </a:rPr>
-              <a:t>ing</a:t>
+              <a:t>ed</a:t>
             </a:r>
             <a:endParaRPr lang="en-US" sz="1300" dirty="0"/>
           </a:p>
@@ -19615,7 +19918,7 @@
                 <a:ea typeface="Calibri" pitchFamily="34" charset="-122"/>
                 <a:cs typeface="Calibri" pitchFamily="34" charset="-120"/>
               </a:rPr>
-              <a:t>in the process of</a:t>
+              <a:t>past tense</a:t>
             </a:r>
             <a:endParaRPr lang="en-US" sz="850" dirty="0"/>
           </a:p>
@@ -20171,7 +20474,7 @@
                 <a:ea typeface="Calibri" pitchFamily="34" charset="-122"/>
                 <a:cs typeface="Calibri" pitchFamily="34" charset="-120"/>
               </a:rPr>
-              <a:t>Word Labs  •  wordlabs.app  •  Root: 'perform' = carry out, do, or show</a:t>
+              <a:t>Word Labs  •  wordlabs.app  •  Root: 'perform' = do; carry out</a:t>
             </a:r>
             <a:endParaRPr lang="en-US" sz="800" dirty="0"/>
           </a:p>
@@ -20310,7 +20613,7 @@
                 <a:ea typeface="Trebuchet MS" pitchFamily="34" charset="-122"/>
                 <a:cs typeface="Trebuchet MS" pitchFamily="34" charset="-120"/>
               </a:rPr>
-              <a:t>outperforming</a:t>
+              <a:t>underperformed</a:t>
             </a:r>
             <a:endParaRPr lang="en-US" sz="2800" dirty="0"/>
           </a:p>
@@ -20449,7 +20752,7 @@
                 <a:ea typeface="Trebuchet MS" pitchFamily="34" charset="-122"/>
                 <a:cs typeface="Trebuchet MS" pitchFamily="34" charset="-120"/>
               </a:rPr>
-              <a:t>out</a:t>
+              <a:t>under</a:t>
             </a:r>
             <a:endParaRPr lang="en-US" sz="1300" dirty="0"/>
           </a:p>
@@ -20488,7 +20791,7 @@
                 <a:ea typeface="Calibri" pitchFamily="34" charset="-122"/>
                 <a:cs typeface="Calibri" pitchFamily="34" charset="-120"/>
               </a:rPr>
-              <a:t>beyond or better than</a:t>
+              <a:t>below</a:t>
             </a:r>
             <a:endParaRPr lang="en-US" sz="850" dirty="0"/>
           </a:p>
@@ -20600,7 +20903,7 @@
                 <a:ea typeface="Calibri" pitchFamily="34" charset="-122"/>
                 <a:cs typeface="Calibri" pitchFamily="34" charset="-120"/>
               </a:rPr>
-              <a:t>carry out or show</a:t>
+              <a:t>do; carry out</a:t>
             </a:r>
             <a:endParaRPr lang="en-US" sz="850" dirty="0"/>
           </a:p>
@@ -20673,7 +20976,7 @@
                 <a:ea typeface="Trebuchet MS" pitchFamily="34" charset="-122"/>
                 <a:cs typeface="Trebuchet MS" pitchFamily="34" charset="-120"/>
               </a:rPr>
-              <a:t>ing</a:t>
+              <a:t>ed</a:t>
             </a:r>
             <a:endParaRPr lang="en-US" sz="1300" dirty="0"/>
           </a:p>
@@ -20712,7 +21015,7 @@
                 <a:ea typeface="Calibri" pitchFamily="34" charset="-122"/>
                 <a:cs typeface="Calibri" pitchFamily="34" charset="-120"/>
               </a:rPr>
-              <a:t>in the process of</a:t>
+              <a:t>past tense</a:t>
             </a:r>
             <a:endParaRPr lang="en-US" sz="850" dirty="0"/>
           </a:p>
@@ -20871,7 +21174,7 @@
                 <a:ea typeface="Trebuchet MS" pitchFamily="34" charset="-122"/>
                 <a:cs typeface="Trebuchet MS" pitchFamily="34" charset="-120"/>
               </a:rPr>
-              <a:t>out</a:t>
+              <a:t>un</a:t>
             </a:r>
             <a:endParaRPr lang="en-US" sz="1400" dirty="0"/>
           </a:p>
@@ -20976,7 +21279,7 @@
                 <a:ea typeface="Trebuchet MS" pitchFamily="34" charset="-122"/>
                 <a:cs typeface="Trebuchet MS" pitchFamily="34" charset="-120"/>
               </a:rPr>
-              <a:t>per</a:t>
+              <a:t>der</a:t>
             </a:r>
             <a:endParaRPr lang="en-US" sz="1400" dirty="0"/>
           </a:p>
@@ -21081,7 +21384,7 @@
                 <a:ea typeface="Trebuchet MS" pitchFamily="34" charset="-122"/>
                 <a:cs typeface="Trebuchet MS" pitchFamily="34" charset="-120"/>
               </a:rPr>
-              <a:t>form</a:t>
+              <a:t>per</a:t>
             </a:r>
             <a:endParaRPr lang="en-US" sz="1400" dirty="0"/>
           </a:p>
@@ -21186,7 +21489,7 @@
                 <a:ea typeface="Trebuchet MS" pitchFamily="34" charset="-122"/>
                 <a:cs typeface="Trebuchet MS" pitchFamily="34" charset="-120"/>
               </a:rPr>
-              <a:t>ing</a:t>
+              <a:t>formed</a:t>
             </a:r>
             <a:endParaRPr lang="en-US" sz="1400" dirty="0"/>
           </a:p>
@@ -21610,7 +21913,7 @@
                 <a:ea typeface="Calibri" pitchFamily="34" charset="-122"/>
                 <a:cs typeface="Calibri" pitchFamily="34" charset="-120"/>
               </a:rPr>
-              <a:t>Word Labs  •  wordlabs.app  •  Root: 'perform' = carry out, do, or show</a:t>
+              <a:t>Word Labs  •  wordlabs.app  •  Root: 'perform' = do; carry out</a:t>
             </a:r>
             <a:endParaRPr lang="en-US" sz="800" dirty="0"/>
           </a:p>
@@ -21749,7 +22052,7 @@
                 <a:ea typeface="Trebuchet MS" pitchFamily="34" charset="-122"/>
                 <a:cs typeface="Trebuchet MS" pitchFamily="34" charset="-120"/>
               </a:rPr>
-              <a:t>outperforming</a:t>
+              <a:t>underperformed</a:t>
             </a:r>
             <a:endParaRPr lang="en-US" sz="2800" dirty="0"/>
           </a:p>
@@ -21888,7 +22191,7 @@
                 <a:ea typeface="Trebuchet MS" pitchFamily="34" charset="-122"/>
                 <a:cs typeface="Trebuchet MS" pitchFamily="34" charset="-120"/>
               </a:rPr>
-              <a:t>out</a:t>
+              <a:t>under</a:t>
             </a:r>
             <a:endParaRPr lang="en-US" sz="1300" dirty="0"/>
           </a:p>
@@ -21927,7 +22230,7 @@
                 <a:ea typeface="Calibri" pitchFamily="34" charset="-122"/>
                 <a:cs typeface="Calibri" pitchFamily="34" charset="-120"/>
               </a:rPr>
-              <a:t>beyond or better than</a:t>
+              <a:t>below</a:t>
             </a:r>
             <a:endParaRPr lang="en-US" sz="850" dirty="0"/>
           </a:p>
@@ -22039,7 +22342,7 @@
                 <a:ea typeface="Calibri" pitchFamily="34" charset="-122"/>
                 <a:cs typeface="Calibri" pitchFamily="34" charset="-120"/>
               </a:rPr>
-              <a:t>carry out or show</a:t>
+              <a:t>do; carry out</a:t>
             </a:r>
             <a:endParaRPr lang="en-US" sz="850" dirty="0"/>
           </a:p>
@@ -22112,7 +22415,7 @@
                 <a:ea typeface="Trebuchet MS" pitchFamily="34" charset="-122"/>
                 <a:cs typeface="Trebuchet MS" pitchFamily="34" charset="-120"/>
               </a:rPr>
-              <a:t>ing</a:t>
+              <a:t>ed</a:t>
             </a:r>
             <a:endParaRPr lang="en-US" sz="1300" dirty="0"/>
           </a:p>
@@ -22151,7 +22454,7 @@
                 <a:ea typeface="Calibri" pitchFamily="34" charset="-122"/>
                 <a:cs typeface="Calibri" pitchFamily="34" charset="-120"/>
               </a:rPr>
-              <a:t>in the process of</a:t>
+              <a:t>past tense</a:t>
             </a:r>
             <a:endParaRPr lang="en-US" sz="850" dirty="0"/>
           </a:p>
@@ -22310,7 +22613,7 @@
                 <a:ea typeface="Trebuchet MS" pitchFamily="34" charset="-122"/>
                 <a:cs typeface="Trebuchet MS" pitchFamily="34" charset="-120"/>
               </a:rPr>
-              <a:t>out</a:t>
+              <a:t>un</a:t>
             </a:r>
             <a:endParaRPr lang="en-US" sz="1400" dirty="0"/>
           </a:p>
@@ -22415,7 +22718,7 @@
                 <a:ea typeface="Trebuchet MS" pitchFamily="34" charset="-122"/>
                 <a:cs typeface="Trebuchet MS" pitchFamily="34" charset="-120"/>
               </a:rPr>
-              <a:t>per</a:t>
+              <a:t>der</a:t>
             </a:r>
             <a:endParaRPr lang="en-US" sz="1400" dirty="0"/>
           </a:p>
@@ -22520,7 +22823,7 @@
                 <a:ea typeface="Trebuchet MS" pitchFamily="34" charset="-122"/>
                 <a:cs typeface="Trebuchet MS" pitchFamily="34" charset="-120"/>
               </a:rPr>
-              <a:t>form</a:t>
+              <a:t>per</a:t>
             </a:r>
             <a:endParaRPr lang="en-US" sz="1400" dirty="0"/>
           </a:p>
@@ -22625,7 +22928,7 @@
                 <a:ea typeface="Trebuchet MS" pitchFamily="34" charset="-122"/>
                 <a:cs typeface="Trebuchet MS" pitchFamily="34" charset="-120"/>
               </a:rPr>
-              <a:t>ing</a:t>
+              <a:t>formed</a:t>
             </a:r>
             <a:endParaRPr lang="en-US" sz="1400" dirty="0"/>
           </a:p>
@@ -22732,8 +23035,8 @@
         </p:nvSpPr>
         <p:spPr>
           <a:xfrm>
-            <a:off x="1951330" y="4169664"/>
-            <a:ext cx="676656" cy="475488"/>
+            <a:off x="1951828" y="4169664"/>
+            <a:ext cx="603504" cy="475488"/>
           </a:xfrm>
           <a:prstGeom prst="rect">
             <a:avLst>
@@ -22759,8 +23062,8 @@
         </p:nvSpPr>
         <p:spPr>
           <a:xfrm>
-            <a:off x="1951330" y="4169664"/>
-            <a:ext cx="676656" cy="475488"/>
+            <a:off x="1951828" y="4169664"/>
+            <a:ext cx="603504" cy="475488"/>
           </a:xfrm>
           <a:prstGeom prst="rect">
             <a:avLst/>
@@ -22784,7 +23087,7 @@
                 <a:ea typeface="Trebuchet MS" pitchFamily="34" charset="-122"/>
                 <a:cs typeface="Trebuchet MS" pitchFamily="34" charset="-120"/>
               </a:rPr>
-              <a:t>ou</a:t>
+              <a:t>u</a:t>
             </a:r>
             <a:endParaRPr lang="en-US" sz="900" dirty="0"/>
           </a:p>
@@ -22798,8 +23101,8 @@
         </p:nvSpPr>
         <p:spPr>
           <a:xfrm>
-            <a:off x="2677363" y="4169664"/>
-            <a:ext cx="676656" cy="475488"/>
+            <a:off x="2605209" y="4169664"/>
+            <a:ext cx="603504" cy="475488"/>
           </a:xfrm>
           <a:prstGeom prst="rect">
             <a:avLst>
@@ -22825,8 +23128,8 @@
         </p:nvSpPr>
         <p:spPr>
           <a:xfrm>
-            <a:off x="2677363" y="4169664"/>
-            <a:ext cx="676656" cy="475488"/>
+            <a:off x="2605209" y="4169664"/>
+            <a:ext cx="603504" cy="475488"/>
           </a:xfrm>
           <a:prstGeom prst="rect">
             <a:avLst/>
@@ -22850,7 +23153,7 @@
                 <a:ea typeface="Trebuchet MS" pitchFamily="34" charset="-122"/>
                 <a:cs typeface="Trebuchet MS" pitchFamily="34" charset="-120"/>
               </a:rPr>
-              <a:t>t</a:t>
+              <a:t>n</a:t>
             </a:r>
             <a:endParaRPr lang="en-US" sz="900" dirty="0"/>
           </a:p>
@@ -22864,8 +23167,8 @@
         </p:nvSpPr>
         <p:spPr>
           <a:xfrm>
-            <a:off x="3403397" y="4169664"/>
-            <a:ext cx="676656" cy="475488"/>
+            <a:off x="3258589" y="4169664"/>
+            <a:ext cx="603504" cy="475488"/>
           </a:xfrm>
           <a:prstGeom prst="rect">
             <a:avLst>
@@ -22891,8 +23194,8 @@
         </p:nvSpPr>
         <p:spPr>
           <a:xfrm>
-            <a:off x="3403397" y="4169664"/>
-            <a:ext cx="676656" cy="475488"/>
+            <a:off x="3258589" y="4169664"/>
+            <a:ext cx="603504" cy="475488"/>
           </a:xfrm>
           <a:prstGeom prst="rect">
             <a:avLst/>
@@ -22916,7 +23219,7 @@
                 <a:ea typeface="Trebuchet MS" pitchFamily="34" charset="-122"/>
                 <a:cs typeface="Trebuchet MS" pitchFamily="34" charset="-120"/>
               </a:rPr>
-              <a:t>p</a:t>
+              <a:t>d</a:t>
             </a:r>
             <a:endParaRPr lang="en-US" sz="900" dirty="0"/>
           </a:p>
@@ -22930,8 +23233,8 @@
         </p:nvSpPr>
         <p:spPr>
           <a:xfrm>
-            <a:off x="4129430" y="4169664"/>
-            <a:ext cx="676656" cy="475488"/>
+            <a:off x="3911969" y="4169664"/>
+            <a:ext cx="603504" cy="475488"/>
           </a:xfrm>
           <a:prstGeom prst="rect">
             <a:avLst>
@@ -22957,8 +23260,8 @@
         </p:nvSpPr>
         <p:spPr>
           <a:xfrm>
-            <a:off x="4129430" y="4169664"/>
-            <a:ext cx="676656" cy="475488"/>
+            <a:off x="3911969" y="4169664"/>
+            <a:ext cx="603504" cy="475488"/>
           </a:xfrm>
           <a:prstGeom prst="rect">
             <a:avLst/>
@@ -22996,8 +23299,8 @@
         </p:nvSpPr>
         <p:spPr>
           <a:xfrm>
-            <a:off x="4855464" y="4169664"/>
-            <a:ext cx="676656" cy="475488"/>
+            <a:off x="4565350" y="4169664"/>
+            <a:ext cx="603504" cy="475488"/>
           </a:xfrm>
           <a:prstGeom prst="rect">
             <a:avLst>
@@ -23023,8 +23326,8 @@
         </p:nvSpPr>
         <p:spPr>
           <a:xfrm>
-            <a:off x="4855464" y="4169664"/>
-            <a:ext cx="676656" cy="475488"/>
+            <a:off x="4565350" y="4169664"/>
+            <a:ext cx="603504" cy="475488"/>
           </a:xfrm>
           <a:prstGeom prst="rect">
             <a:avLst/>
@@ -23048,7 +23351,7 @@
                 <a:ea typeface="Trebuchet MS" pitchFamily="34" charset="-122"/>
                 <a:cs typeface="Trebuchet MS" pitchFamily="34" charset="-120"/>
               </a:rPr>
-              <a:t>f</a:t>
+              <a:t>p</a:t>
             </a:r>
             <a:endParaRPr lang="en-US" sz="900" dirty="0"/>
           </a:p>
@@ -23062,8 +23365,8 @@
         </p:nvSpPr>
         <p:spPr>
           <a:xfrm>
-            <a:off x="5581498" y="4169664"/>
-            <a:ext cx="676656" cy="475488"/>
+            <a:off x="5218730" y="4169664"/>
+            <a:ext cx="603504" cy="475488"/>
           </a:xfrm>
           <a:prstGeom prst="rect">
             <a:avLst>
@@ -23089,8 +23392,8 @@
         </p:nvSpPr>
         <p:spPr>
           <a:xfrm>
-            <a:off x="5581498" y="4169664"/>
-            <a:ext cx="676656" cy="475488"/>
+            <a:off x="5218730" y="4169664"/>
+            <a:ext cx="603504" cy="475488"/>
           </a:xfrm>
           <a:prstGeom prst="rect">
             <a:avLst/>
@@ -23114,7 +23417,7 @@
                 <a:ea typeface="Trebuchet MS" pitchFamily="34" charset="-122"/>
                 <a:cs typeface="Trebuchet MS" pitchFamily="34" charset="-120"/>
               </a:rPr>
-              <a:t>or</a:t>
+              <a:t>er</a:t>
             </a:r>
             <a:endParaRPr lang="en-US" sz="900" dirty="0"/>
           </a:p>
@@ -23128,8 +23431,8 @@
         </p:nvSpPr>
         <p:spPr>
           <a:xfrm>
-            <a:off x="6307531" y="4169664"/>
-            <a:ext cx="676656" cy="475488"/>
+            <a:off x="5872111" y="4169664"/>
+            <a:ext cx="603504" cy="475488"/>
           </a:xfrm>
           <a:prstGeom prst="rect">
             <a:avLst>
@@ -23155,8 +23458,8 @@
         </p:nvSpPr>
         <p:spPr>
           <a:xfrm>
-            <a:off x="6307531" y="4169664"/>
-            <a:ext cx="676656" cy="475488"/>
+            <a:off x="5872111" y="4169664"/>
+            <a:ext cx="603504" cy="475488"/>
           </a:xfrm>
           <a:prstGeom prst="rect">
             <a:avLst/>
@@ -23180,7 +23483,7 @@
                 <a:ea typeface="Trebuchet MS" pitchFamily="34" charset="-122"/>
                 <a:cs typeface="Trebuchet MS" pitchFamily="34" charset="-120"/>
               </a:rPr>
-              <a:t>m</a:t>
+              <a:t>f</a:t>
             </a:r>
             <a:endParaRPr lang="en-US" sz="900" dirty="0"/>
           </a:p>
@@ -23194,8 +23497,8 @@
         </p:nvSpPr>
         <p:spPr>
           <a:xfrm>
-            <a:off x="7033565" y="4169664"/>
-            <a:ext cx="676656" cy="475488"/>
+            <a:off x="6525491" y="4169664"/>
+            <a:ext cx="603504" cy="475488"/>
           </a:xfrm>
           <a:prstGeom prst="rect">
             <a:avLst>
@@ -23221,8 +23524,8 @@
         </p:nvSpPr>
         <p:spPr>
           <a:xfrm>
-            <a:off x="7033565" y="4169664"/>
-            <a:ext cx="676656" cy="475488"/>
+            <a:off x="6525491" y="4169664"/>
+            <a:ext cx="603504" cy="475488"/>
           </a:xfrm>
           <a:prstGeom prst="rect">
             <a:avLst/>
@@ -23246,7 +23549,7 @@
                 <a:ea typeface="Trebuchet MS" pitchFamily="34" charset="-122"/>
                 <a:cs typeface="Trebuchet MS" pitchFamily="34" charset="-120"/>
               </a:rPr>
-              <a:t>i</a:t>
+              <a:t>or</a:t>
             </a:r>
             <a:endParaRPr lang="en-US" sz="900" dirty="0"/>
           </a:p>
@@ -23260,8 +23563,8 @@
         </p:nvSpPr>
         <p:spPr>
           <a:xfrm>
-            <a:off x="7759598" y="4169664"/>
-            <a:ext cx="676656" cy="475488"/>
+            <a:off x="7178871" y="4169664"/>
+            <a:ext cx="603504" cy="475488"/>
           </a:xfrm>
           <a:prstGeom prst="rect">
             <a:avLst>
@@ -23287,8 +23590,8 @@
         </p:nvSpPr>
         <p:spPr>
           <a:xfrm>
-            <a:off x="7759598" y="4169664"/>
-            <a:ext cx="676656" cy="475488"/>
+            <a:off x="7178871" y="4169664"/>
+            <a:ext cx="603504" cy="475488"/>
           </a:xfrm>
           <a:prstGeom prst="rect">
             <a:avLst/>
@@ -23312,7 +23615,73 @@
                 <a:ea typeface="Trebuchet MS" pitchFamily="34" charset="-122"/>
                 <a:cs typeface="Trebuchet MS" pitchFamily="34" charset="-120"/>
               </a:rPr>
-              <a:t>ng</a:t>
+              <a:t>m</a:t>
+            </a:r>
+            <a:endParaRPr lang="en-US" sz="900" dirty="0"/>
+          </a:p>
+        </p:txBody>
+      </p:sp>
+      <p:sp>
+        <p:nvSpPr>
+          <p:cNvPr id="60" name="Shape 58"/>
+          <p:cNvSpPr/>
+          <p:nvPr/>
+        </p:nvSpPr>
+        <p:spPr>
+          <a:xfrm>
+            <a:off x="7832252" y="4169664"/>
+            <a:ext cx="603504" cy="475488"/>
+          </a:xfrm>
+          <a:prstGeom prst="rect">
+            <a:avLst>
+              <a:gd name="adj" fmla="val 7692"/>
+            </a:avLst>
+          </a:prstGeom>
+          <a:solidFill>
+            <a:srgbClr val="FFFFFF"/>
+          </a:solidFill>
+          <a:ln w="12700">
+            <a:solidFill>
+              <a:srgbClr val="DB2777"/>
+            </a:solidFill>
+            <a:prstDash val="solid"/>
+          </a:ln>
+        </p:spPr>
+      </p:sp>
+      <p:sp>
+        <p:nvSpPr>
+          <p:cNvPr id="61" name="Text 59"/>
+          <p:cNvSpPr/>
+          <p:nvPr/>
+        </p:nvSpPr>
+        <p:spPr>
+          <a:xfrm>
+            <a:off x="7832252" y="4169664"/>
+            <a:ext cx="603504" cy="475488"/>
+          </a:xfrm>
+          <a:prstGeom prst="rect">
+            <a:avLst/>
+          </a:prstGeom>
+          <a:noFill/>
+          <a:ln/>
+        </p:spPr>
+        <p:txBody>
+          <a:bodyPr wrap="square" lIns="0" tIns="0" rIns="0" bIns="0" rtlCol="0" anchor="ctr"/>
+          <a:lstStyle/>
+          <a:p>
+            <a:pPr algn="ctr" indent="0" marL="0">
+              <a:buNone/>
+            </a:pPr>
+            <a:r>
+              <a:rPr lang="en-US" sz="900" b="1" dirty="0">
+                <a:solidFill>
+                  <a:srgbClr val="9D174D"/>
+                </a:solidFill>
+                <a:latin typeface="Trebuchet MS" pitchFamily="34" charset="0"/>
+                <a:ea typeface="Trebuchet MS" pitchFamily="34" charset="-122"/>
+                <a:cs typeface="Trebuchet MS" pitchFamily="34" charset="-120"/>
+              </a:rPr>
+              <a:t>ed</a:t>
             </a:r>
             <a:endParaRPr lang="en-US" sz="900" dirty="0"/>
           </a:p>
@@ -23604,7 +23973,7 @@
                 <a:ea typeface="Calibri" pitchFamily="34" charset="-122"/>
                 <a:cs typeface="Calibri" pitchFamily="34" charset="-120"/>
               </a:rPr>
-              <a:t>Word Labs  •  wordlabs.app  •  Root: 'perform' = carry out, do, or show</a:t>
+              <a:t>Word Labs  •  wordlabs.app  •  Root: 'perform' = do; carry out</a:t>
             </a:r>
             <a:endParaRPr lang="en-US" sz="800" dirty="0"/>
           </a:p>
@@ -23743,7 +24112,7 @@
                 <a:ea typeface="Trebuchet MS" pitchFamily="34" charset="-122"/>
                 <a:cs typeface="Trebuchet MS" pitchFamily="34" charset="-120"/>
               </a:rPr>
-              <a:t>performed</a:t>
+              <a:t>performance</a:t>
             </a:r>
             <a:endParaRPr lang="en-US" sz="2800" dirty="0"/>
           </a:p>
@@ -24431,7 +24800,7 @@
                 <a:ea typeface="Calibri" pitchFamily="34" charset="-122"/>
                 <a:cs typeface="Calibri" pitchFamily="34" charset="-120"/>
               </a:rPr>
-              <a:t>Word Labs  •  wordlabs.app  •  Root: 'perform' = carry out, do, or show</a:t>
+              <a:t>Word Labs  •  wordlabs.app  •  Root: 'perform' = do; carry out</a:t>
             </a:r>
             <a:endParaRPr lang="en-US" sz="800" dirty="0"/>
           </a:p>
@@ -24570,7 +24939,7 @@
                 <a:ea typeface="Trebuchet MS" pitchFamily="34" charset="-122"/>
                 <a:cs typeface="Trebuchet MS" pitchFamily="34" charset="-120"/>
               </a:rPr>
-              <a:t>performed</a:t>
+              <a:t>performance</a:t>
             </a:r>
             <a:endParaRPr lang="en-US" sz="2800" dirty="0"/>
           </a:p>
@@ -24748,7 +25117,7 @@
                 <a:ea typeface="Calibri" pitchFamily="34" charset="-122"/>
                 <a:cs typeface="Calibri" pitchFamily="34" charset="-120"/>
               </a:rPr>
-              <a:t>carry out or show</a:t>
+              <a:t>do; carry out</a:t>
             </a:r>
             <a:endParaRPr lang="en-US" sz="850" dirty="0"/>
           </a:p>
@@ -24821,7 +25190,7 @@
                 <a:ea typeface="Trebuchet MS" pitchFamily="34" charset="-122"/>
                 <a:cs typeface="Trebuchet MS" pitchFamily="34" charset="-120"/>
               </a:rPr>
-              <a:t>ed</a:t>
+              <a:t>ance</a:t>
             </a:r>
             <a:endParaRPr lang="en-US" sz="1300" dirty="0"/>
           </a:p>
@@ -24860,7 +25229,7 @@
                 <a:ea typeface="Calibri" pitchFamily="34" charset="-122"/>
                 <a:cs typeface="Calibri" pitchFamily="34" charset="-120"/>
               </a:rPr>
-              <a:t>in the past</a:t>
+              <a:t>state of</a:t>
             </a:r>
             <a:endParaRPr lang="en-US" sz="850" dirty="0"/>
           </a:p>
@@ -25416,7 +25785,7 @@
                 <a:ea typeface="Calibri" pitchFamily="34" charset="-122"/>
                 <a:cs typeface="Calibri" pitchFamily="34" charset="-120"/>
               </a:rPr>
-              <a:t>Word Labs  •  wordlabs.app  •  Root: 'perform' = carry out, do, or show</a:t>
+              <a:t>Word Labs  •  wordlabs.app  •  Root: 'perform' = do; carry out</a:t>
             </a:r>
             <a:endParaRPr lang="en-US" sz="800" dirty="0"/>
           </a:p>
@@ -25489,7 +25858,7 @@
                 <a:ea typeface="Trebuchet MS" pitchFamily="34" charset="-122"/>
                 <a:cs typeface="Trebuchet MS" pitchFamily="34" charset="-120"/>
               </a:rPr>
-              <a:t>We are learning that the root 'perform' means 'carry out, do, or show'.</a:t>
+              <a:t>We are learning that the root 'perform' means 'do; carry out'.</a:t>
             </a:r>
             <a:endParaRPr lang="en-US" sz="2000" dirty="0"/>
           </a:p>
@@ -26135,7 +26504,7 @@
                 <a:ea typeface="Calibri" pitchFamily="34" charset="-122"/>
                 <a:cs typeface="Calibri" pitchFamily="34" charset="-120"/>
               </a:rPr>
-              <a:t>Word Labs  •  wordlabs.app  •  Root: 'perform' = carry out, do, or show</a:t>
+              <a:t>Word Labs  •  wordlabs.app  •  Root: 'perform' = do; carry out</a:t>
             </a:r>
             <a:endParaRPr lang="en-US" sz="800" dirty="0"/>
           </a:p>
@@ -26274,7 +26643,7 @@
                 <a:ea typeface="Trebuchet MS" pitchFamily="34" charset="-122"/>
                 <a:cs typeface="Trebuchet MS" pitchFamily="34" charset="-120"/>
               </a:rPr>
-              <a:t>performed</a:t>
+              <a:t>performance</a:t>
             </a:r>
             <a:endParaRPr lang="en-US" sz="2800" dirty="0"/>
           </a:p>
@@ -26452,7 +26821,7 @@
                 <a:ea typeface="Calibri" pitchFamily="34" charset="-122"/>
                 <a:cs typeface="Calibri" pitchFamily="34" charset="-120"/>
               </a:rPr>
-              <a:t>carry out or show</a:t>
+              <a:t>do; carry out</a:t>
             </a:r>
             <a:endParaRPr lang="en-US" sz="850" dirty="0"/>
           </a:p>
@@ -26525,7 +26894,7 @@
                 <a:ea typeface="Trebuchet MS" pitchFamily="34" charset="-122"/>
                 <a:cs typeface="Trebuchet MS" pitchFamily="34" charset="-120"/>
               </a:rPr>
-              <a:t>ed</a:t>
+              <a:t>ance</a:t>
             </a:r>
             <a:endParaRPr lang="en-US" sz="1300" dirty="0"/>
           </a:p>
@@ -26564,7 +26933,7 @@
                 <a:ea typeface="Calibri" pitchFamily="34" charset="-122"/>
                 <a:cs typeface="Calibri" pitchFamily="34" charset="-120"/>
               </a:rPr>
-              <a:t>in the past</a:t>
+              <a:t>state of</a:t>
             </a:r>
             <a:endParaRPr lang="en-US" sz="850" dirty="0"/>
           </a:p>
@@ -26671,7 +27040,7 @@
         </p:nvSpPr>
         <p:spPr>
           <a:xfrm>
-            <a:off x="2999232" y="3364992"/>
+            <a:off x="2313432" y="3364992"/>
             <a:ext cx="1645920" cy="475488"/>
           </a:xfrm>
           <a:prstGeom prst="rect">
@@ -26698,7 +27067,7 @@
         </p:nvSpPr>
         <p:spPr>
           <a:xfrm>
-            <a:off x="2999232" y="3364992"/>
+            <a:off x="2313432" y="3364992"/>
             <a:ext cx="1645920" cy="475488"/>
           </a:xfrm>
           <a:prstGeom prst="rect">
@@ -26737,8 +27106,8 @@
         </p:nvSpPr>
         <p:spPr>
           <a:xfrm>
-            <a:off x="4645152" y="3364992"/>
-            <a:ext cx="1097280" cy="475488"/>
+            <a:off x="3959352" y="3364992"/>
+            <a:ext cx="411480" cy="475488"/>
           </a:xfrm>
           <a:prstGeom prst="rect">
             <a:avLst/>
@@ -26776,7 +27145,7 @@
         </p:nvSpPr>
         <p:spPr>
           <a:xfrm>
-            <a:off x="5742432" y="3364992"/>
+            <a:off x="4370832" y="3364992"/>
             <a:ext cx="1645920" cy="475488"/>
           </a:xfrm>
           <a:prstGeom prst="rect">
@@ -26803,7 +27172,7 @@
         </p:nvSpPr>
         <p:spPr>
           <a:xfrm>
-            <a:off x="5742432" y="3364992"/>
+            <a:off x="4370832" y="3364992"/>
             <a:ext cx="1645920" cy="475488"/>
           </a:xfrm>
           <a:prstGeom prst="rect">
@@ -26828,7 +27197,7 @@
                 <a:ea typeface="Trebuchet MS" pitchFamily="34" charset="-122"/>
                 <a:cs typeface="Trebuchet MS" pitchFamily="34" charset="-120"/>
               </a:rPr>
-              <a:t>formed</a:t>
+              <a:t>for</a:t>
             </a:r>
             <a:endParaRPr lang="en-US" sz="1400" dirty="0"/>
           </a:p>
@@ -26836,7 +27205,112 @@
       </p:sp>
       <p:sp>
         <p:nvSpPr>
-          <p:cNvPr id="30" name="Shape 28"/>
+          <p:cNvPr id="30" name="Text 28"/>
+          <p:cNvSpPr/>
+          <p:nvPr/>
+        </p:nvSpPr>
+        <p:spPr>
+          <a:xfrm>
+            <a:off x="6016752" y="3364992"/>
+            <a:ext cx="411480" cy="475488"/>
+          </a:xfrm>
+          <a:prstGeom prst="rect">
+            <a:avLst/>
+          </a:prstGeom>
+          <a:noFill/>
+          <a:ln/>
+        </p:spPr>
+        <p:txBody>
+          <a:bodyPr wrap="square" lIns="0" tIns="0" rIns="0" bIns="0" rtlCol="0" anchor="ctr"/>
+          <a:lstStyle/>
+          <a:p>
+            <a:pPr algn="ctr" indent="0" marL="0">
+              <a:buNone/>
+            </a:pPr>
+            <a:r>
+              <a:rPr lang="en-US" sz="1600" b="1" dirty="0">
+                <a:solidFill>
+                  <a:srgbClr val="0D9488"/>
+                </a:solidFill>
+                <a:latin typeface="Trebuchet MS" pitchFamily="34" charset="0"/>
+                <a:ea typeface="Trebuchet MS" pitchFamily="34" charset="-122"/>
+                <a:cs typeface="Trebuchet MS" pitchFamily="34" charset="-120"/>
+              </a:rPr>
+              <a:t>·</a:t>
+            </a:r>
+            <a:endParaRPr lang="en-US" sz="1600" dirty="0"/>
+          </a:p>
+        </p:txBody>
+      </p:sp>
+      <p:sp>
+        <p:nvSpPr>
+          <p:cNvPr id="31" name="Shape 29"/>
+          <p:cNvSpPr/>
+          <p:nvPr/>
+        </p:nvSpPr>
+        <p:spPr>
+          <a:xfrm>
+            <a:off x="6428232" y="3364992"/>
+            <a:ext cx="1645920" cy="475488"/>
+          </a:xfrm>
+          <a:prstGeom prst="rect">
+            <a:avLst>
+              <a:gd name="adj" fmla="val 9615"/>
+            </a:avLst>
+          </a:prstGeom>
+          <a:solidFill>
+            <a:srgbClr val="FFFFFF"/>
+          </a:solidFill>
+          <a:ln w="12700">
+            <a:solidFill>
+              <a:srgbClr val="0D9488"/>
+            </a:solidFill>
+            <a:prstDash val="solid"/>
+          </a:ln>
+        </p:spPr>
+      </p:sp>
+      <p:sp>
+        <p:nvSpPr>
+          <p:cNvPr id="32" name="Text 30"/>
+          <p:cNvSpPr/>
+          <p:nvPr/>
+        </p:nvSpPr>
+        <p:spPr>
+          <a:xfrm>
+            <a:off x="6428232" y="3364992"/>
+            <a:ext cx="1645920" cy="475488"/>
+          </a:xfrm>
+          <a:prstGeom prst="rect">
+            <a:avLst/>
+          </a:prstGeom>
+          <a:noFill/>
+          <a:ln/>
+        </p:spPr>
+        <p:txBody>
+          <a:bodyPr wrap="square" lIns="0" tIns="0" rIns="0" bIns="0" rtlCol="0" anchor="ctr"/>
+          <a:lstStyle/>
+          <a:p>
+            <a:pPr algn="ctr" indent="0" marL="0">
+              <a:buNone/>
+            </a:pPr>
+            <a:r>
+              <a:rPr lang="en-US" sz="1400" b="1" dirty="0">
+                <a:solidFill>
+                  <a:srgbClr val="0D9488"/>
+                </a:solidFill>
+                <a:latin typeface="Trebuchet MS" pitchFamily="34" charset="0"/>
+                <a:ea typeface="Trebuchet MS" pitchFamily="34" charset="-122"/>
+                <a:cs typeface="Trebuchet MS" pitchFamily="34" charset="-120"/>
+              </a:rPr>
+              <a:t>mance</a:t>
+            </a:r>
+            <a:endParaRPr lang="en-US" sz="1400" dirty="0"/>
+          </a:p>
+        </p:txBody>
+      </p:sp>
+      <p:sp>
+        <p:nvSpPr>
+          <p:cNvPr id="33" name="Shape 31"/>
           <p:cNvSpPr/>
           <p:nvPr/>
         </p:nvSpPr>
@@ -26863,7 +27337,7 @@
       </p:sp>
       <p:sp>
         <p:nvSpPr>
-          <p:cNvPr id="31" name="Text 29"/>
+          <p:cNvPr id="34" name="Text 32"/>
           <p:cNvSpPr/>
           <p:nvPr/>
         </p:nvSpPr>
@@ -26902,7 +27376,7 @@
       </p:sp>
       <p:sp>
         <p:nvSpPr>
-          <p:cNvPr id="32" name="Shape 30"/>
+          <p:cNvPr id="35" name="Shape 33"/>
           <p:cNvSpPr/>
           <p:nvPr/>
         </p:nvSpPr>
@@ -26929,7 +27403,7 @@
       </p:sp>
       <p:sp>
         <p:nvSpPr>
-          <p:cNvPr id="33" name="Text 31"/>
+          <p:cNvPr id="36" name="Text 34"/>
           <p:cNvSpPr/>
           <p:nvPr/>
         </p:nvSpPr>
@@ -27252,7 +27726,7 @@
                 <a:ea typeface="Calibri" pitchFamily="34" charset="-122"/>
                 <a:cs typeface="Calibri" pitchFamily="34" charset="-120"/>
               </a:rPr>
-              <a:t>Word Labs  •  wordlabs.app  •  Root: 'perform' = carry out, do, or show</a:t>
+              <a:t>Word Labs  •  wordlabs.app  •  Root: 'perform' = do; carry out</a:t>
             </a:r>
             <a:endParaRPr lang="en-US" sz="800" dirty="0"/>
           </a:p>
@@ -27391,7 +27865,7 @@
                 <a:ea typeface="Trebuchet MS" pitchFamily="34" charset="-122"/>
                 <a:cs typeface="Trebuchet MS" pitchFamily="34" charset="-120"/>
               </a:rPr>
-              <a:t>performed</a:t>
+              <a:t>performance</a:t>
             </a:r>
             <a:endParaRPr lang="en-US" sz="2800" dirty="0"/>
           </a:p>
@@ -27569,7 +28043,7 @@
                 <a:ea typeface="Calibri" pitchFamily="34" charset="-122"/>
                 <a:cs typeface="Calibri" pitchFamily="34" charset="-120"/>
               </a:rPr>
-              <a:t>carry out or show</a:t>
+              <a:t>do; carry out</a:t>
             </a:r>
             <a:endParaRPr lang="en-US" sz="850" dirty="0"/>
           </a:p>
@@ -27642,7 +28116,7 @@
                 <a:ea typeface="Trebuchet MS" pitchFamily="34" charset="-122"/>
                 <a:cs typeface="Trebuchet MS" pitchFamily="34" charset="-120"/>
               </a:rPr>
-              <a:t>ed</a:t>
+              <a:t>ance</a:t>
             </a:r>
             <a:endParaRPr lang="en-US" sz="1300" dirty="0"/>
           </a:p>
@@ -27681,7 +28155,7 @@
                 <a:ea typeface="Calibri" pitchFamily="34" charset="-122"/>
                 <a:cs typeface="Calibri" pitchFamily="34" charset="-120"/>
               </a:rPr>
-              <a:t>in the past</a:t>
+              <a:t>state of</a:t>
             </a:r>
             <a:endParaRPr lang="en-US" sz="850" dirty="0"/>
           </a:p>
@@ -27788,7 +28262,7 @@
         </p:nvSpPr>
         <p:spPr>
           <a:xfrm>
-            <a:off x="2999232" y="3364992"/>
+            <a:off x="2313432" y="3364992"/>
             <a:ext cx="1645920" cy="475488"/>
           </a:xfrm>
           <a:prstGeom prst="rect">
@@ -27815,7 +28289,7 @@
         </p:nvSpPr>
         <p:spPr>
           <a:xfrm>
-            <a:off x="2999232" y="3364992"/>
+            <a:off x="2313432" y="3364992"/>
             <a:ext cx="1645920" cy="475488"/>
           </a:xfrm>
           <a:prstGeom prst="rect">
@@ -27854,8 +28328,8 @@
         </p:nvSpPr>
         <p:spPr>
           <a:xfrm>
-            <a:off x="4645152" y="3364992"/>
-            <a:ext cx="1097280" cy="475488"/>
+            <a:off x="3959352" y="3364992"/>
+            <a:ext cx="411480" cy="475488"/>
           </a:xfrm>
           <a:prstGeom prst="rect">
             <a:avLst/>
@@ -27893,7 +28367,7 @@
         </p:nvSpPr>
         <p:spPr>
           <a:xfrm>
-            <a:off x="5742432" y="3364992"/>
+            <a:off x="4370832" y="3364992"/>
             <a:ext cx="1645920" cy="475488"/>
           </a:xfrm>
           <a:prstGeom prst="rect">
@@ -27920,7 +28394,7 @@
         </p:nvSpPr>
         <p:spPr>
           <a:xfrm>
-            <a:off x="5742432" y="3364992"/>
+            <a:off x="4370832" y="3364992"/>
             <a:ext cx="1645920" cy="475488"/>
           </a:xfrm>
           <a:prstGeom prst="rect">
@@ -27945,7 +28419,7 @@
                 <a:ea typeface="Trebuchet MS" pitchFamily="34" charset="-122"/>
                 <a:cs typeface="Trebuchet MS" pitchFamily="34" charset="-120"/>
               </a:rPr>
-              <a:t>formed</a:t>
+              <a:t>for</a:t>
             </a:r>
             <a:endParaRPr lang="en-US" sz="1400" dirty="0"/>
           </a:p>
@@ -27953,7 +28427,112 @@
       </p:sp>
       <p:sp>
         <p:nvSpPr>
-          <p:cNvPr id="30" name="Shape 28"/>
+          <p:cNvPr id="30" name="Text 28"/>
+          <p:cNvSpPr/>
+          <p:nvPr/>
+        </p:nvSpPr>
+        <p:spPr>
+          <a:xfrm>
+            <a:off x="6016752" y="3364992"/>
+            <a:ext cx="411480" cy="475488"/>
+          </a:xfrm>
+          <a:prstGeom prst="rect">
+            <a:avLst/>
+          </a:prstGeom>
+          <a:noFill/>
+          <a:ln/>
+        </p:spPr>
+        <p:txBody>
+          <a:bodyPr wrap="square" lIns="0" tIns="0" rIns="0" bIns="0" rtlCol="0" anchor="ctr"/>
+          <a:lstStyle/>
+          <a:p>
+            <a:pPr algn="ctr" indent="0" marL="0">
+              <a:buNone/>
+            </a:pPr>
+            <a:r>
+              <a:rPr lang="en-US" sz="1600" b="1" dirty="0">
+                <a:solidFill>
+                  <a:srgbClr val="0D9488"/>
+                </a:solidFill>
+                <a:latin typeface="Trebuchet MS" pitchFamily="34" charset="0"/>
+                <a:ea typeface="Trebuchet MS" pitchFamily="34" charset="-122"/>
+                <a:cs typeface="Trebuchet MS" pitchFamily="34" charset="-120"/>
+              </a:rPr>
+              <a:t>·</a:t>
+            </a:r>
+            <a:endParaRPr lang="en-US" sz="1600" dirty="0"/>
+          </a:p>
+        </p:txBody>
+      </p:sp>
+      <p:sp>
+        <p:nvSpPr>
+          <p:cNvPr id="31" name="Shape 29"/>
+          <p:cNvSpPr/>
+          <p:nvPr/>
+        </p:nvSpPr>
+        <p:spPr>
+          <a:xfrm>
+            <a:off x="6428232" y="3364992"/>
+            <a:ext cx="1645920" cy="475488"/>
+          </a:xfrm>
+          <a:prstGeom prst="rect">
+            <a:avLst>
+              <a:gd name="adj" fmla="val 9615"/>
+            </a:avLst>
+          </a:prstGeom>
+          <a:solidFill>
+            <a:srgbClr val="FFFFFF"/>
+          </a:solidFill>
+          <a:ln w="12700">
+            <a:solidFill>
+              <a:srgbClr val="0D9488"/>
+            </a:solidFill>
+            <a:prstDash val="solid"/>
+          </a:ln>
+        </p:spPr>
+      </p:sp>
+      <p:sp>
+        <p:nvSpPr>
+          <p:cNvPr id="32" name="Text 30"/>
+          <p:cNvSpPr/>
+          <p:nvPr/>
+        </p:nvSpPr>
+        <p:spPr>
+          <a:xfrm>
+            <a:off x="6428232" y="3364992"/>
+            <a:ext cx="1645920" cy="475488"/>
+          </a:xfrm>
+          <a:prstGeom prst="rect">
+            <a:avLst/>
+          </a:prstGeom>
+          <a:noFill/>
+          <a:ln/>
+        </p:spPr>
+        <p:txBody>
+          <a:bodyPr wrap="square" lIns="0" tIns="0" rIns="0" bIns="0" rtlCol="0" anchor="ctr"/>
+          <a:lstStyle/>
+          <a:p>
+            <a:pPr algn="ctr" indent="0" marL="0">
+              <a:buNone/>
+            </a:pPr>
+            <a:r>
+              <a:rPr lang="en-US" sz="1400" b="1" dirty="0">
+                <a:solidFill>
+                  <a:srgbClr val="0D9488"/>
+                </a:solidFill>
+                <a:latin typeface="Trebuchet MS" pitchFamily="34" charset="0"/>
+                <a:ea typeface="Trebuchet MS" pitchFamily="34" charset="-122"/>
+                <a:cs typeface="Trebuchet MS" pitchFamily="34" charset="-120"/>
+              </a:rPr>
+              <a:t>mance</a:t>
+            </a:r>
+            <a:endParaRPr lang="en-US" sz="1400" dirty="0"/>
+          </a:p>
+        </p:txBody>
+      </p:sp>
+      <p:sp>
+        <p:nvSpPr>
+          <p:cNvPr id="33" name="Shape 31"/>
           <p:cNvSpPr/>
           <p:nvPr/>
         </p:nvSpPr>
@@ -27980,7 +28559,7 @@
       </p:sp>
       <p:sp>
         <p:nvSpPr>
-          <p:cNvPr id="31" name="Text 29"/>
+          <p:cNvPr id="34" name="Text 32"/>
           <p:cNvSpPr/>
           <p:nvPr/>
         </p:nvSpPr>
@@ -28019,7 +28598,7 @@
       </p:sp>
       <p:sp>
         <p:nvSpPr>
-          <p:cNvPr id="32" name="Shape 30"/>
+          <p:cNvPr id="35" name="Shape 33"/>
           <p:cNvSpPr/>
           <p:nvPr/>
         </p:nvSpPr>
@@ -28046,13 +28625,13 @@
       </p:sp>
       <p:sp>
         <p:nvSpPr>
-          <p:cNvPr id="33" name="Shape 31"/>
-          <p:cNvSpPr/>
-          <p:nvPr/>
-        </p:nvSpPr>
-        <p:spPr>
-          <a:xfrm>
-            <a:off x="2254649" y="4169664"/>
+          <p:cNvPr id="36" name="Shape 34"/>
+          <p:cNvSpPr/>
+          <p:nvPr/>
+        </p:nvSpPr>
+        <p:spPr>
+          <a:xfrm>
+            <a:off x="2023872" y="4169664"/>
             <a:ext cx="685800" cy="475488"/>
           </a:xfrm>
           <a:prstGeom prst="rect">
@@ -28073,13 +28652,13 @@
       </p:sp>
       <p:sp>
         <p:nvSpPr>
-          <p:cNvPr id="34" name="Text 32"/>
-          <p:cNvSpPr/>
-          <p:nvPr/>
-        </p:nvSpPr>
-        <p:spPr>
-          <a:xfrm>
-            <a:off x="2254649" y="4169664"/>
+          <p:cNvPr id="37" name="Text 35"/>
+          <p:cNvSpPr/>
+          <p:nvPr/>
+        </p:nvSpPr>
+        <p:spPr>
+          <a:xfrm>
+            <a:off x="2023872" y="4169664"/>
             <a:ext cx="685800" cy="475488"/>
           </a:xfrm>
           <a:prstGeom prst="rect">
@@ -28112,13 +28691,13 @@
       </p:sp>
       <p:sp>
         <p:nvSpPr>
-          <p:cNvPr id="35" name="Shape 33"/>
-          <p:cNvSpPr/>
-          <p:nvPr/>
-        </p:nvSpPr>
-        <p:spPr>
-          <a:xfrm>
-            <a:off x="3293146" y="4169664"/>
+          <p:cNvPr id="38" name="Shape 36"/>
+          <p:cNvSpPr/>
+          <p:nvPr/>
+        </p:nvSpPr>
+        <p:spPr>
+          <a:xfrm>
+            <a:off x="2831592" y="4169664"/>
             <a:ext cx="685800" cy="475488"/>
           </a:xfrm>
           <a:prstGeom prst="rect">
@@ -28139,13 +28718,13 @@
       </p:sp>
       <p:sp>
         <p:nvSpPr>
-          <p:cNvPr id="36" name="Text 34"/>
-          <p:cNvSpPr/>
-          <p:nvPr/>
-        </p:nvSpPr>
-        <p:spPr>
-          <a:xfrm>
-            <a:off x="3293146" y="4169664"/>
+          <p:cNvPr id="39" name="Text 37"/>
+          <p:cNvSpPr/>
+          <p:nvPr/>
+        </p:nvSpPr>
+        <p:spPr>
+          <a:xfrm>
+            <a:off x="2831592" y="4169664"/>
             <a:ext cx="685800" cy="475488"/>
           </a:xfrm>
           <a:prstGeom prst="rect">
@@ -28178,13 +28757,13 @@
       </p:sp>
       <p:sp>
         <p:nvSpPr>
-          <p:cNvPr id="37" name="Shape 35"/>
-          <p:cNvSpPr/>
-          <p:nvPr/>
-        </p:nvSpPr>
-        <p:spPr>
-          <a:xfrm>
-            <a:off x="4331643" y="4169664"/>
+          <p:cNvPr id="40" name="Shape 38"/>
+          <p:cNvSpPr/>
+          <p:nvPr/>
+        </p:nvSpPr>
+        <p:spPr>
+          <a:xfrm>
+            <a:off x="3639312" y="4169664"/>
             <a:ext cx="685800" cy="475488"/>
           </a:xfrm>
           <a:prstGeom prst="rect">
@@ -28205,13 +28784,13 @@
       </p:sp>
       <p:sp>
         <p:nvSpPr>
-          <p:cNvPr id="38" name="Text 36"/>
-          <p:cNvSpPr/>
-          <p:nvPr/>
-        </p:nvSpPr>
-        <p:spPr>
-          <a:xfrm>
-            <a:off x="4331643" y="4169664"/>
+          <p:cNvPr id="41" name="Text 39"/>
+          <p:cNvSpPr/>
+          <p:nvPr/>
+        </p:nvSpPr>
+        <p:spPr>
+          <a:xfrm>
+            <a:off x="3639312" y="4169664"/>
             <a:ext cx="685800" cy="475488"/>
           </a:xfrm>
           <a:prstGeom prst="rect">
@@ -28244,13 +28823,13 @@
       </p:sp>
       <p:sp>
         <p:nvSpPr>
-          <p:cNvPr id="39" name="Shape 37"/>
-          <p:cNvSpPr/>
-          <p:nvPr/>
-        </p:nvSpPr>
-        <p:spPr>
-          <a:xfrm>
-            <a:off x="5370141" y="4169664"/>
+          <p:cNvPr id="42" name="Shape 40"/>
+          <p:cNvSpPr/>
+          <p:nvPr/>
+        </p:nvSpPr>
+        <p:spPr>
+          <a:xfrm>
+            <a:off x="4447032" y="4169664"/>
             <a:ext cx="685800" cy="475488"/>
           </a:xfrm>
           <a:prstGeom prst="rect">
@@ -28271,13 +28850,13 @@
       </p:sp>
       <p:sp>
         <p:nvSpPr>
-          <p:cNvPr id="40" name="Text 38"/>
-          <p:cNvSpPr/>
-          <p:nvPr/>
-        </p:nvSpPr>
-        <p:spPr>
-          <a:xfrm>
-            <a:off x="5370141" y="4169664"/>
+          <p:cNvPr id="43" name="Text 41"/>
+          <p:cNvSpPr/>
+          <p:nvPr/>
+        </p:nvSpPr>
+        <p:spPr>
+          <a:xfrm>
+            <a:off x="4447032" y="4169664"/>
             <a:ext cx="685800" cy="475488"/>
           </a:xfrm>
           <a:prstGeom prst="rect">
@@ -28310,13 +28889,13 @@
       </p:sp>
       <p:sp>
         <p:nvSpPr>
-          <p:cNvPr id="41" name="Shape 39"/>
-          <p:cNvSpPr/>
-          <p:nvPr/>
-        </p:nvSpPr>
-        <p:spPr>
-          <a:xfrm>
-            <a:off x="6408638" y="4169664"/>
+          <p:cNvPr id="44" name="Shape 42"/>
+          <p:cNvSpPr/>
+          <p:nvPr/>
+        </p:nvSpPr>
+        <p:spPr>
+          <a:xfrm>
+            <a:off x="5254752" y="4169664"/>
             <a:ext cx="685800" cy="475488"/>
           </a:xfrm>
           <a:prstGeom prst="rect">
@@ -28337,13 +28916,13 @@
       </p:sp>
       <p:sp>
         <p:nvSpPr>
-          <p:cNvPr id="42" name="Text 40"/>
-          <p:cNvSpPr/>
-          <p:nvPr/>
-        </p:nvSpPr>
-        <p:spPr>
-          <a:xfrm>
-            <a:off x="6408638" y="4169664"/>
+          <p:cNvPr id="45" name="Text 43"/>
+          <p:cNvSpPr/>
+          <p:nvPr/>
+        </p:nvSpPr>
+        <p:spPr>
+          <a:xfrm>
+            <a:off x="5254752" y="4169664"/>
             <a:ext cx="685800" cy="475488"/>
           </a:xfrm>
           <a:prstGeom prst="rect">
@@ -28376,13 +28955,13 @@
       </p:sp>
       <p:sp>
         <p:nvSpPr>
-          <p:cNvPr id="43" name="Shape 41"/>
-          <p:cNvSpPr/>
-          <p:nvPr/>
-        </p:nvSpPr>
-        <p:spPr>
-          <a:xfrm>
-            <a:off x="7447135" y="4169664"/>
+          <p:cNvPr id="46" name="Shape 44"/>
+          <p:cNvSpPr/>
+          <p:nvPr/>
+        </p:nvSpPr>
+        <p:spPr>
+          <a:xfrm>
+            <a:off x="6062472" y="4169664"/>
             <a:ext cx="685800" cy="475488"/>
           </a:xfrm>
           <a:prstGeom prst="rect">
@@ -28403,13 +28982,13 @@
       </p:sp>
       <p:sp>
         <p:nvSpPr>
-          <p:cNvPr id="44" name="Text 42"/>
-          <p:cNvSpPr/>
-          <p:nvPr/>
-        </p:nvSpPr>
-        <p:spPr>
-          <a:xfrm>
-            <a:off x="7447135" y="4169664"/>
+          <p:cNvPr id="47" name="Text 45"/>
+          <p:cNvSpPr/>
+          <p:nvPr/>
+        </p:nvSpPr>
+        <p:spPr>
+          <a:xfrm>
+            <a:off x="6062472" y="4169664"/>
             <a:ext cx="685800" cy="475488"/>
           </a:xfrm>
           <a:prstGeom prst="rect">
@@ -28434,7 +29013,139 @@
                 <a:ea typeface="Trebuchet MS" pitchFamily="34" charset="-122"/>
                 <a:cs typeface="Trebuchet MS" pitchFamily="34" charset="-120"/>
               </a:rPr>
-              <a:t>ed</a:t>
+              <a:t>a</a:t>
+            </a:r>
+            <a:endParaRPr lang="en-US" sz="900" dirty="0"/>
+          </a:p>
+        </p:txBody>
+      </p:sp>
+      <p:sp>
+        <p:nvSpPr>
+          <p:cNvPr id="48" name="Shape 46"/>
+          <p:cNvSpPr/>
+          <p:nvPr/>
+        </p:nvSpPr>
+        <p:spPr>
+          <a:xfrm>
+            <a:off x="6870192" y="4169664"/>
+            <a:ext cx="685800" cy="475488"/>
+          </a:xfrm>
+          <a:prstGeom prst="rect">
+            <a:avLst>
+              <a:gd name="adj" fmla="val 7692"/>
+            </a:avLst>
+          </a:prstGeom>
+          <a:solidFill>
+            <a:srgbClr val="FFFFFF"/>
+          </a:solidFill>
+          <a:ln w="12700">
+            <a:solidFill>
+              <a:srgbClr val="DB2777"/>
+            </a:solidFill>
+            <a:prstDash val="solid"/>
+          </a:ln>
+        </p:spPr>
+      </p:sp>
+      <p:sp>
+        <p:nvSpPr>
+          <p:cNvPr id="49" name="Text 47"/>
+          <p:cNvSpPr/>
+          <p:nvPr/>
+        </p:nvSpPr>
+        <p:spPr>
+          <a:xfrm>
+            <a:off x="6870192" y="4169664"/>
+            <a:ext cx="685800" cy="475488"/>
+          </a:xfrm>
+          <a:prstGeom prst="rect">
+            <a:avLst/>
+          </a:prstGeom>
+          <a:noFill/>
+          <a:ln/>
+        </p:spPr>
+        <p:txBody>
+          <a:bodyPr wrap="square" lIns="0" tIns="0" rIns="0" bIns="0" rtlCol="0" anchor="ctr"/>
+          <a:lstStyle/>
+          <a:p>
+            <a:pPr algn="ctr" indent="0" marL="0">
+              <a:buNone/>
+            </a:pPr>
+            <a:r>
+              <a:rPr lang="en-US" sz="900" b="1" dirty="0">
+                <a:solidFill>
+                  <a:srgbClr val="9D174D"/>
+                </a:solidFill>
+                <a:latin typeface="Trebuchet MS" pitchFamily="34" charset="0"/>
+                <a:ea typeface="Trebuchet MS" pitchFamily="34" charset="-122"/>
+                <a:cs typeface="Trebuchet MS" pitchFamily="34" charset="-120"/>
+              </a:rPr>
+              <a:t>n</a:t>
+            </a:r>
+            <a:endParaRPr lang="en-US" sz="900" dirty="0"/>
+          </a:p>
+        </p:txBody>
+      </p:sp>
+      <p:sp>
+        <p:nvSpPr>
+          <p:cNvPr id="50" name="Shape 48"/>
+          <p:cNvSpPr/>
+          <p:nvPr/>
+        </p:nvSpPr>
+        <p:spPr>
+          <a:xfrm>
+            <a:off x="7677912" y="4169664"/>
+            <a:ext cx="685800" cy="475488"/>
+          </a:xfrm>
+          <a:prstGeom prst="rect">
+            <a:avLst>
+              <a:gd name="adj" fmla="val 7692"/>
+            </a:avLst>
+          </a:prstGeom>
+          <a:solidFill>
+            <a:srgbClr val="FFFFFF"/>
+          </a:solidFill>
+          <a:ln w="12700">
+            <a:solidFill>
+              <a:srgbClr val="DB2777"/>
+            </a:solidFill>
+            <a:prstDash val="solid"/>
+          </a:ln>
+        </p:spPr>
+      </p:sp>
+      <p:sp>
+        <p:nvSpPr>
+          <p:cNvPr id="51" name="Text 49"/>
+          <p:cNvSpPr/>
+          <p:nvPr/>
+        </p:nvSpPr>
+        <p:spPr>
+          <a:xfrm>
+            <a:off x="7677912" y="4169664"/>
+            <a:ext cx="685800" cy="475488"/>
+          </a:xfrm>
+          <a:prstGeom prst="rect">
+            <a:avLst/>
+          </a:prstGeom>
+          <a:noFill/>
+          <a:ln/>
+        </p:spPr>
+        <p:txBody>
+          <a:bodyPr wrap="square" lIns="0" tIns="0" rIns="0" bIns="0" rtlCol="0" anchor="ctr"/>
+          <a:lstStyle/>
+          <a:p>
+            <a:pPr algn="ctr" indent="0" marL="0">
+              <a:buNone/>
+            </a:pPr>
+            <a:r>
+              <a:rPr lang="en-US" sz="900" b="1" dirty="0">
+                <a:solidFill>
+                  <a:srgbClr val="9D174D"/>
+                </a:solidFill>
+                <a:latin typeface="Trebuchet MS" pitchFamily="34" charset="0"/>
+                <a:ea typeface="Trebuchet MS" pitchFamily="34" charset="-122"/>
+                <a:cs typeface="Trebuchet MS" pitchFamily="34" charset="-120"/>
+              </a:rPr>
+              <a:t>ce</a:t>
             </a:r>
             <a:endParaRPr lang="en-US" sz="900" dirty="0"/>
           </a:p>
@@ -28726,7 +29437,7 @@
                 <a:ea typeface="Calibri" pitchFamily="34" charset="-122"/>
                 <a:cs typeface="Calibri" pitchFamily="34" charset="-120"/>
               </a:rPr>
-              <a:t>Word Labs  •  wordlabs.app  •  Root: 'perform' = carry out, do, or show</a:t>
+              <a:t>Word Labs  •  wordlabs.app  •  Root: 'perform' = do; carry out</a:t>
             </a:r>
             <a:endParaRPr lang="en-US" sz="800" dirty="0"/>
           </a:p>
@@ -28865,7 +29576,7 @@
                 <a:ea typeface="Trebuchet MS" pitchFamily="34" charset="-122"/>
                 <a:cs typeface="Trebuchet MS" pitchFamily="34" charset="-120"/>
               </a:rPr>
-              <a:t>underperforming</a:t>
+              <a:t>performances</a:t>
             </a:r>
             <a:endParaRPr lang="en-US" sz="2800" dirty="0"/>
           </a:p>
@@ -29553,7 +30264,7 @@
                 <a:ea typeface="Calibri" pitchFamily="34" charset="-122"/>
                 <a:cs typeface="Calibri" pitchFamily="34" charset="-120"/>
               </a:rPr>
-              <a:t>Word Labs  •  wordlabs.app  •  Root: 'perform' = carry out, do, or show</a:t>
+              <a:t>Word Labs  •  wordlabs.app  •  Root: 'perform' = do; carry out</a:t>
             </a:r>
             <a:endParaRPr lang="en-US" sz="800" dirty="0"/>
           </a:p>
@@ -29692,7 +30403,7 @@
                 <a:ea typeface="Trebuchet MS" pitchFamily="34" charset="-122"/>
                 <a:cs typeface="Trebuchet MS" pitchFamily="34" charset="-120"/>
               </a:rPr>
-              <a:t>underperforming</a:t>
+              <a:t>performances</a:t>
             </a:r>
             <a:endParaRPr lang="en-US" sz="2800" dirty="0"/>
           </a:p>
@@ -29781,11 +30492,11 @@
             </a:avLst>
           </a:prstGeom>
           <a:solidFill>
-            <a:srgbClr val="DDD6FE"/>
+            <a:srgbClr val="CCFBF1"/>
           </a:solidFill>
           <a:ln w="19050">
             <a:solidFill>
-              <a:srgbClr val="7C3AED"/>
+              <a:srgbClr val="0D9488"/>
             </a:solidFill>
             <a:prstDash val="solid"/>
           </a:ln>
@@ -29825,13 +30536,13 @@
             <a:r>
               <a:rPr lang="en-US" sz="1300" b="1" dirty="0">
                 <a:solidFill>
-                  <a:srgbClr val="4C1D95"/>
+                  <a:srgbClr val="0F766E"/>
                 </a:solidFill>
                 <a:latin typeface="Trebuchet MS" pitchFamily="34" charset="0"/>
                 <a:ea typeface="Trebuchet MS" pitchFamily="34" charset="-122"/>
                 <a:cs typeface="Trebuchet MS" pitchFamily="34" charset="-120"/>
               </a:rPr>
-              <a:t>under</a:t>
+              <a:t>perform</a:t>
             </a:r>
             <a:endParaRPr lang="en-US" sz="1300" dirty="0"/>
           </a:p>
@@ -29870,7 +30581,7 @@
                 <a:ea typeface="Calibri" pitchFamily="34" charset="-122"/>
                 <a:cs typeface="Calibri" pitchFamily="34" charset="-120"/>
               </a:rPr>
-              <a:t>below or less than expected</a:t>
+              <a:t>do; carry out</a:t>
             </a:r>
             <a:endParaRPr lang="en-US" sz="850" dirty="0"/>
           </a:p>
@@ -29893,11 +30604,11 @@
             </a:avLst>
           </a:prstGeom>
           <a:solidFill>
-            <a:srgbClr val="CCFBF1"/>
+            <a:srgbClr val="FCE7F3"/>
           </a:solidFill>
           <a:ln w="19050">
             <a:solidFill>
-              <a:srgbClr val="0D9488"/>
+              <a:srgbClr val="DB2777"/>
             </a:solidFill>
             <a:prstDash val="solid"/>
           </a:ln>
@@ -29937,13 +30648,13 @@
             <a:r>
               <a:rPr lang="en-US" sz="1300" b="1" dirty="0">
                 <a:solidFill>
-                  <a:srgbClr val="0F766E"/>
+                  <a:srgbClr val="9D174D"/>
                 </a:solidFill>
                 <a:latin typeface="Trebuchet MS" pitchFamily="34" charset="0"/>
                 <a:ea typeface="Trebuchet MS" pitchFamily="34" charset="-122"/>
                 <a:cs typeface="Trebuchet MS" pitchFamily="34" charset="-120"/>
               </a:rPr>
-              <a:t>perform</a:t>
+              <a:t>ance</a:t>
             </a:r>
             <a:endParaRPr lang="en-US" sz="1300" dirty="0"/>
           </a:p>
@@ -29982,7 +30693,7 @@
                 <a:ea typeface="Calibri" pitchFamily="34" charset="-122"/>
                 <a:cs typeface="Calibri" pitchFamily="34" charset="-120"/>
               </a:rPr>
-              <a:t>carry out or show</a:t>
+              <a:t>state of</a:t>
             </a:r>
             <a:endParaRPr lang="en-US" sz="850" dirty="0"/>
           </a:p>
@@ -30055,7 +30766,7 @@
                 <a:ea typeface="Trebuchet MS" pitchFamily="34" charset="-122"/>
                 <a:cs typeface="Trebuchet MS" pitchFamily="34" charset="-120"/>
               </a:rPr>
-              <a:t>ing</a:t>
+              <a:t>s</a:t>
             </a:r>
             <a:endParaRPr lang="en-US" sz="1300" dirty="0"/>
           </a:p>
@@ -30094,7 +30805,7 @@
                 <a:ea typeface="Calibri" pitchFamily="34" charset="-122"/>
                 <a:cs typeface="Calibri" pitchFamily="34" charset="-120"/>
               </a:rPr>
-              <a:t>in the process of</a:t>
+              <a:t>plural or present tense</a:t>
             </a:r>
             <a:endParaRPr lang="en-US" sz="850" dirty="0"/>
           </a:p>
@@ -30650,7 +31361,7 @@
                 <a:ea typeface="Calibri" pitchFamily="34" charset="-122"/>
                 <a:cs typeface="Calibri" pitchFamily="34" charset="-120"/>
               </a:rPr>
-              <a:t>Word Labs  •  wordlabs.app  •  Root: 'perform' = carry out, do, or show</a:t>
+              <a:t>Word Labs  •  wordlabs.app  •  Root: 'perform' = do; carry out</a:t>
             </a:r>
             <a:endParaRPr lang="en-US" sz="800" dirty="0"/>
           </a:p>
@@ -30789,7 +31500,7 @@
                 <a:ea typeface="Trebuchet MS" pitchFamily="34" charset="-122"/>
                 <a:cs typeface="Trebuchet MS" pitchFamily="34" charset="-120"/>
               </a:rPr>
-              <a:t>underperforming</a:t>
+              <a:t>performances</a:t>
             </a:r>
             <a:endParaRPr lang="en-US" sz="2800" dirty="0"/>
           </a:p>
@@ -30878,11 +31589,11 @@
             </a:avLst>
           </a:prstGeom>
           <a:solidFill>
-            <a:srgbClr val="DDD6FE"/>
+            <a:srgbClr val="CCFBF1"/>
           </a:solidFill>
           <a:ln w="19050">
             <a:solidFill>
-              <a:srgbClr val="7C3AED"/>
+              <a:srgbClr val="0D9488"/>
             </a:solidFill>
             <a:prstDash val="solid"/>
           </a:ln>
@@ -30922,13 +31633,13 @@
             <a:r>
               <a:rPr lang="en-US" sz="1300" b="1" dirty="0">
                 <a:solidFill>
-                  <a:srgbClr val="4C1D95"/>
+                  <a:srgbClr val="0F766E"/>
                 </a:solidFill>
                 <a:latin typeface="Trebuchet MS" pitchFamily="34" charset="0"/>
                 <a:ea typeface="Trebuchet MS" pitchFamily="34" charset="-122"/>
                 <a:cs typeface="Trebuchet MS" pitchFamily="34" charset="-120"/>
               </a:rPr>
-              <a:t>under</a:t>
+              <a:t>perform</a:t>
             </a:r>
             <a:endParaRPr lang="en-US" sz="1300" dirty="0"/>
           </a:p>
@@ -30967,7 +31678,7 @@
                 <a:ea typeface="Calibri" pitchFamily="34" charset="-122"/>
                 <a:cs typeface="Calibri" pitchFamily="34" charset="-120"/>
               </a:rPr>
-              <a:t>below or less than expected</a:t>
+              <a:t>do; carry out</a:t>
             </a:r>
             <a:endParaRPr lang="en-US" sz="850" dirty="0"/>
           </a:p>
@@ -30990,11 +31701,11 @@
             </a:avLst>
           </a:prstGeom>
           <a:solidFill>
-            <a:srgbClr val="CCFBF1"/>
+            <a:srgbClr val="FCE7F3"/>
           </a:solidFill>
           <a:ln w="19050">
             <a:solidFill>
-              <a:srgbClr val="0D9488"/>
+              <a:srgbClr val="DB2777"/>
             </a:solidFill>
             <a:prstDash val="solid"/>
           </a:ln>
@@ -31034,13 +31745,13 @@
             <a:r>
               <a:rPr lang="en-US" sz="1300" b="1" dirty="0">
                 <a:solidFill>
-                  <a:srgbClr val="0F766E"/>
+                  <a:srgbClr val="9D174D"/>
                 </a:solidFill>
                 <a:latin typeface="Trebuchet MS" pitchFamily="34" charset="0"/>
                 <a:ea typeface="Trebuchet MS" pitchFamily="34" charset="-122"/>
                 <a:cs typeface="Trebuchet MS" pitchFamily="34" charset="-120"/>
               </a:rPr>
-              <a:t>perform</a:t>
+              <a:t>ance</a:t>
             </a:r>
             <a:endParaRPr lang="en-US" sz="1300" dirty="0"/>
           </a:p>
@@ -31079,7 +31790,7 @@
                 <a:ea typeface="Calibri" pitchFamily="34" charset="-122"/>
                 <a:cs typeface="Calibri" pitchFamily="34" charset="-120"/>
               </a:rPr>
-              <a:t>carry out or show</a:t>
+              <a:t>state of</a:t>
             </a:r>
             <a:endParaRPr lang="en-US" sz="850" dirty="0"/>
           </a:p>
@@ -31152,7 +31863,7 @@
                 <a:ea typeface="Trebuchet MS" pitchFamily="34" charset="-122"/>
                 <a:cs typeface="Trebuchet MS" pitchFamily="34" charset="-120"/>
               </a:rPr>
-              <a:t>ing</a:t>
+              <a:t>s</a:t>
             </a:r>
             <a:endParaRPr lang="en-US" sz="1300" dirty="0"/>
           </a:p>
@@ -31191,7 +31902,7 @@
                 <a:ea typeface="Calibri" pitchFamily="34" charset="-122"/>
                 <a:cs typeface="Calibri" pitchFamily="34" charset="-120"/>
               </a:rPr>
-              <a:t>in the process of</a:t>
+              <a:t>plural or present tense</a:t>
             </a:r>
             <a:endParaRPr lang="en-US" sz="850" dirty="0"/>
           </a:p>
@@ -31298,8 +32009,8 @@
         </p:nvSpPr>
         <p:spPr>
           <a:xfrm>
-            <a:off x="1978152" y="3364992"/>
-            <a:ext cx="1225296" cy="475488"/>
+            <a:off x="1975104" y="3364992"/>
+            <a:ext cx="1554480" cy="475488"/>
           </a:xfrm>
           <a:prstGeom prst="rect">
             <a:avLst>
@@ -31325,8 +32036,8 @@
         </p:nvSpPr>
         <p:spPr>
           <a:xfrm>
-            <a:off x="1978152" y="3364992"/>
-            <a:ext cx="1225296" cy="475488"/>
+            <a:off x="1975104" y="3364992"/>
+            <a:ext cx="1554480" cy="475488"/>
           </a:xfrm>
           <a:prstGeom prst="rect">
             <a:avLst/>
@@ -31350,7 +32061,7 @@
                 <a:ea typeface="Trebuchet MS" pitchFamily="34" charset="-122"/>
                 <a:cs typeface="Trebuchet MS" pitchFamily="34" charset="-120"/>
               </a:rPr>
-              <a:t>un</a:t>
+              <a:t>per</a:t>
             </a:r>
             <a:endParaRPr lang="en-US" sz="1400" dirty="0"/>
           </a:p>
@@ -31364,8 +32075,8 @@
         </p:nvSpPr>
         <p:spPr>
           <a:xfrm>
-            <a:off x="3203448" y="3364992"/>
-            <a:ext cx="76200" cy="475488"/>
+            <a:off x="3529584" y="3364992"/>
+            <a:ext cx="73152" cy="475488"/>
           </a:xfrm>
           <a:prstGeom prst="rect">
             <a:avLst/>
@@ -31403,8 +32114,8 @@
         </p:nvSpPr>
         <p:spPr>
           <a:xfrm>
-            <a:off x="3279648" y="3364992"/>
-            <a:ext cx="1225296" cy="475488"/>
+            <a:off x="3602736" y="3364992"/>
+            <a:ext cx="1554480" cy="475488"/>
           </a:xfrm>
           <a:prstGeom prst="rect">
             <a:avLst>
@@ -31430,8 +32141,8 @@
         </p:nvSpPr>
         <p:spPr>
           <a:xfrm>
-            <a:off x="3279648" y="3364992"/>
-            <a:ext cx="1225296" cy="475488"/>
+            <a:off x="3602736" y="3364992"/>
+            <a:ext cx="1554480" cy="475488"/>
           </a:xfrm>
           <a:prstGeom prst="rect">
             <a:avLst/>
@@ -31455,7 +32166,7 @@
                 <a:ea typeface="Trebuchet MS" pitchFamily="34" charset="-122"/>
                 <a:cs typeface="Trebuchet MS" pitchFamily="34" charset="-120"/>
               </a:rPr>
-              <a:t>der</a:t>
+              <a:t>for</a:t>
             </a:r>
             <a:endParaRPr lang="en-US" sz="1400" dirty="0"/>
           </a:p>
@@ -31469,8 +32180,8 @@
         </p:nvSpPr>
         <p:spPr>
           <a:xfrm>
-            <a:off x="4504944" y="3364992"/>
-            <a:ext cx="76200" cy="475488"/>
+            <a:off x="5157216" y="3364992"/>
+            <a:ext cx="73152" cy="475488"/>
           </a:xfrm>
           <a:prstGeom prst="rect">
             <a:avLst/>
@@ -31508,8 +32219,8 @@
         </p:nvSpPr>
         <p:spPr>
           <a:xfrm>
-            <a:off x="4581144" y="3364992"/>
-            <a:ext cx="1225296" cy="475488"/>
+            <a:off x="5230368" y="3364992"/>
+            <a:ext cx="1554480" cy="475488"/>
           </a:xfrm>
           <a:prstGeom prst="rect">
             <a:avLst>
@@ -31535,8 +32246,8 @@
         </p:nvSpPr>
         <p:spPr>
           <a:xfrm>
-            <a:off x="4581144" y="3364992"/>
-            <a:ext cx="1225296" cy="475488"/>
+            <a:off x="5230368" y="3364992"/>
+            <a:ext cx="1554480" cy="475488"/>
           </a:xfrm>
           <a:prstGeom prst="rect">
             <a:avLst/>
@@ -31560,7 +32271,7 @@
                 <a:ea typeface="Trebuchet MS" pitchFamily="34" charset="-122"/>
                 <a:cs typeface="Trebuchet MS" pitchFamily="34" charset="-120"/>
               </a:rPr>
-              <a:t>per</a:t>
+              <a:t>manc</a:t>
             </a:r>
             <a:endParaRPr lang="en-US" sz="1400" dirty="0"/>
           </a:p>
@@ -31574,8 +32285,8 @@
         </p:nvSpPr>
         <p:spPr>
           <a:xfrm>
-            <a:off x="5806440" y="3364992"/>
-            <a:ext cx="76200" cy="475488"/>
+            <a:off x="6784848" y="3364992"/>
+            <a:ext cx="73152" cy="475488"/>
           </a:xfrm>
           <a:prstGeom prst="rect">
             <a:avLst/>
@@ -31613,8 +32324,8 @@
         </p:nvSpPr>
         <p:spPr>
           <a:xfrm>
-            <a:off x="5882640" y="3364992"/>
-            <a:ext cx="1225296" cy="475488"/>
+            <a:off x="6858000" y="3364992"/>
+            <a:ext cx="1554480" cy="475488"/>
           </a:xfrm>
           <a:prstGeom prst="rect">
             <a:avLst>
@@ -31640,8 +32351,8 @@
         </p:nvSpPr>
         <p:spPr>
           <a:xfrm>
-            <a:off x="5882640" y="3364992"/>
-            <a:ext cx="1225296" cy="475488"/>
+            <a:off x="6858000" y="3364992"/>
+            <a:ext cx="1554480" cy="475488"/>
           </a:xfrm>
           <a:prstGeom prst="rect">
             <a:avLst/>
@@ -31665,7 +32376,7 @@
                 <a:ea typeface="Trebuchet MS" pitchFamily="34" charset="-122"/>
                 <a:cs typeface="Trebuchet MS" pitchFamily="34" charset="-120"/>
               </a:rPr>
-              <a:t>form</a:t>
+              <a:t>es</a:t>
             </a:r>
             <a:endParaRPr lang="en-US" sz="1400" dirty="0"/>
           </a:p>
@@ -31673,119 +32384,80 @@
       </p:sp>
       <p:sp>
         <p:nvSpPr>
-          <p:cNvPr id="39" name="Text 37"/>
-          <p:cNvSpPr/>
-          <p:nvPr/>
-        </p:nvSpPr>
-        <p:spPr>
-          <a:xfrm>
-            <a:off x="7107936" y="3364992"/>
-            <a:ext cx="76200" cy="475488"/>
-          </a:xfrm>
-          <a:prstGeom prst="rect">
-            <a:avLst/>
-          </a:prstGeom>
-          <a:noFill/>
-          <a:ln/>
-        </p:spPr>
-        <p:txBody>
-          <a:bodyPr wrap="square" lIns="0" tIns="0" rIns="0" bIns="0" rtlCol="0" anchor="ctr"/>
-          <a:lstStyle/>
-          <a:p>
-            <a:pPr algn="ctr" indent="0" marL="0">
-              <a:buNone/>
-            </a:pPr>
-            <a:r>
-              <a:rPr lang="en-US" sz="1600" b="1" dirty="0">
-                <a:solidFill>
-                  <a:srgbClr val="0D9488"/>
+          <p:cNvPr id="39" name="Shape 37"/>
+          <p:cNvSpPr/>
+          <p:nvPr/>
+        </p:nvSpPr>
+        <p:spPr>
+          <a:xfrm>
+            <a:off x="365760" y="4096512"/>
+            <a:ext cx="1371600" cy="804672"/>
+          </a:xfrm>
+          <a:prstGeom prst="rect">
+            <a:avLst>
+              <a:gd name="adj" fmla="val 6818"/>
+            </a:avLst>
+          </a:prstGeom>
+          <a:solidFill>
+            <a:srgbClr val="E2E8F0"/>
+          </a:solidFill>
+          <a:ln w="12700">
+            <a:solidFill>
+              <a:srgbClr val="E2E8F0"/>
+            </a:solidFill>
+            <a:prstDash val="solid"/>
+          </a:ln>
+        </p:spPr>
+      </p:sp>
+      <p:sp>
+        <p:nvSpPr>
+          <p:cNvPr id="40" name="Text 38"/>
+          <p:cNvSpPr/>
+          <p:nvPr/>
+        </p:nvSpPr>
+        <p:spPr>
+          <a:xfrm>
+            <a:off x="365760" y="4096512"/>
+            <a:ext cx="1371600" cy="804672"/>
+          </a:xfrm>
+          <a:prstGeom prst="rect">
+            <a:avLst/>
+          </a:prstGeom>
+          <a:noFill/>
+          <a:ln/>
+        </p:spPr>
+        <p:txBody>
+          <a:bodyPr wrap="square" lIns="0" tIns="0" rIns="0" bIns="0" rtlCol="0" anchor="ctr"/>
+          <a:lstStyle/>
+          <a:p>
+            <a:pPr algn="ctr" indent="0" marL="0">
+              <a:buNone/>
+            </a:pPr>
+            <a:r>
+              <a:rPr lang="en-US" sz="1100" b="1" dirty="0">
+                <a:solidFill>
+                  <a:srgbClr val="475569"/>
                 </a:solidFill>
                 <a:latin typeface="Trebuchet MS" pitchFamily="34" charset="0"/>
                 <a:ea typeface="Trebuchet MS" pitchFamily="34" charset="-122"/>
                 <a:cs typeface="Trebuchet MS" pitchFamily="34" charset="-120"/>
               </a:rPr>
-              <a:t>·</a:t>
-            </a:r>
-            <a:endParaRPr lang="en-US" sz="1600" dirty="0"/>
-          </a:p>
-        </p:txBody>
-      </p:sp>
-      <p:sp>
-        <p:nvSpPr>
-          <p:cNvPr id="40" name="Shape 38"/>
-          <p:cNvSpPr/>
-          <p:nvPr/>
-        </p:nvSpPr>
-        <p:spPr>
-          <a:xfrm>
-            <a:off x="7184136" y="3364992"/>
-            <a:ext cx="1225296" cy="475488"/>
-          </a:xfrm>
-          <a:prstGeom prst="rect">
-            <a:avLst>
-              <a:gd name="adj" fmla="val 9615"/>
-            </a:avLst>
-          </a:prstGeom>
-          <a:solidFill>
-            <a:srgbClr val="FFFFFF"/>
-          </a:solidFill>
-          <a:ln w="12700">
-            <a:solidFill>
-              <a:srgbClr val="0D9488"/>
-            </a:solidFill>
-            <a:prstDash val="solid"/>
-          </a:ln>
-        </p:spPr>
-      </p:sp>
-      <p:sp>
-        <p:nvSpPr>
-          <p:cNvPr id="41" name="Text 39"/>
-          <p:cNvSpPr/>
-          <p:nvPr/>
-        </p:nvSpPr>
-        <p:spPr>
-          <a:xfrm>
-            <a:off x="7184136" y="3364992"/>
-            <a:ext cx="1225296" cy="475488"/>
-          </a:xfrm>
-          <a:prstGeom prst="rect">
-            <a:avLst/>
-          </a:prstGeom>
-          <a:noFill/>
-          <a:ln/>
-        </p:spPr>
-        <p:txBody>
-          <a:bodyPr wrap="square" lIns="0" tIns="0" rIns="0" bIns="0" rtlCol="0" anchor="ctr"/>
-          <a:lstStyle/>
-          <a:p>
-            <a:pPr algn="ctr" indent="0" marL="0">
-              <a:buNone/>
-            </a:pPr>
-            <a:r>
-              <a:rPr lang="en-US" sz="1400" b="1" dirty="0">
-                <a:solidFill>
-                  <a:srgbClr val="0D9488"/>
-                </a:solidFill>
-                <a:latin typeface="Trebuchet MS" pitchFamily="34" charset="0"/>
-                <a:ea typeface="Trebuchet MS" pitchFamily="34" charset="-122"/>
-                <a:cs typeface="Trebuchet MS" pitchFamily="34" charset="-120"/>
-              </a:rPr>
-              <a:t>ing</a:t>
-            </a:r>
-            <a:endParaRPr lang="en-US" sz="1400" dirty="0"/>
-          </a:p>
-        </p:txBody>
-      </p:sp>
-      <p:sp>
-        <p:nvSpPr>
-          <p:cNvPr id="42" name="Shape 40"/>
-          <p:cNvSpPr/>
-          <p:nvPr/>
-        </p:nvSpPr>
-        <p:spPr>
-          <a:xfrm>
-            <a:off x="365760" y="4096512"/>
-            <a:ext cx="1371600" cy="804672"/>
+              <a:t>Phonemes</a:t>
+            </a:r>
+            <a:endParaRPr lang="en-US" sz="1100" dirty="0"/>
+          </a:p>
+        </p:txBody>
+      </p:sp>
+      <p:sp>
+        <p:nvSpPr>
+          <p:cNvPr id="41" name="Shape 39"/>
+          <p:cNvSpPr/>
+          <p:nvPr/>
+        </p:nvSpPr>
+        <p:spPr>
+          <a:xfrm>
+            <a:off x="1874520" y="4096512"/>
+            <a:ext cx="6903720" cy="804672"/>
           </a:xfrm>
           <a:prstGeom prst="rect">
             <a:avLst>
@@ -31793,85 +32465,19 @@
             </a:avLst>
           </a:prstGeom>
           <a:solidFill>
-            <a:srgbClr val="E2E8F0"/>
+            <a:srgbClr val="F8FAFC"/>
           </a:solidFill>
           <a:ln w="12700">
             <a:solidFill>
               <a:srgbClr val="E2E8F0"/>
             </a:solidFill>
-            <a:prstDash val="solid"/>
-          </a:ln>
-        </p:spPr>
-      </p:sp>
-      <p:sp>
-        <p:nvSpPr>
-          <p:cNvPr id="43" name="Text 41"/>
-          <p:cNvSpPr/>
-          <p:nvPr/>
-        </p:nvSpPr>
-        <p:spPr>
-          <a:xfrm>
-            <a:off x="365760" y="4096512"/>
-            <a:ext cx="1371600" cy="804672"/>
-          </a:xfrm>
-          <a:prstGeom prst="rect">
-            <a:avLst/>
-          </a:prstGeom>
-          <a:noFill/>
-          <a:ln/>
-        </p:spPr>
-        <p:txBody>
-          <a:bodyPr wrap="square" lIns="0" tIns="0" rIns="0" bIns="0" rtlCol="0" anchor="ctr"/>
-          <a:lstStyle/>
-          <a:p>
-            <a:pPr algn="ctr" indent="0" marL="0">
-              <a:buNone/>
-            </a:pPr>
-            <a:r>
-              <a:rPr lang="en-US" sz="1100" b="1" dirty="0">
-                <a:solidFill>
-                  <a:srgbClr val="475569"/>
-                </a:solidFill>
-                <a:latin typeface="Trebuchet MS" pitchFamily="34" charset="0"/>
-                <a:ea typeface="Trebuchet MS" pitchFamily="34" charset="-122"/>
-                <a:cs typeface="Trebuchet MS" pitchFamily="34" charset="-120"/>
-              </a:rPr>
-              <a:t>Phonemes</a:t>
-            </a:r>
-            <a:endParaRPr lang="en-US" sz="1100" dirty="0"/>
-          </a:p>
-        </p:txBody>
-      </p:sp>
-      <p:sp>
-        <p:nvSpPr>
-          <p:cNvPr id="44" name="Shape 42"/>
-          <p:cNvSpPr/>
-          <p:nvPr/>
-        </p:nvSpPr>
-        <p:spPr>
-          <a:xfrm>
-            <a:off x="1874520" y="4096512"/>
-            <a:ext cx="6903720" cy="804672"/>
-          </a:xfrm>
-          <a:prstGeom prst="rect">
-            <a:avLst>
-              <a:gd name="adj" fmla="val 6818"/>
-            </a:avLst>
-          </a:prstGeom>
-          <a:solidFill>
-            <a:srgbClr val="F8FAFC"/>
-          </a:solidFill>
-          <a:ln w="12700">
-            <a:solidFill>
-              <a:srgbClr val="E2E8F0"/>
-            </a:solidFill>
             <a:prstDash val="dash"/>
           </a:ln>
         </p:spPr>
       </p:sp>
       <p:sp>
         <p:nvSpPr>
-          <p:cNvPr id="45" name="Text 43"/>
+          <p:cNvPr id="42" name="Text 40"/>
           <p:cNvSpPr/>
           <p:nvPr/>
         </p:nvSpPr>
@@ -32194,7 +32800,7 @@
                 <a:ea typeface="Calibri" pitchFamily="34" charset="-122"/>
                 <a:cs typeface="Calibri" pitchFamily="34" charset="-120"/>
               </a:rPr>
-              <a:t>Word Labs  •  wordlabs.app  •  Root: 'perform' = carry out, do, or show</a:t>
+              <a:t>Word Labs  •  wordlabs.app  •  Root: 'perform' = do; carry out</a:t>
             </a:r>
             <a:endParaRPr lang="en-US" sz="800" dirty="0"/>
           </a:p>
@@ -32333,7 +32939,7 @@
                 <a:ea typeface="Trebuchet MS" pitchFamily="34" charset="-122"/>
                 <a:cs typeface="Trebuchet MS" pitchFamily="34" charset="-120"/>
               </a:rPr>
-              <a:t>underperforming</a:t>
+              <a:t>performances</a:t>
             </a:r>
             <a:endParaRPr lang="en-US" sz="2800" dirty="0"/>
           </a:p>
@@ -32422,11 +33028,11 @@
             </a:avLst>
           </a:prstGeom>
           <a:solidFill>
-            <a:srgbClr val="DDD6FE"/>
+            <a:srgbClr val="CCFBF1"/>
           </a:solidFill>
           <a:ln w="19050">
             <a:solidFill>
-              <a:srgbClr val="7C3AED"/>
+              <a:srgbClr val="0D9488"/>
             </a:solidFill>
             <a:prstDash val="solid"/>
           </a:ln>
@@ -32466,13 +33072,13 @@
             <a:r>
               <a:rPr lang="en-US" sz="1300" b="1" dirty="0">
                 <a:solidFill>
-                  <a:srgbClr val="4C1D95"/>
+                  <a:srgbClr val="0F766E"/>
                 </a:solidFill>
                 <a:latin typeface="Trebuchet MS" pitchFamily="34" charset="0"/>
                 <a:ea typeface="Trebuchet MS" pitchFamily="34" charset="-122"/>
                 <a:cs typeface="Trebuchet MS" pitchFamily="34" charset="-120"/>
               </a:rPr>
-              <a:t>under</a:t>
+              <a:t>perform</a:t>
             </a:r>
             <a:endParaRPr lang="en-US" sz="1300" dirty="0"/>
           </a:p>
@@ -32511,7 +33117,7 @@
                 <a:ea typeface="Calibri" pitchFamily="34" charset="-122"/>
                 <a:cs typeface="Calibri" pitchFamily="34" charset="-120"/>
               </a:rPr>
-              <a:t>below or less than expected</a:t>
+              <a:t>do; carry out</a:t>
             </a:r>
             <a:endParaRPr lang="en-US" sz="850" dirty="0"/>
           </a:p>
@@ -32534,11 +33140,11 @@
             </a:avLst>
           </a:prstGeom>
           <a:solidFill>
-            <a:srgbClr val="CCFBF1"/>
+            <a:srgbClr val="FCE7F3"/>
           </a:solidFill>
           <a:ln w="19050">
             <a:solidFill>
-              <a:srgbClr val="0D9488"/>
+              <a:srgbClr val="DB2777"/>
             </a:solidFill>
             <a:prstDash val="solid"/>
           </a:ln>
@@ -32578,13 +33184,13 @@
             <a:r>
               <a:rPr lang="en-US" sz="1300" b="1" dirty="0">
                 <a:solidFill>
-                  <a:srgbClr val="0F766E"/>
+                  <a:srgbClr val="9D174D"/>
                 </a:solidFill>
                 <a:latin typeface="Trebuchet MS" pitchFamily="34" charset="0"/>
                 <a:ea typeface="Trebuchet MS" pitchFamily="34" charset="-122"/>
                 <a:cs typeface="Trebuchet MS" pitchFamily="34" charset="-120"/>
               </a:rPr>
-              <a:t>perform</a:t>
+              <a:t>ance</a:t>
             </a:r>
             <a:endParaRPr lang="en-US" sz="1300" dirty="0"/>
           </a:p>
@@ -32623,7 +33229,7 @@
                 <a:ea typeface="Calibri" pitchFamily="34" charset="-122"/>
                 <a:cs typeface="Calibri" pitchFamily="34" charset="-120"/>
               </a:rPr>
-              <a:t>carry out or show</a:t>
+              <a:t>state of</a:t>
             </a:r>
             <a:endParaRPr lang="en-US" sz="850" dirty="0"/>
           </a:p>
@@ -32696,7 +33302,7 @@
                 <a:ea typeface="Trebuchet MS" pitchFamily="34" charset="-122"/>
                 <a:cs typeface="Trebuchet MS" pitchFamily="34" charset="-120"/>
               </a:rPr>
-              <a:t>ing</a:t>
+              <a:t>s</a:t>
             </a:r>
             <a:endParaRPr lang="en-US" sz="1300" dirty="0"/>
           </a:p>
@@ -32735,7 +33341,7 @@
                 <a:ea typeface="Calibri" pitchFamily="34" charset="-122"/>
                 <a:cs typeface="Calibri" pitchFamily="34" charset="-120"/>
               </a:rPr>
-              <a:t>in the process of</a:t>
+              <a:t>plural or present tense</a:t>
             </a:r>
             <a:endParaRPr lang="en-US" sz="850" dirty="0"/>
           </a:p>
@@ -32842,8 +33448,8 @@
         </p:nvSpPr>
         <p:spPr>
           <a:xfrm>
-            <a:off x="1978152" y="3364992"/>
-            <a:ext cx="1225296" cy="475488"/>
+            <a:off x="1975104" y="3364992"/>
+            <a:ext cx="1554480" cy="475488"/>
           </a:xfrm>
           <a:prstGeom prst="rect">
             <a:avLst>
@@ -32869,8 +33475,8 @@
         </p:nvSpPr>
         <p:spPr>
           <a:xfrm>
-            <a:off x="1978152" y="3364992"/>
-            <a:ext cx="1225296" cy="475488"/>
+            <a:off x="1975104" y="3364992"/>
+            <a:ext cx="1554480" cy="475488"/>
           </a:xfrm>
           <a:prstGeom prst="rect">
             <a:avLst/>
@@ -32894,7 +33500,7 @@
                 <a:ea typeface="Trebuchet MS" pitchFamily="34" charset="-122"/>
                 <a:cs typeface="Trebuchet MS" pitchFamily="34" charset="-120"/>
               </a:rPr>
-              <a:t>un</a:t>
+              <a:t>per</a:t>
             </a:r>
             <a:endParaRPr lang="en-US" sz="1400" dirty="0"/>
           </a:p>
@@ -32908,8 +33514,8 @@
         </p:nvSpPr>
         <p:spPr>
           <a:xfrm>
-            <a:off x="3203448" y="3364992"/>
-            <a:ext cx="76200" cy="475488"/>
+            <a:off x="3529584" y="3364992"/>
+            <a:ext cx="73152" cy="475488"/>
           </a:xfrm>
           <a:prstGeom prst="rect">
             <a:avLst/>
@@ -32947,8 +33553,8 @@
         </p:nvSpPr>
         <p:spPr>
           <a:xfrm>
-            <a:off x="3279648" y="3364992"/>
-            <a:ext cx="1225296" cy="475488"/>
+            <a:off x="3602736" y="3364992"/>
+            <a:ext cx="1554480" cy="475488"/>
           </a:xfrm>
           <a:prstGeom prst="rect">
             <a:avLst>
@@ -32974,8 +33580,8 @@
         </p:nvSpPr>
         <p:spPr>
           <a:xfrm>
-            <a:off x="3279648" y="3364992"/>
-            <a:ext cx="1225296" cy="475488"/>
+            <a:off x="3602736" y="3364992"/>
+            <a:ext cx="1554480" cy="475488"/>
           </a:xfrm>
           <a:prstGeom prst="rect">
             <a:avLst/>
@@ -32999,7 +33605,7 @@
                 <a:ea typeface="Trebuchet MS" pitchFamily="34" charset="-122"/>
                 <a:cs typeface="Trebuchet MS" pitchFamily="34" charset="-120"/>
               </a:rPr>
-              <a:t>der</a:t>
+              <a:t>for</a:t>
             </a:r>
             <a:endParaRPr lang="en-US" sz="1400" dirty="0"/>
           </a:p>
@@ -33013,8 +33619,8 @@
         </p:nvSpPr>
         <p:spPr>
           <a:xfrm>
-            <a:off x="4504944" y="3364992"/>
-            <a:ext cx="76200" cy="475488"/>
+            <a:off x="5157216" y="3364992"/>
+            <a:ext cx="73152" cy="475488"/>
           </a:xfrm>
           <a:prstGeom prst="rect">
             <a:avLst/>
@@ -33052,8 +33658,8 @@
         </p:nvSpPr>
         <p:spPr>
           <a:xfrm>
-            <a:off x="4581144" y="3364992"/>
-            <a:ext cx="1225296" cy="475488"/>
+            <a:off x="5230368" y="3364992"/>
+            <a:ext cx="1554480" cy="475488"/>
           </a:xfrm>
           <a:prstGeom prst="rect">
             <a:avLst>
@@ -33079,8 +33685,8 @@
         </p:nvSpPr>
         <p:spPr>
           <a:xfrm>
-            <a:off x="4581144" y="3364992"/>
-            <a:ext cx="1225296" cy="475488"/>
+            <a:off x="5230368" y="3364992"/>
+            <a:ext cx="1554480" cy="475488"/>
           </a:xfrm>
           <a:prstGeom prst="rect">
             <a:avLst/>
@@ -33104,7 +33710,7 @@
                 <a:ea typeface="Trebuchet MS" pitchFamily="34" charset="-122"/>
                 <a:cs typeface="Trebuchet MS" pitchFamily="34" charset="-120"/>
               </a:rPr>
-              <a:t>per</a:t>
+              <a:t>manc</a:t>
             </a:r>
             <a:endParaRPr lang="en-US" sz="1400" dirty="0"/>
           </a:p>
@@ -33118,8 +33724,8 @@
         </p:nvSpPr>
         <p:spPr>
           <a:xfrm>
-            <a:off x="5806440" y="3364992"/>
-            <a:ext cx="76200" cy="475488"/>
+            <a:off x="6784848" y="3364992"/>
+            <a:ext cx="73152" cy="475488"/>
           </a:xfrm>
           <a:prstGeom prst="rect">
             <a:avLst/>
@@ -33157,8 +33763,8 @@
         </p:nvSpPr>
         <p:spPr>
           <a:xfrm>
-            <a:off x="5882640" y="3364992"/>
-            <a:ext cx="1225296" cy="475488"/>
+            <a:off x="6858000" y="3364992"/>
+            <a:ext cx="1554480" cy="475488"/>
           </a:xfrm>
           <a:prstGeom prst="rect">
             <a:avLst>
@@ -33184,8 +33790,8 @@
         </p:nvSpPr>
         <p:spPr>
           <a:xfrm>
-            <a:off x="5882640" y="3364992"/>
-            <a:ext cx="1225296" cy="475488"/>
+            <a:off x="6858000" y="3364992"/>
+            <a:ext cx="1554480" cy="475488"/>
           </a:xfrm>
           <a:prstGeom prst="rect">
             <a:avLst/>
@@ -33209,7 +33815,7 @@
                 <a:ea typeface="Trebuchet MS" pitchFamily="34" charset="-122"/>
                 <a:cs typeface="Trebuchet MS" pitchFamily="34" charset="-120"/>
               </a:rPr>
-              <a:t>form</a:t>
+              <a:t>es</a:t>
             </a:r>
             <a:endParaRPr lang="en-US" sz="1400" dirty="0"/>
           </a:p>
@@ -33217,212 +33823,239 @@
       </p:sp>
       <p:sp>
         <p:nvSpPr>
-          <p:cNvPr id="39" name="Text 37"/>
-          <p:cNvSpPr/>
-          <p:nvPr/>
-        </p:nvSpPr>
-        <p:spPr>
-          <a:xfrm>
-            <a:off x="7107936" y="3364992"/>
-            <a:ext cx="76200" cy="475488"/>
-          </a:xfrm>
-          <a:prstGeom prst="rect">
-            <a:avLst/>
-          </a:prstGeom>
-          <a:noFill/>
-          <a:ln/>
-        </p:spPr>
-        <p:txBody>
-          <a:bodyPr wrap="square" lIns="0" tIns="0" rIns="0" bIns="0" rtlCol="0" anchor="ctr"/>
-          <a:lstStyle/>
-          <a:p>
-            <a:pPr algn="ctr" indent="0" marL="0">
-              <a:buNone/>
-            </a:pPr>
-            <a:r>
-              <a:rPr lang="en-US" sz="1600" b="1" dirty="0">
-                <a:solidFill>
-                  <a:srgbClr val="0D9488"/>
+          <p:cNvPr id="39" name="Shape 37"/>
+          <p:cNvSpPr/>
+          <p:nvPr/>
+        </p:nvSpPr>
+        <p:spPr>
+          <a:xfrm>
+            <a:off x="365760" y="4096512"/>
+            <a:ext cx="1371600" cy="804672"/>
+          </a:xfrm>
+          <a:prstGeom prst="rect">
+            <a:avLst>
+              <a:gd name="adj" fmla="val 6818"/>
+            </a:avLst>
+          </a:prstGeom>
+          <a:solidFill>
+            <a:srgbClr val="E2E8F0"/>
+          </a:solidFill>
+          <a:ln w="12700">
+            <a:solidFill>
+              <a:srgbClr val="E2E8F0"/>
+            </a:solidFill>
+            <a:prstDash val="solid"/>
+          </a:ln>
+        </p:spPr>
+      </p:sp>
+      <p:sp>
+        <p:nvSpPr>
+          <p:cNvPr id="40" name="Text 38"/>
+          <p:cNvSpPr/>
+          <p:nvPr/>
+        </p:nvSpPr>
+        <p:spPr>
+          <a:xfrm>
+            <a:off x="365760" y="4096512"/>
+            <a:ext cx="1371600" cy="804672"/>
+          </a:xfrm>
+          <a:prstGeom prst="rect">
+            <a:avLst/>
+          </a:prstGeom>
+          <a:noFill/>
+          <a:ln/>
+        </p:spPr>
+        <p:txBody>
+          <a:bodyPr wrap="square" lIns="0" tIns="0" rIns="0" bIns="0" rtlCol="0" anchor="ctr"/>
+          <a:lstStyle/>
+          <a:p>
+            <a:pPr algn="ctr" indent="0" marL="0">
+              <a:buNone/>
+            </a:pPr>
+            <a:r>
+              <a:rPr lang="en-US" sz="1100" b="1" dirty="0">
+                <a:solidFill>
+                  <a:srgbClr val="475569"/>
                 </a:solidFill>
                 <a:latin typeface="Trebuchet MS" pitchFamily="34" charset="0"/>
                 <a:ea typeface="Trebuchet MS" pitchFamily="34" charset="-122"/>
                 <a:cs typeface="Trebuchet MS" pitchFamily="34" charset="-120"/>
               </a:rPr>
-              <a:t>·</a:t>
-            </a:r>
-            <a:endParaRPr lang="en-US" sz="1600" dirty="0"/>
-          </a:p>
-        </p:txBody>
-      </p:sp>
-      <p:sp>
-        <p:nvSpPr>
-          <p:cNvPr id="40" name="Shape 38"/>
-          <p:cNvSpPr/>
-          <p:nvPr/>
-        </p:nvSpPr>
-        <p:spPr>
-          <a:xfrm>
-            <a:off x="7184136" y="3364992"/>
-            <a:ext cx="1225296" cy="475488"/>
+              <a:t>Phonemes</a:t>
+            </a:r>
+            <a:endParaRPr lang="en-US" sz="1100" dirty="0"/>
+          </a:p>
+        </p:txBody>
+      </p:sp>
+      <p:sp>
+        <p:nvSpPr>
+          <p:cNvPr id="41" name="Shape 39"/>
+          <p:cNvSpPr/>
+          <p:nvPr/>
+        </p:nvSpPr>
+        <p:spPr>
+          <a:xfrm>
+            <a:off x="1874520" y="4096512"/>
+            <a:ext cx="6903720" cy="658368"/>
           </a:xfrm>
           <a:prstGeom prst="rect">
             <a:avLst>
-              <a:gd name="adj" fmla="val 9615"/>
+              <a:gd name="adj" fmla="val 8333"/>
             </a:avLst>
           </a:prstGeom>
           <a:solidFill>
+            <a:srgbClr val="FCE7F3"/>
+          </a:solidFill>
+          <a:ln w="12700">
+            <a:solidFill>
+              <a:srgbClr val="DB2777"/>
+            </a:solidFill>
+            <a:prstDash val="solid"/>
+          </a:ln>
+        </p:spPr>
+      </p:sp>
+      <p:sp>
+        <p:nvSpPr>
+          <p:cNvPr id="42" name="Shape 40"/>
+          <p:cNvSpPr/>
+          <p:nvPr/>
+        </p:nvSpPr>
+        <p:spPr>
+          <a:xfrm>
+            <a:off x="1951828" y="4169664"/>
+            <a:ext cx="603504" cy="475488"/>
+          </a:xfrm>
+          <a:prstGeom prst="rect">
+            <a:avLst>
+              <a:gd name="adj" fmla="val 7692"/>
+            </a:avLst>
+          </a:prstGeom>
+          <a:solidFill>
             <a:srgbClr val="FFFFFF"/>
           </a:solidFill>
           <a:ln w="12700">
             <a:solidFill>
-              <a:srgbClr val="0D9488"/>
-            </a:solidFill>
-            <a:prstDash val="solid"/>
-          </a:ln>
-        </p:spPr>
-      </p:sp>
-      <p:sp>
-        <p:nvSpPr>
-          <p:cNvPr id="41" name="Text 39"/>
-          <p:cNvSpPr/>
-          <p:nvPr/>
-        </p:nvSpPr>
-        <p:spPr>
-          <a:xfrm>
-            <a:off x="7184136" y="3364992"/>
-            <a:ext cx="1225296" cy="475488"/>
-          </a:xfrm>
-          <a:prstGeom prst="rect">
-            <a:avLst/>
-          </a:prstGeom>
-          <a:noFill/>
-          <a:ln/>
-        </p:spPr>
-        <p:txBody>
-          <a:bodyPr wrap="square" lIns="0" tIns="0" rIns="0" bIns="0" rtlCol="0" anchor="ctr"/>
-          <a:lstStyle/>
-          <a:p>
-            <a:pPr algn="ctr" indent="0" marL="0">
-              <a:buNone/>
-            </a:pPr>
-            <a:r>
-              <a:rPr lang="en-US" sz="1400" b="1" dirty="0">
-                <a:solidFill>
-                  <a:srgbClr val="0D9488"/>
+              <a:srgbClr val="DB2777"/>
+            </a:solidFill>
+            <a:prstDash val="solid"/>
+          </a:ln>
+        </p:spPr>
+      </p:sp>
+      <p:sp>
+        <p:nvSpPr>
+          <p:cNvPr id="43" name="Text 41"/>
+          <p:cNvSpPr/>
+          <p:nvPr/>
+        </p:nvSpPr>
+        <p:spPr>
+          <a:xfrm>
+            <a:off x="1951828" y="4169664"/>
+            <a:ext cx="603504" cy="475488"/>
+          </a:xfrm>
+          <a:prstGeom prst="rect">
+            <a:avLst/>
+          </a:prstGeom>
+          <a:noFill/>
+          <a:ln/>
+        </p:spPr>
+        <p:txBody>
+          <a:bodyPr wrap="square" lIns="0" tIns="0" rIns="0" bIns="0" rtlCol="0" anchor="ctr"/>
+          <a:lstStyle/>
+          <a:p>
+            <a:pPr algn="ctr" indent="0" marL="0">
+              <a:buNone/>
+            </a:pPr>
+            <a:r>
+              <a:rPr lang="en-US" sz="900" b="1" dirty="0">
+                <a:solidFill>
+                  <a:srgbClr val="9D174D"/>
                 </a:solidFill>
                 <a:latin typeface="Trebuchet MS" pitchFamily="34" charset="0"/>
                 <a:ea typeface="Trebuchet MS" pitchFamily="34" charset="-122"/>
                 <a:cs typeface="Trebuchet MS" pitchFamily="34" charset="-120"/>
               </a:rPr>
-              <a:t>ing</a:t>
-            </a:r>
-            <a:endParaRPr lang="en-US" sz="1400" dirty="0"/>
-          </a:p>
-        </p:txBody>
-      </p:sp>
-      <p:sp>
-        <p:nvSpPr>
-          <p:cNvPr id="42" name="Shape 40"/>
-          <p:cNvSpPr/>
-          <p:nvPr/>
-        </p:nvSpPr>
-        <p:spPr>
-          <a:xfrm>
-            <a:off x="365760" y="4096512"/>
-            <a:ext cx="1371600" cy="804672"/>
+              <a:t>p</a:t>
+            </a:r>
+            <a:endParaRPr lang="en-US" sz="900" dirty="0"/>
+          </a:p>
+        </p:txBody>
+      </p:sp>
+      <p:sp>
+        <p:nvSpPr>
+          <p:cNvPr id="44" name="Shape 42"/>
+          <p:cNvSpPr/>
+          <p:nvPr/>
+        </p:nvSpPr>
+        <p:spPr>
+          <a:xfrm>
+            <a:off x="2605209" y="4169664"/>
+            <a:ext cx="603504" cy="475488"/>
           </a:xfrm>
           <a:prstGeom prst="rect">
             <a:avLst>
-              <a:gd name="adj" fmla="val 6818"/>
+              <a:gd name="adj" fmla="val 7692"/>
             </a:avLst>
           </a:prstGeom>
           <a:solidFill>
-            <a:srgbClr val="E2E8F0"/>
-          </a:solidFill>
-          <a:ln w="12700">
-            <a:solidFill>
-              <a:srgbClr val="E2E8F0"/>
-            </a:solidFill>
-            <a:prstDash val="solid"/>
-          </a:ln>
-        </p:spPr>
-      </p:sp>
-      <p:sp>
-        <p:nvSpPr>
-          <p:cNvPr id="43" name="Text 41"/>
-          <p:cNvSpPr/>
-          <p:nvPr/>
-        </p:nvSpPr>
-        <p:spPr>
-          <a:xfrm>
-            <a:off x="365760" y="4096512"/>
-            <a:ext cx="1371600" cy="804672"/>
-          </a:xfrm>
-          <a:prstGeom prst="rect">
-            <a:avLst/>
-          </a:prstGeom>
-          <a:noFill/>
-          <a:ln/>
-        </p:spPr>
-        <p:txBody>
-          <a:bodyPr wrap="square" lIns="0" tIns="0" rIns="0" bIns="0" rtlCol="0" anchor="ctr"/>
-          <a:lstStyle/>
-          <a:p>
-            <a:pPr algn="ctr" indent="0" marL="0">
-              <a:buNone/>
-            </a:pPr>
-            <a:r>
-              <a:rPr lang="en-US" sz="1100" b="1" dirty="0">
-                <a:solidFill>
-                  <a:srgbClr val="475569"/>
+            <a:srgbClr val="FFFFFF"/>
+          </a:solidFill>
+          <a:ln w="12700">
+            <a:solidFill>
+              <a:srgbClr val="DB2777"/>
+            </a:solidFill>
+            <a:prstDash val="solid"/>
+          </a:ln>
+        </p:spPr>
+      </p:sp>
+      <p:sp>
+        <p:nvSpPr>
+          <p:cNvPr id="45" name="Text 43"/>
+          <p:cNvSpPr/>
+          <p:nvPr/>
+        </p:nvSpPr>
+        <p:spPr>
+          <a:xfrm>
+            <a:off x="2605209" y="4169664"/>
+            <a:ext cx="603504" cy="475488"/>
+          </a:xfrm>
+          <a:prstGeom prst="rect">
+            <a:avLst/>
+          </a:prstGeom>
+          <a:noFill/>
+          <a:ln/>
+        </p:spPr>
+        <p:txBody>
+          <a:bodyPr wrap="square" lIns="0" tIns="0" rIns="0" bIns="0" rtlCol="0" anchor="ctr"/>
+          <a:lstStyle/>
+          <a:p>
+            <a:pPr algn="ctr" indent="0" marL="0">
+              <a:buNone/>
+            </a:pPr>
+            <a:r>
+              <a:rPr lang="en-US" sz="900" b="1" dirty="0">
+                <a:solidFill>
+                  <a:srgbClr val="9D174D"/>
                 </a:solidFill>
                 <a:latin typeface="Trebuchet MS" pitchFamily="34" charset="0"/>
                 <a:ea typeface="Trebuchet MS" pitchFamily="34" charset="-122"/>
                 <a:cs typeface="Trebuchet MS" pitchFamily="34" charset="-120"/>
               </a:rPr>
-              <a:t>Phonemes</a:t>
-            </a:r>
-            <a:endParaRPr lang="en-US" sz="1100" dirty="0"/>
-          </a:p>
-        </p:txBody>
-      </p:sp>
-      <p:sp>
-        <p:nvSpPr>
-          <p:cNvPr id="44" name="Shape 42"/>
-          <p:cNvSpPr/>
-          <p:nvPr/>
-        </p:nvSpPr>
-        <p:spPr>
-          <a:xfrm>
-            <a:off x="1874520" y="4096512"/>
-            <a:ext cx="6903720" cy="658368"/>
-          </a:xfrm>
-          <a:prstGeom prst="rect">
-            <a:avLst>
-              <a:gd name="adj" fmla="val 8333"/>
-            </a:avLst>
-          </a:prstGeom>
-          <a:solidFill>
-            <a:srgbClr val="FCE7F3"/>
-          </a:solidFill>
-          <a:ln w="12700">
-            <a:solidFill>
-              <a:srgbClr val="DB2777"/>
-            </a:solidFill>
-            <a:prstDash val="solid"/>
-          </a:ln>
-        </p:spPr>
-      </p:sp>
-      <p:sp>
-        <p:nvSpPr>
-          <p:cNvPr id="45" name="Shape 43"/>
-          <p:cNvSpPr/>
-          <p:nvPr/>
-        </p:nvSpPr>
-        <p:spPr>
-          <a:xfrm>
-            <a:off x="1952244" y="4169664"/>
-            <a:ext cx="543652" cy="475488"/>
+              <a:t>er</a:t>
+            </a:r>
+            <a:endParaRPr lang="en-US" sz="900" dirty="0"/>
+          </a:p>
+        </p:txBody>
+      </p:sp>
+      <p:sp>
+        <p:nvSpPr>
+          <p:cNvPr id="46" name="Shape 44"/>
+          <p:cNvSpPr/>
+          <p:nvPr/>
+        </p:nvSpPr>
+        <p:spPr>
+          <a:xfrm>
+            <a:off x="3258589" y="4169664"/>
+            <a:ext cx="603504" cy="475488"/>
           </a:xfrm>
           <a:prstGeom prst="rect">
             <a:avLst>
@@ -33442,14 +34075,14 @@
       </p:sp>
       <p:sp>
         <p:nvSpPr>
-          <p:cNvPr id="46" name="Text 44"/>
-          <p:cNvSpPr/>
-          <p:nvPr/>
-        </p:nvSpPr>
-        <p:spPr>
-          <a:xfrm>
-            <a:off x="1952244" y="4169664"/>
-            <a:ext cx="543652" cy="475488"/>
+          <p:cNvPr id="47" name="Text 45"/>
+          <p:cNvSpPr/>
+          <p:nvPr/>
+        </p:nvSpPr>
+        <p:spPr>
+          <a:xfrm>
+            <a:off x="3258589" y="4169664"/>
+            <a:ext cx="603504" cy="475488"/>
           </a:xfrm>
           <a:prstGeom prst="rect">
             <a:avLst/>
@@ -33473,7 +34106,7 @@
                 <a:ea typeface="Trebuchet MS" pitchFamily="34" charset="-122"/>
                 <a:cs typeface="Trebuchet MS" pitchFamily="34" charset="-120"/>
               </a:rPr>
-              <a:t>u</a:t>
+              <a:t>f</a:t>
             </a:r>
             <a:endParaRPr lang="en-US" sz="900" dirty="0"/>
           </a:p>
@@ -33481,14 +34114,14 @@
       </p:sp>
       <p:sp>
         <p:nvSpPr>
-          <p:cNvPr id="47" name="Shape 45"/>
-          <p:cNvSpPr/>
-          <p:nvPr/>
-        </p:nvSpPr>
-        <p:spPr>
-          <a:xfrm>
-            <a:off x="2546188" y="4169664"/>
-            <a:ext cx="543652" cy="475488"/>
+          <p:cNvPr id="48" name="Shape 46"/>
+          <p:cNvSpPr/>
+          <p:nvPr/>
+        </p:nvSpPr>
+        <p:spPr>
+          <a:xfrm>
+            <a:off x="3911969" y="4169664"/>
+            <a:ext cx="603504" cy="475488"/>
           </a:xfrm>
           <a:prstGeom prst="rect">
             <a:avLst>
@@ -33508,14 +34141,14 @@
       </p:sp>
       <p:sp>
         <p:nvSpPr>
-          <p:cNvPr id="48" name="Text 46"/>
-          <p:cNvSpPr/>
-          <p:nvPr/>
-        </p:nvSpPr>
-        <p:spPr>
-          <a:xfrm>
-            <a:off x="2546188" y="4169664"/>
-            <a:ext cx="543652" cy="475488"/>
+          <p:cNvPr id="49" name="Text 47"/>
+          <p:cNvSpPr/>
+          <p:nvPr/>
+        </p:nvSpPr>
+        <p:spPr>
+          <a:xfrm>
+            <a:off x="3911969" y="4169664"/>
+            <a:ext cx="603504" cy="475488"/>
           </a:xfrm>
           <a:prstGeom prst="rect">
             <a:avLst/>
@@ -33539,7 +34172,7 @@
                 <a:ea typeface="Trebuchet MS" pitchFamily="34" charset="-122"/>
                 <a:cs typeface="Trebuchet MS" pitchFamily="34" charset="-120"/>
               </a:rPr>
-              <a:t>n</a:t>
+              <a:t>or</a:t>
             </a:r>
             <a:endParaRPr lang="en-US" sz="900" dirty="0"/>
           </a:p>
@@ -33547,14 +34180,14 @@
       </p:sp>
       <p:sp>
         <p:nvSpPr>
-          <p:cNvPr id="49" name="Shape 47"/>
-          <p:cNvSpPr/>
-          <p:nvPr/>
-        </p:nvSpPr>
-        <p:spPr>
-          <a:xfrm>
-            <a:off x="3140133" y="4169664"/>
-            <a:ext cx="543652" cy="475488"/>
+          <p:cNvPr id="50" name="Shape 48"/>
+          <p:cNvSpPr/>
+          <p:nvPr/>
+        </p:nvSpPr>
+        <p:spPr>
+          <a:xfrm>
+            <a:off x="4565350" y="4169664"/>
+            <a:ext cx="603504" cy="475488"/>
           </a:xfrm>
           <a:prstGeom prst="rect">
             <a:avLst>
@@ -33574,14 +34207,14 @@
       </p:sp>
       <p:sp>
         <p:nvSpPr>
-          <p:cNvPr id="50" name="Text 48"/>
-          <p:cNvSpPr/>
-          <p:nvPr/>
-        </p:nvSpPr>
-        <p:spPr>
-          <a:xfrm>
-            <a:off x="3140133" y="4169664"/>
-            <a:ext cx="543652" cy="475488"/>
+          <p:cNvPr id="51" name="Text 49"/>
+          <p:cNvSpPr/>
+          <p:nvPr/>
+        </p:nvSpPr>
+        <p:spPr>
+          <a:xfrm>
+            <a:off x="4565350" y="4169664"/>
+            <a:ext cx="603504" cy="475488"/>
           </a:xfrm>
           <a:prstGeom prst="rect">
             <a:avLst/>
@@ -33605,7 +34238,7 @@
                 <a:ea typeface="Trebuchet MS" pitchFamily="34" charset="-122"/>
                 <a:cs typeface="Trebuchet MS" pitchFamily="34" charset="-120"/>
               </a:rPr>
-              <a:t>d</a:t>
+              <a:t>m</a:t>
             </a:r>
             <a:endParaRPr lang="en-US" sz="900" dirty="0"/>
           </a:p>
@@ -33613,14 +34246,14 @@
       </p:sp>
       <p:sp>
         <p:nvSpPr>
-          <p:cNvPr id="51" name="Shape 49"/>
-          <p:cNvSpPr/>
-          <p:nvPr/>
-        </p:nvSpPr>
-        <p:spPr>
-          <a:xfrm>
-            <a:off x="3734077" y="4169664"/>
-            <a:ext cx="543652" cy="475488"/>
+          <p:cNvPr id="52" name="Shape 50"/>
+          <p:cNvSpPr/>
+          <p:nvPr/>
+        </p:nvSpPr>
+        <p:spPr>
+          <a:xfrm>
+            <a:off x="5218730" y="4169664"/>
+            <a:ext cx="603504" cy="475488"/>
           </a:xfrm>
           <a:prstGeom prst="rect">
             <a:avLst>
@@ -33640,14 +34273,14 @@
       </p:sp>
       <p:sp>
         <p:nvSpPr>
-          <p:cNvPr id="52" name="Text 50"/>
-          <p:cNvSpPr/>
-          <p:nvPr/>
-        </p:nvSpPr>
-        <p:spPr>
-          <a:xfrm>
-            <a:off x="3734077" y="4169664"/>
-            <a:ext cx="543652" cy="475488"/>
+          <p:cNvPr id="53" name="Text 51"/>
+          <p:cNvSpPr/>
+          <p:nvPr/>
+        </p:nvSpPr>
+        <p:spPr>
+          <a:xfrm>
+            <a:off x="5218730" y="4169664"/>
+            <a:ext cx="603504" cy="475488"/>
           </a:xfrm>
           <a:prstGeom prst="rect">
             <a:avLst/>
@@ -33671,7 +34304,7 @@
                 <a:ea typeface="Trebuchet MS" pitchFamily="34" charset="-122"/>
                 <a:cs typeface="Trebuchet MS" pitchFamily="34" charset="-120"/>
               </a:rPr>
-              <a:t>er</a:t>
+              <a:t>a</a:t>
             </a:r>
             <a:endParaRPr lang="en-US" sz="900" dirty="0"/>
           </a:p>
@@ -33679,14 +34312,14 @@
       </p:sp>
       <p:sp>
         <p:nvSpPr>
-          <p:cNvPr id="53" name="Shape 51"/>
-          <p:cNvSpPr/>
-          <p:nvPr/>
-        </p:nvSpPr>
-        <p:spPr>
-          <a:xfrm>
-            <a:off x="4328021" y="4169664"/>
-            <a:ext cx="543652" cy="475488"/>
+          <p:cNvPr id="54" name="Shape 52"/>
+          <p:cNvSpPr/>
+          <p:nvPr/>
+        </p:nvSpPr>
+        <p:spPr>
+          <a:xfrm>
+            <a:off x="5872111" y="4169664"/>
+            <a:ext cx="603504" cy="475488"/>
           </a:xfrm>
           <a:prstGeom prst="rect">
             <a:avLst>
@@ -33706,14 +34339,14 @@
       </p:sp>
       <p:sp>
         <p:nvSpPr>
-          <p:cNvPr id="54" name="Text 52"/>
-          <p:cNvSpPr/>
-          <p:nvPr/>
-        </p:nvSpPr>
-        <p:spPr>
-          <a:xfrm>
-            <a:off x="4328021" y="4169664"/>
-            <a:ext cx="543652" cy="475488"/>
+          <p:cNvPr id="55" name="Text 53"/>
+          <p:cNvSpPr/>
+          <p:nvPr/>
+        </p:nvSpPr>
+        <p:spPr>
+          <a:xfrm>
+            <a:off x="5872111" y="4169664"/>
+            <a:ext cx="603504" cy="475488"/>
           </a:xfrm>
           <a:prstGeom prst="rect">
             <a:avLst/>
@@ -33737,7 +34370,7 @@
                 <a:ea typeface="Trebuchet MS" pitchFamily="34" charset="-122"/>
                 <a:cs typeface="Trebuchet MS" pitchFamily="34" charset="-120"/>
               </a:rPr>
-              <a:t>p</a:t>
+              <a:t>n</a:t>
             </a:r>
             <a:endParaRPr lang="en-US" sz="900" dirty="0"/>
           </a:p>
@@ -33745,14 +34378,14 @@
       </p:sp>
       <p:sp>
         <p:nvSpPr>
-          <p:cNvPr id="55" name="Shape 53"/>
-          <p:cNvSpPr/>
-          <p:nvPr/>
-        </p:nvSpPr>
-        <p:spPr>
-          <a:xfrm>
-            <a:off x="4921966" y="4169664"/>
-            <a:ext cx="543652" cy="475488"/>
+          <p:cNvPr id="56" name="Shape 54"/>
+          <p:cNvSpPr/>
+          <p:nvPr/>
+        </p:nvSpPr>
+        <p:spPr>
+          <a:xfrm>
+            <a:off x="6525491" y="4169664"/>
+            <a:ext cx="603504" cy="475488"/>
           </a:xfrm>
           <a:prstGeom prst="rect">
             <a:avLst>
@@ -33772,14 +34405,14 @@
       </p:sp>
       <p:sp>
         <p:nvSpPr>
-          <p:cNvPr id="56" name="Text 54"/>
-          <p:cNvSpPr/>
-          <p:nvPr/>
-        </p:nvSpPr>
-        <p:spPr>
-          <a:xfrm>
-            <a:off x="4921966" y="4169664"/>
-            <a:ext cx="543652" cy="475488"/>
+          <p:cNvPr id="57" name="Text 55"/>
+          <p:cNvSpPr/>
+          <p:nvPr/>
+        </p:nvSpPr>
+        <p:spPr>
+          <a:xfrm>
+            <a:off x="6525491" y="4169664"/>
+            <a:ext cx="603504" cy="475488"/>
           </a:xfrm>
           <a:prstGeom prst="rect">
             <a:avLst/>
@@ -33803,7 +34436,7 @@
                 <a:ea typeface="Trebuchet MS" pitchFamily="34" charset="-122"/>
                 <a:cs typeface="Trebuchet MS" pitchFamily="34" charset="-120"/>
               </a:rPr>
-              <a:t>er</a:t>
+              <a:t>c</a:t>
             </a:r>
             <a:endParaRPr lang="en-US" sz="900" dirty="0"/>
           </a:p>
@@ -33811,14 +34444,14 @@
       </p:sp>
       <p:sp>
         <p:nvSpPr>
-          <p:cNvPr id="57" name="Shape 55"/>
-          <p:cNvSpPr/>
-          <p:nvPr/>
-        </p:nvSpPr>
-        <p:spPr>
-          <a:xfrm>
-            <a:off x="5515910" y="4169664"/>
-            <a:ext cx="543652" cy="475488"/>
+          <p:cNvPr id="58" name="Shape 56"/>
+          <p:cNvSpPr/>
+          <p:nvPr/>
+        </p:nvSpPr>
+        <p:spPr>
+          <a:xfrm>
+            <a:off x="7178871" y="4169664"/>
+            <a:ext cx="603504" cy="475488"/>
           </a:xfrm>
           <a:prstGeom prst="rect">
             <a:avLst>
@@ -33838,14 +34471,14 @@
       </p:sp>
       <p:sp>
         <p:nvSpPr>
-          <p:cNvPr id="58" name="Text 56"/>
-          <p:cNvSpPr/>
-          <p:nvPr/>
-        </p:nvSpPr>
-        <p:spPr>
-          <a:xfrm>
-            <a:off x="5515910" y="4169664"/>
-            <a:ext cx="543652" cy="475488"/>
+          <p:cNvPr id="59" name="Text 57"/>
+          <p:cNvSpPr/>
+          <p:nvPr/>
+        </p:nvSpPr>
+        <p:spPr>
+          <a:xfrm>
+            <a:off x="7178871" y="4169664"/>
+            <a:ext cx="603504" cy="475488"/>
           </a:xfrm>
           <a:prstGeom prst="rect">
             <a:avLst/>
@@ -33869,7 +34502,7 @@
                 <a:ea typeface="Trebuchet MS" pitchFamily="34" charset="-122"/>
                 <a:cs typeface="Trebuchet MS" pitchFamily="34" charset="-120"/>
               </a:rPr>
-              <a:t>f</a:t>
+              <a:t>e</a:t>
             </a:r>
             <a:endParaRPr lang="en-US" sz="900" dirty="0"/>
           </a:p>
@@ -33877,14 +34510,14 @@
       </p:sp>
       <p:sp>
         <p:nvSpPr>
-          <p:cNvPr id="59" name="Shape 57"/>
-          <p:cNvSpPr/>
-          <p:nvPr/>
-        </p:nvSpPr>
-        <p:spPr>
-          <a:xfrm>
-            <a:off x="6109855" y="4169664"/>
-            <a:ext cx="543652" cy="475488"/>
+          <p:cNvPr id="60" name="Shape 58"/>
+          <p:cNvSpPr/>
+          <p:nvPr/>
+        </p:nvSpPr>
+        <p:spPr>
+          <a:xfrm>
+            <a:off x="7832252" y="4169664"/>
+            <a:ext cx="603504" cy="475488"/>
           </a:xfrm>
           <a:prstGeom prst="rect">
             <a:avLst>
@@ -33904,14 +34537,14 @@
       </p:sp>
       <p:sp>
         <p:nvSpPr>
-          <p:cNvPr id="60" name="Text 58"/>
-          <p:cNvSpPr/>
-          <p:nvPr/>
-        </p:nvSpPr>
-        <p:spPr>
-          <a:xfrm>
-            <a:off x="6109855" y="4169664"/>
-            <a:ext cx="543652" cy="475488"/>
+          <p:cNvPr id="61" name="Text 59"/>
+          <p:cNvSpPr/>
+          <p:nvPr/>
+        </p:nvSpPr>
+        <p:spPr>
+          <a:xfrm>
+            <a:off x="7832252" y="4169664"/>
+            <a:ext cx="603504" cy="475488"/>
           </a:xfrm>
           <a:prstGeom prst="rect">
             <a:avLst/>
@@ -33935,205 +34568,7 @@
                 <a:ea typeface="Trebuchet MS" pitchFamily="34" charset="-122"/>
                 <a:cs typeface="Trebuchet MS" pitchFamily="34" charset="-120"/>
               </a:rPr>
-              <a:t>or</a:t>
-            </a:r>
-            <a:endParaRPr lang="en-US" sz="900" dirty="0"/>
-          </a:p>
-        </p:txBody>
-      </p:sp>
-      <p:sp>
-        <p:nvSpPr>
-          <p:cNvPr id="61" name="Shape 59"/>
-          <p:cNvSpPr/>
-          <p:nvPr/>
-        </p:nvSpPr>
-        <p:spPr>
-          <a:xfrm>
-            <a:off x="6703799" y="4169664"/>
-            <a:ext cx="543652" cy="475488"/>
-          </a:xfrm>
-          <a:prstGeom prst="rect">
-            <a:avLst>
-              <a:gd name="adj" fmla="val 7692"/>
-            </a:avLst>
-          </a:prstGeom>
-          <a:solidFill>
-            <a:srgbClr val="FFFFFF"/>
-          </a:solidFill>
-          <a:ln w="12700">
-            <a:solidFill>
-              <a:srgbClr val="DB2777"/>
-            </a:solidFill>
-            <a:prstDash val="solid"/>
-          </a:ln>
-        </p:spPr>
-      </p:sp>
-      <p:sp>
-        <p:nvSpPr>
-          <p:cNvPr id="62" name="Text 60"/>
-          <p:cNvSpPr/>
-          <p:nvPr/>
-        </p:nvSpPr>
-        <p:spPr>
-          <a:xfrm>
-            <a:off x="6703799" y="4169664"/>
-            <a:ext cx="543652" cy="475488"/>
-          </a:xfrm>
-          <a:prstGeom prst="rect">
-            <a:avLst/>
-          </a:prstGeom>
-          <a:noFill/>
-          <a:ln/>
-        </p:spPr>
-        <p:txBody>
-          <a:bodyPr wrap="square" lIns="0" tIns="0" rIns="0" bIns="0" rtlCol="0" anchor="ctr"/>
-          <a:lstStyle/>
-          <a:p>
-            <a:pPr algn="ctr" indent="0" marL="0">
-              <a:buNone/>
-            </a:pPr>
-            <a:r>
-              <a:rPr lang="en-US" sz="900" b="1" dirty="0">
-                <a:solidFill>
-                  <a:srgbClr val="9D174D"/>
-                </a:solidFill>
-                <a:latin typeface="Trebuchet MS" pitchFamily="34" charset="0"/>
-                <a:ea typeface="Trebuchet MS" pitchFamily="34" charset="-122"/>
-                <a:cs typeface="Trebuchet MS" pitchFamily="34" charset="-120"/>
-              </a:rPr>
-              <a:t>m</a:t>
-            </a:r>
-            <a:endParaRPr lang="en-US" sz="900" dirty="0"/>
-          </a:p>
-        </p:txBody>
-      </p:sp>
-      <p:sp>
-        <p:nvSpPr>
-          <p:cNvPr id="63" name="Shape 61"/>
-          <p:cNvSpPr/>
-          <p:nvPr/>
-        </p:nvSpPr>
-        <p:spPr>
-          <a:xfrm>
-            <a:off x="7297743" y="4169664"/>
-            <a:ext cx="543652" cy="475488"/>
-          </a:xfrm>
-          <a:prstGeom prst="rect">
-            <a:avLst>
-              <a:gd name="adj" fmla="val 7692"/>
-            </a:avLst>
-          </a:prstGeom>
-          <a:solidFill>
-            <a:srgbClr val="FFFFFF"/>
-          </a:solidFill>
-          <a:ln w="12700">
-            <a:solidFill>
-              <a:srgbClr val="DB2777"/>
-            </a:solidFill>
-            <a:prstDash val="solid"/>
-          </a:ln>
-        </p:spPr>
-      </p:sp>
-      <p:sp>
-        <p:nvSpPr>
-          <p:cNvPr id="64" name="Text 62"/>
-          <p:cNvSpPr/>
-          <p:nvPr/>
-        </p:nvSpPr>
-        <p:spPr>
-          <a:xfrm>
-            <a:off x="7297743" y="4169664"/>
-            <a:ext cx="543652" cy="475488"/>
-          </a:xfrm>
-          <a:prstGeom prst="rect">
-            <a:avLst/>
-          </a:prstGeom>
-          <a:noFill/>
-          <a:ln/>
-        </p:spPr>
-        <p:txBody>
-          <a:bodyPr wrap="square" lIns="0" tIns="0" rIns="0" bIns="0" rtlCol="0" anchor="ctr"/>
-          <a:lstStyle/>
-          <a:p>
-            <a:pPr algn="ctr" indent="0" marL="0">
-              <a:buNone/>
-            </a:pPr>
-            <a:r>
-              <a:rPr lang="en-US" sz="900" b="1" dirty="0">
-                <a:solidFill>
-                  <a:srgbClr val="9D174D"/>
-                </a:solidFill>
-                <a:latin typeface="Trebuchet MS" pitchFamily="34" charset="0"/>
-                <a:ea typeface="Trebuchet MS" pitchFamily="34" charset="-122"/>
-                <a:cs typeface="Trebuchet MS" pitchFamily="34" charset="-120"/>
-              </a:rPr>
-              <a:t>i</a:t>
-            </a:r>
-            <a:endParaRPr lang="en-US" sz="900" dirty="0"/>
-          </a:p>
-        </p:txBody>
-      </p:sp>
-      <p:sp>
-        <p:nvSpPr>
-          <p:cNvPr id="65" name="Shape 63"/>
-          <p:cNvSpPr/>
-          <p:nvPr/>
-        </p:nvSpPr>
-        <p:spPr>
-          <a:xfrm>
-            <a:off x="7891688" y="4169664"/>
-            <a:ext cx="543652" cy="475488"/>
-          </a:xfrm>
-          <a:prstGeom prst="rect">
-            <a:avLst>
-              <a:gd name="adj" fmla="val 7692"/>
-            </a:avLst>
-          </a:prstGeom>
-          <a:solidFill>
-            <a:srgbClr val="FFFFFF"/>
-          </a:solidFill>
-          <a:ln w="12700">
-            <a:solidFill>
-              <a:srgbClr val="DB2777"/>
-            </a:solidFill>
-            <a:prstDash val="solid"/>
-          </a:ln>
-        </p:spPr>
-      </p:sp>
-      <p:sp>
-        <p:nvSpPr>
-          <p:cNvPr id="66" name="Text 64"/>
-          <p:cNvSpPr/>
-          <p:nvPr/>
-        </p:nvSpPr>
-        <p:spPr>
-          <a:xfrm>
-            <a:off x="7891688" y="4169664"/>
-            <a:ext cx="543652" cy="475488"/>
-          </a:xfrm>
-          <a:prstGeom prst="rect">
-            <a:avLst/>
-          </a:prstGeom>
-          <a:noFill/>
-          <a:ln/>
-        </p:spPr>
-        <p:txBody>
-          <a:bodyPr wrap="square" lIns="0" tIns="0" rIns="0" bIns="0" rtlCol="0" anchor="ctr"/>
-          <a:lstStyle/>
-          <a:p>
-            <a:pPr algn="ctr" indent="0" marL="0">
-              <a:buNone/>
-            </a:pPr>
-            <a:r>
-              <a:rPr lang="en-US" sz="900" b="1" dirty="0">
-                <a:solidFill>
-                  <a:srgbClr val="9D174D"/>
-                </a:solidFill>
-                <a:latin typeface="Trebuchet MS" pitchFamily="34" charset="0"/>
-                <a:ea typeface="Trebuchet MS" pitchFamily="34" charset="-122"/>
-                <a:cs typeface="Trebuchet MS" pitchFamily="34" charset="-120"/>
-              </a:rPr>
-              <a:t>ng</a:t>
+              <a:t>s</a:t>
             </a:r>
             <a:endParaRPr lang="en-US" sz="900" dirty="0"/>
           </a:p>
@@ -34425,7 +34860,7 @@
                 <a:ea typeface="Calibri" pitchFamily="34" charset="-122"/>
                 <a:cs typeface="Calibri" pitchFamily="34" charset="-120"/>
               </a:rPr>
-              <a:t>Word Labs  •  wordlabs.app  •  Root: 'perform' = carry out, do, or show</a:t>
+              <a:t>Word Labs  •  wordlabs.app  •  Root: 'perform' = do; carry out</a:t>
             </a:r>
             <a:endParaRPr lang="en-US" sz="800" dirty="0"/>
           </a:p>
@@ -35594,7 +36029,7 @@
                 <a:ea typeface="Calibri" pitchFamily="34" charset="-122"/>
                 <a:cs typeface="Calibri" pitchFamily="34" charset="-120"/>
               </a:rPr>
-              <a:t>Word Labs  •  wordlabs.app  •  Root: 'perform' = carry out, do, or show</a:t>
+              <a:t>Word Labs  •  wordlabs.app  •  Root: 'perform' = do; carry out</a:t>
             </a:r>
             <a:endParaRPr lang="en-US" sz="800" dirty="0"/>
           </a:p>
@@ -35895,7 +36330,7 @@
                 <a:ea typeface="Trebuchet MS" pitchFamily="34" charset="-122"/>
                 <a:cs typeface="Trebuchet MS" pitchFamily="34" charset="-120"/>
               </a:rPr>
-              <a:t>out-</a:t>
+              <a:t>under-</a:t>
             </a:r>
             <a:endParaRPr lang="en-US" sz="1300" dirty="0"/>
           </a:p>
@@ -36044,7 +36479,7 @@
             <a:avLst/>
           </a:prstGeom>
           <a:solidFill>
-            <a:srgbClr val="DDD6FE"/>
+            <a:srgbClr val="F1F5F9"/>
           </a:solidFill>
           <a:ln w="12700">
             <a:solidFill>
@@ -36056,14 +36491,64 @@
       </p:sp>
       <p:sp>
         <p:nvSpPr>
-          <p:cNvPr id="24" name="Text 22"/>
-          <p:cNvSpPr/>
-          <p:nvPr/>
-        </p:nvSpPr>
-        <p:spPr>
-          <a:xfrm>
-            <a:off x="365760" y="1984248"/>
-            <a:ext cx="2468880" cy="402336"/>
+          <p:cNvPr id="24" name="Shape 22"/>
+          <p:cNvSpPr/>
+          <p:nvPr/>
+        </p:nvSpPr>
+        <p:spPr>
+          <a:xfrm>
+            <a:off x="2971800" y="1984248"/>
+            <a:ext cx="2834640" cy="402336"/>
+          </a:xfrm>
+          <a:prstGeom prst="rect">
+            <a:avLst/>
+          </a:prstGeom>
+          <a:solidFill>
+            <a:srgbClr val="F1F5F9"/>
+          </a:solidFill>
+          <a:ln w="12700">
+            <a:solidFill>
+              <a:srgbClr val="E2E8F0"/>
+            </a:solidFill>
+            <a:prstDash val="solid"/>
+          </a:ln>
+        </p:spPr>
+      </p:sp>
+      <p:sp>
+        <p:nvSpPr>
+          <p:cNvPr id="25" name="Shape 23"/>
+          <p:cNvSpPr/>
+          <p:nvPr/>
+        </p:nvSpPr>
+        <p:spPr>
+          <a:xfrm>
+            <a:off x="5943600" y="1984248"/>
+            <a:ext cx="2834640" cy="402336"/>
+          </a:xfrm>
+          <a:prstGeom prst="rect">
+            <a:avLst/>
+          </a:prstGeom>
+          <a:solidFill>
+            <a:srgbClr val="FCE7F3"/>
+          </a:solidFill>
+          <a:ln w="12700">
+            <a:solidFill>
+              <a:srgbClr val="E2E8F0"/>
+            </a:solidFill>
+            <a:prstDash val="solid"/>
+          </a:ln>
+        </p:spPr>
+      </p:sp>
+      <p:sp>
+        <p:nvSpPr>
+          <p:cNvPr id="26" name="Text 24"/>
+          <p:cNvSpPr/>
+          <p:nvPr/>
+        </p:nvSpPr>
+        <p:spPr>
+          <a:xfrm>
+            <a:off x="5943600" y="1984248"/>
+            <a:ext cx="2834640" cy="402336"/>
           </a:xfrm>
           <a:prstGeom prst="rect">
             <a:avLst/>
@@ -36081,13 +36566,13 @@
             <a:r>
               <a:rPr lang="en-US" sz="1300" b="1" dirty="0">
                 <a:solidFill>
-                  <a:srgbClr val="4C1D95"/>
+                  <a:srgbClr val="9D174D"/>
                 </a:solidFill>
                 <a:latin typeface="Trebuchet MS" pitchFamily="34" charset="0"/>
                 <a:ea typeface="Trebuchet MS" pitchFamily="34" charset="-122"/>
                 <a:cs typeface="Trebuchet MS" pitchFamily="34" charset="-120"/>
               </a:rPr>
-              <a:t>over-</a:t>
+              <a:t>-ed</a:t>
             </a:r>
             <a:endParaRPr lang="en-US" sz="1300" dirty="0"/>
           </a:p>
@@ -36095,20 +36580,45 @@
       </p:sp>
       <p:sp>
         <p:nvSpPr>
-          <p:cNvPr id="25" name="Shape 23"/>
-          <p:cNvSpPr/>
-          <p:nvPr/>
-        </p:nvSpPr>
-        <p:spPr>
-          <a:xfrm>
-            <a:off x="2971800" y="1984248"/>
+          <p:cNvPr id="27" name="Shape 25"/>
+          <p:cNvSpPr/>
+          <p:nvPr/>
+        </p:nvSpPr>
+        <p:spPr>
+          <a:xfrm>
+            <a:off x="365760" y="2404872"/>
+            <a:ext cx="2468880" cy="402336"/>
+          </a:xfrm>
+          <a:prstGeom prst="rect">
+            <a:avLst/>
+          </a:prstGeom>
+          <a:solidFill>
+            <a:srgbClr val="F8FAFC"/>
+          </a:solidFill>
+          <a:ln w="12700">
+            <a:solidFill>
+              <a:srgbClr val="E2E8F0"/>
+            </a:solidFill>
+            <a:prstDash val="solid"/>
+          </a:ln>
+        </p:spPr>
+      </p:sp>
+      <p:sp>
+        <p:nvSpPr>
+          <p:cNvPr id="28" name="Shape 26"/>
+          <p:cNvSpPr/>
+          <p:nvPr/>
+        </p:nvSpPr>
+        <p:spPr>
+          <a:xfrm>
+            <a:off x="2971800" y="2404872"/>
             <a:ext cx="2834640" cy="402336"/>
           </a:xfrm>
           <a:prstGeom prst="rect">
             <a:avLst/>
           </a:prstGeom>
           <a:solidFill>
-            <a:srgbClr val="F1F5F9"/>
+            <a:srgbClr val="F8FAFC"/>
           </a:solidFill>
           <a:ln w="12700">
             <a:solidFill>
@@ -36120,13 +36630,13 @@
       </p:sp>
       <p:sp>
         <p:nvSpPr>
-          <p:cNvPr id="26" name="Shape 24"/>
-          <p:cNvSpPr/>
-          <p:nvPr/>
-        </p:nvSpPr>
-        <p:spPr>
-          <a:xfrm>
-            <a:off x="5943600" y="1984248"/>
+          <p:cNvPr id="29" name="Shape 27"/>
+          <p:cNvSpPr/>
+          <p:nvPr/>
+        </p:nvSpPr>
+        <p:spPr>
+          <a:xfrm>
+            <a:off x="5943600" y="2404872"/>
             <a:ext cx="2834640" cy="402336"/>
           </a:xfrm>
           <a:prstGeom prst="rect">
@@ -36145,13 +36655,13 @@
       </p:sp>
       <p:sp>
         <p:nvSpPr>
-          <p:cNvPr id="27" name="Text 25"/>
-          <p:cNvSpPr/>
-          <p:nvPr/>
-        </p:nvSpPr>
-        <p:spPr>
-          <a:xfrm>
-            <a:off x="5943600" y="1984248"/>
+          <p:cNvPr id="30" name="Text 28"/>
+          <p:cNvSpPr/>
+          <p:nvPr/>
+        </p:nvSpPr>
+        <p:spPr>
+          <a:xfrm>
+            <a:off x="5943600" y="2404872"/>
             <a:ext cx="2834640" cy="402336"/>
           </a:xfrm>
           <a:prstGeom prst="rect">
@@ -36184,20 +36694,20 @@
       </p:sp>
       <p:sp>
         <p:nvSpPr>
-          <p:cNvPr id="28" name="Shape 26"/>
-          <p:cNvSpPr/>
-          <p:nvPr/>
-        </p:nvSpPr>
-        <p:spPr>
-          <a:xfrm>
-            <a:off x="365760" y="2404872"/>
+          <p:cNvPr id="31" name="Shape 29"/>
+          <p:cNvSpPr/>
+          <p:nvPr/>
+        </p:nvSpPr>
+        <p:spPr>
+          <a:xfrm>
+            <a:off x="365760" y="2825496"/>
             <a:ext cx="2468880" cy="402336"/>
           </a:xfrm>
           <a:prstGeom prst="rect">
             <a:avLst/>
           </a:prstGeom>
           <a:solidFill>
-            <a:srgbClr val="DDD6FE"/>
+            <a:srgbClr val="F1F5F9"/>
           </a:solidFill>
           <a:ln w="12700">
             <a:solidFill>
@@ -36209,14 +36719,64 @@
       </p:sp>
       <p:sp>
         <p:nvSpPr>
-          <p:cNvPr id="29" name="Text 27"/>
-          <p:cNvSpPr/>
-          <p:nvPr/>
-        </p:nvSpPr>
-        <p:spPr>
-          <a:xfrm>
-            <a:off x="365760" y="2404872"/>
-            <a:ext cx="2468880" cy="402336"/>
+          <p:cNvPr id="32" name="Shape 30"/>
+          <p:cNvSpPr/>
+          <p:nvPr/>
+        </p:nvSpPr>
+        <p:spPr>
+          <a:xfrm>
+            <a:off x="2971800" y="2825496"/>
+            <a:ext cx="2834640" cy="402336"/>
+          </a:xfrm>
+          <a:prstGeom prst="rect">
+            <a:avLst/>
+          </a:prstGeom>
+          <a:solidFill>
+            <a:srgbClr val="F1F5F9"/>
+          </a:solidFill>
+          <a:ln w="12700">
+            <a:solidFill>
+              <a:srgbClr val="E2E8F0"/>
+            </a:solidFill>
+            <a:prstDash val="solid"/>
+          </a:ln>
+        </p:spPr>
+      </p:sp>
+      <p:sp>
+        <p:nvSpPr>
+          <p:cNvPr id="33" name="Shape 31"/>
+          <p:cNvSpPr/>
+          <p:nvPr/>
+        </p:nvSpPr>
+        <p:spPr>
+          <a:xfrm>
+            <a:off x="5943600" y="2825496"/>
+            <a:ext cx="2834640" cy="402336"/>
+          </a:xfrm>
+          <a:prstGeom prst="rect">
+            <a:avLst/>
+          </a:prstGeom>
+          <a:solidFill>
+            <a:srgbClr val="FCE7F3"/>
+          </a:solidFill>
+          <a:ln w="12700">
+            <a:solidFill>
+              <a:srgbClr val="E2E8F0"/>
+            </a:solidFill>
+            <a:prstDash val="solid"/>
+          </a:ln>
+        </p:spPr>
+      </p:sp>
+      <p:sp>
+        <p:nvSpPr>
+          <p:cNvPr id="34" name="Text 32"/>
+          <p:cNvSpPr/>
+          <p:nvPr/>
+        </p:nvSpPr>
+        <p:spPr>
+          <a:xfrm>
+            <a:off x="5943600" y="2825496"/>
+            <a:ext cx="2834640" cy="402336"/>
           </a:xfrm>
           <a:prstGeom prst="rect">
             <a:avLst/>
@@ -36234,13 +36794,13 @@
             <a:r>
               <a:rPr lang="en-US" sz="1300" b="1" dirty="0">
                 <a:solidFill>
-                  <a:srgbClr val="4C1D95"/>
+                  <a:srgbClr val="9D174D"/>
                 </a:solidFill>
                 <a:latin typeface="Trebuchet MS" pitchFamily="34" charset="0"/>
                 <a:ea typeface="Trebuchet MS" pitchFamily="34" charset="-122"/>
                 <a:cs typeface="Trebuchet MS" pitchFamily="34" charset="-120"/>
               </a:rPr>
-              <a:t>under-</a:t>
+              <a:t>-ing</a:t>
             </a:r>
             <a:endParaRPr lang="en-US" sz="1300" dirty="0"/>
           </a:p>
@@ -36248,13 +36808,38 @@
       </p:sp>
       <p:sp>
         <p:nvSpPr>
-          <p:cNvPr id="30" name="Shape 28"/>
-          <p:cNvSpPr/>
-          <p:nvPr/>
-        </p:nvSpPr>
-        <p:spPr>
-          <a:xfrm>
-            <a:off x="2971800" y="2404872"/>
+          <p:cNvPr id="35" name="Shape 33"/>
+          <p:cNvSpPr/>
+          <p:nvPr/>
+        </p:nvSpPr>
+        <p:spPr>
+          <a:xfrm>
+            <a:off x="365760" y="3246120"/>
+            <a:ext cx="2468880" cy="402336"/>
+          </a:xfrm>
+          <a:prstGeom prst="rect">
+            <a:avLst/>
+          </a:prstGeom>
+          <a:solidFill>
+            <a:srgbClr val="F8FAFC"/>
+          </a:solidFill>
+          <a:ln w="12700">
+            <a:solidFill>
+              <a:srgbClr val="E2E8F0"/>
+            </a:solidFill>
+            <a:prstDash val="solid"/>
+          </a:ln>
+        </p:spPr>
+      </p:sp>
+      <p:sp>
+        <p:nvSpPr>
+          <p:cNvPr id="36" name="Shape 34"/>
+          <p:cNvSpPr/>
+          <p:nvPr/>
+        </p:nvSpPr>
+        <p:spPr>
+          <a:xfrm>
+            <a:off x="2971800" y="3246120"/>
             <a:ext cx="2834640" cy="402336"/>
           </a:xfrm>
           <a:prstGeom prst="rect">
@@ -36273,13 +36858,13 @@
       </p:sp>
       <p:sp>
         <p:nvSpPr>
-          <p:cNvPr id="31" name="Shape 29"/>
-          <p:cNvSpPr/>
-          <p:nvPr/>
-        </p:nvSpPr>
-        <p:spPr>
-          <a:xfrm>
-            <a:off x="5943600" y="2404872"/>
+          <p:cNvPr id="37" name="Shape 35"/>
+          <p:cNvSpPr/>
+          <p:nvPr/>
+        </p:nvSpPr>
+        <p:spPr>
+          <a:xfrm>
+            <a:off x="5943600" y="3246120"/>
             <a:ext cx="2834640" cy="402336"/>
           </a:xfrm>
           <a:prstGeom prst="rect">
@@ -36298,13 +36883,13 @@
       </p:sp>
       <p:sp>
         <p:nvSpPr>
-          <p:cNvPr id="32" name="Text 30"/>
-          <p:cNvSpPr/>
-          <p:nvPr/>
-        </p:nvSpPr>
-        <p:spPr>
-          <a:xfrm>
-            <a:off x="5943600" y="2404872"/>
+          <p:cNvPr id="38" name="Text 36"/>
+          <p:cNvSpPr/>
+          <p:nvPr/>
+        </p:nvSpPr>
+        <p:spPr>
+          <a:xfrm>
+            <a:off x="5943600" y="3246120"/>
             <a:ext cx="2834640" cy="402336"/>
           </a:xfrm>
           <a:prstGeom prst="rect">
@@ -36329,7 +36914,7 @@
                 <a:ea typeface="Trebuchet MS" pitchFamily="34" charset="-122"/>
                 <a:cs typeface="Trebuchet MS" pitchFamily="34" charset="-120"/>
               </a:rPr>
-              <a:t>-ing</a:t>
+              <a:t>-s</a:t>
             </a:r>
             <a:endParaRPr lang="en-US" sz="1300" dirty="0"/>
           </a:p>
@@ -36337,344 +36922,302 @@
       </p:sp>
       <p:sp>
         <p:nvSpPr>
-          <p:cNvPr id="33" name="Shape 31"/>
-          <p:cNvSpPr/>
-          <p:nvPr/>
-        </p:nvSpPr>
-        <p:spPr>
-          <a:xfrm>
-            <a:off x="365760" y="2825496"/>
-            <a:ext cx="2468880" cy="402336"/>
-          </a:xfrm>
-          <a:prstGeom prst="rect">
-            <a:avLst/>
-          </a:prstGeom>
-          <a:solidFill>
-            <a:srgbClr val="DDD6FE"/>
-          </a:solidFill>
-          <a:ln w="12700">
-            <a:solidFill>
-              <a:srgbClr val="E2E8F0"/>
-            </a:solidFill>
-            <a:prstDash val="solid"/>
-          </a:ln>
-        </p:spPr>
-      </p:sp>
-      <p:sp>
-        <p:nvSpPr>
-          <p:cNvPr id="34" name="Text 32"/>
-          <p:cNvSpPr/>
-          <p:nvPr/>
-        </p:nvSpPr>
-        <p:spPr>
-          <a:xfrm>
-            <a:off x="365760" y="2825496"/>
-            <a:ext cx="2468880" cy="402336"/>
-          </a:xfrm>
-          <a:prstGeom prst="rect">
-            <a:avLst/>
-          </a:prstGeom>
-          <a:noFill/>
-          <a:ln/>
-        </p:spPr>
-        <p:txBody>
-          <a:bodyPr wrap="square" lIns="0" tIns="0" rIns="0" bIns="0" rtlCol="0" anchor="ctr"/>
-          <a:lstStyle/>
-          <a:p>
-            <a:pPr algn="ctr" indent="0" marL="0">
-              <a:buNone/>
-            </a:pPr>
-            <a:r>
-              <a:rPr lang="en-US" sz="1300" b="1" dirty="0">
-                <a:solidFill>
-                  <a:srgbClr val="4C1D95"/>
+          <p:cNvPr id="39" name="Text 37"/>
+          <p:cNvSpPr/>
+          <p:nvPr/>
+        </p:nvSpPr>
+        <p:spPr>
+          <a:xfrm>
+            <a:off x="365760" y="3611880"/>
+            <a:ext cx="1828800" cy="347472"/>
+          </a:xfrm>
+          <a:prstGeom prst="rect">
+            <a:avLst/>
+          </a:prstGeom>
+          <a:noFill/>
+          <a:ln/>
+        </p:spPr>
+        <p:txBody>
+          <a:bodyPr wrap="square" lIns="0" tIns="0" rIns="0" bIns="0" rtlCol="0" anchor="ctr"/>
+          <a:lstStyle/>
+          <a:p>
+            <a:pPr algn="l" indent="0" marL="0">
+              <a:buNone/>
+            </a:pPr>
+            <a:r>
+              <a:rPr lang="en-US" sz="1200" b="1" dirty="0">
+                <a:solidFill>
+                  <a:srgbClr val="0F172A"/>
                 </a:solidFill>
                 <a:latin typeface="Trebuchet MS" pitchFamily="34" charset="0"/>
                 <a:ea typeface="Trebuchet MS" pitchFamily="34" charset="-122"/>
                 <a:cs typeface="Trebuchet MS" pitchFamily="34" charset="-120"/>
               </a:rPr>
-              <a:t>re-</a:t>
-            </a:r>
-            <a:endParaRPr lang="en-US" sz="1300" dirty="0"/>
-          </a:p>
-        </p:txBody>
-      </p:sp>
-      <p:sp>
-        <p:nvSpPr>
-          <p:cNvPr id="35" name="Shape 33"/>
-          <p:cNvSpPr/>
-          <p:nvPr/>
-        </p:nvSpPr>
-        <p:spPr>
-          <a:xfrm>
-            <a:off x="2971800" y="2825496"/>
-            <a:ext cx="2834640" cy="402336"/>
-          </a:xfrm>
-          <a:prstGeom prst="rect">
-            <a:avLst/>
-          </a:prstGeom>
-          <a:solidFill>
-            <a:srgbClr val="F1F5F9"/>
-          </a:solidFill>
-          <a:ln w="12700">
-            <a:solidFill>
-              <a:srgbClr val="E2E8F0"/>
-            </a:solidFill>
-            <a:prstDash val="solid"/>
-          </a:ln>
-        </p:spPr>
-      </p:sp>
-      <p:sp>
-        <p:nvSpPr>
-          <p:cNvPr id="36" name="Shape 34"/>
-          <p:cNvSpPr/>
-          <p:nvPr/>
-        </p:nvSpPr>
-        <p:spPr>
-          <a:xfrm>
-            <a:off x="5943600" y="2825496"/>
-            <a:ext cx="2834640" cy="402336"/>
-          </a:xfrm>
-          <a:prstGeom prst="rect">
-            <a:avLst/>
-          </a:prstGeom>
-          <a:solidFill>
-            <a:srgbClr val="FCE7F3"/>
-          </a:solidFill>
-          <a:ln w="12700">
-            <a:solidFill>
-              <a:srgbClr val="E2E8F0"/>
-            </a:solidFill>
-            <a:prstDash val="solid"/>
-          </a:ln>
-        </p:spPr>
-      </p:sp>
-      <p:sp>
-        <p:nvSpPr>
-          <p:cNvPr id="37" name="Text 35"/>
-          <p:cNvSpPr/>
-          <p:nvPr/>
-        </p:nvSpPr>
-        <p:spPr>
-          <a:xfrm>
-            <a:off x="5943600" y="2825496"/>
-            <a:ext cx="2834640" cy="402336"/>
-          </a:xfrm>
-          <a:prstGeom prst="rect">
-            <a:avLst/>
-          </a:prstGeom>
-          <a:noFill/>
-          <a:ln/>
-        </p:spPr>
-        <p:txBody>
-          <a:bodyPr wrap="square" lIns="0" tIns="0" rIns="0" bIns="0" rtlCol="0" anchor="ctr"/>
-          <a:lstStyle/>
-          <a:p>
-            <a:pPr algn="ctr" indent="0" marL="0">
-              <a:buNone/>
-            </a:pPr>
-            <a:r>
-              <a:rPr lang="en-US" sz="1300" b="1" dirty="0">
-                <a:solidFill>
-                  <a:srgbClr val="9D174D"/>
+              <a:t>Sample words:</a:t>
+            </a:r>
+            <a:endParaRPr lang="en-US" sz="1200" dirty="0"/>
+          </a:p>
+        </p:txBody>
+      </p:sp>
+      <p:sp>
+        <p:nvSpPr>
+          <p:cNvPr id="40" name="Shape 38"/>
+          <p:cNvSpPr/>
+          <p:nvPr/>
+        </p:nvSpPr>
+        <p:spPr>
+          <a:xfrm>
+            <a:off x="365760" y="4023360"/>
+            <a:ext cx="2011680" cy="402336"/>
+          </a:xfrm>
+          <a:prstGeom prst="rect">
+            <a:avLst>
+              <a:gd name="adj" fmla="val 13636"/>
+            </a:avLst>
+          </a:prstGeom>
+          <a:solidFill>
+            <a:srgbClr val="EEF2FF"/>
+          </a:solidFill>
+          <a:ln w="12700">
+            <a:solidFill>
+              <a:srgbClr val="6366F1"/>
+            </a:solidFill>
+            <a:prstDash val="solid"/>
+          </a:ln>
+        </p:spPr>
+      </p:sp>
+      <p:sp>
+        <p:nvSpPr>
+          <p:cNvPr id="41" name="Text 39"/>
+          <p:cNvSpPr/>
+          <p:nvPr/>
+        </p:nvSpPr>
+        <p:spPr>
+          <a:xfrm>
+            <a:off x="365760" y="4023360"/>
+            <a:ext cx="2011680" cy="402336"/>
+          </a:xfrm>
+          <a:prstGeom prst="rect">
+            <a:avLst/>
+          </a:prstGeom>
+          <a:noFill/>
+          <a:ln/>
+        </p:spPr>
+        <p:txBody>
+          <a:bodyPr wrap="square" lIns="0" tIns="0" rIns="0" bIns="0" rtlCol="0" anchor="ctr"/>
+          <a:lstStyle/>
+          <a:p>
+            <a:pPr algn="ctr" indent="0" marL="0">
+              <a:buNone/>
+            </a:pPr>
+            <a:r>
+              <a:rPr lang="en-US" sz="1200" b="1" dirty="0">
+                <a:solidFill>
+                  <a:srgbClr val="4338CA"/>
                 </a:solidFill>
                 <a:latin typeface="Trebuchet MS" pitchFamily="34" charset="0"/>
                 <a:ea typeface="Trebuchet MS" pitchFamily="34" charset="-122"/>
                 <a:cs typeface="Trebuchet MS" pitchFamily="34" charset="-120"/>
               </a:rPr>
-              <a:t>-ed</a:t>
-            </a:r>
-            <a:endParaRPr lang="en-US" sz="1300" dirty="0"/>
-          </a:p>
-        </p:txBody>
-      </p:sp>
-      <p:sp>
-        <p:nvSpPr>
-          <p:cNvPr id="38" name="Shape 36"/>
-          <p:cNvSpPr/>
-          <p:nvPr/>
-        </p:nvSpPr>
-        <p:spPr>
-          <a:xfrm>
-            <a:off x="365760" y="3246120"/>
-            <a:ext cx="2468880" cy="402336"/>
-          </a:xfrm>
-          <a:prstGeom prst="rect">
-            <a:avLst/>
-          </a:prstGeom>
-          <a:solidFill>
-            <a:srgbClr val="DDD6FE"/>
-          </a:solidFill>
-          <a:ln w="12700">
-            <a:solidFill>
-              <a:srgbClr val="E2E8F0"/>
-            </a:solidFill>
-            <a:prstDash val="solid"/>
-          </a:ln>
-        </p:spPr>
-      </p:sp>
-      <p:sp>
-        <p:nvSpPr>
-          <p:cNvPr id="39" name="Text 37"/>
-          <p:cNvSpPr/>
-          <p:nvPr/>
-        </p:nvSpPr>
-        <p:spPr>
-          <a:xfrm>
-            <a:off x="365760" y="3246120"/>
-            <a:ext cx="2468880" cy="402336"/>
-          </a:xfrm>
-          <a:prstGeom prst="rect">
-            <a:avLst/>
-          </a:prstGeom>
-          <a:noFill/>
-          <a:ln/>
-        </p:spPr>
-        <p:txBody>
-          <a:bodyPr wrap="square" lIns="0" tIns="0" rIns="0" bIns="0" rtlCol="0" anchor="ctr"/>
-          <a:lstStyle/>
-          <a:p>
-            <a:pPr algn="ctr" indent="0" marL="0">
-              <a:buNone/>
-            </a:pPr>
-            <a:r>
-              <a:rPr lang="en-US" sz="1300" b="1" dirty="0">
-                <a:solidFill>
-                  <a:srgbClr val="4C1D95"/>
+              <a:t>perform</a:t>
+            </a:r>
+            <a:endParaRPr lang="en-US" sz="1200" dirty="0"/>
+          </a:p>
+        </p:txBody>
+      </p:sp>
+      <p:sp>
+        <p:nvSpPr>
+          <p:cNvPr id="42" name="Shape 40"/>
+          <p:cNvSpPr/>
+          <p:nvPr/>
+        </p:nvSpPr>
+        <p:spPr>
+          <a:xfrm>
+            <a:off x="2542032" y="4023360"/>
+            <a:ext cx="2011680" cy="402336"/>
+          </a:xfrm>
+          <a:prstGeom prst="rect">
+            <a:avLst>
+              <a:gd name="adj" fmla="val 13636"/>
+            </a:avLst>
+          </a:prstGeom>
+          <a:solidFill>
+            <a:srgbClr val="EEF2FF"/>
+          </a:solidFill>
+          <a:ln w="12700">
+            <a:solidFill>
+              <a:srgbClr val="6366F1"/>
+            </a:solidFill>
+            <a:prstDash val="solid"/>
+          </a:ln>
+        </p:spPr>
+      </p:sp>
+      <p:sp>
+        <p:nvSpPr>
+          <p:cNvPr id="43" name="Text 41"/>
+          <p:cNvSpPr/>
+          <p:nvPr/>
+        </p:nvSpPr>
+        <p:spPr>
+          <a:xfrm>
+            <a:off x="2542032" y="4023360"/>
+            <a:ext cx="2011680" cy="402336"/>
+          </a:xfrm>
+          <a:prstGeom prst="rect">
+            <a:avLst/>
+          </a:prstGeom>
+          <a:noFill/>
+          <a:ln/>
+        </p:spPr>
+        <p:txBody>
+          <a:bodyPr wrap="square" lIns="0" tIns="0" rIns="0" bIns="0" rtlCol="0" anchor="ctr"/>
+          <a:lstStyle/>
+          <a:p>
+            <a:pPr algn="ctr" indent="0" marL="0">
+              <a:buNone/>
+            </a:pPr>
+            <a:r>
+              <a:rPr lang="en-US" sz="1200" b="1" dirty="0">
+                <a:solidFill>
+                  <a:srgbClr val="4338CA"/>
                 </a:solidFill>
                 <a:latin typeface="Trebuchet MS" pitchFamily="34" charset="0"/>
                 <a:ea typeface="Trebuchet MS" pitchFamily="34" charset="-122"/>
                 <a:cs typeface="Trebuchet MS" pitchFamily="34" charset="-120"/>
               </a:rPr>
-              <a:t>mis-</a:t>
-            </a:r>
-            <a:endParaRPr lang="en-US" sz="1300" dirty="0"/>
-          </a:p>
-        </p:txBody>
-      </p:sp>
-      <p:sp>
-        <p:nvSpPr>
-          <p:cNvPr id="40" name="Shape 38"/>
-          <p:cNvSpPr/>
-          <p:nvPr/>
-        </p:nvSpPr>
-        <p:spPr>
-          <a:xfrm>
-            <a:off x="2971800" y="3246120"/>
-            <a:ext cx="2834640" cy="402336"/>
-          </a:xfrm>
-          <a:prstGeom prst="rect">
-            <a:avLst/>
-          </a:prstGeom>
-          <a:solidFill>
-            <a:srgbClr val="F8FAFC"/>
-          </a:solidFill>
-          <a:ln w="12700">
-            <a:solidFill>
-              <a:srgbClr val="E2E8F0"/>
-            </a:solidFill>
-            <a:prstDash val="solid"/>
-          </a:ln>
-        </p:spPr>
-      </p:sp>
-      <p:sp>
-        <p:nvSpPr>
-          <p:cNvPr id="41" name="Shape 39"/>
-          <p:cNvSpPr/>
-          <p:nvPr/>
-        </p:nvSpPr>
-        <p:spPr>
-          <a:xfrm>
-            <a:off x="5943600" y="3246120"/>
-            <a:ext cx="2834640" cy="402336"/>
-          </a:xfrm>
-          <a:prstGeom prst="rect">
-            <a:avLst/>
-          </a:prstGeom>
-          <a:solidFill>
-            <a:srgbClr val="FCE7F3"/>
-          </a:solidFill>
-          <a:ln w="12700">
-            <a:solidFill>
-              <a:srgbClr val="E2E8F0"/>
-            </a:solidFill>
-            <a:prstDash val="solid"/>
-          </a:ln>
-        </p:spPr>
-      </p:sp>
-      <p:sp>
-        <p:nvSpPr>
-          <p:cNvPr id="42" name="Text 40"/>
-          <p:cNvSpPr/>
-          <p:nvPr/>
-        </p:nvSpPr>
-        <p:spPr>
-          <a:xfrm>
-            <a:off x="5943600" y="3246120"/>
-            <a:ext cx="2834640" cy="402336"/>
-          </a:xfrm>
-          <a:prstGeom prst="rect">
-            <a:avLst/>
-          </a:prstGeom>
-          <a:noFill/>
-          <a:ln/>
-        </p:spPr>
-        <p:txBody>
-          <a:bodyPr wrap="square" lIns="0" tIns="0" rIns="0" bIns="0" rtlCol="0" anchor="ctr"/>
-          <a:lstStyle/>
-          <a:p>
-            <a:pPr algn="ctr" indent="0" marL="0">
-              <a:buNone/>
-            </a:pPr>
-            <a:r>
-              <a:rPr lang="en-US" sz="1300" b="1" dirty="0">
-                <a:solidFill>
-                  <a:srgbClr val="9D174D"/>
+              <a:t>performs</a:t>
+            </a:r>
+            <a:endParaRPr lang="en-US" sz="1200" dirty="0"/>
+          </a:p>
+        </p:txBody>
+      </p:sp>
+      <p:sp>
+        <p:nvSpPr>
+          <p:cNvPr id="44" name="Shape 42"/>
+          <p:cNvSpPr/>
+          <p:nvPr/>
+        </p:nvSpPr>
+        <p:spPr>
+          <a:xfrm>
+            <a:off x="4718304" y="4023360"/>
+            <a:ext cx="2011680" cy="402336"/>
+          </a:xfrm>
+          <a:prstGeom prst="rect">
+            <a:avLst>
+              <a:gd name="adj" fmla="val 13636"/>
+            </a:avLst>
+          </a:prstGeom>
+          <a:solidFill>
+            <a:srgbClr val="EEF2FF"/>
+          </a:solidFill>
+          <a:ln w="12700">
+            <a:solidFill>
+              <a:srgbClr val="6366F1"/>
+            </a:solidFill>
+            <a:prstDash val="solid"/>
+          </a:ln>
+        </p:spPr>
+      </p:sp>
+      <p:sp>
+        <p:nvSpPr>
+          <p:cNvPr id="45" name="Text 43"/>
+          <p:cNvSpPr/>
+          <p:nvPr/>
+        </p:nvSpPr>
+        <p:spPr>
+          <a:xfrm>
+            <a:off x="4718304" y="4023360"/>
+            <a:ext cx="2011680" cy="402336"/>
+          </a:xfrm>
+          <a:prstGeom prst="rect">
+            <a:avLst/>
+          </a:prstGeom>
+          <a:noFill/>
+          <a:ln/>
+        </p:spPr>
+        <p:txBody>
+          <a:bodyPr wrap="square" lIns="0" tIns="0" rIns="0" bIns="0" rtlCol="0" anchor="ctr"/>
+          <a:lstStyle/>
+          <a:p>
+            <a:pPr algn="ctr" indent="0" marL="0">
+              <a:buNone/>
+            </a:pPr>
+            <a:r>
+              <a:rPr lang="en-US" sz="1200" b="1" dirty="0">
+                <a:solidFill>
+                  <a:srgbClr val="4338CA"/>
                 </a:solidFill>
                 <a:latin typeface="Trebuchet MS" pitchFamily="34" charset="0"/>
                 <a:ea typeface="Trebuchet MS" pitchFamily="34" charset="-122"/>
                 <a:cs typeface="Trebuchet MS" pitchFamily="34" charset="-120"/>
               </a:rPr>
-              <a:t>-ative</a:t>
-            </a:r>
-            <a:endParaRPr lang="en-US" sz="1300" dirty="0"/>
-          </a:p>
-        </p:txBody>
-      </p:sp>
-      <p:sp>
-        <p:nvSpPr>
-          <p:cNvPr id="43" name="Text 41"/>
-          <p:cNvSpPr/>
-          <p:nvPr/>
-        </p:nvSpPr>
-        <p:spPr>
-          <a:xfrm>
-            <a:off x="365760" y="3611880"/>
-            <a:ext cx="1828800" cy="347472"/>
-          </a:xfrm>
-          <a:prstGeom prst="rect">
-            <a:avLst/>
-          </a:prstGeom>
-          <a:noFill/>
-          <a:ln/>
-        </p:spPr>
-        <p:txBody>
-          <a:bodyPr wrap="square" lIns="0" tIns="0" rIns="0" bIns="0" rtlCol="0" anchor="ctr"/>
-          <a:lstStyle/>
-          <a:p>
-            <a:pPr algn="l" indent="0" marL="0">
+              <a:t>performed</a:t>
+            </a:r>
+            <a:endParaRPr lang="en-US" sz="1200" dirty="0"/>
+          </a:p>
+        </p:txBody>
+      </p:sp>
+      <p:sp>
+        <p:nvSpPr>
+          <p:cNvPr id="46" name="Shape 44"/>
+          <p:cNvSpPr/>
+          <p:nvPr/>
+        </p:nvSpPr>
+        <p:spPr>
+          <a:xfrm>
+            <a:off x="6894576" y="4023360"/>
+            <a:ext cx="2011680" cy="402336"/>
+          </a:xfrm>
+          <a:prstGeom prst="rect">
+            <a:avLst>
+              <a:gd name="adj" fmla="val 13636"/>
+            </a:avLst>
+          </a:prstGeom>
+          <a:solidFill>
+            <a:srgbClr val="EEF2FF"/>
+          </a:solidFill>
+          <a:ln w="12700">
+            <a:solidFill>
+              <a:srgbClr val="6366F1"/>
+            </a:solidFill>
+            <a:prstDash val="solid"/>
+          </a:ln>
+        </p:spPr>
+      </p:sp>
+      <p:sp>
+        <p:nvSpPr>
+          <p:cNvPr id="47" name="Text 45"/>
+          <p:cNvSpPr/>
+          <p:nvPr/>
+        </p:nvSpPr>
+        <p:spPr>
+          <a:xfrm>
+            <a:off x="6894576" y="4023360"/>
+            <a:ext cx="2011680" cy="402336"/>
+          </a:xfrm>
+          <a:prstGeom prst="rect">
+            <a:avLst/>
+          </a:prstGeom>
+          <a:noFill/>
+          <a:ln/>
+        </p:spPr>
+        <p:txBody>
+          <a:bodyPr wrap="square" lIns="0" tIns="0" rIns="0" bIns="0" rtlCol="0" anchor="ctr"/>
+          <a:lstStyle/>
+          <a:p>
+            <a:pPr algn="ctr" indent="0" marL="0">
               <a:buNone/>
             </a:pPr>
             <a:r>
               <a:rPr lang="en-US" sz="1200" b="1" dirty="0">
                 <a:solidFill>
-                  <a:srgbClr val="0F172A"/>
+                  <a:srgbClr val="4338CA"/>
                 </a:solidFill>
                 <a:latin typeface="Trebuchet MS" pitchFamily="34" charset="0"/>
                 <a:ea typeface="Trebuchet MS" pitchFamily="34" charset="-122"/>
                 <a:cs typeface="Trebuchet MS" pitchFamily="34" charset="-120"/>
               </a:rPr>
-              <a:t>Sample words:</a:t>
+              <a:t>performer</a:t>
             </a:r>
             <a:endParaRPr lang="en-US" sz="1200" dirty="0"/>
           </a:p>
@@ -36682,13 +37225,13 @@
       </p:sp>
       <p:sp>
         <p:nvSpPr>
-          <p:cNvPr id="44" name="Shape 42"/>
-          <p:cNvSpPr/>
-          <p:nvPr/>
-        </p:nvSpPr>
-        <p:spPr>
-          <a:xfrm>
-            <a:off x="365760" y="4023360"/>
+          <p:cNvPr id="48" name="Shape 46"/>
+          <p:cNvSpPr/>
+          <p:nvPr/>
+        </p:nvSpPr>
+        <p:spPr>
+          <a:xfrm>
+            <a:off x="365760" y="4498848"/>
             <a:ext cx="2011680" cy="402336"/>
           </a:xfrm>
           <a:prstGeom prst="rect">
@@ -36709,13 +37252,13 @@
       </p:sp>
       <p:sp>
         <p:nvSpPr>
-          <p:cNvPr id="45" name="Text 43"/>
-          <p:cNvSpPr/>
-          <p:nvPr/>
-        </p:nvSpPr>
-        <p:spPr>
-          <a:xfrm>
-            <a:off x="365760" y="4023360"/>
+          <p:cNvPr id="49" name="Text 47"/>
+          <p:cNvSpPr/>
+          <p:nvPr/>
+        </p:nvSpPr>
+        <p:spPr>
+          <a:xfrm>
+            <a:off x="365760" y="4498848"/>
             <a:ext cx="2011680" cy="402336"/>
           </a:xfrm>
           <a:prstGeom prst="rect">
@@ -36740,469 +37283,7 @@
                 <a:ea typeface="Trebuchet MS" pitchFamily="34" charset="-122"/>
                 <a:cs typeface="Trebuchet MS" pitchFamily="34" charset="-120"/>
               </a:rPr>
-              <a:t>perform</a:t>
-            </a:r>
-            <a:endParaRPr lang="en-US" sz="1200" dirty="0"/>
-          </a:p>
-        </p:txBody>
-      </p:sp>
-      <p:sp>
-        <p:nvSpPr>
-          <p:cNvPr id="46" name="Shape 44"/>
-          <p:cNvSpPr/>
-          <p:nvPr/>
-        </p:nvSpPr>
-        <p:spPr>
-          <a:xfrm>
-            <a:off x="2542032" y="4023360"/>
-            <a:ext cx="2011680" cy="402336"/>
-          </a:xfrm>
-          <a:prstGeom prst="rect">
-            <a:avLst>
-              <a:gd name="adj" fmla="val 13636"/>
-            </a:avLst>
-          </a:prstGeom>
-          <a:solidFill>
-            <a:srgbClr val="EEF2FF"/>
-          </a:solidFill>
-          <a:ln w="12700">
-            <a:solidFill>
-              <a:srgbClr val="6366F1"/>
-            </a:solidFill>
-            <a:prstDash val="solid"/>
-          </a:ln>
-        </p:spPr>
-      </p:sp>
-      <p:sp>
-        <p:nvSpPr>
-          <p:cNvPr id="47" name="Text 45"/>
-          <p:cNvSpPr/>
-          <p:nvPr/>
-        </p:nvSpPr>
-        <p:spPr>
-          <a:xfrm>
-            <a:off x="2542032" y="4023360"/>
-            <a:ext cx="2011680" cy="402336"/>
-          </a:xfrm>
-          <a:prstGeom prst="rect">
-            <a:avLst/>
-          </a:prstGeom>
-          <a:noFill/>
-          <a:ln/>
-        </p:spPr>
-        <p:txBody>
-          <a:bodyPr wrap="square" lIns="0" tIns="0" rIns="0" bIns="0" rtlCol="0" anchor="ctr"/>
-          <a:lstStyle/>
-          <a:p>
-            <a:pPr algn="ctr" indent="0" marL="0">
-              <a:buNone/>
-            </a:pPr>
-            <a:r>
-              <a:rPr lang="en-US" sz="1200" b="1" dirty="0">
-                <a:solidFill>
-                  <a:srgbClr val="4338CA"/>
-                </a:solidFill>
-                <a:latin typeface="Trebuchet MS" pitchFamily="34" charset="0"/>
-                <a:ea typeface="Trebuchet MS" pitchFamily="34" charset="-122"/>
-                <a:cs typeface="Trebuchet MS" pitchFamily="34" charset="-120"/>
-              </a:rPr>
-              <a:t>performance</a:t>
-            </a:r>
-            <a:endParaRPr lang="en-US" sz="1200" dirty="0"/>
-          </a:p>
-        </p:txBody>
-      </p:sp>
-      <p:sp>
-        <p:nvSpPr>
-          <p:cNvPr id="48" name="Shape 46"/>
-          <p:cNvSpPr/>
-          <p:nvPr/>
-        </p:nvSpPr>
-        <p:spPr>
-          <a:xfrm>
-            <a:off x="4718304" y="4023360"/>
-            <a:ext cx="2011680" cy="402336"/>
-          </a:xfrm>
-          <a:prstGeom prst="rect">
-            <a:avLst>
-              <a:gd name="adj" fmla="val 13636"/>
-            </a:avLst>
-          </a:prstGeom>
-          <a:solidFill>
-            <a:srgbClr val="EEF2FF"/>
-          </a:solidFill>
-          <a:ln w="12700">
-            <a:solidFill>
-              <a:srgbClr val="6366F1"/>
-            </a:solidFill>
-            <a:prstDash val="solid"/>
-          </a:ln>
-        </p:spPr>
-      </p:sp>
-      <p:sp>
-        <p:nvSpPr>
-          <p:cNvPr id="49" name="Text 47"/>
-          <p:cNvSpPr/>
-          <p:nvPr/>
-        </p:nvSpPr>
-        <p:spPr>
-          <a:xfrm>
-            <a:off x="4718304" y="4023360"/>
-            <a:ext cx="2011680" cy="402336"/>
-          </a:xfrm>
-          <a:prstGeom prst="rect">
-            <a:avLst/>
-          </a:prstGeom>
-          <a:noFill/>
-          <a:ln/>
-        </p:spPr>
-        <p:txBody>
-          <a:bodyPr wrap="square" lIns="0" tIns="0" rIns="0" bIns="0" rtlCol="0" anchor="ctr"/>
-          <a:lstStyle/>
-          <a:p>
-            <a:pPr algn="ctr" indent="0" marL="0">
-              <a:buNone/>
-            </a:pPr>
-            <a:r>
-              <a:rPr lang="en-US" sz="1200" b="1" dirty="0">
-                <a:solidFill>
-                  <a:srgbClr val="4338CA"/>
-                </a:solidFill>
-                <a:latin typeface="Trebuchet MS" pitchFamily="34" charset="0"/>
-                <a:ea typeface="Trebuchet MS" pitchFamily="34" charset="-122"/>
-                <a:cs typeface="Trebuchet MS" pitchFamily="34" charset="-120"/>
-              </a:rPr>
-              <a:t>performer</a:t>
-            </a:r>
-            <a:endParaRPr lang="en-US" sz="1200" dirty="0"/>
-          </a:p>
-        </p:txBody>
-      </p:sp>
-      <p:sp>
-        <p:nvSpPr>
-          <p:cNvPr id="50" name="Shape 48"/>
-          <p:cNvSpPr/>
-          <p:nvPr/>
-        </p:nvSpPr>
-        <p:spPr>
-          <a:xfrm>
-            <a:off x="6894576" y="4023360"/>
-            <a:ext cx="2011680" cy="402336"/>
-          </a:xfrm>
-          <a:prstGeom prst="rect">
-            <a:avLst>
-              <a:gd name="adj" fmla="val 13636"/>
-            </a:avLst>
-          </a:prstGeom>
-          <a:solidFill>
-            <a:srgbClr val="EEF2FF"/>
-          </a:solidFill>
-          <a:ln w="12700">
-            <a:solidFill>
-              <a:srgbClr val="6366F1"/>
-            </a:solidFill>
-            <a:prstDash val="solid"/>
-          </a:ln>
-        </p:spPr>
-      </p:sp>
-      <p:sp>
-        <p:nvSpPr>
-          <p:cNvPr id="51" name="Text 49"/>
-          <p:cNvSpPr/>
-          <p:nvPr/>
-        </p:nvSpPr>
-        <p:spPr>
-          <a:xfrm>
-            <a:off x="6894576" y="4023360"/>
-            <a:ext cx="2011680" cy="402336"/>
-          </a:xfrm>
-          <a:prstGeom prst="rect">
-            <a:avLst/>
-          </a:prstGeom>
-          <a:noFill/>
-          <a:ln/>
-        </p:spPr>
-        <p:txBody>
-          <a:bodyPr wrap="square" lIns="0" tIns="0" rIns="0" bIns="0" rtlCol="0" anchor="ctr"/>
-          <a:lstStyle/>
-          <a:p>
-            <a:pPr algn="ctr" indent="0" marL="0">
-              <a:buNone/>
-            </a:pPr>
-            <a:r>
-              <a:rPr lang="en-US" sz="1200" b="1" dirty="0">
-                <a:solidFill>
-                  <a:srgbClr val="4338CA"/>
-                </a:solidFill>
-                <a:latin typeface="Trebuchet MS" pitchFamily="34" charset="0"/>
-                <a:ea typeface="Trebuchet MS" pitchFamily="34" charset="-122"/>
-                <a:cs typeface="Trebuchet MS" pitchFamily="34" charset="-120"/>
-              </a:rPr>
-              <a:t>performing</a:t>
-            </a:r>
-            <a:endParaRPr lang="en-US" sz="1200" dirty="0"/>
-          </a:p>
-        </p:txBody>
-      </p:sp>
-      <p:sp>
-        <p:nvSpPr>
-          <p:cNvPr id="52" name="Shape 50"/>
-          <p:cNvSpPr/>
-          <p:nvPr/>
-        </p:nvSpPr>
-        <p:spPr>
-          <a:xfrm>
-            <a:off x="365760" y="4498848"/>
-            <a:ext cx="2011680" cy="402336"/>
-          </a:xfrm>
-          <a:prstGeom prst="rect">
-            <a:avLst>
-              <a:gd name="adj" fmla="val 13636"/>
-            </a:avLst>
-          </a:prstGeom>
-          <a:solidFill>
-            <a:srgbClr val="EEF2FF"/>
-          </a:solidFill>
-          <a:ln w="12700">
-            <a:solidFill>
-              <a:srgbClr val="6366F1"/>
-            </a:solidFill>
-            <a:prstDash val="solid"/>
-          </a:ln>
-        </p:spPr>
-      </p:sp>
-      <p:sp>
-        <p:nvSpPr>
-          <p:cNvPr id="53" name="Text 51"/>
-          <p:cNvSpPr/>
-          <p:nvPr/>
-        </p:nvSpPr>
-        <p:spPr>
-          <a:xfrm>
-            <a:off x="365760" y="4498848"/>
-            <a:ext cx="2011680" cy="402336"/>
-          </a:xfrm>
-          <a:prstGeom prst="rect">
-            <a:avLst/>
-          </a:prstGeom>
-          <a:noFill/>
-          <a:ln/>
-        </p:spPr>
-        <p:txBody>
-          <a:bodyPr wrap="square" lIns="0" tIns="0" rIns="0" bIns="0" rtlCol="0" anchor="ctr"/>
-          <a:lstStyle/>
-          <a:p>
-            <a:pPr algn="ctr" indent="0" marL="0">
-              <a:buNone/>
-            </a:pPr>
-            <a:r>
-              <a:rPr lang="en-US" sz="1200" b="1" dirty="0">
-                <a:solidFill>
-                  <a:srgbClr val="4338CA"/>
-                </a:solidFill>
-                <a:latin typeface="Trebuchet MS" pitchFamily="34" charset="0"/>
-                <a:ea typeface="Trebuchet MS" pitchFamily="34" charset="-122"/>
-                <a:cs typeface="Trebuchet MS" pitchFamily="34" charset="-120"/>
-              </a:rPr>
-              <a:t>performed</a:t>
-            </a:r>
-            <a:endParaRPr lang="en-US" sz="1200" dirty="0"/>
-          </a:p>
-        </p:txBody>
-      </p:sp>
-      <p:sp>
-        <p:nvSpPr>
-          <p:cNvPr id="54" name="Shape 52"/>
-          <p:cNvSpPr/>
-          <p:nvPr/>
-        </p:nvSpPr>
-        <p:spPr>
-          <a:xfrm>
-            <a:off x="2542032" y="4498848"/>
-            <a:ext cx="2011680" cy="402336"/>
-          </a:xfrm>
-          <a:prstGeom prst="rect">
-            <a:avLst>
-              <a:gd name="adj" fmla="val 13636"/>
-            </a:avLst>
-          </a:prstGeom>
-          <a:solidFill>
-            <a:srgbClr val="EEF2FF"/>
-          </a:solidFill>
-          <a:ln w="12700">
-            <a:solidFill>
-              <a:srgbClr val="6366F1"/>
-            </a:solidFill>
-            <a:prstDash val="solid"/>
-          </a:ln>
-        </p:spPr>
-      </p:sp>
-      <p:sp>
-        <p:nvSpPr>
-          <p:cNvPr id="55" name="Text 53"/>
-          <p:cNvSpPr/>
-          <p:nvPr/>
-        </p:nvSpPr>
-        <p:spPr>
-          <a:xfrm>
-            <a:off x="2542032" y="4498848"/>
-            <a:ext cx="2011680" cy="402336"/>
-          </a:xfrm>
-          <a:prstGeom prst="rect">
-            <a:avLst/>
-          </a:prstGeom>
-          <a:noFill/>
-          <a:ln/>
-        </p:spPr>
-        <p:txBody>
-          <a:bodyPr wrap="square" lIns="0" tIns="0" rIns="0" bIns="0" rtlCol="0" anchor="ctr"/>
-          <a:lstStyle/>
-          <a:p>
-            <a:pPr algn="ctr" indent="0" marL="0">
-              <a:buNone/>
-            </a:pPr>
-            <a:r>
-              <a:rPr lang="en-US" sz="1200" b="1" dirty="0">
-                <a:solidFill>
-                  <a:srgbClr val="4338CA"/>
-                </a:solidFill>
-                <a:latin typeface="Trebuchet MS" pitchFamily="34" charset="0"/>
-                <a:ea typeface="Trebuchet MS" pitchFamily="34" charset="-122"/>
-                <a:cs typeface="Trebuchet MS" pitchFamily="34" charset="-120"/>
-              </a:rPr>
-              <a:t>outperform</a:t>
-            </a:r>
-            <a:endParaRPr lang="en-US" sz="1200" dirty="0"/>
-          </a:p>
-        </p:txBody>
-      </p:sp>
-      <p:sp>
-        <p:nvSpPr>
-          <p:cNvPr id="56" name="Shape 54"/>
-          <p:cNvSpPr/>
-          <p:nvPr/>
-        </p:nvSpPr>
-        <p:spPr>
-          <a:xfrm>
-            <a:off x="4718304" y="4498848"/>
-            <a:ext cx="2011680" cy="402336"/>
-          </a:xfrm>
-          <a:prstGeom prst="rect">
-            <a:avLst>
-              <a:gd name="adj" fmla="val 13636"/>
-            </a:avLst>
-          </a:prstGeom>
-          <a:solidFill>
-            <a:srgbClr val="EEF2FF"/>
-          </a:solidFill>
-          <a:ln w="12700">
-            <a:solidFill>
-              <a:srgbClr val="6366F1"/>
-            </a:solidFill>
-            <a:prstDash val="solid"/>
-          </a:ln>
-        </p:spPr>
-      </p:sp>
-      <p:sp>
-        <p:nvSpPr>
-          <p:cNvPr id="57" name="Text 55"/>
-          <p:cNvSpPr/>
-          <p:nvPr/>
-        </p:nvSpPr>
-        <p:spPr>
-          <a:xfrm>
-            <a:off x="4718304" y="4498848"/>
-            <a:ext cx="2011680" cy="402336"/>
-          </a:xfrm>
-          <a:prstGeom prst="rect">
-            <a:avLst/>
-          </a:prstGeom>
-          <a:noFill/>
-          <a:ln/>
-        </p:spPr>
-        <p:txBody>
-          <a:bodyPr wrap="square" lIns="0" tIns="0" rIns="0" bIns="0" rtlCol="0" anchor="ctr"/>
-          <a:lstStyle/>
-          <a:p>
-            <a:pPr algn="ctr" indent="0" marL="0">
-              <a:buNone/>
-            </a:pPr>
-            <a:r>
-              <a:rPr lang="en-US" sz="1200" b="1" dirty="0">
-                <a:solidFill>
-                  <a:srgbClr val="4338CA"/>
-                </a:solidFill>
-                <a:latin typeface="Trebuchet MS" pitchFamily="34" charset="0"/>
-                <a:ea typeface="Trebuchet MS" pitchFamily="34" charset="-122"/>
-                <a:cs typeface="Trebuchet MS" pitchFamily="34" charset="-120"/>
-              </a:rPr>
-              <a:t>underperform</a:t>
-            </a:r>
-            <a:endParaRPr lang="en-US" sz="1200" dirty="0"/>
-          </a:p>
-        </p:txBody>
-      </p:sp>
-      <p:sp>
-        <p:nvSpPr>
-          <p:cNvPr id="58" name="Shape 56"/>
-          <p:cNvSpPr/>
-          <p:nvPr/>
-        </p:nvSpPr>
-        <p:spPr>
-          <a:xfrm>
-            <a:off x="6894576" y="4498848"/>
-            <a:ext cx="2011680" cy="402336"/>
-          </a:xfrm>
-          <a:prstGeom prst="rect">
-            <a:avLst>
-              <a:gd name="adj" fmla="val 13636"/>
-            </a:avLst>
-          </a:prstGeom>
-          <a:solidFill>
-            <a:srgbClr val="EEF2FF"/>
-          </a:solidFill>
-          <a:ln w="12700">
-            <a:solidFill>
-              <a:srgbClr val="6366F1"/>
-            </a:solidFill>
-            <a:prstDash val="solid"/>
-          </a:ln>
-        </p:spPr>
-      </p:sp>
-      <p:sp>
-        <p:nvSpPr>
-          <p:cNvPr id="59" name="Text 57"/>
-          <p:cNvSpPr/>
-          <p:nvPr/>
-        </p:nvSpPr>
-        <p:spPr>
-          <a:xfrm>
-            <a:off x="6894576" y="4498848"/>
-            <a:ext cx="2011680" cy="402336"/>
-          </a:xfrm>
-          <a:prstGeom prst="rect">
-            <a:avLst/>
-          </a:prstGeom>
-          <a:noFill/>
-          <a:ln/>
-        </p:spPr>
-        <p:txBody>
-          <a:bodyPr wrap="square" lIns="0" tIns="0" rIns="0" bIns="0" rtlCol="0" anchor="ctr"/>
-          <a:lstStyle/>
-          <a:p>
-            <a:pPr algn="ctr" indent="0" marL="0">
-              <a:buNone/>
-            </a:pPr>
-            <a:r>
-              <a:rPr lang="en-US" sz="1200" b="1" dirty="0">
-                <a:solidFill>
-                  <a:srgbClr val="4338CA"/>
-                </a:solidFill>
-                <a:latin typeface="Trebuchet MS" pitchFamily="34" charset="0"/>
-                <a:ea typeface="Trebuchet MS" pitchFamily="34" charset="-122"/>
-                <a:cs typeface="Trebuchet MS" pitchFamily="34" charset="-120"/>
-              </a:rPr>
-              <a:t>reperform</a:t>
+              <a:t>performers</a:t>
             </a:r>
             <a:endParaRPr lang="en-US" sz="1200" dirty="0"/>
           </a:p>
@@ -37494,7 +37575,7 @@
                 <a:ea typeface="Calibri" pitchFamily="34" charset="-122"/>
                 <a:cs typeface="Calibri" pitchFamily="34" charset="-120"/>
               </a:rPr>
-              <a:t>Word Labs  •  wordlabs.app  •  Root: 'perform' = carry out, do, or show</a:t>
+              <a:t>Word Labs  •  wordlabs.app  •  Root: 'perform' = do; carry out</a:t>
             </a:r>
             <a:endParaRPr lang="en-US" sz="800" dirty="0"/>
           </a:p>
@@ -37658,7 +37739,7 @@
                 <a:ea typeface="Calibri" pitchFamily="34" charset="-122"/>
                 <a:cs typeface="Calibri" pitchFamily="34" charset="-120"/>
               </a:rPr>
-              <a:t>The core part of a word carrying its basic meaning. For example, 'perform' means 'carry out, do, or show'.</a:t>
+              <a:t>The core part of a word carrying its basic meaning. For example, 'perform' means 'do; carry out'.</a:t>
             </a:r>
             <a:endParaRPr lang="en-US" sz="1350" dirty="0"/>
           </a:p>
@@ -38278,7 +38359,7 @@
                 <a:ea typeface="Calibri" pitchFamily="34" charset="-122"/>
                 <a:cs typeface="Calibri" pitchFamily="34" charset="-120"/>
               </a:rPr>
-              <a:t>Word Labs  •  wordlabs.app  •  Root: 'perform' = carry out, do, or show</a:t>
+              <a:t>Word Labs  •  wordlabs.app  •  Root: 'perform' = do; carry out</a:t>
             </a:r>
             <a:endParaRPr lang="en-US" sz="800" dirty="0"/>
           </a:p>
@@ -38390,7 +38471,7 @@
                 <a:ea typeface="Calibri" pitchFamily="34" charset="-122"/>
                 <a:cs typeface="Calibri" pitchFamily="34" charset="-120"/>
               </a:rPr>
-              <a:t>1.  A performer is someone who performs for an audience.</a:t>
+              <a:t>1.  'perform' means 'to hide something so no one can see it'.</a:t>
             </a:r>
             <a:endParaRPr lang="en-US" sz="1300" dirty="0"/>
           </a:p>
@@ -38413,11 +38494,11 @@
             </a:avLst>
           </a:prstGeom>
           <a:solidFill>
-            <a:srgbClr val="DCFCE7"/>
-          </a:solidFill>
-          <a:ln w="12700">
-            <a:solidFill>
-              <a:srgbClr val="16A34A"/>
+            <a:srgbClr val="FEE2E2"/>
+          </a:solidFill>
+          <a:ln w="12700">
+            <a:solidFill>
+              <a:srgbClr val="DC2626"/>
             </a:solidFill>
             <a:prstDash val="solid"/>
           </a:ln>
@@ -38450,13 +38531,13 @@
             <a:r>
               <a:rPr lang="en-US" sz="1100" b="1" dirty="0">
                 <a:solidFill>
-                  <a:srgbClr val="16A34A"/>
+                  <a:srgbClr val="DC2626"/>
                 </a:solidFill>
                 <a:latin typeface="Trebuchet MS" pitchFamily="34" charset="0"/>
                 <a:ea typeface="Trebuchet MS" pitchFamily="34" charset="-122"/>
                 <a:cs typeface="Trebuchet MS" pitchFamily="34" charset="-120"/>
               </a:rPr>
-              <a:t>TRUE</a:t>
+              <a:t>FALSE</a:t>
             </a:r>
             <a:endParaRPr lang="en-US" sz="1100" dirty="0"/>
           </a:p>
@@ -38529,7 +38610,7 @@
                 <a:ea typeface="Calibri" pitchFamily="34" charset="-122"/>
                 <a:cs typeface="Calibri" pitchFamily="34" charset="-120"/>
               </a:rPr>
-              <a:t>2.  The suffix '-ance' turns the verb perform into a noun.</a:t>
+              <a:t>2.  'perform' means 'to do something in front of an audience, or to carry out a task or duty'.</a:t>
             </a:r>
             <a:endParaRPr lang="en-US" sz="1300" dirty="0"/>
           </a:p>
@@ -38668,7 +38749,7 @@
                 <a:ea typeface="Calibri" pitchFamily="34" charset="-122"/>
                 <a:cs typeface="Calibri" pitchFamily="34" charset="-120"/>
               </a:rPr>
-              <a:t>3.  Outperform means to do much worse than someone else.</a:t>
+              <a:t>3.  'performs' means 'does something in front of an audience, or carries out a task'.</a:t>
             </a:r>
             <a:endParaRPr lang="en-US" sz="1300" dirty="0"/>
           </a:p>
@@ -38691,11 +38772,11 @@
             </a:avLst>
           </a:prstGeom>
           <a:solidFill>
-            <a:srgbClr val="FEE2E2"/>
-          </a:solidFill>
-          <a:ln w="12700">
-            <a:solidFill>
-              <a:srgbClr val="DC2626"/>
+            <a:srgbClr val="DCFCE7"/>
+          </a:solidFill>
+          <a:ln w="12700">
+            <a:solidFill>
+              <a:srgbClr val="16A34A"/>
             </a:solidFill>
             <a:prstDash val="solid"/>
           </a:ln>
@@ -38728,13 +38809,13 @@
             <a:r>
               <a:rPr lang="en-US" sz="1100" b="1" dirty="0">
                 <a:solidFill>
-                  <a:srgbClr val="DC2626"/>
+                  <a:srgbClr val="16A34A"/>
                 </a:solidFill>
                 <a:latin typeface="Trebuchet MS" pitchFamily="34" charset="0"/>
                 <a:ea typeface="Trebuchet MS" pitchFamily="34" charset="-122"/>
                 <a:cs typeface="Trebuchet MS" pitchFamily="34" charset="-120"/>
               </a:rPr>
-              <a:t>FALSE</a:t>
+              <a:t>TRUE</a:t>
             </a:r>
             <a:endParaRPr lang="en-US" sz="1100" dirty="0"/>
           </a:p>
@@ -38807,7 +38888,7 @@
                 <a:ea typeface="Calibri" pitchFamily="34" charset="-122"/>
                 <a:cs typeface="Calibri" pitchFamily="34" charset="-120"/>
               </a:rPr>
-              <a:t>4.  The root 'perform' comes from Ancient Greek.</a:t>
+              <a:t>4.  'performs' means 'hides something so no one can see it'.</a:t>
             </a:r>
             <a:endParaRPr lang="en-US" sz="1300" dirty="0"/>
           </a:p>
@@ -38946,7 +39027,7 @@
                 <a:ea typeface="Calibri" pitchFamily="34" charset="-122"/>
                 <a:cs typeface="Calibri" pitchFamily="34" charset="-120"/>
               </a:rPr>
-              <a:t>5.  Underperform means to do worse than expected.</a:t>
+              <a:t>5.  'perform' means 'do; carry out'.</a:t>
             </a:r>
             <a:endParaRPr lang="en-US" sz="1300" dirty="0"/>
           </a:p>
@@ -39304,7 +39385,7 @@
                 <a:ea typeface="Calibri" pitchFamily="34" charset="-122"/>
                 <a:cs typeface="Calibri" pitchFamily="34" charset="-120"/>
               </a:rPr>
-              <a:t>Word Labs  •  wordlabs.app  •  Root: 'perform' = carry out, do, or show</a:t>
+              <a:t>Word Labs  •  wordlabs.app  •  Root: 'perform' = do; carry out</a:t>
             </a:r>
             <a:endParaRPr lang="en-US" sz="800" dirty="0"/>
           </a:p>
@@ -39441,7 +39522,7 @@
                 <a:ea typeface="Trebuchet MS" pitchFamily="34" charset="-122"/>
                 <a:cs typeface="Trebuchet MS" pitchFamily="34" charset="-120"/>
               </a:rPr>
-              <a:t>carry out, do, or show</a:t>
+              <a:t>do; carry out</a:t>
             </a:r>
             <a:endParaRPr lang="en-US" sz="2000" dirty="0"/>
           </a:p>
@@ -39480,7 +39561,7 @@
                 <a:ea typeface="Calibri" pitchFamily="34" charset="-122"/>
                 <a:cs typeface="Calibri" pitchFamily="34" charset="-120"/>
               </a:rPr>
-              <a:t>Origin: Latin: performare</a:t>
+              <a:t>Origin: Core English root</a:t>
             </a:r>
             <a:endParaRPr lang="en-US" sz="1100" dirty="0"/>
           </a:p>
@@ -39651,7 +39732,7 @@
                 <a:ea typeface="Trebuchet MS" pitchFamily="34" charset="-122"/>
                 <a:cs typeface="Trebuchet MS" pitchFamily="34" charset="-120"/>
               </a:rPr>
-              <a:t>performance</a:t>
+              <a:t>performs</a:t>
             </a:r>
             <a:endParaRPr lang="en-US" sz="1300" dirty="0"/>
           </a:p>
@@ -39717,7 +39798,7 @@
                 <a:ea typeface="Trebuchet MS" pitchFamily="34" charset="-122"/>
                 <a:cs typeface="Trebuchet MS" pitchFamily="34" charset="-120"/>
               </a:rPr>
-              <a:t>performer</a:t>
+              <a:t>performed</a:t>
             </a:r>
             <a:endParaRPr lang="en-US" sz="1300" dirty="0"/>
           </a:p>
@@ -39783,7 +39864,7 @@
                 <a:ea typeface="Trebuchet MS" pitchFamily="34" charset="-122"/>
                 <a:cs typeface="Trebuchet MS" pitchFamily="34" charset="-120"/>
               </a:rPr>
-              <a:t>performing</a:t>
+              <a:t>performer</a:t>
             </a:r>
             <a:endParaRPr lang="en-US" sz="1300" dirty="0"/>
           </a:p>
@@ -39849,139 +39930,7 @@
                 <a:ea typeface="Trebuchet MS" pitchFamily="34" charset="-122"/>
                 <a:cs typeface="Trebuchet MS" pitchFamily="34" charset="-120"/>
               </a:rPr>
-              <a:t>performed</a:t>
-            </a:r>
-            <a:endParaRPr lang="en-US" sz="1300" dirty="0"/>
-          </a:p>
-        </p:txBody>
-      </p:sp>
-      <p:sp>
-        <p:nvSpPr>
-          <p:cNvPr id="26" name="Shape 24"/>
-          <p:cNvSpPr/>
-          <p:nvPr/>
-        </p:nvSpPr>
-        <p:spPr>
-          <a:xfrm>
-            <a:off x="2514600" y="3401568"/>
-            <a:ext cx="2011680" cy="502920"/>
-          </a:xfrm>
-          <a:prstGeom prst="rect">
-            <a:avLst>
-              <a:gd name="adj" fmla="val 14545"/>
-            </a:avLst>
-          </a:prstGeom>
-          <a:solidFill>
-            <a:srgbClr val="EEF2FF"/>
-          </a:solidFill>
-          <a:ln w="12700">
-            <a:solidFill>
-              <a:srgbClr val="6366F1"/>
-            </a:solidFill>
-            <a:prstDash val="solid"/>
-          </a:ln>
-        </p:spPr>
-      </p:sp>
-      <p:sp>
-        <p:nvSpPr>
-          <p:cNvPr id="27" name="Text 25"/>
-          <p:cNvSpPr/>
-          <p:nvPr/>
-        </p:nvSpPr>
-        <p:spPr>
-          <a:xfrm>
-            <a:off x="2514600" y="3401568"/>
-            <a:ext cx="2011680" cy="502920"/>
-          </a:xfrm>
-          <a:prstGeom prst="rect">
-            <a:avLst/>
-          </a:prstGeom>
-          <a:noFill/>
-          <a:ln/>
-        </p:spPr>
-        <p:txBody>
-          <a:bodyPr wrap="square" lIns="0" tIns="0" rIns="0" bIns="0" rtlCol="0" anchor="ctr"/>
-          <a:lstStyle/>
-          <a:p>
-            <a:pPr algn="ctr" indent="0" marL="0">
-              <a:buNone/>
-            </a:pPr>
-            <a:r>
-              <a:rPr lang="en-US" sz="1300" b="1" dirty="0">
-                <a:solidFill>
-                  <a:srgbClr val="4338CA"/>
-                </a:solidFill>
-                <a:latin typeface="Trebuchet MS" pitchFamily="34" charset="0"/>
-                <a:ea typeface="Trebuchet MS" pitchFamily="34" charset="-122"/>
-                <a:cs typeface="Trebuchet MS" pitchFamily="34" charset="-120"/>
-              </a:rPr>
-              <a:t>outperform</a:t>
-            </a:r>
-            <a:endParaRPr lang="en-US" sz="1300" dirty="0"/>
-          </a:p>
-        </p:txBody>
-      </p:sp>
-      <p:sp>
-        <p:nvSpPr>
-          <p:cNvPr id="28" name="Shape 26"/>
-          <p:cNvSpPr/>
-          <p:nvPr/>
-        </p:nvSpPr>
-        <p:spPr>
-          <a:xfrm>
-            <a:off x="4663440" y="3401568"/>
-            <a:ext cx="2011680" cy="502920"/>
-          </a:xfrm>
-          <a:prstGeom prst="rect">
-            <a:avLst>
-              <a:gd name="adj" fmla="val 14545"/>
-            </a:avLst>
-          </a:prstGeom>
-          <a:solidFill>
-            <a:srgbClr val="EEF2FF"/>
-          </a:solidFill>
-          <a:ln w="12700">
-            <a:solidFill>
-              <a:srgbClr val="6366F1"/>
-            </a:solidFill>
-            <a:prstDash val="solid"/>
-          </a:ln>
-        </p:spPr>
-      </p:sp>
-      <p:sp>
-        <p:nvSpPr>
-          <p:cNvPr id="29" name="Text 27"/>
-          <p:cNvSpPr/>
-          <p:nvPr/>
-        </p:nvSpPr>
-        <p:spPr>
-          <a:xfrm>
-            <a:off x="4663440" y="3401568"/>
-            <a:ext cx="2011680" cy="502920"/>
-          </a:xfrm>
-          <a:prstGeom prst="rect">
-            <a:avLst/>
-          </a:prstGeom>
-          <a:noFill/>
-          <a:ln/>
-        </p:spPr>
-        <p:txBody>
-          <a:bodyPr wrap="square" lIns="0" tIns="0" rIns="0" bIns="0" rtlCol="0" anchor="ctr"/>
-          <a:lstStyle/>
-          <a:p>
-            <a:pPr algn="ctr" indent="0" marL="0">
-              <a:buNone/>
-            </a:pPr>
-            <a:r>
-              <a:rPr lang="en-US" sz="1300" b="1" dirty="0">
-                <a:solidFill>
-                  <a:srgbClr val="4338CA"/>
-                </a:solidFill>
-                <a:latin typeface="Trebuchet MS" pitchFamily="34" charset="0"/>
-                <a:ea typeface="Trebuchet MS" pitchFamily="34" charset="-122"/>
-                <a:cs typeface="Trebuchet MS" pitchFamily="34" charset="-120"/>
-              </a:rPr>
-              <a:t>underperform</a:t>
+              <a:t>performers</a:t>
             </a:r>
             <a:endParaRPr lang="en-US" sz="1300" dirty="0"/>
           </a:p>
@@ -40273,7 +40222,7 @@
                 <a:ea typeface="Calibri" pitchFamily="34" charset="-122"/>
                 <a:cs typeface="Calibri" pitchFamily="34" charset="-120"/>
               </a:rPr>
-              <a:t>Word Labs  •  wordlabs.app  •  Root: 'perform' = carry out, do, or show</a:t>
+              <a:t>Word Labs  •  wordlabs.app  •  Root: 'perform' = do; carry out</a:t>
             </a:r>
             <a:endParaRPr lang="en-US" sz="800" dirty="0"/>
           </a:p>
@@ -40574,7 +40523,7 @@
                 <a:ea typeface="Trebuchet MS" pitchFamily="34" charset="-122"/>
                 <a:cs typeface="Trebuchet MS" pitchFamily="34" charset="-120"/>
               </a:rPr>
-              <a:t>out-</a:t>
+              <a:t>under-</a:t>
             </a:r>
             <a:endParaRPr lang="en-US" sz="1300" dirty="0"/>
           </a:p>
@@ -40723,7 +40672,7 @@
             <a:avLst/>
           </a:prstGeom>
           <a:solidFill>
-            <a:srgbClr val="DDD6FE"/>
+            <a:srgbClr val="F1F5F9"/>
           </a:solidFill>
           <a:ln w="12700">
             <a:solidFill>
@@ -40735,18 +40684,68 @@
       </p:sp>
       <p:sp>
         <p:nvSpPr>
-          <p:cNvPr id="24" name="Text 22"/>
-          <p:cNvSpPr/>
-          <p:nvPr/>
-        </p:nvSpPr>
-        <p:spPr>
-          <a:xfrm>
-            <a:off x="640080" y="2212848"/>
+          <p:cNvPr id="24" name="Shape 22"/>
+          <p:cNvSpPr/>
+          <p:nvPr/>
+        </p:nvSpPr>
+        <p:spPr>
+          <a:xfrm>
+            <a:off x="3291840" y="2212848"/>
+            <a:ext cx="1645920" cy="420624"/>
+          </a:xfrm>
+          <a:prstGeom prst="rect">
+            <a:avLst/>
+          </a:prstGeom>
+          <a:solidFill>
+            <a:srgbClr val="F1F5F9"/>
+          </a:solidFill>
+          <a:ln w="12700">
+            <a:solidFill>
+              <a:srgbClr val="E5E7EB"/>
+            </a:solidFill>
+            <a:prstDash val="solid"/>
+          </a:ln>
+        </p:spPr>
+      </p:sp>
+      <p:sp>
+        <p:nvSpPr>
+          <p:cNvPr id="25" name="Shape 23"/>
+          <p:cNvSpPr/>
+          <p:nvPr/>
+        </p:nvSpPr>
+        <p:spPr>
+          <a:xfrm>
+            <a:off x="5943600" y="2212848"/>
             <a:ext cx="1463040" cy="420624"/>
           </a:xfrm>
           <a:prstGeom prst="rect">
             <a:avLst/>
           </a:prstGeom>
+          <a:solidFill>
+            <a:srgbClr val="FCE7F3"/>
+          </a:solidFill>
+          <a:ln w="12700">
+            <a:solidFill>
+              <a:srgbClr val="E5E7EB"/>
+            </a:solidFill>
+            <a:prstDash val="solid"/>
+          </a:ln>
+        </p:spPr>
+      </p:sp>
+      <p:sp>
+        <p:nvSpPr>
+          <p:cNvPr id="26" name="Text 24"/>
+          <p:cNvSpPr/>
+          <p:nvPr/>
+        </p:nvSpPr>
+        <p:spPr>
+          <a:xfrm>
+            <a:off x="5943600" y="2212848"/>
+            <a:ext cx="1463040" cy="420624"/>
+          </a:xfrm>
+          <a:prstGeom prst="rect">
+            <a:avLst/>
+          </a:prstGeom>
           <a:noFill/>
           <a:ln/>
         </p:spPr>
@@ -40760,13 +40759,13 @@
             <a:r>
               <a:rPr lang="en-US" sz="1300" b="1" dirty="0">
                 <a:solidFill>
-                  <a:srgbClr val="4C1D95"/>
+                  <a:srgbClr val="9D174D"/>
                 </a:solidFill>
                 <a:latin typeface="Trebuchet MS" pitchFamily="34" charset="0"/>
                 <a:ea typeface="Trebuchet MS" pitchFamily="34" charset="-122"/>
                 <a:cs typeface="Trebuchet MS" pitchFamily="34" charset="-120"/>
               </a:rPr>
-              <a:t>over-</a:t>
+              <a:t>-ed</a:t>
             </a:r>
             <a:endParaRPr lang="en-US" sz="1300" dirty="0"/>
           </a:p>
@@ -40774,20 +40773,45 @@
       </p:sp>
       <p:sp>
         <p:nvSpPr>
-          <p:cNvPr id="25" name="Shape 23"/>
-          <p:cNvSpPr/>
-          <p:nvPr/>
-        </p:nvSpPr>
-        <p:spPr>
-          <a:xfrm>
-            <a:off x="3291840" y="2212848"/>
+          <p:cNvPr id="27" name="Shape 25"/>
+          <p:cNvSpPr/>
+          <p:nvPr/>
+        </p:nvSpPr>
+        <p:spPr>
+          <a:xfrm>
+            <a:off x="640080" y="2670048"/>
+            <a:ext cx="1463040" cy="420624"/>
+          </a:xfrm>
+          <a:prstGeom prst="rect">
+            <a:avLst/>
+          </a:prstGeom>
+          <a:solidFill>
+            <a:srgbClr val="F8FAFC"/>
+          </a:solidFill>
+          <a:ln w="12700">
+            <a:solidFill>
+              <a:srgbClr val="E5E7EB"/>
+            </a:solidFill>
+            <a:prstDash val="solid"/>
+          </a:ln>
+        </p:spPr>
+      </p:sp>
+      <p:sp>
+        <p:nvSpPr>
+          <p:cNvPr id="28" name="Shape 26"/>
+          <p:cNvSpPr/>
+          <p:nvPr/>
+        </p:nvSpPr>
+        <p:spPr>
+          <a:xfrm>
+            <a:off x="3291840" y="2670048"/>
             <a:ext cx="1645920" cy="420624"/>
           </a:xfrm>
           <a:prstGeom prst="rect">
             <a:avLst/>
           </a:prstGeom>
           <a:solidFill>
-            <a:srgbClr val="F1F5F9"/>
+            <a:srgbClr val="F8FAFC"/>
           </a:solidFill>
           <a:ln w="12700">
             <a:solidFill>
@@ -40799,13 +40823,13 @@
       </p:sp>
       <p:sp>
         <p:nvSpPr>
-          <p:cNvPr id="26" name="Shape 24"/>
-          <p:cNvSpPr/>
-          <p:nvPr/>
-        </p:nvSpPr>
-        <p:spPr>
-          <a:xfrm>
-            <a:off x="5943600" y="2212848"/>
+          <p:cNvPr id="29" name="Shape 27"/>
+          <p:cNvSpPr/>
+          <p:nvPr/>
+        </p:nvSpPr>
+        <p:spPr>
+          <a:xfrm>
+            <a:off x="5943600" y="2670048"/>
             <a:ext cx="1463040" cy="420624"/>
           </a:xfrm>
           <a:prstGeom prst="rect">
@@ -40824,13 +40848,13 @@
       </p:sp>
       <p:sp>
         <p:nvSpPr>
-          <p:cNvPr id="27" name="Text 25"/>
-          <p:cNvSpPr/>
-          <p:nvPr/>
-        </p:nvSpPr>
-        <p:spPr>
-          <a:xfrm>
-            <a:off x="5943600" y="2212848"/>
+          <p:cNvPr id="30" name="Text 28"/>
+          <p:cNvSpPr/>
+          <p:nvPr/>
+        </p:nvSpPr>
+        <p:spPr>
+          <a:xfrm>
+            <a:off x="5943600" y="2670048"/>
             <a:ext cx="1463040" cy="420624"/>
           </a:xfrm>
           <a:prstGeom prst="rect">
@@ -40863,20 +40887,20 @@
       </p:sp>
       <p:sp>
         <p:nvSpPr>
-          <p:cNvPr id="28" name="Shape 26"/>
-          <p:cNvSpPr/>
-          <p:nvPr/>
-        </p:nvSpPr>
-        <p:spPr>
-          <a:xfrm>
-            <a:off x="640080" y="2670048"/>
+          <p:cNvPr id="31" name="Shape 29"/>
+          <p:cNvSpPr/>
+          <p:nvPr/>
+        </p:nvSpPr>
+        <p:spPr>
+          <a:xfrm>
+            <a:off x="640080" y="3127248"/>
             <a:ext cx="1463040" cy="420624"/>
           </a:xfrm>
           <a:prstGeom prst="rect">
             <a:avLst/>
           </a:prstGeom>
           <a:solidFill>
-            <a:srgbClr val="DDD6FE"/>
+            <a:srgbClr val="F1F5F9"/>
           </a:solidFill>
           <a:ln w="12700">
             <a:solidFill>
@@ -40888,18 +40912,68 @@
       </p:sp>
       <p:sp>
         <p:nvSpPr>
-          <p:cNvPr id="29" name="Text 27"/>
-          <p:cNvSpPr/>
-          <p:nvPr/>
-        </p:nvSpPr>
-        <p:spPr>
-          <a:xfrm>
-            <a:off x="640080" y="2670048"/>
+          <p:cNvPr id="32" name="Shape 30"/>
+          <p:cNvSpPr/>
+          <p:nvPr/>
+        </p:nvSpPr>
+        <p:spPr>
+          <a:xfrm>
+            <a:off x="3291840" y="3127248"/>
+            <a:ext cx="1645920" cy="420624"/>
+          </a:xfrm>
+          <a:prstGeom prst="rect">
+            <a:avLst/>
+          </a:prstGeom>
+          <a:solidFill>
+            <a:srgbClr val="F1F5F9"/>
+          </a:solidFill>
+          <a:ln w="12700">
+            <a:solidFill>
+              <a:srgbClr val="E5E7EB"/>
+            </a:solidFill>
+            <a:prstDash val="solid"/>
+          </a:ln>
+        </p:spPr>
+      </p:sp>
+      <p:sp>
+        <p:nvSpPr>
+          <p:cNvPr id="33" name="Shape 31"/>
+          <p:cNvSpPr/>
+          <p:nvPr/>
+        </p:nvSpPr>
+        <p:spPr>
+          <a:xfrm>
+            <a:off x="5943600" y="3127248"/>
             <a:ext cx="1463040" cy="420624"/>
           </a:xfrm>
           <a:prstGeom prst="rect">
             <a:avLst/>
           </a:prstGeom>
+          <a:solidFill>
+            <a:srgbClr val="FCE7F3"/>
+          </a:solidFill>
+          <a:ln w="12700">
+            <a:solidFill>
+              <a:srgbClr val="E5E7EB"/>
+            </a:solidFill>
+            <a:prstDash val="solid"/>
+          </a:ln>
+        </p:spPr>
+      </p:sp>
+      <p:sp>
+        <p:nvSpPr>
+          <p:cNvPr id="34" name="Text 32"/>
+          <p:cNvSpPr/>
+          <p:nvPr/>
+        </p:nvSpPr>
+        <p:spPr>
+          <a:xfrm>
+            <a:off x="5943600" y="3127248"/>
+            <a:ext cx="1463040" cy="420624"/>
+          </a:xfrm>
+          <a:prstGeom prst="rect">
+            <a:avLst/>
+          </a:prstGeom>
           <a:noFill/>
           <a:ln/>
         </p:spPr>
@@ -40913,13 +40987,13 @@
             <a:r>
               <a:rPr lang="en-US" sz="1300" b="1" dirty="0">
                 <a:solidFill>
-                  <a:srgbClr val="4C1D95"/>
+                  <a:srgbClr val="9D174D"/>
                 </a:solidFill>
                 <a:latin typeface="Trebuchet MS" pitchFamily="34" charset="0"/>
                 <a:ea typeface="Trebuchet MS" pitchFamily="34" charset="-122"/>
                 <a:cs typeface="Trebuchet MS" pitchFamily="34" charset="-120"/>
               </a:rPr>
-              <a:t>under-</a:t>
+              <a:t>-ing</a:t>
             </a:r>
             <a:endParaRPr lang="en-US" sz="1300" dirty="0"/>
           </a:p>
@@ -40927,13 +41001,38 @@
       </p:sp>
       <p:sp>
         <p:nvSpPr>
-          <p:cNvPr id="30" name="Shape 28"/>
-          <p:cNvSpPr/>
-          <p:nvPr/>
-        </p:nvSpPr>
-        <p:spPr>
-          <a:xfrm>
-            <a:off x="3291840" y="2670048"/>
+          <p:cNvPr id="35" name="Shape 33"/>
+          <p:cNvSpPr/>
+          <p:nvPr/>
+        </p:nvSpPr>
+        <p:spPr>
+          <a:xfrm>
+            <a:off x="640080" y="3584448"/>
+            <a:ext cx="1463040" cy="420624"/>
+          </a:xfrm>
+          <a:prstGeom prst="rect">
+            <a:avLst/>
+          </a:prstGeom>
+          <a:solidFill>
+            <a:srgbClr val="F8FAFC"/>
+          </a:solidFill>
+          <a:ln w="12700">
+            <a:solidFill>
+              <a:srgbClr val="E5E7EB"/>
+            </a:solidFill>
+            <a:prstDash val="solid"/>
+          </a:ln>
+        </p:spPr>
+      </p:sp>
+      <p:sp>
+        <p:nvSpPr>
+          <p:cNvPr id="36" name="Shape 34"/>
+          <p:cNvSpPr/>
+          <p:nvPr/>
+        </p:nvSpPr>
+        <p:spPr>
+          <a:xfrm>
+            <a:off x="3291840" y="3584448"/>
             <a:ext cx="1645920" cy="420624"/>
           </a:xfrm>
           <a:prstGeom prst="rect">
@@ -40952,13 +41051,13 @@
       </p:sp>
       <p:sp>
         <p:nvSpPr>
-          <p:cNvPr id="31" name="Shape 29"/>
-          <p:cNvSpPr/>
-          <p:nvPr/>
-        </p:nvSpPr>
-        <p:spPr>
-          <a:xfrm>
-            <a:off x="5943600" y="2670048"/>
+          <p:cNvPr id="37" name="Shape 35"/>
+          <p:cNvSpPr/>
+          <p:nvPr/>
+        </p:nvSpPr>
+        <p:spPr>
+          <a:xfrm>
+            <a:off x="5943600" y="3584448"/>
             <a:ext cx="1463040" cy="420624"/>
           </a:xfrm>
           <a:prstGeom prst="rect">
@@ -40977,13 +41076,13 @@
       </p:sp>
       <p:sp>
         <p:nvSpPr>
-          <p:cNvPr id="32" name="Text 30"/>
-          <p:cNvSpPr/>
-          <p:nvPr/>
-        </p:nvSpPr>
-        <p:spPr>
-          <a:xfrm>
-            <a:off x="5943600" y="2670048"/>
+          <p:cNvPr id="38" name="Text 36"/>
+          <p:cNvSpPr/>
+          <p:nvPr/>
+        </p:nvSpPr>
+        <p:spPr>
+          <a:xfrm>
+            <a:off x="5943600" y="3584448"/>
             <a:ext cx="1463040" cy="420624"/>
           </a:xfrm>
           <a:prstGeom prst="rect">
@@ -41008,7 +41107,7 @@
                 <a:ea typeface="Trebuchet MS" pitchFamily="34" charset="-122"/>
                 <a:cs typeface="Trebuchet MS" pitchFamily="34" charset="-120"/>
               </a:rPr>
-              <a:t>-ing</a:t>
+              <a:t>-s</a:t>
             </a:r>
             <a:endParaRPr lang="en-US" sz="1300" dirty="0"/>
           </a:p>
@@ -41016,313 +41115,7 @@
       </p:sp>
       <p:sp>
         <p:nvSpPr>
-          <p:cNvPr id="33" name="Shape 31"/>
-          <p:cNvSpPr/>
-          <p:nvPr/>
-        </p:nvSpPr>
-        <p:spPr>
-          <a:xfrm>
-            <a:off x="640080" y="3127248"/>
-            <a:ext cx="1463040" cy="420624"/>
-          </a:xfrm>
-          <a:prstGeom prst="rect">
-            <a:avLst/>
-          </a:prstGeom>
-          <a:solidFill>
-            <a:srgbClr val="DDD6FE"/>
-          </a:solidFill>
-          <a:ln w="12700">
-            <a:solidFill>
-              <a:srgbClr val="E5E7EB"/>
-            </a:solidFill>
-            <a:prstDash val="solid"/>
-          </a:ln>
-        </p:spPr>
-      </p:sp>
-      <p:sp>
-        <p:nvSpPr>
-          <p:cNvPr id="34" name="Text 32"/>
-          <p:cNvSpPr/>
-          <p:nvPr/>
-        </p:nvSpPr>
-        <p:spPr>
-          <a:xfrm>
-            <a:off x="640080" y="3127248"/>
-            <a:ext cx="1463040" cy="420624"/>
-          </a:xfrm>
-          <a:prstGeom prst="rect">
-            <a:avLst/>
-          </a:prstGeom>
-          <a:noFill/>
-          <a:ln/>
-        </p:spPr>
-        <p:txBody>
-          <a:bodyPr wrap="square" lIns="0" tIns="0" rIns="0" bIns="0" rtlCol="0" anchor="ctr"/>
-          <a:lstStyle/>
-          <a:p>
-            <a:pPr algn="ctr" indent="0" marL="0">
-              <a:buNone/>
-            </a:pPr>
-            <a:r>
-              <a:rPr lang="en-US" sz="1300" b="1" dirty="0">
-                <a:solidFill>
-                  <a:srgbClr val="4C1D95"/>
-                </a:solidFill>
-                <a:latin typeface="Trebuchet MS" pitchFamily="34" charset="0"/>
-                <a:ea typeface="Trebuchet MS" pitchFamily="34" charset="-122"/>
-                <a:cs typeface="Trebuchet MS" pitchFamily="34" charset="-120"/>
-              </a:rPr>
-              <a:t>re-</a:t>
-            </a:r>
-            <a:endParaRPr lang="en-US" sz="1300" dirty="0"/>
-          </a:p>
-        </p:txBody>
-      </p:sp>
-      <p:sp>
-        <p:nvSpPr>
-          <p:cNvPr id="35" name="Shape 33"/>
-          <p:cNvSpPr/>
-          <p:nvPr/>
-        </p:nvSpPr>
-        <p:spPr>
-          <a:xfrm>
-            <a:off x="3291840" y="3127248"/>
-            <a:ext cx="1645920" cy="420624"/>
-          </a:xfrm>
-          <a:prstGeom prst="rect">
-            <a:avLst/>
-          </a:prstGeom>
-          <a:solidFill>
-            <a:srgbClr val="F1F5F9"/>
-          </a:solidFill>
-          <a:ln w="12700">
-            <a:solidFill>
-              <a:srgbClr val="E5E7EB"/>
-            </a:solidFill>
-            <a:prstDash val="solid"/>
-          </a:ln>
-        </p:spPr>
-      </p:sp>
-      <p:sp>
-        <p:nvSpPr>
-          <p:cNvPr id="36" name="Shape 34"/>
-          <p:cNvSpPr/>
-          <p:nvPr/>
-        </p:nvSpPr>
-        <p:spPr>
-          <a:xfrm>
-            <a:off x="5943600" y="3127248"/>
-            <a:ext cx="1463040" cy="420624"/>
-          </a:xfrm>
-          <a:prstGeom prst="rect">
-            <a:avLst/>
-          </a:prstGeom>
-          <a:solidFill>
-            <a:srgbClr val="FCE7F3"/>
-          </a:solidFill>
-          <a:ln w="12700">
-            <a:solidFill>
-              <a:srgbClr val="E5E7EB"/>
-            </a:solidFill>
-            <a:prstDash val="solid"/>
-          </a:ln>
-        </p:spPr>
-      </p:sp>
-      <p:sp>
-        <p:nvSpPr>
-          <p:cNvPr id="37" name="Text 35"/>
-          <p:cNvSpPr/>
-          <p:nvPr/>
-        </p:nvSpPr>
-        <p:spPr>
-          <a:xfrm>
-            <a:off x="5943600" y="3127248"/>
-            <a:ext cx="1463040" cy="420624"/>
-          </a:xfrm>
-          <a:prstGeom prst="rect">
-            <a:avLst/>
-          </a:prstGeom>
-          <a:noFill/>
-          <a:ln/>
-        </p:spPr>
-        <p:txBody>
-          <a:bodyPr wrap="square" lIns="0" tIns="0" rIns="0" bIns="0" rtlCol="0" anchor="ctr"/>
-          <a:lstStyle/>
-          <a:p>
-            <a:pPr algn="ctr" indent="0" marL="0">
-              <a:buNone/>
-            </a:pPr>
-            <a:r>
-              <a:rPr lang="en-US" sz="1300" b="1" dirty="0">
-                <a:solidFill>
-                  <a:srgbClr val="9D174D"/>
-                </a:solidFill>
-                <a:latin typeface="Trebuchet MS" pitchFamily="34" charset="0"/>
-                <a:ea typeface="Trebuchet MS" pitchFamily="34" charset="-122"/>
-                <a:cs typeface="Trebuchet MS" pitchFamily="34" charset="-120"/>
-              </a:rPr>
-              <a:t>-ed</a:t>
-            </a:r>
-            <a:endParaRPr lang="en-US" sz="1300" dirty="0"/>
-          </a:p>
-        </p:txBody>
-      </p:sp>
-      <p:sp>
-        <p:nvSpPr>
-          <p:cNvPr id="38" name="Shape 36"/>
-          <p:cNvSpPr/>
-          <p:nvPr/>
-        </p:nvSpPr>
-        <p:spPr>
-          <a:xfrm>
-            <a:off x="640080" y="3584448"/>
-            <a:ext cx="1463040" cy="420624"/>
-          </a:xfrm>
-          <a:prstGeom prst="rect">
-            <a:avLst/>
-          </a:prstGeom>
-          <a:solidFill>
-            <a:srgbClr val="DDD6FE"/>
-          </a:solidFill>
-          <a:ln w="12700">
-            <a:solidFill>
-              <a:srgbClr val="E5E7EB"/>
-            </a:solidFill>
-            <a:prstDash val="solid"/>
-          </a:ln>
-        </p:spPr>
-      </p:sp>
-      <p:sp>
-        <p:nvSpPr>
           <p:cNvPr id="39" name="Text 37"/>
-          <p:cNvSpPr/>
-          <p:nvPr/>
-        </p:nvSpPr>
-        <p:spPr>
-          <a:xfrm>
-            <a:off x="640080" y="3584448"/>
-            <a:ext cx="1463040" cy="420624"/>
-          </a:xfrm>
-          <a:prstGeom prst="rect">
-            <a:avLst/>
-          </a:prstGeom>
-          <a:noFill/>
-          <a:ln/>
-        </p:spPr>
-        <p:txBody>
-          <a:bodyPr wrap="square" lIns="0" tIns="0" rIns="0" bIns="0" rtlCol="0" anchor="ctr"/>
-          <a:lstStyle/>
-          <a:p>
-            <a:pPr algn="ctr" indent="0" marL="0">
-              <a:buNone/>
-            </a:pPr>
-            <a:r>
-              <a:rPr lang="en-US" sz="1300" b="1" dirty="0">
-                <a:solidFill>
-                  <a:srgbClr val="4C1D95"/>
-                </a:solidFill>
-                <a:latin typeface="Trebuchet MS" pitchFamily="34" charset="0"/>
-                <a:ea typeface="Trebuchet MS" pitchFamily="34" charset="-122"/>
-                <a:cs typeface="Trebuchet MS" pitchFamily="34" charset="-120"/>
-              </a:rPr>
-              <a:t>mis-</a:t>
-            </a:r>
-            <a:endParaRPr lang="en-US" sz="1300" dirty="0"/>
-          </a:p>
-        </p:txBody>
-      </p:sp>
-      <p:sp>
-        <p:nvSpPr>
-          <p:cNvPr id="40" name="Shape 38"/>
-          <p:cNvSpPr/>
-          <p:nvPr/>
-        </p:nvSpPr>
-        <p:spPr>
-          <a:xfrm>
-            <a:off x="3291840" y="3584448"/>
-            <a:ext cx="1645920" cy="420624"/>
-          </a:xfrm>
-          <a:prstGeom prst="rect">
-            <a:avLst/>
-          </a:prstGeom>
-          <a:solidFill>
-            <a:srgbClr val="F8FAFC"/>
-          </a:solidFill>
-          <a:ln w="12700">
-            <a:solidFill>
-              <a:srgbClr val="E5E7EB"/>
-            </a:solidFill>
-            <a:prstDash val="solid"/>
-          </a:ln>
-        </p:spPr>
-      </p:sp>
-      <p:sp>
-        <p:nvSpPr>
-          <p:cNvPr id="41" name="Shape 39"/>
-          <p:cNvSpPr/>
-          <p:nvPr/>
-        </p:nvSpPr>
-        <p:spPr>
-          <a:xfrm>
-            <a:off x="5943600" y="3584448"/>
-            <a:ext cx="1463040" cy="420624"/>
-          </a:xfrm>
-          <a:prstGeom prst="rect">
-            <a:avLst/>
-          </a:prstGeom>
-          <a:solidFill>
-            <a:srgbClr val="FCE7F3"/>
-          </a:solidFill>
-          <a:ln w="12700">
-            <a:solidFill>
-              <a:srgbClr val="E5E7EB"/>
-            </a:solidFill>
-            <a:prstDash val="solid"/>
-          </a:ln>
-        </p:spPr>
-      </p:sp>
-      <p:sp>
-        <p:nvSpPr>
-          <p:cNvPr id="42" name="Text 40"/>
-          <p:cNvSpPr/>
-          <p:nvPr/>
-        </p:nvSpPr>
-        <p:spPr>
-          <a:xfrm>
-            <a:off x="5943600" y="3584448"/>
-            <a:ext cx="1463040" cy="420624"/>
-          </a:xfrm>
-          <a:prstGeom prst="rect">
-            <a:avLst/>
-          </a:prstGeom>
-          <a:noFill/>
-          <a:ln/>
-        </p:spPr>
-        <p:txBody>
-          <a:bodyPr wrap="square" lIns="0" tIns="0" rIns="0" bIns="0" rtlCol="0" anchor="ctr"/>
-          <a:lstStyle/>
-          <a:p>
-            <a:pPr algn="ctr" indent="0" marL="0">
-              <a:buNone/>
-            </a:pPr>
-            <a:r>
-              <a:rPr lang="en-US" sz="1300" b="1" dirty="0">
-                <a:solidFill>
-                  <a:srgbClr val="9D174D"/>
-                </a:solidFill>
-                <a:latin typeface="Trebuchet MS" pitchFamily="34" charset="0"/>
-                <a:ea typeface="Trebuchet MS" pitchFamily="34" charset="-122"/>
-                <a:cs typeface="Trebuchet MS" pitchFamily="34" charset="-120"/>
-              </a:rPr>
-              <a:t>-ative</a:t>
-            </a:r>
-            <a:endParaRPr lang="en-US" sz="1300" dirty="0"/>
-          </a:p>
-        </p:txBody>
-      </p:sp>
-      <p:sp>
-        <p:nvSpPr>
-          <p:cNvPr id="43" name="Text 41"/>
           <p:cNvSpPr/>
           <p:nvPr/>
         </p:nvSpPr>
@@ -41361,14 +41154,14 @@
       </p:sp>
       <p:sp>
         <p:nvSpPr>
-          <p:cNvPr id="44" name="Shape 42"/>
+          <p:cNvPr id="40" name="Shape 38"/>
           <p:cNvSpPr/>
           <p:nvPr/>
         </p:nvSpPr>
         <p:spPr>
           <a:xfrm>
             <a:off x="1508760" y="4178808"/>
-            <a:ext cx="950976" cy="420624"/>
+            <a:ext cx="1243584" cy="420624"/>
           </a:xfrm>
           <a:prstGeom prst="rect">
             <a:avLst>
@@ -41395,14 +41188,14 @@
       </p:sp>
       <p:sp>
         <p:nvSpPr>
-          <p:cNvPr id="45" name="Text 43"/>
+          <p:cNvPr id="41" name="Text 39"/>
           <p:cNvSpPr/>
           <p:nvPr/>
         </p:nvSpPr>
         <p:spPr>
           <a:xfrm>
             <a:off x="1508760" y="4178808"/>
-            <a:ext cx="950976" cy="420624"/>
+            <a:ext cx="1243584" cy="420624"/>
           </a:xfrm>
           <a:prstGeom prst="rect">
             <a:avLst/>
@@ -41426,7 +41219,7 @@
                 <a:ea typeface="Trebuchet MS" pitchFamily="34" charset="-122"/>
                 <a:cs typeface="Trebuchet MS" pitchFamily="34" charset="-120"/>
               </a:rPr>
-              <a:t>out-</a:t>
+              <a:t>under-</a:t>
             </a:r>
             <a:endParaRPr lang="en-US" sz="1300" dirty="0"/>
           </a:p>
@@ -41434,13 +41227,13 @@
       </p:sp>
       <p:sp>
         <p:nvSpPr>
-          <p:cNvPr id="46" name="Text 44"/>
-          <p:cNvSpPr/>
-          <p:nvPr/>
-        </p:nvSpPr>
-        <p:spPr>
-          <a:xfrm>
-            <a:off x="2487168" y="4178808"/>
+          <p:cNvPr id="42" name="Text 40"/>
+          <p:cNvSpPr/>
+          <p:nvPr/>
+        </p:nvSpPr>
+        <p:spPr>
+          <a:xfrm>
+            <a:off x="2779776" y="4178808"/>
             <a:ext cx="320040" cy="420624"/>
           </a:xfrm>
           <a:prstGeom prst="rect">
@@ -41473,13 +41266,13 @@
       </p:sp>
       <p:sp>
         <p:nvSpPr>
-          <p:cNvPr id="47" name="Shape 45"/>
-          <p:cNvSpPr/>
-          <p:nvPr/>
-        </p:nvSpPr>
-        <p:spPr>
-          <a:xfrm>
-            <a:off x="2834640" y="4178808"/>
+          <p:cNvPr id="43" name="Shape 41"/>
+          <p:cNvSpPr/>
+          <p:nvPr/>
+        </p:nvSpPr>
+        <p:spPr>
+          <a:xfrm>
+            <a:off x="3127248" y="4178808"/>
             <a:ext cx="1682496" cy="420624"/>
           </a:xfrm>
           <a:prstGeom prst="rect">
@@ -41507,13 +41300,13 @@
       </p:sp>
       <p:sp>
         <p:nvSpPr>
-          <p:cNvPr id="48" name="Text 46"/>
-          <p:cNvSpPr/>
-          <p:nvPr/>
-        </p:nvSpPr>
-        <p:spPr>
-          <a:xfrm>
-            <a:off x="2834640" y="4178808"/>
+          <p:cNvPr id="44" name="Text 42"/>
+          <p:cNvSpPr/>
+          <p:nvPr/>
+        </p:nvSpPr>
+        <p:spPr>
+          <a:xfrm>
+            <a:off x="3127248" y="4178808"/>
             <a:ext cx="1682496" cy="420624"/>
           </a:xfrm>
           <a:prstGeom prst="rect">
@@ -41546,13 +41339,13 @@
       </p:sp>
       <p:sp>
         <p:nvSpPr>
-          <p:cNvPr id="49" name="Text 47"/>
-          <p:cNvSpPr/>
-          <p:nvPr/>
-        </p:nvSpPr>
-        <p:spPr>
-          <a:xfrm>
-            <a:off x="4544568" y="4178808"/>
+          <p:cNvPr id="45" name="Text 43"/>
+          <p:cNvSpPr/>
+          <p:nvPr/>
+        </p:nvSpPr>
+        <p:spPr>
+          <a:xfrm>
+            <a:off x="4837176" y="4178808"/>
             <a:ext cx="320040" cy="420624"/>
           </a:xfrm>
           <a:prstGeom prst="rect">
@@ -41585,13 +41378,13 @@
       </p:sp>
       <p:sp>
         <p:nvSpPr>
-          <p:cNvPr id="50" name="Shape 48"/>
-          <p:cNvSpPr/>
-          <p:nvPr/>
-        </p:nvSpPr>
-        <p:spPr>
-          <a:xfrm>
-            <a:off x="4892040" y="4178808"/>
+          <p:cNvPr id="46" name="Shape 44"/>
+          <p:cNvSpPr/>
+          <p:nvPr/>
+        </p:nvSpPr>
+        <p:spPr>
+          <a:xfrm>
+            <a:off x="5184648" y="4178808"/>
             <a:ext cx="1097280" cy="420624"/>
           </a:xfrm>
           <a:prstGeom prst="rect">
@@ -41619,13 +41412,13 @@
       </p:sp>
       <p:sp>
         <p:nvSpPr>
-          <p:cNvPr id="51" name="Text 49"/>
-          <p:cNvSpPr/>
-          <p:nvPr/>
-        </p:nvSpPr>
-        <p:spPr>
-          <a:xfrm>
-            <a:off x="4892040" y="4178808"/>
+          <p:cNvPr id="47" name="Text 45"/>
+          <p:cNvSpPr/>
+          <p:nvPr/>
+        </p:nvSpPr>
+        <p:spPr>
+          <a:xfrm>
+            <a:off x="5184648" y="4178808"/>
             <a:ext cx="1097280" cy="420624"/>
           </a:xfrm>
           <a:prstGeom prst="rect">
@@ -41658,13 +41451,13 @@
       </p:sp>
       <p:sp>
         <p:nvSpPr>
-          <p:cNvPr id="52" name="Text 50"/>
-          <p:cNvSpPr/>
-          <p:nvPr/>
-        </p:nvSpPr>
-        <p:spPr>
-          <a:xfrm>
-            <a:off x="6062472" y="4178808"/>
+          <p:cNvPr id="48" name="Text 46"/>
+          <p:cNvSpPr/>
+          <p:nvPr/>
+        </p:nvSpPr>
+        <p:spPr>
+          <a:xfrm>
+            <a:off x="6355080" y="4178808"/>
             <a:ext cx="365760" cy="420624"/>
           </a:xfrm>
           <a:prstGeom prst="rect">
@@ -41697,13 +41490,13 @@
       </p:sp>
       <p:sp>
         <p:nvSpPr>
-          <p:cNvPr id="53" name="Shape 51"/>
-          <p:cNvSpPr/>
-          <p:nvPr/>
-        </p:nvSpPr>
-        <p:spPr>
-          <a:xfrm>
-            <a:off x="6473952" y="4178808"/>
+          <p:cNvPr id="49" name="Shape 47"/>
+          <p:cNvSpPr/>
+          <p:nvPr/>
+        </p:nvSpPr>
+        <p:spPr>
+          <a:xfrm>
+            <a:off x="6766560" y="4178808"/>
             <a:ext cx="2194560" cy="420624"/>
           </a:xfrm>
           <a:prstGeom prst="rect">
@@ -41724,13 +41517,13 @@
       </p:sp>
       <p:sp>
         <p:nvSpPr>
-          <p:cNvPr id="54" name="Text 52"/>
-          <p:cNvSpPr/>
-          <p:nvPr/>
-        </p:nvSpPr>
-        <p:spPr>
-          <a:xfrm>
-            <a:off x="6473952" y="4178808"/>
+          <p:cNvPr id="50" name="Text 48"/>
+          <p:cNvSpPr/>
+          <p:nvPr/>
+        </p:nvSpPr>
+        <p:spPr>
+          <a:xfrm>
+            <a:off x="6766560" y="4178808"/>
             <a:ext cx="2194560" cy="420624"/>
           </a:xfrm>
           <a:prstGeom prst="rect">
@@ -42047,7 +41840,7 @@
                 <a:ea typeface="Calibri" pitchFamily="34" charset="-122"/>
                 <a:cs typeface="Calibri" pitchFamily="34" charset="-120"/>
               </a:rPr>
-              <a:t>Word Labs  •  wordlabs.app  •  Root: 'perform' = carry out, do, or show</a:t>
+              <a:t>Word Labs  •  wordlabs.app  •  Root: 'perform' = do; carry out</a:t>
             </a:r>
             <a:endParaRPr lang="en-US" sz="800" dirty="0"/>
           </a:p>
@@ -42225,7 +42018,7 @@
                 <a:ea typeface="Calibri" pitchFamily="34" charset="-122"/>
                 <a:cs typeface="Calibri" pitchFamily="34" charset="-120"/>
               </a:rPr>
-              <a:t>A person who performs, such as a singer, actor, or dancer.</a:t>
+              <a:t>did something in front of an audience, or carried out a task, in the past</a:t>
             </a:r>
             <a:endParaRPr lang="en-US" sz="1200" dirty="0"/>
           </a:p>
@@ -42298,7 +42091,7 @@
                 <a:ea typeface="Trebuchet MS" pitchFamily="34" charset="-122"/>
                 <a:cs typeface="Trebuchet MS" pitchFamily="34" charset="-120"/>
               </a:rPr>
-              <a:t>performance</a:t>
+              <a:t>performs</a:t>
             </a:r>
             <a:endParaRPr lang="en-US" sz="1200" dirty="0"/>
           </a:p>
@@ -42364,7 +42157,7 @@
                 <a:ea typeface="Calibri" pitchFamily="34" charset="-122"/>
                 <a:cs typeface="Calibri" pitchFamily="34" charset="-120"/>
               </a:rPr>
-              <a:t>Did something or put on a show in the past.</a:t>
+              <a:t>people who perform, such as actors, dancers or musicians</a:t>
             </a:r>
             <a:endParaRPr lang="en-US" sz="1200" dirty="0"/>
           </a:p>
@@ -42437,7 +42230,7 @@
                 <a:ea typeface="Trebuchet MS" pitchFamily="34" charset="-122"/>
                 <a:cs typeface="Trebuchet MS" pitchFamily="34" charset="-120"/>
               </a:rPr>
-              <a:t>performer</a:t>
+              <a:t>performed</a:t>
             </a:r>
             <a:endParaRPr lang="en-US" sz="1200" dirty="0"/>
           </a:p>
@@ -42503,7 +42296,7 @@
                 <a:ea typeface="Calibri" pitchFamily="34" charset="-122"/>
                 <a:cs typeface="Calibri" pitchFamily="34" charset="-120"/>
               </a:rPr>
-              <a:t>To do something, like act in a play or complete a task.</a:t>
+              <a:t>to do something in front of an audience, or to carry out a task or duty</a:t>
             </a:r>
             <a:endParaRPr lang="en-US" sz="1200" dirty="0"/>
           </a:p>
@@ -42576,7 +42369,7 @@
                 <a:ea typeface="Trebuchet MS" pitchFamily="34" charset="-122"/>
                 <a:cs typeface="Trebuchet MS" pitchFamily="34" charset="-120"/>
               </a:rPr>
-              <a:t>performing</a:t>
+              <a:t>performer</a:t>
             </a:r>
             <a:endParaRPr lang="en-US" sz="1200" dirty="0"/>
           </a:p>
@@ -42642,7 +42435,7 @@
                 <a:ea typeface="Calibri" pitchFamily="34" charset="-122"/>
                 <a:cs typeface="Calibri" pitchFamily="34" charset="-120"/>
               </a:rPr>
-              <a:t>To do better than someone else at a task or activity.</a:t>
+              <a:t>a person who performs, such as an actor, dancer or musician</a:t>
             </a:r>
             <a:endParaRPr lang="en-US" sz="1200" dirty="0"/>
           </a:p>
@@ -42715,7 +42508,7 @@
                 <a:ea typeface="Trebuchet MS" pitchFamily="34" charset="-122"/>
                 <a:cs typeface="Trebuchet MS" pitchFamily="34" charset="-120"/>
               </a:rPr>
-              <a:t>performed</a:t>
+              <a:t>performers</a:t>
             </a:r>
             <a:endParaRPr lang="en-US" sz="1200" dirty="0"/>
           </a:p>
@@ -42781,285 +42574,7 @@
                 <a:ea typeface="Calibri" pitchFamily="34" charset="-122"/>
                 <a:cs typeface="Calibri" pitchFamily="34" charset="-120"/>
               </a:rPr>
-              <a:t>To do worse than expected or not as well as you could.</a:t>
-            </a:r>
-            <a:endParaRPr lang="en-US" sz="1200" dirty="0"/>
-          </a:p>
-        </p:txBody>
-      </p:sp>
-      <p:sp>
-        <p:nvSpPr>
-          <p:cNvPr id="31" name="Shape 29"/>
-          <p:cNvSpPr/>
-          <p:nvPr/>
-        </p:nvSpPr>
-        <p:spPr>
-          <a:xfrm>
-            <a:off x="365760" y="3840480"/>
-            <a:ext cx="2011680" cy="457200"/>
-          </a:xfrm>
-          <a:prstGeom prst="rect">
-            <a:avLst>
-              <a:gd name="adj" fmla="val 12000"/>
-            </a:avLst>
-          </a:prstGeom>
-          <a:solidFill>
-            <a:srgbClr val="EEF2FF"/>
-          </a:solidFill>
-          <a:ln w="12700">
-            <a:solidFill>
-              <a:srgbClr val="6366F1"/>
-            </a:solidFill>
-            <a:prstDash val="solid"/>
-          </a:ln>
-          <a:effectLst>
-            <a:outerShdw sx="100000" sy="100000" kx="0" ky="0" algn="bl" rotWithShape="0" blurRad="101600" dist="38100" dir="8100000">
-              <a:srgbClr val="000000">
-                <a:alpha val="12000"/>
-              </a:srgbClr>
-            </a:outerShdw>
-          </a:effectLst>
-        </p:spPr>
-      </p:sp>
-      <p:sp>
-        <p:nvSpPr>
-          <p:cNvPr id="32" name="Text 30"/>
-          <p:cNvSpPr/>
-          <p:nvPr/>
-        </p:nvSpPr>
-        <p:spPr>
-          <a:xfrm>
-            <a:off x="365760" y="3840480"/>
-            <a:ext cx="2011680" cy="457200"/>
-          </a:xfrm>
-          <a:prstGeom prst="rect">
-            <a:avLst/>
-          </a:prstGeom>
-          <a:noFill/>
-          <a:ln/>
-        </p:spPr>
-        <p:txBody>
-          <a:bodyPr wrap="square" lIns="0" tIns="0" rIns="0" bIns="0" rtlCol="0" anchor="ctr"/>
-          <a:lstStyle/>
-          <a:p>
-            <a:pPr algn="ctr" indent="0" marL="0">
-              <a:buNone/>
-            </a:pPr>
-            <a:r>
-              <a:rPr lang="en-US" sz="1200" b="1" dirty="0">
-                <a:solidFill>
-                  <a:srgbClr val="4338CA"/>
-                </a:solidFill>
-                <a:latin typeface="Trebuchet MS" pitchFamily="34" charset="0"/>
-                <a:ea typeface="Trebuchet MS" pitchFamily="34" charset="-122"/>
-                <a:cs typeface="Trebuchet MS" pitchFamily="34" charset="-120"/>
-              </a:rPr>
-              <a:t>outperform</a:t>
-            </a:r>
-            <a:endParaRPr lang="en-US" sz="1200" dirty="0"/>
-          </a:p>
-        </p:txBody>
-      </p:sp>
-      <p:sp>
-        <p:nvSpPr>
-          <p:cNvPr id="33" name="Shape 31"/>
-          <p:cNvSpPr/>
-          <p:nvPr/>
-        </p:nvSpPr>
-        <p:spPr>
-          <a:xfrm>
-            <a:off x="2514600" y="3840480"/>
-            <a:ext cx="6263640" cy="457200"/>
-          </a:xfrm>
-          <a:prstGeom prst="rect">
-            <a:avLst>
-              <a:gd name="adj" fmla="val 12000"/>
-            </a:avLst>
-          </a:prstGeom>
-          <a:solidFill>
-            <a:srgbClr val="F8FAFC"/>
-          </a:solidFill>
-          <a:ln w="12700">
-            <a:solidFill>
-              <a:srgbClr val="E2E8F0"/>
-            </a:solidFill>
-            <a:prstDash val="solid"/>
-          </a:ln>
-        </p:spPr>
-      </p:sp>
-      <p:sp>
-        <p:nvSpPr>
-          <p:cNvPr id="34" name="Text 32"/>
-          <p:cNvSpPr/>
-          <p:nvPr/>
-        </p:nvSpPr>
-        <p:spPr>
-          <a:xfrm>
-            <a:off x="2651760" y="3840480"/>
-            <a:ext cx="6035040" cy="457200"/>
-          </a:xfrm>
-          <a:prstGeom prst="rect">
-            <a:avLst/>
-          </a:prstGeom>
-          <a:noFill/>
-          <a:ln/>
-        </p:spPr>
-        <p:txBody>
-          <a:bodyPr wrap="square" rtlCol="0" anchor="ctr"/>
-          <a:lstStyle/>
-          <a:p>
-            <a:pPr algn="l" indent="0" marL="0">
-              <a:buNone/>
-            </a:pPr>
-            <a:r>
-              <a:rPr lang="en-US" sz="1200" dirty="0">
-                <a:solidFill>
-                  <a:srgbClr val="0F172A"/>
-                </a:solidFill>
-                <a:latin typeface="Calibri" pitchFamily="34" charset="0"/>
-                <a:ea typeface="Calibri" pitchFamily="34" charset="-122"/>
-                <a:cs typeface="Calibri" pitchFamily="34" charset="-120"/>
-              </a:rPr>
-              <a:t>Currently doing or showing something to an audience.</a:t>
-            </a:r>
-            <a:endParaRPr lang="en-US" sz="1200" dirty="0"/>
-          </a:p>
-        </p:txBody>
-      </p:sp>
-      <p:sp>
-        <p:nvSpPr>
-          <p:cNvPr id="35" name="Shape 33"/>
-          <p:cNvSpPr/>
-          <p:nvPr/>
-        </p:nvSpPr>
-        <p:spPr>
-          <a:xfrm>
-            <a:off x="365760" y="4370832"/>
-            <a:ext cx="2011680" cy="457200"/>
-          </a:xfrm>
-          <a:prstGeom prst="rect">
-            <a:avLst>
-              <a:gd name="adj" fmla="val 12000"/>
-            </a:avLst>
-          </a:prstGeom>
-          <a:solidFill>
-            <a:srgbClr val="EEF2FF"/>
-          </a:solidFill>
-          <a:ln w="12700">
-            <a:solidFill>
-              <a:srgbClr val="6366F1"/>
-            </a:solidFill>
-            <a:prstDash val="solid"/>
-          </a:ln>
-          <a:effectLst>
-            <a:outerShdw sx="100000" sy="100000" kx="0" ky="0" algn="bl" rotWithShape="0" blurRad="101600" dist="38100" dir="8100000">
-              <a:srgbClr val="000000">
-                <a:alpha val="12000"/>
-              </a:srgbClr>
-            </a:outerShdw>
-          </a:effectLst>
-        </p:spPr>
-      </p:sp>
-      <p:sp>
-        <p:nvSpPr>
-          <p:cNvPr id="36" name="Text 34"/>
-          <p:cNvSpPr/>
-          <p:nvPr/>
-        </p:nvSpPr>
-        <p:spPr>
-          <a:xfrm>
-            <a:off x="365760" y="4370832"/>
-            <a:ext cx="2011680" cy="457200"/>
-          </a:xfrm>
-          <a:prstGeom prst="rect">
-            <a:avLst/>
-          </a:prstGeom>
-          <a:noFill/>
-          <a:ln/>
-        </p:spPr>
-        <p:txBody>
-          <a:bodyPr wrap="square" lIns="0" tIns="0" rIns="0" bIns="0" rtlCol="0" anchor="ctr"/>
-          <a:lstStyle/>
-          <a:p>
-            <a:pPr algn="ctr" indent="0" marL="0">
-              <a:buNone/>
-            </a:pPr>
-            <a:r>
-              <a:rPr lang="en-US" sz="1200" b="1" dirty="0">
-                <a:solidFill>
-                  <a:srgbClr val="4338CA"/>
-                </a:solidFill>
-                <a:latin typeface="Trebuchet MS" pitchFamily="34" charset="0"/>
-                <a:ea typeface="Trebuchet MS" pitchFamily="34" charset="-122"/>
-                <a:cs typeface="Trebuchet MS" pitchFamily="34" charset="-120"/>
-              </a:rPr>
-              <a:t>underperform</a:t>
-            </a:r>
-            <a:endParaRPr lang="en-US" sz="1200" dirty="0"/>
-          </a:p>
-        </p:txBody>
-      </p:sp>
-      <p:sp>
-        <p:nvSpPr>
-          <p:cNvPr id="37" name="Shape 35"/>
-          <p:cNvSpPr/>
-          <p:nvPr/>
-        </p:nvSpPr>
-        <p:spPr>
-          <a:xfrm>
-            <a:off x="2514600" y="4370832"/>
-            <a:ext cx="6263640" cy="457200"/>
-          </a:xfrm>
-          <a:prstGeom prst="rect">
-            <a:avLst>
-              <a:gd name="adj" fmla="val 12000"/>
-            </a:avLst>
-          </a:prstGeom>
-          <a:solidFill>
-            <a:srgbClr val="F8FAFC"/>
-          </a:solidFill>
-          <a:ln w="12700">
-            <a:solidFill>
-              <a:srgbClr val="E2E8F0"/>
-            </a:solidFill>
-            <a:prstDash val="solid"/>
-          </a:ln>
-        </p:spPr>
-      </p:sp>
-      <p:sp>
-        <p:nvSpPr>
-          <p:cNvPr id="38" name="Text 36"/>
-          <p:cNvSpPr/>
-          <p:nvPr/>
-        </p:nvSpPr>
-        <p:spPr>
-          <a:xfrm>
-            <a:off x="2651760" y="4370832"/>
-            <a:ext cx="6035040" cy="457200"/>
-          </a:xfrm>
-          <a:prstGeom prst="rect">
-            <a:avLst/>
-          </a:prstGeom>
-          <a:noFill/>
-          <a:ln/>
-        </p:spPr>
-        <p:txBody>
-          <a:bodyPr wrap="square" rtlCol="0" anchor="ctr"/>
-          <a:lstStyle/>
-          <a:p>
-            <a:pPr algn="l" indent="0" marL="0">
-              <a:buNone/>
-            </a:pPr>
-            <a:r>
-              <a:rPr lang="en-US" sz="1200" dirty="0">
-                <a:solidFill>
-                  <a:srgbClr val="0F172A"/>
-                </a:solidFill>
-                <a:latin typeface="Calibri" pitchFamily="34" charset="0"/>
-                <a:ea typeface="Calibri" pitchFamily="34" charset="-122"/>
-                <a:cs typeface="Calibri" pitchFamily="34" charset="-120"/>
-              </a:rPr>
-              <a:t>The act of doing something in front of others, like a concert or play.</a:t>
+              <a:t>does something in front of an audience, or carries out a task</a:t>
             </a:r>
             <a:endParaRPr lang="en-US" sz="1200" dirty="0"/>
           </a:p>
@@ -43351,7 +42866,7 @@
                 <a:ea typeface="Calibri" pitchFamily="34" charset="-122"/>
                 <a:cs typeface="Calibri" pitchFamily="34" charset="-120"/>
               </a:rPr>
-              <a:t>Word Labs  •  wordlabs.app  •  Root: 'perform' = carry out, do, or show</a:t>
+              <a:t>Word Labs  •  wordlabs.app  •  Root: 'perform' = do; carry out</a:t>
             </a:r>
             <a:endParaRPr lang="en-US" sz="800" dirty="0"/>
           </a:p>
@@ -43554,7 +43069,7 @@
                 <a:ea typeface="Calibri" pitchFamily="34" charset="-122"/>
                 <a:cs typeface="Calibri" pitchFamily="34" charset="-120"/>
               </a:rPr>
-              <a:t>The talented performer took a deep bow after the final act of the school play.</a:t>
+              <a:t>The band will perform three songs at the school concert.</a:t>
             </a:r>
             <a:endParaRPr lang="en-US" sz="1500" dirty="0"/>
           </a:p>
@@ -43718,7 +43233,7 @@
                 <a:ea typeface="Calibri" pitchFamily="34" charset="-122"/>
                 <a:cs typeface="Calibri" pitchFamily="34" charset="-120"/>
               </a:rPr>
-              <a:t>Our class will perform a short skit about Australian animals for the whole school.</a:t>
+              <a:t>The magician performs a new trick at every show.</a:t>
             </a:r>
             <a:endParaRPr lang="en-US" sz="1500" dirty="0"/>
           </a:p>
@@ -43882,7 +43397,7 @@
                 <a:ea typeface="Calibri" pitchFamily="34" charset="-122"/>
                 <a:cs typeface="Calibri" pitchFamily="34" charset="-120"/>
               </a:rPr>
-              <a:t>The gymnast continued to outperform all of her teammates at every competition this season.</a:t>
+              <a:t>The choir performed beautifully at the assembly last week.</a:t>
             </a:r>
             <a:endParaRPr lang="en-US" sz="1500" dirty="0"/>
           </a:p>
